--- a/Credit Risk Prediction System.pptx
+++ b/Credit Risk Prediction System.pptx
@@ -136,7 +136,7 @@
 <file path=ppt/revisionInfo.xml><?xml version="1.0" encoding="utf-8"?>
 <p1510:revInfo xmlns:a="http://schemas.openxmlformats.org/drawingml/2006/main" xmlns:r="http://schemas.openxmlformats.org/officeDocument/2006/relationships" xmlns:p1510="http://schemas.microsoft.com/office/powerpoint/2015/10/main">
   <p1510:revLst>
-    <p1510:client id="{5F03DC37-C6E7-4D03-9B6A-5B1F4D882761}" v="1" dt="2026-08-31T07:53:38.807"/>
+    <p1510:client id="{5F03DC37-C6E7-4D03-9B6A-5B1F4D882761}" v="2" dt="2026-08-31T08:35:15.850"/>
   </p1510:revLst>
 </p1510:revInfo>
 </file>
@@ -146,12 +146,35 @@
   <pc:docChgLst>
     <pc:chgData name="Thembelihle Nkosi" userId="34acb82be647289d" providerId="LiveId" clId="{A75475CB-E90B-49A7-8916-1196816BF4F1}"/>
     <pc:docChg chg="undo custSel addSld modSld">
-      <pc:chgData name="Thembelihle Nkosi" userId="34acb82be647289d" providerId="LiveId" clId="{A75475CB-E90B-49A7-8916-1196816BF4F1}" dt="2026-08-31T07:53:49.573" v="48" actId="14100"/>
+      <pc:chgData name="Thembelihle Nkosi" userId="34acb82be647289d" providerId="LiveId" clId="{A75475CB-E90B-49A7-8916-1196816BF4F1}" dt="2026-08-31T09:39:33.545" v="160" actId="113"/>
       <pc:docMkLst>
         <pc:docMk/>
       </pc:docMkLst>
-      <pc:sldChg chg="addSp modSp new mod modClrScheme chgLayout">
-        <pc:chgData name="Thembelihle Nkosi" userId="34acb82be647289d" providerId="LiveId" clId="{A75475CB-E90B-49A7-8916-1196816BF4F1}" dt="2026-08-31T07:53:49.573" v="48" actId="14100"/>
+      <pc:sldChg chg="addSp modSp mod">
+        <pc:chgData name="Thembelihle Nkosi" userId="34acb82be647289d" providerId="LiveId" clId="{A75475CB-E90B-49A7-8916-1196816BF4F1}" dt="2026-08-31T09:39:33.545" v="160" actId="113"/>
+        <pc:sldMkLst>
+          <pc:docMk/>
+          <pc:sldMk cId="2329614230" sldId="260"/>
+        </pc:sldMkLst>
+        <pc:spChg chg="mod">
+          <ac:chgData name="Thembelihle Nkosi" userId="34acb82be647289d" providerId="LiveId" clId="{A75475CB-E90B-49A7-8916-1196816BF4F1}" dt="2026-08-31T09:39:33.545" v="160" actId="113"/>
+          <ac:spMkLst>
+            <pc:docMk/>
+            <pc:sldMk cId="2329614230" sldId="260"/>
+            <ac:spMk id="3" creationId="{F01FB9CD-CBF7-C634-8B2F-5E2490FDF9F0}"/>
+          </ac:spMkLst>
+        </pc:spChg>
+        <pc:spChg chg="add mod">
+          <ac:chgData name="Thembelihle Nkosi" userId="34acb82be647289d" providerId="LiveId" clId="{A75475CB-E90B-49A7-8916-1196816BF4F1}" dt="2026-08-31T08:35:15.850" v="56"/>
+          <ac:spMkLst>
+            <pc:docMk/>
+            <pc:sldMk cId="2329614230" sldId="260"/>
+            <ac:spMk id="6" creationId="{5C9BE093-E5B6-DA93-72FB-870FC733B4A2}"/>
+          </ac:spMkLst>
+        </pc:spChg>
+      </pc:sldChg>
+      <pc:sldChg chg="addSp delSp modSp new mod modClrScheme chgLayout">
+        <pc:chgData name="Thembelihle Nkosi" userId="34acb82be647289d" providerId="LiveId" clId="{A75475CB-E90B-49A7-8916-1196816BF4F1}" dt="2026-08-31T08:34:11.940" v="50"/>
         <pc:sldMkLst>
           <pc:docMk/>
           <pc:sldMk cId="838054146" sldId="261"/>
@@ -164,8 +187,8 @@
             <ac:spMk id="2" creationId="{D4445175-D007-C5CD-FD93-BDCE99788073}"/>
           </ac:spMkLst>
         </pc:spChg>
-        <pc:spChg chg="add mod">
-          <ac:chgData name="Thembelihle Nkosi" userId="34acb82be647289d" providerId="LiveId" clId="{A75475CB-E90B-49A7-8916-1196816BF4F1}" dt="2026-08-31T07:53:49.573" v="48" actId="14100"/>
+        <pc:spChg chg="add del mod">
+          <ac:chgData name="Thembelihle Nkosi" userId="34acb82be647289d" providerId="LiveId" clId="{A75475CB-E90B-49A7-8916-1196816BF4F1}" dt="2026-08-31T08:34:11.940" v="50"/>
           <ac:spMkLst>
             <pc:docMk/>
             <pc:sldMk cId="838054146" sldId="261"/>
@@ -19170,20 +19193,144 @@
             <p:ph type="ctrTitle"/>
           </p:nvPr>
         </p:nvSpPr>
-        <p:spPr/>
-        <p:txBody>
-          <a:bodyPr/>
+        <p:spPr>
+          <a:xfrm>
+            <a:off x="951723" y="4721290"/>
+            <a:ext cx="8229600" cy="1455575"/>
+          </a:xfrm>
+        </p:spPr>
+        <p:txBody>
+          <a:bodyPr>
+            <a:normAutofit/>
+          </a:bodyPr>
           <a:lstStyle/>
           <a:p>
-            <a:r>
-              <a:rPr lang="en-US" dirty="0"/>
+            <a:pPr>
+              <a:lnSpc>
+                <a:spcPct val="150000"/>
+              </a:lnSpc>
+            </a:pPr>
+            <a:r>
+              <a:rPr lang="en-US" sz="2000" dirty="0">
+                <a:solidFill>
+                  <a:schemeClr val="tx2"/>
+                </a:solidFill>
+              </a:rPr>
+              <a:t>Name</a:t>
+            </a:r>
+            <a:r>
+              <a:rPr lang="en-US" sz="2000" b="1" dirty="0">
+                <a:solidFill>
+                  <a:schemeClr val="tx2"/>
+                </a:solidFill>
+              </a:rPr>
+              <a:t>: THEMBELIHLE TILI NKOSI</a:t>
+            </a:r>
+            <a:br>
+              <a:rPr lang="en-US" sz="2000" b="1" dirty="0">
+                <a:solidFill>
+                  <a:schemeClr val="tx2"/>
+                </a:solidFill>
+              </a:rPr>
+            </a:br>
+            <a:r>
+              <a:rPr lang="en-US" sz="2000" dirty="0">
+                <a:solidFill>
+                  <a:schemeClr val="tx2"/>
+                </a:solidFill>
+              </a:rPr>
+              <a:t>Student number</a:t>
+            </a:r>
+            <a:r>
+              <a:rPr lang="en-US" sz="2000" b="1" dirty="0">
+                <a:solidFill>
+                  <a:schemeClr val="tx2"/>
+                </a:solidFill>
+              </a:rPr>
+              <a:t>: 402313573</a:t>
+            </a:r>
+            <a:br>
+              <a:rPr lang="en-US" sz="2000" b="1" dirty="0">
+                <a:solidFill>
+                  <a:schemeClr val="tx2"/>
+                </a:solidFill>
+              </a:rPr>
+            </a:br>
+            <a:r>
+              <a:rPr lang="en-US" sz="2000" dirty="0">
+                <a:solidFill>
+                  <a:schemeClr val="tx2"/>
+                </a:solidFill>
+              </a:rPr>
+              <a:t>Module</a:t>
+            </a:r>
+            <a:r>
+              <a:rPr lang="en-US" sz="2000" b="1" dirty="0">
+                <a:solidFill>
+                  <a:schemeClr val="tx2"/>
+                </a:solidFill>
+              </a:rPr>
+              <a:t>: MACHINE LEARNING</a:t>
+            </a:r>
+          </a:p>
+        </p:txBody>
+      </p:sp>
+      <p:sp>
+        <p:nvSpPr>
+          <p:cNvPr id="6" name="Title 2">
+            <a:extLst>
+              <a:ext uri="{FF2B5EF4-FFF2-40B4-BE49-F238E27FC236}">
+                <a16:creationId xmlns:a16="http://schemas.microsoft.com/office/drawing/2014/main" id="{5C9BE093-E5B6-DA93-72FB-870FC733B4A2}"/>
+              </a:ext>
+            </a:extLst>
+          </p:cNvPr>
+          <p:cNvSpPr txBox="1">
+            <a:spLocks/>
+          </p:cNvSpPr>
+          <p:nvPr/>
+        </p:nvSpPr>
+        <p:spPr>
+          <a:xfrm>
+            <a:off x="609600" y="758891"/>
+            <a:ext cx="8229600" cy="3694922"/>
+          </a:xfrm>
+          <a:prstGeom prst="rect">
+            <a:avLst/>
+          </a:prstGeom>
+        </p:spPr>
+        <p:txBody>
+          <a:bodyPr vert="horz" lIns="91440" tIns="45720" rIns="91440" bIns="45720" rtlCol="0" anchor="b">
+            <a:normAutofit/>
+          </a:bodyPr>
+          <a:lstStyle>
+            <a:lvl1pPr algn="l" defTabSz="914400" rtl="0" eaLnBrk="1" latinLnBrk="0" hangingPunct="1">
+              <a:lnSpc>
+                <a:spcPct val="80000"/>
+              </a:lnSpc>
+              <a:spcBef>
+                <a:spcPct val="0"/>
+              </a:spcBef>
+              <a:buNone/>
+              <a:defRPr lang="en-US" sz="9600" b="0" kern="1200" spc="0" baseline="0" dirty="0">
+                <a:solidFill>
+                  <a:schemeClr val="tx1"/>
+                </a:solidFill>
+                <a:latin typeface="+mj-lt"/>
+                <a:ea typeface="+mj-ea"/>
+                <a:cs typeface="Biome" panose="020B0503030204020804" pitchFamily="34" charset="0"/>
+              </a:defRPr>
+            </a:lvl1pPr>
+          </a:lstStyle>
+          <a:p>
+            <a:r>
+              <a:rPr lang="en-ZA" dirty="0"/>
               <a:t>CREDIT RISK</a:t>
             </a:r>
             <a:br>
-              <a:rPr lang="en-US" dirty="0"/>
+              <a:rPr lang="en-ZA" dirty="0"/>
             </a:br>
             <a:r>
-              <a:rPr lang="en-US" dirty="0"/>
+              <a:rPr lang="en-ZA" dirty="0"/>
               <a:t>PREDICTION SYSTEM</a:t>
             </a:r>
           </a:p>
@@ -19267,38 +19414,6 @@
                 <a:schemeClr val="tx2"/>
               </a:solidFill>
             </a:endParaRPr>
-          </a:p>
-        </p:txBody>
-      </p:sp>
-      <p:sp>
-        <p:nvSpPr>
-          <p:cNvPr id="3" name="TextBox 2">
-            <a:extLst>
-              <a:ext uri="{FF2B5EF4-FFF2-40B4-BE49-F238E27FC236}">
-                <a16:creationId xmlns:a16="http://schemas.microsoft.com/office/drawing/2014/main" id="{405BABCB-B116-4A70-293C-2E7D17E1BB6F}"/>
-              </a:ext>
-            </a:extLst>
-          </p:cNvPr>
-          <p:cNvSpPr txBox="1"/>
-          <p:nvPr/>
-        </p:nvSpPr>
-        <p:spPr>
-          <a:xfrm>
-            <a:off x="457200" y="2470484"/>
-            <a:ext cx="10339138" cy="958515"/>
-          </a:xfrm>
-          <a:prstGeom prst="rect">
-            <a:avLst/>
-          </a:prstGeom>
-          <a:noFill/>
-        </p:spPr>
-        <p:txBody>
-          <a:bodyPr wrap="square" rtlCol="0">
-            <a:spAutoFit/>
-          </a:bodyPr>
-          <a:lstStyle/>
-          <a:p>
-            <a:endParaRPr lang="en-ZA" dirty="0"/>
           </a:p>
         </p:txBody>
       </p:sp>

--- a/Credit Risk Prediction System.pptx
+++ b/Credit Risk Prediction System.pptx
@@ -146,26 +146,34 @@
   <pc:docChgLst>
     <pc:chgData name="Thembelihle Nkosi" userId="34acb82be647289d" providerId="LiveId" clId="{A75475CB-E90B-49A7-8916-1196816BF4F1}"/>
     <pc:docChg chg="undo custSel addSld modSld">
-      <pc:chgData name="Thembelihle Nkosi" userId="34acb82be647289d" providerId="LiveId" clId="{A75475CB-E90B-49A7-8916-1196816BF4F1}" dt="2026-08-31T09:39:33.545" v="160" actId="113"/>
+      <pc:chgData name="Thembelihle Nkosi" userId="34acb82be647289d" providerId="LiveId" clId="{A75475CB-E90B-49A7-8916-1196816BF4F1}" dt="2026-09-01T10:18:10.257" v="275" actId="14100"/>
       <pc:docMkLst>
         <pc:docMk/>
       </pc:docMkLst>
-      <pc:sldChg chg="addSp modSp mod">
-        <pc:chgData name="Thembelihle Nkosi" userId="34acb82be647289d" providerId="LiveId" clId="{A75475CB-E90B-49A7-8916-1196816BF4F1}" dt="2026-08-31T09:39:33.545" v="160" actId="113"/>
+      <pc:sldChg chg="addSp delSp modSp mod">
+        <pc:chgData name="Thembelihle Nkosi" userId="34acb82be647289d" providerId="LiveId" clId="{A75475CB-E90B-49A7-8916-1196816BF4F1}" dt="2026-09-01T10:18:10.257" v="275" actId="14100"/>
         <pc:sldMkLst>
           <pc:docMk/>
           <pc:sldMk cId="2329614230" sldId="260"/>
         </pc:sldMkLst>
-        <pc:spChg chg="mod">
-          <ac:chgData name="Thembelihle Nkosi" userId="34acb82be647289d" providerId="LiveId" clId="{A75475CB-E90B-49A7-8916-1196816BF4F1}" dt="2026-08-31T09:39:33.545" v="160" actId="113"/>
+        <pc:spChg chg="del mod">
+          <ac:chgData name="Thembelihle Nkosi" userId="34acb82be647289d" providerId="LiveId" clId="{A75475CB-E90B-49A7-8916-1196816BF4F1}" dt="2026-09-01T10:17:54.735" v="273" actId="21"/>
           <ac:spMkLst>
             <pc:docMk/>
             <pc:sldMk cId="2329614230" sldId="260"/>
             <ac:spMk id="3" creationId="{F01FB9CD-CBF7-C634-8B2F-5E2490FDF9F0}"/>
           </ac:spMkLst>
         </pc:spChg>
+        <pc:spChg chg="add del mod">
+          <ac:chgData name="Thembelihle Nkosi" userId="34acb82be647289d" providerId="LiveId" clId="{A75475CB-E90B-49A7-8916-1196816BF4F1}" dt="2026-09-01T10:18:01.794" v="274" actId="21"/>
+          <ac:spMkLst>
+            <pc:docMk/>
+            <pc:sldMk cId="2329614230" sldId="260"/>
+            <ac:spMk id="4" creationId="{1FBDF25C-ACB6-0A9E-3317-64B27F1922D0}"/>
+          </ac:spMkLst>
+        </pc:spChg>
         <pc:spChg chg="add mod">
-          <ac:chgData name="Thembelihle Nkosi" userId="34acb82be647289d" providerId="LiveId" clId="{A75475CB-E90B-49A7-8916-1196816BF4F1}" dt="2026-08-31T08:35:15.850" v="56"/>
+          <ac:chgData name="Thembelihle Nkosi" userId="34acb82be647289d" providerId="LiveId" clId="{A75475CB-E90B-49A7-8916-1196816BF4F1}" dt="2026-09-01T10:18:10.257" v="275" actId="14100"/>
           <ac:spMkLst>
             <pc:docMk/>
             <pc:sldMk cId="2329614230" sldId="260"/>
@@ -295,7 +303,7 @@
           <a:p>
             <a:fld id="{F223FF85-4E34-4546-B772-76DFA4A6051B}" type="datetimeFigureOut">
               <a:rPr lang="en-US" smtClean="0"/>
-              <a:t>8/31/2026</a:t>
+              <a:t>9/1/2026</a:t>
             </a:fld>
             <a:endParaRPr lang="en-US"/>
           </a:p>
@@ -472,7 +480,7 @@
           <a:p>
             <a:fld id="{1B5CC398-6116-4BD2-9FAD-9822FDA158BE}" type="datetimeFigureOut">
               <a:rPr lang="en-US" smtClean="0"/>
-              <a:t>8/31/2026</a:t>
+              <a:t>9/1/2026</a:t>
             </a:fld>
             <a:endParaRPr lang="en-US"/>
           </a:p>
@@ -994,7 +1002,7 @@
           <a:p>
             <a:fld id="{B3CFBE15-E4BE-4B42-AEEE-ED6C6B9CFCE2}" type="datetime1">
               <a:rPr lang="en-US" smtClean="0"/>
-              <a:t>8/31/2026</a:t>
+              <a:t>9/1/2026</a:t>
             </a:fld>
             <a:endParaRPr lang="en-US"/>
           </a:p>
@@ -1214,7 +1222,7 @@
           <a:p>
             <a:fld id="{FF6B260B-9C30-8041-A127-55431CED219C}" type="datetime1">
               <a:rPr lang="en-US" smtClean="0"/>
-              <a:t>8/31/2026</a:t>
+              <a:t>9/1/2026</a:t>
             </a:fld>
             <a:endParaRPr lang="en-US"/>
           </a:p>
@@ -1481,7 +1489,7 @@
           <a:p>
             <a:fld id="{F63FFE14-963B-F240-A047-D4733954729E}" type="datetime1">
               <a:rPr lang="en-US" smtClean="0"/>
-              <a:t>8/31/2026</a:t>
+              <a:t>9/1/2026</a:t>
             </a:fld>
             <a:endParaRPr lang="en-US"/>
           </a:p>
@@ -1804,7 +1812,7 @@
           <a:p>
             <a:fld id="{AEC70E42-D83C-0945-8790-6453F9081E20}" type="datetime1">
               <a:rPr lang="en-US" smtClean="0"/>
-              <a:t>8/31/2026</a:t>
+              <a:t>9/1/2026</a:t>
             </a:fld>
             <a:endParaRPr lang="en-US"/>
           </a:p>
@@ -2202,7 +2210,7 @@
           <a:p>
             <a:fld id="{BC14B53C-24D5-7E4A-A014-94F398D5C635}" type="datetime1">
               <a:rPr lang="en-US" smtClean="0"/>
-              <a:t>8/31/2026</a:t>
+              <a:t>9/1/2026</a:t>
             </a:fld>
             <a:endParaRPr lang="en-US"/>
           </a:p>
@@ -2563,7 +2571,7 @@
           <a:p>
             <a:fld id="{4123D06D-70B8-D14B-A67C-9271374366C3}" type="datetime1">
               <a:rPr lang="en-US" smtClean="0"/>
-              <a:t>8/31/2026</a:t>
+              <a:t>9/1/2026</a:t>
             </a:fld>
             <a:endParaRPr lang="en-US"/>
           </a:p>
@@ -2807,7 +2815,7 @@
           <a:p>
             <a:fld id="{75AE1D74-C13D-F14A-9B9E-EB7933559C88}" type="datetime1">
               <a:rPr lang="en-US" smtClean="0"/>
-              <a:t>8/31/2026</a:t>
+              <a:t>9/1/2026</a:t>
             </a:fld>
             <a:endParaRPr lang="en-US"/>
           </a:p>
@@ -3067,7 +3075,7 @@
           <a:p>
             <a:fld id="{04FB7707-CCB1-0246-9925-E5DB223369A7}" type="datetime1">
               <a:rPr lang="en-US" smtClean="0"/>
-              <a:t>8/31/2026</a:t>
+              <a:t>9/1/2026</a:t>
             </a:fld>
             <a:endParaRPr lang="en-US"/>
           </a:p>
@@ -3353,7 +3361,7 @@
           <a:p>
             <a:fld id="{AE76B46A-8201-CC4A-8088-50255B4B9D0D}" type="datetime1">
               <a:rPr lang="en-US" smtClean="0"/>
-              <a:t>8/31/2026</a:t>
+              <a:t>9/1/2026</a:t>
             </a:fld>
             <a:endParaRPr lang="en-US"/>
           </a:p>
@@ -3639,7 +3647,7 @@
           <a:p>
             <a:fld id="{0F2D9860-67F8-974D-8794-2C5A1B3DA504}" type="datetime1">
               <a:rPr lang="en-US" smtClean="0"/>
-              <a:t>8/31/2026</a:t>
+              <a:t>9/1/2026</a:t>
             </a:fld>
             <a:endParaRPr lang="en-US"/>
           </a:p>
@@ -3868,7 +3876,7 @@
           <a:p>
             <a:fld id="{8351A969-2D26-4F49-AF79-EF4D76632F71}" type="datetime1">
               <a:rPr lang="en-US" smtClean="0"/>
-              <a:t>8/31/2026</a:t>
+              <a:t>9/1/2026</a:t>
             </a:fld>
             <a:endParaRPr lang="en-US"/>
           </a:p>
@@ -4150,7 +4158,7 @@
           <a:p>
             <a:fld id="{94040C0B-3638-F744-9F98-D66CEC428329}" type="datetime1">
               <a:rPr lang="en-US" smtClean="0"/>
-              <a:t>8/31/2026</a:t>
+              <a:t>9/1/2026</a:t>
             </a:fld>
             <a:endParaRPr lang="en-US"/>
           </a:p>
@@ -4496,7 +4504,7 @@
           <a:p>
             <a:fld id="{383FCCD6-08E9-5F43-B78A-D6D06FA7D888}" type="datetime1">
               <a:rPr lang="en-US" smtClean="0"/>
-              <a:t>8/31/2026</a:t>
+              <a:t>9/1/2026</a:t>
             </a:fld>
             <a:endParaRPr lang="en-US" dirty="0"/>
           </a:p>
@@ -4960,7 +4968,7 @@
           <a:p>
             <a:fld id="{7D5752D2-CCDE-DA48-AA88-B770548F7575}" type="datetime1">
               <a:rPr lang="en-US" smtClean="0"/>
-              <a:t>8/31/2026</a:t>
+              <a:t>9/1/2026</a:t>
             </a:fld>
             <a:endParaRPr lang="en-US"/>
           </a:p>
@@ -5400,7 +5408,7 @@
           <a:p>
             <a:fld id="{2E2458BC-FE32-0A45-9DD7-ED7D64447D19}" type="datetime1">
               <a:rPr lang="en-US" smtClean="0"/>
-              <a:t>8/31/2026</a:t>
+              <a:t>9/1/2026</a:t>
             </a:fld>
             <a:endParaRPr lang="en-US" dirty="0"/>
           </a:p>
@@ -5800,7 +5808,7 @@
           <a:p>
             <a:fld id="{1233975F-0E53-0840-98CD-E03B319E6BC3}" type="datetime1">
               <a:rPr lang="en-US" smtClean="0"/>
-              <a:t>8/31/2026</a:t>
+              <a:t>9/1/2026</a:t>
             </a:fld>
             <a:endParaRPr lang="en-US" dirty="0"/>
           </a:p>
@@ -6086,7 +6094,7 @@
           <a:p>
             <a:fld id="{D0CA20AB-D25D-704E-83C3-6B013E02E645}" type="datetime1">
               <a:rPr lang="en-US" smtClean="0"/>
-              <a:t>8/31/2026</a:t>
+              <a:t>9/1/2026</a:t>
             </a:fld>
             <a:endParaRPr lang="en-US" dirty="0"/>
           </a:p>
@@ -6390,7 +6398,7 @@
           <a:p>
             <a:fld id="{B31F77D0-31D8-5446-A1F3-FE6147C324EC}" type="datetime1">
               <a:rPr lang="en-US" smtClean="0"/>
-              <a:t>8/31/2026</a:t>
+              <a:t>9/1/2026</a:t>
             </a:fld>
             <a:endParaRPr lang="en-US" dirty="0"/>
           </a:p>
@@ -6804,7 +6812,7 @@
           <a:p>
             <a:fld id="{2005CF00-6C05-B849-B141-54CC9A394B3C}" type="datetime1">
               <a:rPr lang="en-US" smtClean="0"/>
-              <a:t>8/31/2026</a:t>
+              <a:t>9/1/2026</a:t>
             </a:fld>
             <a:endParaRPr lang="en-US"/>
           </a:p>
@@ -7215,7 +7223,7 @@
           <a:p>
             <a:fld id="{66499679-3EA0-9342-AF62-C5FAA18B6EFA}" type="datetime1">
               <a:rPr lang="en-US" smtClean="0"/>
-              <a:t>8/31/2026</a:t>
+              <a:t>9/1/2026</a:t>
             </a:fld>
             <a:endParaRPr lang="en-US" dirty="0"/>
           </a:p>
@@ -7628,7 +7636,7 @@
           <a:p>
             <a:fld id="{3C97155C-DE68-4440-8202-CC9478E27F07}" type="datetime1">
               <a:rPr lang="en-US" smtClean="0"/>
-              <a:t>8/31/2026</a:t>
+              <a:t>9/1/2026</a:t>
             </a:fld>
             <a:endParaRPr lang="en-US" dirty="0"/>
           </a:p>
@@ -8070,7 +8078,7 @@
           <a:p>
             <a:fld id="{2B9DA8F7-1BE7-954A-B654-92996DBA4E86}" type="datetime1">
               <a:rPr lang="en-US" smtClean="0"/>
-              <a:t>8/31/2026</a:t>
+              <a:t>9/1/2026</a:t>
             </a:fld>
             <a:endParaRPr lang="en-US" dirty="0"/>
           </a:p>
@@ -8485,7 +8493,7 @@
           <a:p>
             <a:fld id="{D9EF7764-3766-AD43-917F-3181D2483C36}" type="datetime1">
               <a:rPr lang="en-US" smtClean="0"/>
-              <a:t>8/31/2026</a:t>
+              <a:t>9/1/2026</a:t>
             </a:fld>
             <a:endParaRPr lang="en-US"/>
           </a:p>
@@ -8823,7 +8831,7 @@
           <a:p>
             <a:fld id="{5447FF96-6068-D045-B983-6A2E1F44124F}" type="datetime1">
               <a:rPr lang="en-US" smtClean="0"/>
-              <a:t>8/31/2026</a:t>
+              <a:t>9/1/2026</a:t>
             </a:fld>
             <a:endParaRPr lang="en-US" dirty="0"/>
           </a:p>
@@ -9284,7 +9292,7 @@
           <a:p>
             <a:fld id="{C195F3F8-9E31-7F42-8188-F6043F071A39}" type="datetime1">
               <a:rPr lang="en-US" smtClean="0"/>
-              <a:t>8/31/2026</a:t>
+              <a:t>9/1/2026</a:t>
             </a:fld>
             <a:endParaRPr lang="en-US" dirty="0"/>
           </a:p>
@@ -9728,7 +9736,7 @@
           <a:p>
             <a:fld id="{AE8BA31F-10E3-B74C-A113-9DB8A6700F67}" type="datetime1">
               <a:rPr lang="en-US" smtClean="0"/>
-              <a:t>8/31/2026</a:t>
+              <a:t>9/1/2026</a:t>
             </a:fld>
             <a:endParaRPr lang="en-US" dirty="0"/>
           </a:p>
@@ -10064,7 +10072,7 @@
           <a:p>
             <a:fld id="{3596BBB1-49AB-C544-9861-84EE6CF53403}" type="datetime1">
               <a:rPr lang="en-US" smtClean="0"/>
-              <a:t>8/31/2026</a:t>
+              <a:t>9/1/2026</a:t>
             </a:fld>
             <a:endParaRPr lang="en-US" dirty="0"/>
           </a:p>
@@ -10350,7 +10358,7 @@
           <a:p>
             <a:fld id="{9D50FFC8-0737-944F-9B20-403A2248B3E7}" type="datetime1">
               <a:rPr lang="en-US" smtClean="0"/>
-              <a:t>8/31/2026</a:t>
+              <a:t>9/1/2026</a:t>
             </a:fld>
             <a:endParaRPr lang="en-US" dirty="0"/>
           </a:p>
@@ -10746,7 +10754,7 @@
           <a:p>
             <a:fld id="{FE45DA7B-3D23-9747-B64E-78D5DD68C6C7}" type="datetime1">
               <a:rPr lang="en-US" smtClean="0"/>
-              <a:t>8/31/2026</a:t>
+              <a:t>9/1/2026</a:t>
             </a:fld>
             <a:endParaRPr lang="en-US"/>
           </a:p>
@@ -11133,7 +11141,7 @@
           <a:p>
             <a:fld id="{313040DD-291F-D14A-B0CD-056B01183946}" type="datetime1">
               <a:rPr lang="en-US" smtClean="0"/>
-              <a:t>8/31/2026</a:t>
+              <a:t>9/1/2026</a:t>
             </a:fld>
             <a:endParaRPr lang="en-US"/>
           </a:p>
@@ -11459,7 +11467,7 @@
           <a:p>
             <a:fld id="{F20AA6F4-6FEB-A645-BC84-8FD86BB56A56}" type="datetime1">
               <a:rPr lang="en-US" smtClean="0"/>
-              <a:t>8/31/2026</a:t>
+              <a:t>9/1/2026</a:t>
             </a:fld>
             <a:endParaRPr lang="en-US"/>
           </a:p>
@@ -11725,7 +11733,7 @@
           <a:p>
             <a:fld id="{019C1F0A-369C-694C-9034-23649A99EDDB}" type="datetime1">
               <a:rPr lang="en-US" smtClean="0"/>
-              <a:t>8/31/2026</a:t>
+              <a:t>9/1/2026</a:t>
             </a:fld>
             <a:endParaRPr lang="en-US" dirty="0"/>
           </a:p>
@@ -11991,7 +11999,7 @@
           <a:p>
             <a:fld id="{C05CB68B-3B3F-204E-812A-7CA74DAAFECC}" type="datetime1">
               <a:rPr lang="en-US" smtClean="0"/>
-              <a:t>8/31/2026</a:t>
+              <a:t>9/1/2026</a:t>
             </a:fld>
             <a:endParaRPr lang="en-US" dirty="0"/>
           </a:p>
@@ -12372,7 +12380,7 @@
           <a:p>
             <a:fld id="{BD2E1884-4CA3-F14A-A3FE-9D94D32D34BF}" type="datetime1">
               <a:rPr lang="en-US" smtClean="0"/>
-              <a:t>8/31/2026</a:t>
+              <a:t>9/1/2026</a:t>
             </a:fld>
             <a:endParaRPr lang="en-US"/>
           </a:p>
@@ -12641,7 +12649,7 @@
           <a:p>
             <a:fld id="{D963A025-A5F8-BC41-857C-074A129970DD}" type="datetime1">
               <a:rPr lang="en-US" smtClean="0"/>
-              <a:t>8/31/2026</a:t>
+              <a:t>9/1/2026</a:t>
             </a:fld>
             <a:endParaRPr lang="en-US"/>
           </a:p>
@@ -12958,7 +12966,7 @@
           <a:p>
             <a:fld id="{67E1A02B-DBB0-A046-81B0-FEDCAC57CE71}" type="datetime1">
               <a:rPr lang="en-US" smtClean="0"/>
-              <a:t>8/31/2026</a:t>
+              <a:t>9/1/2026</a:t>
             </a:fld>
             <a:endParaRPr lang="en-US"/>
           </a:p>
@@ -13283,7 +13291,7 @@
           <a:p>
             <a:fld id="{192E1041-C021-CE4A-9D2F-9EE16EB193AE}" type="datetime1">
               <a:rPr lang="en-US" smtClean="0"/>
-              <a:t>8/31/2026</a:t>
+              <a:t>9/1/2026</a:t>
             </a:fld>
             <a:endParaRPr lang="en-US" dirty="0"/>
           </a:p>
@@ -13649,7 +13657,7 @@
           <a:p>
             <a:fld id="{B19110DB-B309-8C4D-B2B7-2B6318BF3864}" type="datetime1">
               <a:rPr lang="en-US" smtClean="0"/>
-              <a:t>8/31/2026</a:t>
+              <a:t>9/1/2026</a:t>
             </a:fld>
             <a:endParaRPr lang="en-US" dirty="0"/>
           </a:p>
@@ -13918,7 +13926,7 @@
           <a:p>
             <a:fld id="{FCCD263F-17D1-DD49-AE75-3B385E0CFFA9}" type="datetime1">
               <a:rPr lang="en-US" smtClean="0"/>
-              <a:t>8/31/2026</a:t>
+              <a:t>9/1/2026</a:t>
             </a:fld>
             <a:endParaRPr lang="en-US" dirty="0"/>
           </a:p>
@@ -14187,7 +14195,7 @@
           <a:p>
             <a:fld id="{1664374B-BFF6-3C4D-A435-E85D19EC7285}" type="datetime1">
               <a:rPr lang="en-US" smtClean="0"/>
-              <a:t>8/31/2026</a:t>
+              <a:t>9/1/2026</a:t>
             </a:fld>
             <a:endParaRPr lang="en-US" dirty="0"/>
           </a:p>
@@ -14399,7 +14407,7 @@
           <a:p>
             <a:fld id="{E9C4FF47-482A-5A42-BC2B-D17760A60D7C}" type="datetime1">
               <a:rPr lang="en-US" smtClean="0"/>
-              <a:t>8/31/2026</a:t>
+              <a:t>9/1/2026</a:t>
             </a:fld>
             <a:endParaRPr lang="en-US"/>
           </a:p>
@@ -14767,7 +14775,7 @@
           <a:p>
             <a:fld id="{A0E0A138-5AFC-9A4D-A014-96125C4D80CC}" type="datetime1">
               <a:rPr lang="en-US" smtClean="0"/>
-              <a:t>8/31/2026</a:t>
+              <a:t>9/1/2026</a:t>
             </a:fld>
             <a:endParaRPr lang="en-US"/>
           </a:p>
@@ -15287,7 +15295,7 @@
           <a:p>
             <a:fld id="{23BF1EA9-87CF-8343-9776-D1D52A179B2E}" type="datetime1">
               <a:rPr lang="en-US" smtClean="0"/>
-              <a:t>8/31/2026</a:t>
+              <a:t>9/1/2026</a:t>
             </a:fld>
             <a:endParaRPr lang="en-US"/>
           </a:p>
@@ -15403,7 +15411,7 @@
           <a:p>
             <a:fld id="{A889506F-D76B-DF43-A96B-B8A73BD734D5}" type="datetime1">
               <a:rPr lang="en-US" smtClean="0"/>
-              <a:t>8/31/2026</a:t>
+              <a:t>9/1/2026</a:t>
             </a:fld>
             <a:endParaRPr lang="en-US"/>
           </a:p>
@@ -15730,7 +15738,7 @@
           <a:p>
             <a:fld id="{3DCB9363-2EBD-E747-A181-1D3A08C65245}" type="datetime1">
               <a:rPr lang="en-US" smtClean="0"/>
-              <a:t>8/31/2026</a:t>
+              <a:t>9/1/2026</a:t>
             </a:fld>
             <a:endParaRPr lang="en-US"/>
           </a:p>
@@ -16041,7 +16049,7 @@
           <a:p>
             <a:fld id="{B2777B30-84C4-E14A-AD9D-99C744B58D2B}" type="datetime1">
               <a:rPr lang="en-US" smtClean="0"/>
-              <a:t>8/31/2026</a:t>
+              <a:t>9/1/2026</a:t>
             </a:fld>
             <a:endParaRPr lang="en-US"/>
           </a:p>
@@ -16482,7 +16490,7 @@
           <a:p>
             <a:fld id="{DAB2B00D-D41F-AF4D-9311-8F7464F57478}" type="datetime1">
               <a:rPr lang="en-US" smtClean="0"/>
-              <a:t>8/31/2026</a:t>
+              <a:t>9/1/2026</a:t>
             </a:fld>
             <a:endParaRPr lang="en-US"/>
           </a:p>
@@ -16847,7 +16855,7 @@
           <a:p>
             <a:fld id="{FED1D72C-8184-5840-B481-389540A01A17}" type="datetime1">
               <a:rPr lang="en-US" smtClean="0"/>
-              <a:t>8/31/2026</a:t>
+              <a:t>9/1/2026</a:t>
             </a:fld>
             <a:endParaRPr lang="en-US"/>
           </a:p>
@@ -17179,7 +17187,7 @@
           <a:p>
             <a:fld id="{FB32C1FE-0BA1-514C-8495-D43A7528783D}" type="datetime1">
               <a:rPr lang="en-US" smtClean="0"/>
-              <a:t>8/31/2026</a:t>
+              <a:t>9/1/2026</a:t>
             </a:fld>
             <a:endParaRPr lang="en-US"/>
           </a:p>
@@ -17534,7 +17542,7 @@
           <a:p>
             <a:fld id="{A43625EB-9CE7-FE4A-962B-ADA6590F06B0}" type="datetime1">
               <a:rPr lang="en-US" smtClean="0"/>
-              <a:t>8/31/2026</a:t>
+              <a:t>9/1/2026</a:t>
             </a:fld>
             <a:endParaRPr lang="en-US"/>
           </a:p>
@@ -17832,7 +17840,7 @@
           <a:p>
             <a:fld id="{88E0F305-9E38-2F43-A154-0A13A54C557F}" type="datetime1">
               <a:rPr lang="en-US" smtClean="0"/>
-              <a:t>8/31/2026</a:t>
+              <a:t>9/1/2026</a:t>
             </a:fld>
             <a:endParaRPr lang="en-US"/>
           </a:p>
@@ -18115,7 +18123,7 @@
           <a:p>
             <a:fld id="{B9258CAE-C0F2-B346-BD4B-417B70F2F6EB}" type="datetime1">
               <a:rPr lang="en-US" smtClean="0"/>
-              <a:t>8/31/2026</a:t>
+              <a:t>9/1/2026</a:t>
             </a:fld>
             <a:endParaRPr lang="en-US"/>
           </a:p>
@@ -18378,7 +18386,7 @@
           <a:p>
             <a:fld id="{51EF5BDB-72C5-6C45-B365-DB2A3AA7E4EB}" type="datetime1">
               <a:rPr lang="en-US" smtClean="0"/>
-              <a:t>8/31/2026</a:t>
+              <a:t>9/1/2026</a:t>
             </a:fld>
             <a:endParaRPr lang="en-US"/>
           </a:p>
@@ -18653,7 +18661,7 @@
             <a:fld id="{ABF82D58-E94F-DA46-9A9B-DBAB917AB2DD}" type="datetime1">
               <a:rPr lang="en-US" smtClean="0"/>
               <a:pPr/>
-              <a:t>8/31/2026</a:t>
+              <a:t>9/1/2026</a:t>
             </a:fld>
             <a:endParaRPr lang="en-US" dirty="0"/>
           </a:p>
@@ -19179,104 +19187,6 @@
       </p:grpSpPr>
       <p:sp>
         <p:nvSpPr>
-          <p:cNvPr id="3" name="Title 2">
-            <a:extLst>
-              <a:ext uri="{FF2B5EF4-FFF2-40B4-BE49-F238E27FC236}">
-                <a16:creationId xmlns:a16="http://schemas.microsoft.com/office/drawing/2014/main" id="{F01FB9CD-CBF7-C634-8B2F-5E2490FDF9F0}"/>
-              </a:ext>
-            </a:extLst>
-          </p:cNvPr>
-          <p:cNvSpPr>
-            <a:spLocks noGrp="1"/>
-          </p:cNvSpPr>
-          <p:nvPr>
-            <p:ph type="ctrTitle"/>
-          </p:nvPr>
-        </p:nvSpPr>
-        <p:spPr>
-          <a:xfrm>
-            <a:off x="951723" y="4721290"/>
-            <a:ext cx="8229600" cy="1455575"/>
-          </a:xfrm>
-        </p:spPr>
-        <p:txBody>
-          <a:bodyPr>
-            <a:normAutofit/>
-          </a:bodyPr>
-          <a:lstStyle/>
-          <a:p>
-            <a:pPr>
-              <a:lnSpc>
-                <a:spcPct val="150000"/>
-              </a:lnSpc>
-            </a:pPr>
-            <a:r>
-              <a:rPr lang="en-US" sz="2000" dirty="0">
-                <a:solidFill>
-                  <a:schemeClr val="tx2"/>
-                </a:solidFill>
-              </a:rPr>
-              <a:t>Name</a:t>
-            </a:r>
-            <a:r>
-              <a:rPr lang="en-US" sz="2000" b="1" dirty="0">
-                <a:solidFill>
-                  <a:schemeClr val="tx2"/>
-                </a:solidFill>
-              </a:rPr>
-              <a:t>: THEMBELIHLE TILI NKOSI</a:t>
-            </a:r>
-            <a:br>
-              <a:rPr lang="en-US" sz="2000" b="1" dirty="0">
-                <a:solidFill>
-                  <a:schemeClr val="tx2"/>
-                </a:solidFill>
-              </a:rPr>
-            </a:br>
-            <a:r>
-              <a:rPr lang="en-US" sz="2000" dirty="0">
-                <a:solidFill>
-                  <a:schemeClr val="tx2"/>
-                </a:solidFill>
-              </a:rPr>
-              <a:t>Student number</a:t>
-            </a:r>
-            <a:r>
-              <a:rPr lang="en-US" sz="2000" b="1" dirty="0">
-                <a:solidFill>
-                  <a:schemeClr val="tx2"/>
-                </a:solidFill>
-              </a:rPr>
-              <a:t>: 402313573</a:t>
-            </a:r>
-            <a:br>
-              <a:rPr lang="en-US" sz="2000" b="1" dirty="0">
-                <a:solidFill>
-                  <a:schemeClr val="tx2"/>
-                </a:solidFill>
-              </a:rPr>
-            </a:br>
-            <a:r>
-              <a:rPr lang="en-US" sz="2000" dirty="0">
-                <a:solidFill>
-                  <a:schemeClr val="tx2"/>
-                </a:solidFill>
-              </a:rPr>
-              <a:t>Module</a:t>
-            </a:r>
-            <a:r>
-              <a:rPr lang="en-US" sz="2000" b="1" dirty="0">
-                <a:solidFill>
-                  <a:schemeClr val="tx2"/>
-                </a:solidFill>
-              </a:rPr>
-              <a:t>: MACHINE LEARNING</a:t>
-            </a:r>
-          </a:p>
-        </p:txBody>
-      </p:sp>
-      <p:sp>
-        <p:nvSpPr>
           <p:cNvPr id="6" name="Title 2">
             <a:extLst>
               <a:ext uri="{FF2B5EF4-FFF2-40B4-BE49-F238E27FC236}">
@@ -19291,8 +19201,8 @@
         </p:nvSpPr>
         <p:spPr>
           <a:xfrm>
-            <a:off x="609600" y="758891"/>
-            <a:ext cx="8229600" cy="3694922"/>
+            <a:off x="818148" y="289248"/>
+            <a:ext cx="11020926" cy="5561045"/>
           </a:xfrm>
           <a:prstGeom prst="rect">
             <a:avLst/>
@@ -19323,16 +19233,55 @@
           </a:lstStyle>
           <a:p>
             <a:r>
-              <a:rPr lang="en-ZA" dirty="0"/>
-              <a:t>CREDIT RISK</a:t>
-            </a:r>
-            <a:br>
-              <a:rPr lang="en-ZA" dirty="0"/>
-            </a:br>
-            <a:r>
-              <a:rPr lang="en-ZA" dirty="0"/>
-              <a:t>PREDICTION SYSTEM</a:t>
-            </a:r>
+              <a:rPr lang="en-ZA" sz="6600" dirty="0"/>
+              <a:t>CREDIT RISK PREDICTION SYSTEM</a:t>
+            </a:r>
+          </a:p>
+          <a:p>
+            <a:endParaRPr lang="en-ZA" sz="3200" dirty="0"/>
+          </a:p>
+          <a:p>
+            <a:pPr algn="just"/>
+            <a:r>
+              <a:rPr lang="en-ZA" sz="2000" b="1" dirty="0">
+                <a:solidFill>
+                  <a:schemeClr val="tx2"/>
+                </a:solidFill>
+              </a:rPr>
+              <a:t>Applying Machine Learning Life Cycle to classify Loan applicants as High-risk or Low-risk</a:t>
+            </a:r>
+          </a:p>
+          <a:p>
+            <a:pPr algn="just"/>
+            <a:endParaRPr lang="en-ZA" sz="2000" b="1" dirty="0">
+              <a:solidFill>
+                <a:schemeClr val="tx2"/>
+              </a:solidFill>
+            </a:endParaRPr>
+          </a:p>
+          <a:p>
+            <a:pPr algn="just"/>
+            <a:endParaRPr lang="en-ZA" sz="2000" b="1" dirty="0">
+              <a:solidFill>
+                <a:schemeClr val="tx2"/>
+              </a:solidFill>
+            </a:endParaRPr>
+          </a:p>
+          <a:p>
+            <a:pPr algn="just"/>
+            <a:endParaRPr lang="en-ZA" sz="2000" b="1" dirty="0">
+              <a:solidFill>
+                <a:schemeClr val="tx2"/>
+              </a:solidFill>
+            </a:endParaRPr>
+          </a:p>
+          <a:p>
+            <a:pPr algn="just"/>
+            <a:endParaRPr lang="en-ZA" sz="2000" b="1" dirty="0">
+              <a:solidFill>
+                <a:schemeClr val="tx2"/>
+              </a:solidFill>
+            </a:endParaRPr>
           </a:p>
         </p:txBody>
       </p:sp>

--- a/Credit Risk Prediction System.pptx
+++ b/Credit Risk Prediction System.pptx
@@ -1,18 +1,23 @@
 
 <file path=ppt/presentation.xml><?xml version="1.0" encoding="utf-8"?>
-<p:presentation xmlns:a="http://schemas.openxmlformats.org/drawingml/2006/main" xmlns:r="http://schemas.openxmlformats.org/officeDocument/2006/relationships" xmlns:p="http://schemas.openxmlformats.org/presentationml/2006/main" saveSubsetFonts="1">
+<p:presentation xmlns:a="http://schemas.openxmlformats.org/drawingml/2006/main" xmlns:r="http://schemas.openxmlformats.org/officeDocument/2006/relationships" xmlns:p="http://schemas.openxmlformats.org/presentationml/2006/main" showSpecialPlsOnTitleSld="0" saveSubsetFonts="1">
   <p:sldMasterIdLst>
     <p:sldMasterId id="2147483979" r:id="rId1"/>
   </p:sldMasterIdLst>
   <p:notesMasterIdLst>
-    <p:notesMasterId r:id="rId4"/>
+    <p:notesMasterId r:id="rId9"/>
   </p:notesMasterIdLst>
   <p:handoutMasterIdLst>
-    <p:handoutMasterId r:id="rId5"/>
+    <p:handoutMasterId r:id="rId10"/>
   </p:handoutMasterIdLst>
   <p:sldIdLst>
     <p:sldId id="260" r:id="rId2"/>
     <p:sldId id="261" r:id="rId3"/>
+    <p:sldId id="262" r:id="rId4"/>
+    <p:sldId id="263" r:id="rId5"/>
+    <p:sldId id="264" r:id="rId6"/>
+    <p:sldId id="265" r:id="rId7"/>
+    <p:sldId id="266" r:id="rId8"/>
   </p:sldIdLst>
   <p:sldSz cx="12192000" cy="6858000"/>
   <p:notesSz cx="6858000" cy="9144000"/>
@@ -136,7 +141,7 @@
 <file path=ppt/revisionInfo.xml><?xml version="1.0" encoding="utf-8"?>
 <p1510:revInfo xmlns:a="http://schemas.openxmlformats.org/drawingml/2006/main" xmlns:r="http://schemas.openxmlformats.org/officeDocument/2006/relationships" xmlns:p1510="http://schemas.microsoft.com/office/powerpoint/2015/10/main">
   <p1510:revLst>
-    <p1510:client id="{5F03DC37-C6E7-4D03-9B6A-5B1F4D882761}" v="2" dt="2026-08-31T08:35:15.850"/>
+    <p1510:client id="{5F03DC37-C6E7-4D03-9B6A-5B1F4D882761}" v="46" dt="2026-09-02T07:57:28.032"/>
   </p1510:revLst>
 </p1510:revInfo>
 </file>
@@ -145,13 +150,13 @@
 <pc:chgInfo xmlns:a="http://schemas.openxmlformats.org/drawingml/2006/main" xmlns:r="http://schemas.openxmlformats.org/officeDocument/2006/relationships" xmlns:ac="http://schemas.microsoft.com/office/drawing/2013/main/command" xmlns:pc="http://schemas.microsoft.com/office/powerpoint/2013/main/command">
   <pc:docChgLst>
     <pc:chgData name="Thembelihle Nkosi" userId="34acb82be647289d" providerId="LiveId" clId="{A75475CB-E90B-49A7-8916-1196816BF4F1}"/>
-    <pc:docChg chg="undo custSel addSld modSld">
-      <pc:chgData name="Thembelihle Nkosi" userId="34acb82be647289d" providerId="LiveId" clId="{A75475CB-E90B-49A7-8916-1196816BF4F1}" dt="2026-09-01T10:18:10.257" v="275" actId="14100"/>
+    <pc:docChg chg="undo custSel addSld delSld modSld">
+      <pc:chgData name="Thembelihle Nkosi" userId="34acb82be647289d" providerId="LiveId" clId="{A75475CB-E90B-49A7-8916-1196816BF4F1}" dt="2026-09-02T07:58:45.096" v="4282" actId="20577"/>
       <pc:docMkLst>
         <pc:docMk/>
       </pc:docMkLst>
       <pc:sldChg chg="addSp delSp modSp mod">
-        <pc:chgData name="Thembelihle Nkosi" userId="34acb82be647289d" providerId="LiveId" clId="{A75475CB-E90B-49A7-8916-1196816BF4F1}" dt="2026-09-01T10:18:10.257" v="275" actId="14100"/>
+        <pc:chgData name="Thembelihle Nkosi" userId="34acb82be647289d" providerId="LiveId" clId="{A75475CB-E90B-49A7-8916-1196816BF4F1}" dt="2026-09-01T13:21:11.951" v="2069" actId="767"/>
         <pc:sldMkLst>
           <pc:docMk/>
           <pc:sldMk cId="2329614230" sldId="260"/>
@@ -173,6 +178,14 @@
           </ac:spMkLst>
         </pc:spChg>
         <pc:spChg chg="add mod">
+          <ac:chgData name="Thembelihle Nkosi" userId="34acb82be647289d" providerId="LiveId" clId="{A75475CB-E90B-49A7-8916-1196816BF4F1}" dt="2026-09-01T13:21:11.951" v="2069" actId="767"/>
+          <ac:spMkLst>
+            <pc:docMk/>
+            <pc:sldMk cId="2329614230" sldId="260"/>
+            <ac:spMk id="5" creationId="{A6D0165C-8135-7923-31EF-3C8382BDBCDC}"/>
+          </ac:spMkLst>
+        </pc:spChg>
+        <pc:spChg chg="add mod">
           <ac:chgData name="Thembelihle Nkosi" userId="34acb82be647289d" providerId="LiveId" clId="{A75475CB-E90B-49A7-8916-1196816BF4F1}" dt="2026-09-01T10:18:10.257" v="275" actId="14100"/>
           <ac:spMkLst>
             <pc:docMk/>
@@ -182,13 +195,13 @@
         </pc:spChg>
       </pc:sldChg>
       <pc:sldChg chg="addSp delSp modSp new mod modClrScheme chgLayout">
-        <pc:chgData name="Thembelihle Nkosi" userId="34acb82be647289d" providerId="LiveId" clId="{A75475CB-E90B-49A7-8916-1196816BF4F1}" dt="2026-08-31T08:34:11.940" v="50"/>
+        <pc:chgData name="Thembelihle Nkosi" userId="34acb82be647289d" providerId="LiveId" clId="{A75475CB-E90B-49A7-8916-1196816BF4F1}" dt="2026-09-01T12:54:19.761" v="1281" actId="255"/>
         <pc:sldMkLst>
           <pc:docMk/>
           <pc:sldMk cId="838054146" sldId="261"/>
         </pc:sldMkLst>
         <pc:spChg chg="mod">
-          <ac:chgData name="Thembelihle Nkosi" userId="34acb82be647289d" providerId="LiveId" clId="{A75475CB-E90B-49A7-8916-1196816BF4F1}" dt="2026-08-31T07:53:18.134" v="45" actId="27636"/>
+          <ac:chgData name="Thembelihle Nkosi" userId="34acb82be647289d" providerId="LiveId" clId="{A75475CB-E90B-49A7-8916-1196816BF4F1}" dt="2026-09-01T12:54:19.761" v="1281" actId="255"/>
           <ac:spMkLst>
             <pc:docMk/>
             <pc:sldMk cId="838054146" sldId="261"/>
@@ -196,13 +209,447 @@
           </ac:spMkLst>
         </pc:spChg>
         <pc:spChg chg="add del mod">
-          <ac:chgData name="Thembelihle Nkosi" userId="34acb82be647289d" providerId="LiveId" clId="{A75475CB-E90B-49A7-8916-1196816BF4F1}" dt="2026-08-31T08:34:11.940" v="50"/>
+          <ac:chgData name="Thembelihle Nkosi" userId="34acb82be647289d" providerId="LiveId" clId="{A75475CB-E90B-49A7-8916-1196816BF4F1}" dt="2026-09-01T12:34:17.563" v="359"/>
           <ac:spMkLst>
             <pc:docMk/>
             <pc:sldMk cId="838054146" sldId="261"/>
-            <ac:spMk id="3" creationId="{405BABCB-B116-4A70-293C-2E7D17E1BB6F}"/>
+            <ac:spMk id="3" creationId="{6C4FB046-603E-EC96-E409-50DB82D094E4}"/>
           </ac:spMkLst>
         </pc:spChg>
+        <pc:spChg chg="add del mod">
+          <ac:chgData name="Thembelihle Nkosi" userId="34acb82be647289d" providerId="LiveId" clId="{A75475CB-E90B-49A7-8916-1196816BF4F1}" dt="2026-09-01T12:34:29.212" v="364"/>
+          <ac:spMkLst>
+            <pc:docMk/>
+            <pc:sldMk cId="838054146" sldId="261"/>
+            <ac:spMk id="4" creationId="{D70F0641-8541-7E07-2E38-514A29B1636D}"/>
+          </ac:spMkLst>
+        </pc:spChg>
+        <pc:spChg chg="add del mod">
+          <ac:chgData name="Thembelihle Nkosi" userId="34acb82be647289d" providerId="LiveId" clId="{A75475CB-E90B-49A7-8916-1196816BF4F1}" dt="2026-09-01T12:34:40.214" v="369"/>
+          <ac:spMkLst>
+            <pc:docMk/>
+            <pc:sldMk cId="838054146" sldId="261"/>
+            <ac:spMk id="5" creationId="{3BF37DB5-02DC-00FE-3630-07A3BA894AEF}"/>
+          </ac:spMkLst>
+        </pc:spChg>
+        <pc:spChg chg="add del mod">
+          <ac:chgData name="Thembelihle Nkosi" userId="34acb82be647289d" providerId="LiveId" clId="{A75475CB-E90B-49A7-8916-1196816BF4F1}" dt="2026-09-01T12:34:50.241" v="373"/>
+          <ac:spMkLst>
+            <pc:docMk/>
+            <pc:sldMk cId="838054146" sldId="261"/>
+            <ac:spMk id="6" creationId="{527344D4-F8C2-10AC-0B28-0856DBA44DDE}"/>
+          </ac:spMkLst>
+        </pc:spChg>
+        <pc:spChg chg="add mod">
+          <ac:chgData name="Thembelihle Nkosi" userId="34acb82be647289d" providerId="LiveId" clId="{A75475CB-E90B-49A7-8916-1196816BF4F1}" dt="2026-09-01T12:34:53.899" v="375" actId="767"/>
+          <ac:spMkLst>
+            <pc:docMk/>
+            <pc:sldMk cId="838054146" sldId="261"/>
+            <ac:spMk id="7" creationId="{7291D5DB-E1BD-441C-1DF5-125C38CA2BC1}"/>
+          </ac:spMkLst>
+        </pc:spChg>
+        <pc:spChg chg="add del mod">
+          <ac:chgData name="Thembelihle Nkosi" userId="34acb82be647289d" providerId="LiveId" clId="{A75475CB-E90B-49A7-8916-1196816BF4F1}" dt="2026-09-01T12:37:35.171" v="517" actId="21"/>
+          <ac:spMkLst>
+            <pc:docMk/>
+            <pc:sldMk cId="838054146" sldId="261"/>
+            <ac:spMk id="8" creationId="{7D20854A-47DF-F5F2-D2DF-D34708329EBB}"/>
+          </ac:spMkLst>
+        </pc:spChg>
+        <pc:spChg chg="add mod">
+          <ac:chgData name="Thembelihle Nkosi" userId="34acb82be647289d" providerId="LiveId" clId="{A75475CB-E90B-49A7-8916-1196816BF4F1}" dt="2026-09-01T12:44:14.428" v="669" actId="164"/>
+          <ac:spMkLst>
+            <pc:docMk/>
+            <pc:sldMk cId="838054146" sldId="261"/>
+            <ac:spMk id="9" creationId="{750E653F-6E68-281C-E99D-C4D1D81B0B5F}"/>
+          </ac:spMkLst>
+        </pc:spChg>
+        <pc:spChg chg="add del">
+          <ac:chgData name="Thembelihle Nkosi" userId="34acb82be647289d" providerId="LiveId" clId="{A75475CB-E90B-49A7-8916-1196816BF4F1}" dt="2026-09-01T12:38:34.664" v="525" actId="22"/>
+          <ac:spMkLst>
+            <pc:docMk/>
+            <pc:sldMk cId="838054146" sldId="261"/>
+            <ac:spMk id="11" creationId="{3D11413E-DA74-962A-71F2-6AAEFAACB32E}"/>
+          </ac:spMkLst>
+        </pc:spChg>
+        <pc:spChg chg="add del">
+          <ac:chgData name="Thembelihle Nkosi" userId="34acb82be647289d" providerId="LiveId" clId="{A75475CB-E90B-49A7-8916-1196816BF4F1}" dt="2026-09-01T12:41:01.386" v="656" actId="11529"/>
+          <ac:spMkLst>
+            <pc:docMk/>
+            <pc:sldMk cId="838054146" sldId="261"/>
+            <ac:spMk id="12" creationId="{358392A8-CB4E-1274-1E0D-F14ED8CD8088}"/>
+          </ac:spMkLst>
+        </pc:spChg>
+        <pc:spChg chg="add mod">
+          <ac:chgData name="Thembelihle Nkosi" userId="34acb82be647289d" providerId="LiveId" clId="{A75475CB-E90B-49A7-8916-1196816BF4F1}" dt="2026-09-01T12:44:14.428" v="669" actId="164"/>
+          <ac:spMkLst>
+            <pc:docMk/>
+            <pc:sldMk cId="838054146" sldId="261"/>
+            <ac:spMk id="13" creationId="{81704100-503A-5AA9-1CB7-EB4AF3302DEC}"/>
+          </ac:spMkLst>
+        </pc:spChg>
+        <pc:spChg chg="mod">
+          <ac:chgData name="Thembelihle Nkosi" userId="34acb82be647289d" providerId="LiveId" clId="{A75475CB-E90B-49A7-8916-1196816BF4F1}" dt="2026-09-01T12:47:16.630" v="792" actId="20577"/>
+          <ac:spMkLst>
+            <pc:docMk/>
+            <pc:sldMk cId="838054146" sldId="261"/>
+            <ac:spMk id="16" creationId="{91E567BE-EA72-C968-298B-C0D12C129F2D}"/>
+          </ac:spMkLst>
+        </pc:spChg>
+        <pc:spChg chg="mod">
+          <ac:chgData name="Thembelihle Nkosi" userId="34acb82be647289d" providerId="LiveId" clId="{A75475CB-E90B-49A7-8916-1196816BF4F1}" dt="2026-09-01T12:45:49.056" v="677" actId="20577"/>
+          <ac:spMkLst>
+            <pc:docMk/>
+            <pc:sldMk cId="838054146" sldId="261"/>
+            <ac:spMk id="17" creationId="{F80C31BA-E3EB-C530-2F9C-3316994CC296}"/>
+          </ac:spMkLst>
+        </pc:spChg>
+        <pc:spChg chg="mod">
+          <ac:chgData name="Thembelihle Nkosi" userId="34acb82be647289d" providerId="LiveId" clId="{A75475CB-E90B-49A7-8916-1196816BF4F1}" dt="2026-09-01T12:48:33.975" v="937" actId="20577"/>
+          <ac:spMkLst>
+            <pc:docMk/>
+            <pc:sldMk cId="838054146" sldId="261"/>
+            <ac:spMk id="19" creationId="{06ABC3D6-86BF-F2D2-2263-F8A492EC6AA6}"/>
+          </ac:spMkLst>
+        </pc:spChg>
+        <pc:spChg chg="mod">
+          <ac:chgData name="Thembelihle Nkosi" userId="34acb82be647289d" providerId="LiveId" clId="{A75475CB-E90B-49A7-8916-1196816BF4F1}" dt="2026-09-01T12:45:53.364" v="678" actId="20577"/>
+          <ac:spMkLst>
+            <pc:docMk/>
+            <pc:sldMk cId="838054146" sldId="261"/>
+            <ac:spMk id="20" creationId="{2FAAA1C8-AE57-9FE7-2995-748176148515}"/>
+          </ac:spMkLst>
+        </pc:spChg>
+        <pc:spChg chg="add mod">
+          <ac:chgData name="Thembelihle Nkosi" userId="34acb82be647289d" providerId="LiveId" clId="{A75475CB-E90B-49A7-8916-1196816BF4F1}" dt="2026-09-01T12:54:03.639" v="1280" actId="14100"/>
+          <ac:spMkLst>
+            <pc:docMk/>
+            <pc:sldMk cId="838054146" sldId="261"/>
+            <ac:spMk id="22" creationId="{BEF16CDA-C0B0-113E-B233-58D439B4DF9C}"/>
+          </ac:spMkLst>
+        </pc:spChg>
+        <pc:grpChg chg="add mod">
+          <ac:chgData name="Thembelihle Nkosi" userId="34acb82be647289d" providerId="LiveId" clId="{A75475CB-E90B-49A7-8916-1196816BF4F1}" dt="2026-09-01T12:48:50.949" v="938" actId="164"/>
+          <ac:grpSpMkLst>
+            <pc:docMk/>
+            <pc:sldMk cId="838054146" sldId="261"/>
+            <ac:grpSpMk id="14" creationId="{F3FE3E5B-23FD-6E84-D37F-94D2DCD760F8}"/>
+          </ac:grpSpMkLst>
+        </pc:grpChg>
+        <pc:grpChg chg="add mod">
+          <ac:chgData name="Thembelihle Nkosi" userId="34acb82be647289d" providerId="LiveId" clId="{A75475CB-E90B-49A7-8916-1196816BF4F1}" dt="2026-09-01T12:48:50.949" v="938" actId="164"/>
+          <ac:grpSpMkLst>
+            <pc:docMk/>
+            <pc:sldMk cId="838054146" sldId="261"/>
+            <ac:grpSpMk id="15" creationId="{14CFD373-C87B-6550-F58E-12B1192517EB}"/>
+          </ac:grpSpMkLst>
+        </pc:grpChg>
+        <pc:grpChg chg="add mod">
+          <ac:chgData name="Thembelihle Nkosi" userId="34acb82be647289d" providerId="LiveId" clId="{A75475CB-E90B-49A7-8916-1196816BF4F1}" dt="2026-09-01T12:48:50.949" v="938" actId="164"/>
+          <ac:grpSpMkLst>
+            <pc:docMk/>
+            <pc:sldMk cId="838054146" sldId="261"/>
+            <ac:grpSpMk id="18" creationId="{12FAF7CE-4ABB-2F24-961D-EA15B9EC213B}"/>
+          </ac:grpSpMkLst>
+        </pc:grpChg>
+        <pc:grpChg chg="add mod">
+          <ac:chgData name="Thembelihle Nkosi" userId="34acb82be647289d" providerId="LiveId" clId="{A75475CB-E90B-49A7-8916-1196816BF4F1}" dt="2026-09-01T12:53:54.608" v="1278" actId="1076"/>
+          <ac:grpSpMkLst>
+            <pc:docMk/>
+            <pc:sldMk cId="838054146" sldId="261"/>
+            <ac:grpSpMk id="21" creationId="{2AE957D7-471B-E718-EF04-388FCCC3E7FB}"/>
+          </ac:grpSpMkLst>
+        </pc:grpChg>
+      </pc:sldChg>
+      <pc:sldChg chg="addSp modSp new mod">
+        <pc:chgData name="Thembelihle Nkosi" userId="34acb82be647289d" providerId="LiveId" clId="{A75475CB-E90B-49A7-8916-1196816BF4F1}" dt="2026-09-01T19:41:01.335" v="2810" actId="14100"/>
+        <pc:sldMkLst>
+          <pc:docMk/>
+          <pc:sldMk cId="1420003605" sldId="262"/>
+        </pc:sldMkLst>
+        <pc:spChg chg="mod">
+          <ac:chgData name="Thembelihle Nkosi" userId="34acb82be647289d" providerId="LiveId" clId="{A75475CB-E90B-49A7-8916-1196816BF4F1}" dt="2026-09-01T19:41:01.335" v="2810" actId="14100"/>
+          <ac:spMkLst>
+            <pc:docMk/>
+            <pc:sldMk cId="1420003605" sldId="262"/>
+            <ac:spMk id="2" creationId="{30C09699-B87A-D2F8-DF10-D9F76F6021D4}"/>
+          </ac:spMkLst>
+        </pc:spChg>
+        <pc:spChg chg="add mod">
+          <ac:chgData name="Thembelihle Nkosi" userId="34acb82be647289d" providerId="LiveId" clId="{A75475CB-E90B-49A7-8916-1196816BF4F1}" dt="2026-09-01T12:57:11.188" v="1335" actId="767"/>
+          <ac:spMkLst>
+            <pc:docMk/>
+            <pc:sldMk cId="1420003605" sldId="262"/>
+            <ac:spMk id="3" creationId="{717D40CD-0B84-4C31-ECF8-D1C62B229695}"/>
+          </ac:spMkLst>
+        </pc:spChg>
+        <pc:spChg chg="add mod">
+          <ac:chgData name="Thembelihle Nkosi" userId="34acb82be647289d" providerId="LiveId" clId="{A75475CB-E90B-49A7-8916-1196816BF4F1}" dt="2026-09-01T13:01:46.071" v="1501" actId="207"/>
+          <ac:spMkLst>
+            <pc:docMk/>
+            <pc:sldMk cId="1420003605" sldId="262"/>
+            <ac:spMk id="4" creationId="{9338586F-97B7-4B4D-B65A-F4F4BE39E158}"/>
+          </ac:spMkLst>
+        </pc:spChg>
+        <pc:spChg chg="add mod">
+          <ac:chgData name="Thembelihle Nkosi" userId="34acb82be647289d" providerId="LiveId" clId="{A75475CB-E90B-49A7-8916-1196816BF4F1}" dt="2026-09-01T13:01:58.200" v="1502" actId="207"/>
+          <ac:spMkLst>
+            <pc:docMk/>
+            <pc:sldMk cId="1420003605" sldId="262"/>
+            <ac:spMk id="6" creationId="{6A2BF41D-8296-2AE8-41C7-DBD3D006BBAC}"/>
+          </ac:spMkLst>
+        </pc:spChg>
+        <pc:spChg chg="add mod">
+          <ac:chgData name="Thembelihle Nkosi" userId="34acb82be647289d" providerId="LiveId" clId="{A75475CB-E90B-49A7-8916-1196816BF4F1}" dt="2026-09-01T13:02:02.588" v="1503" actId="207"/>
+          <ac:spMkLst>
+            <pc:docMk/>
+            <pc:sldMk cId="1420003605" sldId="262"/>
+            <ac:spMk id="8" creationId="{767C5B18-4A8C-0C61-0149-C57FC6A85F88}"/>
+          </ac:spMkLst>
+        </pc:spChg>
+        <pc:spChg chg="add mod">
+          <ac:chgData name="Thembelihle Nkosi" userId="34acb82be647289d" providerId="LiveId" clId="{A75475CB-E90B-49A7-8916-1196816BF4F1}" dt="2026-09-01T13:02:24.807" v="1505" actId="767"/>
+          <ac:spMkLst>
+            <pc:docMk/>
+            <pc:sldMk cId="1420003605" sldId="262"/>
+            <ac:spMk id="10" creationId="{965FB033-6B89-0B51-38C3-7D9D69520CAA}"/>
+          </ac:spMkLst>
+        </pc:spChg>
+        <pc:spChg chg="add mod">
+          <ac:chgData name="Thembelihle Nkosi" userId="34acb82be647289d" providerId="LiveId" clId="{A75475CB-E90B-49A7-8916-1196816BF4F1}" dt="2026-09-01T13:04:14.667" v="1531" actId="1076"/>
+          <ac:spMkLst>
+            <pc:docMk/>
+            <pc:sldMk cId="1420003605" sldId="262"/>
+            <ac:spMk id="11" creationId="{EB6BF935-14F4-D51F-83E7-4EEBDEF35282}"/>
+          </ac:spMkLst>
+        </pc:spChg>
+        <pc:spChg chg="add mod">
+          <ac:chgData name="Thembelihle Nkosi" userId="34acb82be647289d" providerId="LiveId" clId="{A75475CB-E90B-49A7-8916-1196816BF4F1}" dt="2026-09-01T13:20:09.456" v="2067" actId="767"/>
+          <ac:spMkLst>
+            <pc:docMk/>
+            <pc:sldMk cId="1420003605" sldId="262"/>
+            <ac:spMk id="13" creationId="{266BE0AC-17C6-B832-1CCB-8C31E5337448}"/>
+          </ac:spMkLst>
+        </pc:spChg>
+        <pc:grpChg chg="add mod">
+          <ac:chgData name="Thembelihle Nkosi" userId="34acb82be647289d" providerId="LiveId" clId="{A75475CB-E90B-49A7-8916-1196816BF4F1}" dt="2026-09-01T13:00:28.304" v="1392" actId="164"/>
+          <ac:grpSpMkLst>
+            <pc:docMk/>
+            <pc:sldMk cId="1420003605" sldId="262"/>
+            <ac:grpSpMk id="9" creationId="{B5268710-362F-5D3A-ADEF-E878E929E19D}"/>
+          </ac:grpSpMkLst>
+        </pc:grpChg>
+        <pc:graphicFrameChg chg="add mod modGraphic">
+          <ac:chgData name="Thembelihle Nkosi" userId="34acb82be647289d" providerId="LiveId" clId="{A75475CB-E90B-49A7-8916-1196816BF4F1}" dt="2026-09-01T13:20:01.500" v="2065" actId="20577"/>
+          <ac:graphicFrameMkLst>
+            <pc:docMk/>
+            <pc:sldMk cId="1420003605" sldId="262"/>
+            <ac:graphicFrameMk id="12" creationId="{F1211279-574A-404D-07AE-BAEDD03880BB}"/>
+          </ac:graphicFrameMkLst>
+        </pc:graphicFrameChg>
+      </pc:sldChg>
+      <pc:sldChg chg="addSp delSp modSp new mod">
+        <pc:chgData name="Thembelihle Nkosi" userId="34acb82be647289d" providerId="LiveId" clId="{A75475CB-E90B-49A7-8916-1196816BF4F1}" dt="2026-09-01T13:37:08.337" v="2778" actId="1076"/>
+        <pc:sldMkLst>
+          <pc:docMk/>
+          <pc:sldMk cId="1320807106" sldId="263"/>
+        </pc:sldMkLst>
+        <pc:spChg chg="add del mod">
+          <ac:chgData name="Thembelihle Nkosi" userId="34acb82be647289d" providerId="LiveId" clId="{A75475CB-E90B-49A7-8916-1196816BF4F1}" dt="2026-09-01T13:22:24.321" v="2073"/>
+          <ac:spMkLst>
+            <pc:docMk/>
+            <pc:sldMk cId="1320807106" sldId="263"/>
+            <ac:spMk id="3" creationId="{86ADD3DE-FFFE-B99A-C8AC-6BC7D119CEF4}"/>
+          </ac:spMkLst>
+        </pc:spChg>
+        <pc:spChg chg="add mod">
+          <ac:chgData name="Thembelihle Nkosi" userId="34acb82be647289d" providerId="LiveId" clId="{A75475CB-E90B-49A7-8916-1196816BF4F1}" dt="2026-09-01T13:37:08.337" v="2778" actId="1076"/>
+          <ac:spMkLst>
+            <pc:docMk/>
+            <pc:sldMk cId="1320807106" sldId="263"/>
+            <ac:spMk id="4" creationId="{34C5732B-A0FC-6BE7-66B4-BD16ABA69C2E}"/>
+          </ac:spMkLst>
+        </pc:spChg>
+        <pc:spChg chg="add mod">
+          <ac:chgData name="Thembelihle Nkosi" userId="34acb82be647289d" providerId="LiveId" clId="{A75475CB-E90B-49A7-8916-1196816BF4F1}" dt="2026-09-01T13:36:58.238" v="2777" actId="164"/>
+          <ac:spMkLst>
+            <pc:docMk/>
+            <pc:sldMk cId="1320807106" sldId="263"/>
+            <ac:spMk id="5" creationId="{F16DFC1D-4B85-6FFB-08AF-FF5552E231FF}"/>
+          </ac:spMkLst>
+        </pc:spChg>
+        <pc:spChg chg="add del mod">
+          <ac:chgData name="Thembelihle Nkosi" userId="34acb82be647289d" providerId="LiveId" clId="{A75475CB-E90B-49A7-8916-1196816BF4F1}" dt="2026-09-01T13:24:28.770" v="2115" actId="21"/>
+          <ac:spMkLst>
+            <pc:docMk/>
+            <pc:sldMk cId="1320807106" sldId="263"/>
+            <ac:spMk id="7" creationId="{C968A2AA-1A50-0DF9-3A2B-B7823CFD28C5}"/>
+          </ac:spMkLst>
+        </pc:spChg>
+        <pc:spChg chg="add del mod">
+          <ac:chgData name="Thembelihle Nkosi" userId="34acb82be647289d" providerId="LiveId" clId="{A75475CB-E90B-49A7-8916-1196816BF4F1}" dt="2026-09-01T13:24:26.396" v="2114" actId="21"/>
+          <ac:spMkLst>
+            <pc:docMk/>
+            <pc:sldMk cId="1320807106" sldId="263"/>
+            <ac:spMk id="9" creationId="{D2323175-B4C2-4BD7-6D9C-5F0D7B5D92E9}"/>
+          </ac:spMkLst>
+        </pc:spChg>
+        <pc:spChg chg="add mod">
+          <ac:chgData name="Thembelihle Nkosi" userId="34acb82be647289d" providerId="LiveId" clId="{A75475CB-E90B-49A7-8916-1196816BF4F1}" dt="2026-09-01T13:36:58.238" v="2777" actId="164"/>
+          <ac:spMkLst>
+            <pc:docMk/>
+            <pc:sldMk cId="1320807106" sldId="263"/>
+            <ac:spMk id="11" creationId="{AE71BBAF-2E2F-12D9-77D9-E3A23E6F4AB7}"/>
+          </ac:spMkLst>
+        </pc:spChg>
+        <pc:spChg chg="add mod">
+          <ac:chgData name="Thembelihle Nkosi" userId="34acb82be647289d" providerId="LiveId" clId="{A75475CB-E90B-49A7-8916-1196816BF4F1}" dt="2026-09-01T13:36:58.238" v="2777" actId="164"/>
+          <ac:spMkLst>
+            <pc:docMk/>
+            <pc:sldMk cId="1320807106" sldId="263"/>
+            <ac:spMk id="13" creationId="{0B8DEA96-23F7-4671-8B04-75C8E827447D}"/>
+          </ac:spMkLst>
+        </pc:spChg>
+        <pc:spChg chg="add mod">
+          <ac:chgData name="Thembelihle Nkosi" userId="34acb82be647289d" providerId="LiveId" clId="{A75475CB-E90B-49A7-8916-1196816BF4F1}" dt="2026-09-01T13:36:58.238" v="2777" actId="164"/>
+          <ac:spMkLst>
+            <pc:docMk/>
+            <pc:sldMk cId="1320807106" sldId="263"/>
+            <ac:spMk id="15" creationId="{E6101395-99E0-F679-1F64-061F36C0955F}"/>
+          </ac:spMkLst>
+        </pc:spChg>
+        <pc:spChg chg="add mod">
+          <ac:chgData name="Thembelihle Nkosi" userId="34acb82be647289d" providerId="LiveId" clId="{A75475CB-E90B-49A7-8916-1196816BF4F1}" dt="2026-09-01T13:36:58.238" v="2777" actId="164"/>
+          <ac:spMkLst>
+            <pc:docMk/>
+            <pc:sldMk cId="1320807106" sldId="263"/>
+            <ac:spMk id="17" creationId="{969CBD7C-1F4E-DEC1-7570-2CE212A58AC1}"/>
+          </ac:spMkLst>
+        </pc:spChg>
+        <pc:spChg chg="add mod">
+          <ac:chgData name="Thembelihle Nkosi" userId="34acb82be647289d" providerId="LiveId" clId="{A75475CB-E90B-49A7-8916-1196816BF4F1}" dt="2026-09-01T13:36:58.238" v="2777" actId="164"/>
+          <ac:spMkLst>
+            <pc:docMk/>
+            <pc:sldMk cId="1320807106" sldId="263"/>
+            <ac:spMk id="19" creationId="{E069293D-C6DB-B694-09E4-84AC977ADF74}"/>
+          </ac:spMkLst>
+        </pc:spChg>
+        <pc:grpChg chg="add mod">
+          <ac:chgData name="Thembelihle Nkosi" userId="34acb82be647289d" providerId="LiveId" clId="{A75475CB-E90B-49A7-8916-1196816BF4F1}" dt="2026-09-01T13:36:58.238" v="2777" actId="164"/>
+          <ac:grpSpMkLst>
+            <pc:docMk/>
+            <pc:sldMk cId="1320807106" sldId="263"/>
+            <ac:grpSpMk id="20" creationId="{452FD5C8-F8BA-B7F9-0F73-AB18189159C9}"/>
+          </ac:grpSpMkLst>
+        </pc:grpChg>
+      </pc:sldChg>
+      <pc:sldChg chg="addSp delSp modSp new mod">
+        <pc:chgData name="Thembelihle Nkosi" userId="34acb82be647289d" providerId="LiveId" clId="{A75475CB-E90B-49A7-8916-1196816BF4F1}" dt="2026-09-02T07:49:55.799" v="3807" actId="14100"/>
+        <pc:sldMkLst>
+          <pc:docMk/>
+          <pc:sldMk cId="855587190" sldId="264"/>
+        </pc:sldMkLst>
+        <pc:spChg chg="mod">
+          <ac:chgData name="Thembelihle Nkosi" userId="34acb82be647289d" providerId="LiveId" clId="{A75475CB-E90B-49A7-8916-1196816BF4F1}" dt="2026-09-02T07:49:46.366" v="3805" actId="14100"/>
+          <ac:spMkLst>
+            <pc:docMk/>
+            <pc:sldMk cId="855587190" sldId="264"/>
+            <ac:spMk id="2" creationId="{DEE19E3C-E9B3-43B6-3190-55C9663706B5}"/>
+          </ac:spMkLst>
+        </pc:spChg>
+        <pc:spChg chg="add del mod">
+          <ac:chgData name="Thembelihle Nkosi" userId="34acb82be647289d" providerId="LiveId" clId="{A75475CB-E90B-49A7-8916-1196816BF4F1}" dt="2026-09-01T19:41:57.453" v="2819"/>
+          <ac:spMkLst>
+            <pc:docMk/>
+            <pc:sldMk cId="855587190" sldId="264"/>
+            <ac:spMk id="4" creationId="{5B088CE8-596E-065F-49E7-9C53370C71E7}"/>
+          </ac:spMkLst>
+        </pc:spChg>
+        <pc:spChg chg="add del mod">
+          <ac:chgData name="Thembelihle Nkosi" userId="34acb82be647289d" providerId="LiveId" clId="{A75475CB-E90B-49A7-8916-1196816BF4F1}" dt="2026-09-01T19:59:42.852" v="3704"/>
+          <ac:spMkLst>
+            <pc:docMk/>
+            <pc:sldMk cId="855587190" sldId="264"/>
+            <ac:spMk id="6" creationId="{F083230C-9E57-A5BA-4F7B-EB7DF4165982}"/>
+          </ac:spMkLst>
+        </pc:spChg>
+        <pc:graphicFrameChg chg="add mod modGraphic">
+          <ac:chgData name="Thembelihle Nkosi" userId="34acb82be647289d" providerId="LiveId" clId="{A75475CB-E90B-49A7-8916-1196816BF4F1}" dt="2026-09-02T07:49:55.799" v="3807" actId="14100"/>
+          <ac:graphicFrameMkLst>
+            <pc:docMk/>
+            <pc:sldMk cId="855587190" sldId="264"/>
+            <ac:graphicFrameMk id="5" creationId="{58FF69B2-7E30-0308-1586-D628F46E045E}"/>
+          </ac:graphicFrameMkLst>
+        </pc:graphicFrameChg>
+      </pc:sldChg>
+      <pc:sldChg chg="new del">
+        <pc:chgData name="Thembelihle Nkosi" userId="34acb82be647289d" providerId="LiveId" clId="{A75475CB-E90B-49A7-8916-1196816BF4F1}" dt="2026-09-02T07:48:43.830" v="3797" actId="680"/>
+        <pc:sldMkLst>
+          <pc:docMk/>
+          <pc:sldMk cId="2169082369" sldId="265"/>
+        </pc:sldMkLst>
+      </pc:sldChg>
+      <pc:sldChg chg="addSp modSp new mod modClrScheme chgLayout">
+        <pc:chgData name="Thembelihle Nkosi" userId="34acb82be647289d" providerId="LiveId" clId="{A75475CB-E90B-49A7-8916-1196816BF4F1}" dt="2026-09-02T07:58:45.096" v="4282" actId="20577"/>
+        <pc:sldMkLst>
+          <pc:docMk/>
+          <pc:sldMk cId="4224083050" sldId="265"/>
+        </pc:sldMkLst>
+        <pc:spChg chg="mod ord">
+          <ac:chgData name="Thembelihle Nkosi" userId="34acb82be647289d" providerId="LiveId" clId="{A75475CB-E90B-49A7-8916-1196816BF4F1}" dt="2026-09-02T07:53:50.539" v="3924" actId="14100"/>
+          <ac:spMkLst>
+            <pc:docMk/>
+            <pc:sldMk cId="4224083050" sldId="265"/>
+            <ac:spMk id="2" creationId="{FD3F206E-8859-03F4-D25B-742E549DD91C}"/>
+          </ac:spMkLst>
+        </pc:spChg>
+        <pc:spChg chg="mod ord">
+          <ac:chgData name="Thembelihle Nkosi" userId="34acb82be647289d" providerId="LiveId" clId="{A75475CB-E90B-49A7-8916-1196816BF4F1}" dt="2026-09-02T07:53:03.375" v="3917" actId="700"/>
+          <ac:spMkLst>
+            <pc:docMk/>
+            <pc:sldMk cId="4224083050" sldId="265"/>
+            <ac:spMk id="3" creationId="{AC397655-5486-D6F2-06F1-ABF1420A763F}"/>
+          </ac:spMkLst>
+        </pc:spChg>
+        <pc:spChg chg="add mod">
+          <ac:chgData name="Thembelihle Nkosi" userId="34acb82be647289d" providerId="LiveId" clId="{A75475CB-E90B-49A7-8916-1196816BF4F1}" dt="2026-09-02T07:54:43.413" v="4031" actId="20577"/>
+          <ac:spMkLst>
+            <pc:docMk/>
+            <pc:sldMk cId="4224083050" sldId="265"/>
+            <ac:spMk id="4" creationId="{68678F28-5190-6A5D-62A5-015767B1BC1D}"/>
+          </ac:spMkLst>
+        </pc:spChg>
+        <pc:spChg chg="add mod">
+          <ac:chgData name="Thembelihle Nkosi" userId="34acb82be647289d" providerId="LiveId" clId="{A75475CB-E90B-49A7-8916-1196816BF4F1}" dt="2026-09-02T07:56:58.126" v="4097" actId="14100"/>
+          <ac:spMkLst>
+            <pc:docMk/>
+            <pc:sldMk cId="4224083050" sldId="265"/>
+            <ac:spMk id="5" creationId="{101B37D2-ABBA-15BF-263E-02D2CA6E3131}"/>
+          </ac:spMkLst>
+        </pc:spChg>
+        <pc:spChg chg="add mod">
+          <ac:chgData name="Thembelihle Nkosi" userId="34acb82be647289d" providerId="LiveId" clId="{A75475CB-E90B-49A7-8916-1196816BF4F1}" dt="2026-09-02T07:57:23.799" v="4103" actId="20577"/>
+          <ac:spMkLst>
+            <pc:docMk/>
+            <pc:sldMk cId="4224083050" sldId="265"/>
+            <ac:spMk id="7" creationId="{DA97D7DB-313D-CFE8-5561-7E90996C9450}"/>
+          </ac:spMkLst>
+        </pc:spChg>
+        <pc:spChg chg="add mod">
+          <ac:chgData name="Thembelihle Nkosi" userId="34acb82be647289d" providerId="LiveId" clId="{A75475CB-E90B-49A7-8916-1196816BF4F1}" dt="2026-09-02T07:58:45.096" v="4282" actId="20577"/>
+          <ac:spMkLst>
+            <pc:docMk/>
+            <pc:sldMk cId="4224083050" sldId="265"/>
+            <ac:spMk id="8" creationId="{3202D219-EFBD-0B93-72B9-EB96D28B3591}"/>
+          </ac:spMkLst>
+        </pc:spChg>
+      </pc:sldChg>
+      <pc:sldChg chg="new">
+        <pc:chgData name="Thembelihle Nkosi" userId="34acb82be647289d" providerId="LiveId" clId="{A75475CB-E90B-49A7-8916-1196816BF4F1}" dt="2026-09-02T07:52:51.138" v="3916" actId="680"/>
+        <pc:sldMkLst>
+          <pc:docMk/>
+          <pc:sldMk cId="4169104927" sldId="266"/>
+        </pc:sldMkLst>
       </pc:sldChg>
     </pc:docChg>
   </pc:docChgLst>
@@ -264,7 +711,10 @@
             </a:lvl1pPr>
           </a:lstStyle>
           <a:p>
-            <a:endParaRPr lang="en-US"/>
+            <a:r>
+              <a:rPr lang="en-US"/>
+              <a:t>Thembelihle Tili Nkosi 402313573</a:t>
+            </a:r>
           </a:p>
         </p:txBody>
       </p:sp>
@@ -303,7 +753,7 @@
           <a:p>
             <a:fld id="{F223FF85-4E34-4546-B772-76DFA4A6051B}" type="datetimeFigureOut">
               <a:rPr lang="en-US" smtClean="0"/>
-              <a:t>9/1/2026</a:t>
+              <a:t>9/2/2026</a:t>
             </a:fld>
             <a:endParaRPr lang="en-US"/>
           </a:p>
@@ -395,6 +845,7 @@
     </p:extLst>
   </p:cSld>
   <p:clrMap bg1="lt1" tx1="dk1" bg2="lt2" tx2="dk2" accent1="accent1" accent2="accent2" accent3="accent3" accent4="accent4" accent5="accent5" accent6="accent6" hlink="hlink" folHlink="folHlink"/>
+  <p:hf ftr="0" dt="0"/>
 </p:handoutMaster>
 </file>
 
@@ -447,7 +898,10 @@
             </a:lvl1pPr>
           </a:lstStyle>
           <a:p>
-            <a:endParaRPr lang="en-US"/>
+            <a:r>
+              <a:rPr lang="en-US"/>
+              <a:t>Thembelihle Tili Nkosi 402313573</a:t>
+            </a:r>
           </a:p>
         </p:txBody>
       </p:sp>
@@ -480,7 +934,7 @@
           <a:p>
             <a:fld id="{1B5CC398-6116-4BD2-9FAD-9822FDA158BE}" type="datetimeFigureOut">
               <a:rPr lang="en-US" smtClean="0"/>
-              <a:t>9/1/2026</a:t>
+              <a:t>9/2/2026</a:t>
             </a:fld>
             <a:endParaRPr lang="en-US"/>
           </a:p>
@@ -652,6 +1106,7 @@
     </p:extLst>
   </p:cSld>
   <p:clrMap bg1="lt1" tx1="dk1" bg2="lt2" tx2="dk2" accent1="accent1" accent2="accent2" accent3="accent3" accent4="accent4" accent5="accent5" accent6="accent6" hlink="hlink" folHlink="folHlink"/>
+  <p:hf ftr="0" dt="0"/>
   <p:notesStyle>
     <a:lvl1pPr marL="0" algn="l" defTabSz="914400" rtl="0" eaLnBrk="1" latinLnBrk="0" hangingPunct="1">
       <a:defRPr sz="1200" kern="1200">
@@ -818,6 +1273,34 @@
           </a:p>
         </p:txBody>
       </p:sp>
+      <p:sp>
+        <p:nvSpPr>
+          <p:cNvPr id="5" name="Header Placeholder 4">
+            <a:extLst>
+              <a:ext uri="{FF2B5EF4-FFF2-40B4-BE49-F238E27FC236}">
+                <a16:creationId xmlns:a16="http://schemas.microsoft.com/office/drawing/2014/main" id="{6E9A197A-58CB-3D36-18E2-0FC0CA0FC33F}"/>
+              </a:ext>
+            </a:extLst>
+          </p:cNvPr>
+          <p:cNvSpPr>
+            <a:spLocks noGrp="1"/>
+          </p:cNvSpPr>
+          <p:nvPr>
+            <p:ph type="hdr" sz="quarter"/>
+          </p:nvPr>
+        </p:nvSpPr>
+        <p:spPr/>
+        <p:txBody>
+          <a:bodyPr/>
+          <a:lstStyle/>
+          <a:p>
+            <a:r>
+              <a:rPr lang="en-US"/>
+              <a:t>Thembelihle Tili Nkosi 402313573</a:t>
+            </a:r>
+          </a:p>
+        </p:txBody>
+      </p:sp>
     </p:spTree>
     <p:extLst>
       <p:ext uri="{BB962C8B-B14F-4D97-AF65-F5344CB8AC3E}">
@@ -1000,9 +1483,9 @@
           <a:bodyPr/>
           <a:lstStyle/>
           <a:p>
-            <a:fld id="{B3CFBE15-E4BE-4B42-AEEE-ED6C6B9CFCE2}" type="datetime1">
+            <a:fld id="{B98362AE-2C36-45F0-89C3-62A1A57AEF12}" type="datetime1">
               <a:rPr lang="en-US" smtClean="0"/>
-              <a:t>9/1/2026</a:t>
+              <a:t>9/2/2026</a:t>
             </a:fld>
             <a:endParaRPr lang="en-US"/>
           </a:p>
@@ -1220,9 +1703,9 @@
           <a:bodyPr/>
           <a:lstStyle/>
           <a:p>
-            <a:fld id="{FF6B260B-9C30-8041-A127-55431CED219C}" type="datetime1">
+            <a:fld id="{3A78FECD-A4F9-488C-8ADE-21AB9969B077}" type="datetime1">
               <a:rPr lang="en-US" smtClean="0"/>
-              <a:t>9/1/2026</a:t>
+              <a:t>9/2/2026</a:t>
             </a:fld>
             <a:endParaRPr lang="en-US"/>
           </a:p>
@@ -1487,9 +1970,9 @@
           <a:bodyPr/>
           <a:lstStyle/>
           <a:p>
-            <a:fld id="{F63FFE14-963B-F240-A047-D4733954729E}" type="datetime1">
+            <a:fld id="{A83EDB7E-6F2A-4085-8709-B3C7F60273CE}" type="datetime1">
               <a:rPr lang="en-US" smtClean="0"/>
-              <a:t>9/1/2026</a:t>
+              <a:t>9/2/2026</a:t>
             </a:fld>
             <a:endParaRPr lang="en-US"/>
           </a:p>
@@ -1810,9 +2293,9 @@
           <a:bodyPr/>
           <a:lstStyle/>
           <a:p>
-            <a:fld id="{AEC70E42-D83C-0945-8790-6453F9081E20}" type="datetime1">
+            <a:fld id="{F228A7E8-38C1-40E5-8F4D-956F8B01E68B}" type="datetime1">
               <a:rPr lang="en-US" smtClean="0"/>
-              <a:t>9/1/2026</a:t>
+              <a:t>9/2/2026</a:t>
             </a:fld>
             <a:endParaRPr lang="en-US"/>
           </a:p>
@@ -2208,9 +2691,9 @@
           <a:bodyPr/>
           <a:lstStyle/>
           <a:p>
-            <a:fld id="{BC14B53C-24D5-7E4A-A014-94F398D5C635}" type="datetime1">
+            <a:fld id="{6ED242BA-7514-4E8F-A1E5-B6D33FA3683D}" type="datetime1">
               <a:rPr lang="en-US" smtClean="0"/>
-              <a:t>9/1/2026</a:t>
+              <a:t>9/2/2026</a:t>
             </a:fld>
             <a:endParaRPr lang="en-US"/>
           </a:p>
@@ -2569,9 +3052,9 @@
           <a:bodyPr/>
           <a:lstStyle/>
           <a:p>
-            <a:fld id="{4123D06D-70B8-D14B-A67C-9271374366C3}" type="datetime1">
+            <a:fld id="{F9CB03D3-CC37-49B7-AB28-BD9ECADD9218}" type="datetime1">
               <a:rPr lang="en-US" smtClean="0"/>
-              <a:t>9/1/2026</a:t>
+              <a:t>9/2/2026</a:t>
             </a:fld>
             <a:endParaRPr lang="en-US"/>
           </a:p>
@@ -2813,9 +3296,9 @@
           <a:bodyPr/>
           <a:lstStyle/>
           <a:p>
-            <a:fld id="{75AE1D74-C13D-F14A-9B9E-EB7933559C88}" type="datetime1">
+            <a:fld id="{EE16350C-9F11-4EBF-B094-107D7BEF2807}" type="datetime1">
               <a:rPr lang="en-US" smtClean="0"/>
-              <a:t>9/1/2026</a:t>
+              <a:t>9/2/2026</a:t>
             </a:fld>
             <a:endParaRPr lang="en-US"/>
           </a:p>
@@ -3073,9 +3556,9 @@
           <a:bodyPr/>
           <a:lstStyle/>
           <a:p>
-            <a:fld id="{04FB7707-CCB1-0246-9925-E5DB223369A7}" type="datetime1">
+            <a:fld id="{6D37F7F2-020F-4336-87A4-17150DE1EE67}" type="datetime1">
               <a:rPr lang="en-US" smtClean="0"/>
-              <a:t>9/1/2026</a:t>
+              <a:t>9/2/2026</a:t>
             </a:fld>
             <a:endParaRPr lang="en-US"/>
           </a:p>
@@ -3359,9 +3842,9 @@
           <a:bodyPr/>
           <a:lstStyle/>
           <a:p>
-            <a:fld id="{AE76B46A-8201-CC4A-8088-50255B4B9D0D}" type="datetime1">
+            <a:fld id="{ECFD1D24-3E64-42AB-A9F0-9A28A6646A4C}" type="datetime1">
               <a:rPr lang="en-US" smtClean="0"/>
-              <a:t>9/1/2026</a:t>
+              <a:t>9/2/2026</a:t>
             </a:fld>
             <a:endParaRPr lang="en-US"/>
           </a:p>
@@ -3645,9 +4128,9 @@
           <a:bodyPr/>
           <a:lstStyle/>
           <a:p>
-            <a:fld id="{0F2D9860-67F8-974D-8794-2C5A1B3DA504}" type="datetime1">
+            <a:fld id="{2B2E4C63-596A-47BE-BE0F-FF0526384F57}" type="datetime1">
               <a:rPr lang="en-US" smtClean="0"/>
-              <a:t>9/1/2026</a:t>
+              <a:t>9/2/2026</a:t>
             </a:fld>
             <a:endParaRPr lang="en-US"/>
           </a:p>
@@ -3874,9 +4357,9 @@
           <a:bodyPr/>
           <a:lstStyle/>
           <a:p>
-            <a:fld id="{8351A969-2D26-4F49-AF79-EF4D76632F71}" type="datetime1">
+            <a:fld id="{CAD4C856-6C48-4F05-8C20-FA17C7CCDC6B}" type="datetime1">
               <a:rPr lang="en-US" smtClean="0"/>
-              <a:t>9/1/2026</a:t>
+              <a:t>9/2/2026</a:t>
             </a:fld>
             <a:endParaRPr lang="en-US"/>
           </a:p>
@@ -4156,9 +4639,9 @@
           <a:bodyPr/>
           <a:lstStyle/>
           <a:p>
-            <a:fld id="{94040C0B-3638-F744-9F98-D66CEC428329}" type="datetime1">
+            <a:fld id="{35A224EF-FAD4-494A-8BF2-CC9AEECE0756}" type="datetime1">
               <a:rPr lang="en-US" smtClean="0"/>
-              <a:t>9/1/2026</a:t>
+              <a:t>9/2/2026</a:t>
             </a:fld>
             <a:endParaRPr lang="en-US"/>
           </a:p>
@@ -4502,9 +4985,9 @@
             </a:lvl1pPr>
           </a:lstStyle>
           <a:p>
-            <a:fld id="{383FCCD6-08E9-5F43-B78A-D6D06FA7D888}" type="datetime1">
+            <a:fld id="{F5B8E69F-9AE3-4724-8776-3A6C261313A6}" type="datetime1">
               <a:rPr lang="en-US" smtClean="0"/>
-              <a:t>9/1/2026</a:t>
+              <a:t>9/2/2026</a:t>
             </a:fld>
             <a:endParaRPr lang="en-US" dirty="0"/>
           </a:p>
@@ -4966,9 +5449,9 @@
           <a:bodyPr/>
           <a:lstStyle/>
           <a:p>
-            <a:fld id="{7D5752D2-CCDE-DA48-AA88-B770548F7575}" type="datetime1">
+            <a:fld id="{E0D45ACF-50BA-4EE0-BE93-6D2796ACDECA}" type="datetime1">
               <a:rPr lang="en-US" smtClean="0"/>
-              <a:t>9/1/2026</a:t>
+              <a:t>9/2/2026</a:t>
             </a:fld>
             <a:endParaRPr lang="en-US"/>
           </a:p>
@@ -5406,9 +5889,9 @@
           <a:bodyPr/>
           <a:lstStyle/>
           <a:p>
-            <a:fld id="{2E2458BC-FE32-0A45-9DD7-ED7D64447D19}" type="datetime1">
+            <a:fld id="{1DBE0817-F54E-4992-88DD-E1B2F6C81E72}" type="datetime1">
               <a:rPr lang="en-US" smtClean="0"/>
-              <a:t>9/1/2026</a:t>
+              <a:t>9/2/2026</a:t>
             </a:fld>
             <a:endParaRPr lang="en-US" dirty="0"/>
           </a:p>
@@ -5806,9 +6289,9 @@
           <a:bodyPr/>
           <a:lstStyle/>
           <a:p>
-            <a:fld id="{1233975F-0E53-0840-98CD-E03B319E6BC3}" type="datetime1">
+            <a:fld id="{586941F6-776C-4CFB-AA27-A0087DCEF113}" type="datetime1">
               <a:rPr lang="en-US" smtClean="0"/>
-              <a:t>9/1/2026</a:t>
+              <a:t>9/2/2026</a:t>
             </a:fld>
             <a:endParaRPr lang="en-US" dirty="0"/>
           </a:p>
@@ -6092,9 +6575,9 @@
           <a:bodyPr/>
           <a:lstStyle/>
           <a:p>
-            <a:fld id="{D0CA20AB-D25D-704E-83C3-6B013E02E645}" type="datetime1">
+            <a:fld id="{81DF9D14-F163-4362-9787-D147A1B99C88}" type="datetime1">
               <a:rPr lang="en-US" smtClean="0"/>
-              <a:t>9/1/2026</a:t>
+              <a:t>9/2/2026</a:t>
             </a:fld>
             <a:endParaRPr lang="en-US" dirty="0"/>
           </a:p>
@@ -6396,9 +6879,9 @@
           <a:bodyPr/>
           <a:lstStyle/>
           <a:p>
-            <a:fld id="{B31F77D0-31D8-5446-A1F3-FE6147C324EC}" type="datetime1">
+            <a:fld id="{04AE55DE-D8CA-40AB-8042-F3F25A3A93EA}" type="datetime1">
               <a:rPr lang="en-US" smtClean="0"/>
-              <a:t>9/1/2026</a:t>
+              <a:t>9/2/2026</a:t>
             </a:fld>
             <a:endParaRPr lang="en-US" dirty="0"/>
           </a:p>
@@ -6810,9 +7293,9 @@
           <a:bodyPr/>
           <a:lstStyle/>
           <a:p>
-            <a:fld id="{2005CF00-6C05-B849-B141-54CC9A394B3C}" type="datetime1">
+            <a:fld id="{D18C8317-286A-4379-A764-765D2611957F}" type="datetime1">
               <a:rPr lang="en-US" smtClean="0"/>
-              <a:t>9/1/2026</a:t>
+              <a:t>9/2/2026</a:t>
             </a:fld>
             <a:endParaRPr lang="en-US"/>
           </a:p>
@@ -7221,9 +7704,9 @@
           <a:bodyPr/>
           <a:lstStyle/>
           <a:p>
-            <a:fld id="{66499679-3EA0-9342-AF62-C5FAA18B6EFA}" type="datetime1">
+            <a:fld id="{22DEBFB0-8C21-464F-B983-DA5E6097C3AC}" type="datetime1">
               <a:rPr lang="en-US" smtClean="0"/>
-              <a:t>9/1/2026</a:t>
+              <a:t>9/2/2026</a:t>
             </a:fld>
             <a:endParaRPr lang="en-US" dirty="0"/>
           </a:p>
@@ -7634,9 +8117,9 @@
           <a:bodyPr/>
           <a:lstStyle/>
           <a:p>
-            <a:fld id="{3C97155C-DE68-4440-8202-CC9478E27F07}" type="datetime1">
+            <a:fld id="{7871E2FE-5516-4AFE-9DCA-4FB7C11D56C3}" type="datetime1">
               <a:rPr lang="en-US" smtClean="0"/>
-              <a:t>9/1/2026</a:t>
+              <a:t>9/2/2026</a:t>
             </a:fld>
             <a:endParaRPr lang="en-US" dirty="0"/>
           </a:p>
@@ -8076,9 +8559,9 @@
           <a:bodyPr/>
           <a:lstStyle/>
           <a:p>
-            <a:fld id="{2B9DA8F7-1BE7-954A-B654-92996DBA4E86}" type="datetime1">
+            <a:fld id="{637572F3-4776-431C-92C5-391680F72612}" type="datetime1">
               <a:rPr lang="en-US" smtClean="0"/>
-              <a:t>9/1/2026</a:t>
+              <a:t>9/2/2026</a:t>
             </a:fld>
             <a:endParaRPr lang="en-US" dirty="0"/>
           </a:p>
@@ -8491,9 +8974,9 @@
           <a:bodyPr/>
           <a:lstStyle/>
           <a:p>
-            <a:fld id="{D9EF7764-3766-AD43-917F-3181D2483C36}" type="datetime1">
+            <a:fld id="{093A8513-14C1-4EA5-B816-85CB08185FD4}" type="datetime1">
               <a:rPr lang="en-US" smtClean="0"/>
-              <a:t>9/1/2026</a:t>
+              <a:t>9/2/2026</a:t>
             </a:fld>
             <a:endParaRPr lang="en-US"/>
           </a:p>
@@ -8829,9 +9312,9 @@
           <a:bodyPr/>
           <a:lstStyle/>
           <a:p>
-            <a:fld id="{5447FF96-6068-D045-B983-6A2E1F44124F}" type="datetime1">
+            <a:fld id="{8F7770AB-DC37-4B7F-9A8C-273E03C5221B}" type="datetime1">
               <a:rPr lang="en-US" smtClean="0"/>
-              <a:t>9/1/2026</a:t>
+              <a:t>9/2/2026</a:t>
             </a:fld>
             <a:endParaRPr lang="en-US" dirty="0"/>
           </a:p>
@@ -9290,9 +9773,9 @@
           <a:bodyPr/>
           <a:lstStyle/>
           <a:p>
-            <a:fld id="{C195F3F8-9E31-7F42-8188-F6043F071A39}" type="datetime1">
+            <a:fld id="{5A78EBE9-E3B4-4D34-98D4-EDCF231D8E97}" type="datetime1">
               <a:rPr lang="en-US" smtClean="0"/>
-              <a:t>9/1/2026</a:t>
+              <a:t>9/2/2026</a:t>
             </a:fld>
             <a:endParaRPr lang="en-US" dirty="0"/>
           </a:p>
@@ -9734,9 +10217,9 @@
           <a:bodyPr/>
           <a:lstStyle/>
           <a:p>
-            <a:fld id="{AE8BA31F-10E3-B74C-A113-9DB8A6700F67}" type="datetime1">
+            <a:fld id="{9D32C8A0-1A1A-468D-997E-C3017087B148}" type="datetime1">
               <a:rPr lang="en-US" smtClean="0"/>
-              <a:t>9/1/2026</a:t>
+              <a:t>9/2/2026</a:t>
             </a:fld>
             <a:endParaRPr lang="en-US" dirty="0"/>
           </a:p>
@@ -10070,9 +10553,9 @@
           <a:bodyPr/>
           <a:lstStyle/>
           <a:p>
-            <a:fld id="{3596BBB1-49AB-C544-9861-84EE6CF53403}" type="datetime1">
+            <a:fld id="{FC086BAF-8081-434A-9847-579DEEADDD8F}" type="datetime1">
               <a:rPr lang="en-US" smtClean="0"/>
-              <a:t>9/1/2026</a:t>
+              <a:t>9/2/2026</a:t>
             </a:fld>
             <a:endParaRPr lang="en-US" dirty="0"/>
           </a:p>
@@ -10356,9 +10839,9 @@
           <a:bodyPr/>
           <a:lstStyle/>
           <a:p>
-            <a:fld id="{9D50FFC8-0737-944F-9B20-403A2248B3E7}" type="datetime1">
+            <a:fld id="{2AD65953-2978-4891-9AEB-00D723E1A06D}" type="datetime1">
               <a:rPr lang="en-US" smtClean="0"/>
-              <a:t>9/1/2026</a:t>
+              <a:t>9/2/2026</a:t>
             </a:fld>
             <a:endParaRPr lang="en-US" dirty="0"/>
           </a:p>
@@ -10752,9 +11235,9 @@
           <a:bodyPr/>
           <a:lstStyle/>
           <a:p>
-            <a:fld id="{FE45DA7B-3D23-9747-B64E-78D5DD68C6C7}" type="datetime1">
+            <a:fld id="{B47AD74F-CF43-4C73-A781-3E241FBD4489}" type="datetime1">
               <a:rPr lang="en-US" smtClean="0"/>
-              <a:t>9/1/2026</a:t>
+              <a:t>9/2/2026</a:t>
             </a:fld>
             <a:endParaRPr lang="en-US"/>
           </a:p>
@@ -11139,9 +11622,9 @@
           <a:bodyPr/>
           <a:lstStyle/>
           <a:p>
-            <a:fld id="{313040DD-291F-D14A-B0CD-056B01183946}" type="datetime1">
+            <a:fld id="{616D5FE2-0242-4672-B80A-E9802917FF7D}" type="datetime1">
               <a:rPr lang="en-US" smtClean="0"/>
-              <a:t>9/1/2026</a:t>
+              <a:t>9/2/2026</a:t>
             </a:fld>
             <a:endParaRPr lang="en-US"/>
           </a:p>
@@ -11465,9 +11948,9 @@
             </a:lvl1pPr>
           </a:lstStyle>
           <a:p>
-            <a:fld id="{F20AA6F4-6FEB-A645-BC84-8FD86BB56A56}" type="datetime1">
+            <a:fld id="{C0C69BDD-FB22-4830-AD6B-3D02A95A09F7}" type="datetime1">
               <a:rPr lang="en-US" smtClean="0"/>
-              <a:t>9/1/2026</a:t>
+              <a:t>9/2/2026</a:t>
             </a:fld>
             <a:endParaRPr lang="en-US"/>
           </a:p>
@@ -11731,9 +12214,9 @@
             </a:lvl1pPr>
           </a:lstStyle>
           <a:p>
-            <a:fld id="{019C1F0A-369C-694C-9034-23649A99EDDB}" type="datetime1">
+            <a:fld id="{7D78C567-06D7-4B8F-84D5-5E142E2A352D}" type="datetime1">
               <a:rPr lang="en-US" smtClean="0"/>
-              <a:t>9/1/2026</a:t>
+              <a:t>9/2/2026</a:t>
             </a:fld>
             <a:endParaRPr lang="en-US" dirty="0"/>
           </a:p>
@@ -11997,9 +12480,9 @@
             </a:lvl1pPr>
           </a:lstStyle>
           <a:p>
-            <a:fld id="{C05CB68B-3B3F-204E-812A-7CA74DAAFECC}" type="datetime1">
+            <a:fld id="{BFC6B68E-07A2-447A-BB7A-C1165A5B3D09}" type="datetime1">
               <a:rPr lang="en-US" smtClean="0"/>
-              <a:t>9/1/2026</a:t>
+              <a:t>9/2/2026</a:t>
             </a:fld>
             <a:endParaRPr lang="en-US" dirty="0"/>
           </a:p>
@@ -12378,9 +12861,9 @@
           <a:bodyPr/>
           <a:lstStyle/>
           <a:p>
-            <a:fld id="{BD2E1884-4CA3-F14A-A3FE-9D94D32D34BF}" type="datetime1">
+            <a:fld id="{C0CC24DD-B32E-4CAE-BEF6-5792F13223AA}" type="datetime1">
               <a:rPr lang="en-US" smtClean="0"/>
-              <a:t>9/1/2026</a:t>
+              <a:t>9/2/2026</a:t>
             </a:fld>
             <a:endParaRPr lang="en-US"/>
           </a:p>
@@ -12647,9 +13130,9 @@
           <a:bodyPr/>
           <a:lstStyle/>
           <a:p>
-            <a:fld id="{D963A025-A5F8-BC41-857C-074A129970DD}" type="datetime1">
+            <a:fld id="{6D94B96B-8D58-409B-9344-402C97479EC5}" type="datetime1">
               <a:rPr lang="en-US" smtClean="0"/>
-              <a:t>9/1/2026</a:t>
+              <a:t>9/2/2026</a:t>
             </a:fld>
             <a:endParaRPr lang="en-US"/>
           </a:p>
@@ -12964,9 +13447,9 @@
           <a:bodyPr/>
           <a:lstStyle/>
           <a:p>
-            <a:fld id="{67E1A02B-DBB0-A046-81B0-FEDCAC57CE71}" type="datetime1">
+            <a:fld id="{3322A277-29BE-4061-AD8E-4C472F3E445C}" type="datetime1">
               <a:rPr lang="en-US" smtClean="0"/>
-              <a:t>9/1/2026</a:t>
+              <a:t>9/2/2026</a:t>
             </a:fld>
             <a:endParaRPr lang="en-US"/>
           </a:p>
@@ -13289,9 +13772,9 @@
             </a:lvl1pPr>
           </a:lstStyle>
           <a:p>
-            <a:fld id="{192E1041-C021-CE4A-9D2F-9EE16EB193AE}" type="datetime1">
+            <a:fld id="{5EB7A63E-3D18-4447-9785-7C0CAC607389}" type="datetime1">
               <a:rPr lang="en-US" smtClean="0"/>
-              <a:t>9/1/2026</a:t>
+              <a:t>9/2/2026</a:t>
             </a:fld>
             <a:endParaRPr lang="en-US" dirty="0"/>
           </a:p>
@@ -13655,9 +14138,9 @@
             </a:lvl1pPr>
           </a:lstStyle>
           <a:p>
-            <a:fld id="{B19110DB-B309-8C4D-B2B7-2B6318BF3864}" type="datetime1">
+            <a:fld id="{7765A40A-6C5D-4291-939E-B3776F67CA21}" type="datetime1">
               <a:rPr lang="en-US" smtClean="0"/>
-              <a:t>9/1/2026</a:t>
+              <a:t>9/2/2026</a:t>
             </a:fld>
             <a:endParaRPr lang="en-US" dirty="0"/>
           </a:p>
@@ -13924,9 +14407,9 @@
             </a:lvl1pPr>
           </a:lstStyle>
           <a:p>
-            <a:fld id="{FCCD263F-17D1-DD49-AE75-3B385E0CFFA9}" type="datetime1">
+            <a:fld id="{67DA5944-B733-478E-BF98-5DC755873459}" type="datetime1">
               <a:rPr lang="en-US" smtClean="0"/>
-              <a:t>9/1/2026</a:t>
+              <a:t>9/2/2026</a:t>
             </a:fld>
             <a:endParaRPr lang="en-US" dirty="0"/>
           </a:p>
@@ -14193,9 +14676,9 @@
             </a:lvl1pPr>
           </a:lstStyle>
           <a:p>
-            <a:fld id="{1664374B-BFF6-3C4D-A435-E85D19EC7285}" type="datetime1">
+            <a:fld id="{2BE1D580-B8B1-4D3E-8C1C-0681B1B376EE}" type="datetime1">
               <a:rPr lang="en-US" smtClean="0"/>
-              <a:t>9/1/2026</a:t>
+              <a:t>9/2/2026</a:t>
             </a:fld>
             <a:endParaRPr lang="en-US" dirty="0"/>
           </a:p>
@@ -14405,9 +14888,9 @@
           <a:bodyPr/>
           <a:lstStyle/>
           <a:p>
-            <a:fld id="{E9C4FF47-482A-5A42-BC2B-D17760A60D7C}" type="datetime1">
+            <a:fld id="{6D91211C-75F1-4F06-BE7D-88201C59619D}" type="datetime1">
               <a:rPr lang="en-US" smtClean="0"/>
-              <a:t>9/1/2026</a:t>
+              <a:t>9/2/2026</a:t>
             </a:fld>
             <a:endParaRPr lang="en-US"/>
           </a:p>
@@ -14773,9 +15256,9 @@
           <a:bodyPr/>
           <a:lstStyle/>
           <a:p>
-            <a:fld id="{A0E0A138-5AFC-9A4D-A014-96125C4D80CC}" type="datetime1">
+            <a:fld id="{26265AAE-87D1-4296-9368-86C54F3A53E4}" type="datetime1">
               <a:rPr lang="en-US" smtClean="0"/>
-              <a:t>9/1/2026</a:t>
+              <a:t>9/2/2026</a:t>
             </a:fld>
             <a:endParaRPr lang="en-US"/>
           </a:p>
@@ -15293,9 +15776,9 @@
           <a:bodyPr/>
           <a:lstStyle/>
           <a:p>
-            <a:fld id="{23BF1EA9-87CF-8343-9776-D1D52A179B2E}" type="datetime1">
+            <a:fld id="{250645FA-284C-401E-981E-43FE721C0C5B}" type="datetime1">
               <a:rPr lang="en-US" smtClean="0"/>
-              <a:t>9/1/2026</a:t>
+              <a:t>9/2/2026</a:t>
             </a:fld>
             <a:endParaRPr lang="en-US"/>
           </a:p>
@@ -15409,9 +15892,9 @@
           <a:bodyPr/>
           <a:lstStyle/>
           <a:p>
-            <a:fld id="{A889506F-D76B-DF43-A96B-B8A73BD734D5}" type="datetime1">
+            <a:fld id="{72130B77-F388-4259-94E1-2078E6FD291A}" type="datetime1">
               <a:rPr lang="en-US" smtClean="0"/>
-              <a:t>9/1/2026</a:t>
+              <a:t>9/2/2026</a:t>
             </a:fld>
             <a:endParaRPr lang="en-US"/>
           </a:p>
@@ -15736,9 +16219,9 @@
             </a:lvl1pPr>
           </a:lstStyle>
           <a:p>
-            <a:fld id="{3DCB9363-2EBD-E747-A181-1D3A08C65245}" type="datetime1">
+            <a:fld id="{ABF832BF-3B44-4220-ADE4-8AF6F7957F7E}" type="datetime1">
               <a:rPr lang="en-US" smtClean="0"/>
-              <a:t>9/1/2026</a:t>
+              <a:t>9/2/2026</a:t>
             </a:fld>
             <a:endParaRPr lang="en-US"/>
           </a:p>
@@ -16047,9 +16530,9 @@
           <a:bodyPr/>
           <a:lstStyle/>
           <a:p>
-            <a:fld id="{B2777B30-84C4-E14A-AD9D-99C744B58D2B}" type="datetime1">
+            <a:fld id="{57E38C45-5B71-4261-A3A7-C9D9B684A87D}" type="datetime1">
               <a:rPr lang="en-US" smtClean="0"/>
-              <a:t>9/1/2026</a:t>
+              <a:t>9/2/2026</a:t>
             </a:fld>
             <a:endParaRPr lang="en-US"/>
           </a:p>
@@ -16488,9 +16971,9 @@
           <a:bodyPr/>
           <a:lstStyle/>
           <a:p>
-            <a:fld id="{DAB2B00D-D41F-AF4D-9311-8F7464F57478}" type="datetime1">
+            <a:fld id="{4E0E63B0-523E-43F1-943D-AF5F3C578E59}" type="datetime1">
               <a:rPr lang="en-US" smtClean="0"/>
-              <a:t>9/1/2026</a:t>
+              <a:t>9/2/2026</a:t>
             </a:fld>
             <a:endParaRPr lang="en-US"/>
           </a:p>
@@ -16853,9 +17336,9 @@
           <a:bodyPr/>
           <a:lstStyle/>
           <a:p>
-            <a:fld id="{FED1D72C-8184-5840-B481-389540A01A17}" type="datetime1">
+            <a:fld id="{444CA961-2D1B-468B-8D0D-77698F868DD4}" type="datetime1">
               <a:rPr lang="en-US" smtClean="0"/>
-              <a:t>9/1/2026</a:t>
+              <a:t>9/2/2026</a:t>
             </a:fld>
             <a:endParaRPr lang="en-US"/>
           </a:p>
@@ -17185,9 +17668,9 @@
           <a:bodyPr/>
           <a:lstStyle/>
           <a:p>
-            <a:fld id="{FB32C1FE-0BA1-514C-8495-D43A7528783D}" type="datetime1">
+            <a:fld id="{CA0C9CC5-26B6-4FB3-B4FD-2898E7837501}" type="datetime1">
               <a:rPr lang="en-US" smtClean="0"/>
-              <a:t>9/1/2026</a:t>
+              <a:t>9/2/2026</a:t>
             </a:fld>
             <a:endParaRPr lang="en-US"/>
           </a:p>
@@ -17540,9 +18023,9 @@
           <a:bodyPr/>
           <a:lstStyle/>
           <a:p>
-            <a:fld id="{A43625EB-9CE7-FE4A-962B-ADA6590F06B0}" type="datetime1">
+            <a:fld id="{4909E381-6539-4489-B4FB-FB4B213947D0}" type="datetime1">
               <a:rPr lang="en-US" smtClean="0"/>
-              <a:t>9/1/2026</a:t>
+              <a:t>9/2/2026</a:t>
             </a:fld>
             <a:endParaRPr lang="en-US"/>
           </a:p>
@@ -17838,9 +18321,9 @@
           <a:bodyPr/>
           <a:lstStyle/>
           <a:p>
-            <a:fld id="{88E0F305-9E38-2F43-A154-0A13A54C557F}" type="datetime1">
+            <a:fld id="{EEF6926C-A806-4837-B2ED-C1FBC6C9862A}" type="datetime1">
               <a:rPr lang="en-US" smtClean="0"/>
-              <a:t>9/1/2026</a:t>
+              <a:t>9/2/2026</a:t>
             </a:fld>
             <a:endParaRPr lang="en-US"/>
           </a:p>
@@ -18121,9 +18604,9 @@
           <a:bodyPr/>
           <a:lstStyle/>
           <a:p>
-            <a:fld id="{B9258CAE-C0F2-B346-BD4B-417B70F2F6EB}" type="datetime1">
+            <a:fld id="{105D11D3-D3E2-4915-A910-087C484C19E6}" type="datetime1">
               <a:rPr lang="en-US" smtClean="0"/>
-              <a:t>9/1/2026</a:t>
+              <a:t>9/2/2026</a:t>
             </a:fld>
             <a:endParaRPr lang="en-US"/>
           </a:p>
@@ -18384,9 +18867,9 @@
           <a:bodyPr/>
           <a:lstStyle/>
           <a:p>
-            <a:fld id="{51EF5BDB-72C5-6C45-B365-DB2A3AA7E4EB}" type="datetime1">
+            <a:fld id="{FB57F29D-BFC4-4C38-8372-C0BD5CC9783B}" type="datetime1">
               <a:rPr lang="en-US" smtClean="0"/>
-              <a:t>9/1/2026</a:t>
+              <a:t>9/2/2026</a:t>
             </a:fld>
             <a:endParaRPr lang="en-US"/>
           </a:p>
@@ -18658,10 +19141,9 @@
             </a:lvl1pPr>
           </a:lstStyle>
           <a:p>
-            <a:fld id="{ABF82D58-E94F-DA46-9A9B-DBAB917AB2DD}" type="datetime1">
+            <a:fld id="{4D9E3D53-2925-41A5-81A8-8FA2532A49A1}" type="datetime1">
               <a:rPr lang="en-US" smtClean="0"/>
-              <a:pPr/>
-              <a:t>9/1/2026</a:t>
+              <a:t>9/2/2026</a:t>
             </a:fld>
             <a:endParaRPr lang="en-US" dirty="0"/>
           </a:p>
@@ -18822,7 +19304,7 @@
     <p:sldLayoutId id="2147484031" r:id="rId52"/>
     <p:sldLayoutId id="2147484032" r:id="rId53"/>
   </p:sldLayoutIdLst>
-  <p:hf sldNum="0" hdr="0" ftr="0" dt="0"/>
+  <p:hf hdr="0" ftr="0" dt="0"/>
   <p:txStyles>
     <p:titleStyle>
       <a:lvl1pPr algn="l" defTabSz="914400" rtl="0" eaLnBrk="1" latinLnBrk="0" hangingPunct="1">
@@ -19334,7 +19816,7 @@
         <p:spPr>
           <a:xfrm>
             <a:off x="457199" y="457200"/>
-            <a:ext cx="9982201" cy="1355558"/>
+            <a:ext cx="9982201" cy="1129005"/>
           </a:xfrm>
         </p:spPr>
         <p:txBody>
@@ -19343,26 +19825,748 @@
           </a:bodyPr>
           <a:lstStyle/>
           <a:p>
-            <a:r>
-              <a:rPr lang="en-ZA" sz="3200" b="1" dirty="0">
+            <a:pPr>
+              <a:lnSpc>
+                <a:spcPct val="150000"/>
+              </a:lnSpc>
+            </a:pPr>
+            <a:r>
+              <a:rPr lang="en-ZA" sz="2800" b="1" dirty="0">
                 <a:solidFill>
                   <a:schemeClr val="tx2"/>
                 </a:solidFill>
+                <a:latin typeface="Times New Roman" panose="02020603050405020304" pitchFamily="18" charset="0"/>
+                <a:cs typeface="Times New Roman" panose="02020603050405020304" pitchFamily="18" charset="0"/>
               </a:rPr>
               <a:t>Problem Statement</a:t>
             </a:r>
             <a:br>
-              <a:rPr lang="en-ZA" sz="3200" b="1" dirty="0">
+              <a:rPr lang="en-ZA" sz="2400" b="1" dirty="0">
                 <a:solidFill>
                   <a:schemeClr val="tx2"/>
                 </a:solidFill>
+                <a:latin typeface="Times New Roman" panose="02020603050405020304" pitchFamily="18" charset="0"/>
+                <a:cs typeface="Times New Roman" panose="02020603050405020304" pitchFamily="18" charset="0"/>
               </a:rPr>
             </a:br>
-            <a:endParaRPr lang="en-ZA" sz="3200" b="1" dirty="0">
+            <a:r>
+              <a:rPr lang="en-ZA" sz="1600" dirty="0">
+                <a:solidFill>
+                  <a:schemeClr val="tx2"/>
+                </a:solidFill>
+                <a:latin typeface="Times New Roman" panose="02020603050405020304" pitchFamily="18" charset="0"/>
+                <a:cs typeface="Times New Roman" panose="02020603050405020304" pitchFamily="18" charset="0"/>
+              </a:rPr>
+              <a:t>Why the organisation needs a predictive credit risk model</a:t>
+            </a:r>
+            <a:endParaRPr lang="en-ZA" sz="1600" b="1" dirty="0">
               <a:solidFill>
                 <a:schemeClr val="tx2"/>
               </a:solidFill>
+              <a:latin typeface="Times New Roman" panose="02020603050405020304" pitchFamily="18" charset="0"/>
+              <a:cs typeface="Times New Roman" panose="02020603050405020304" pitchFamily="18" charset="0"/>
             </a:endParaRPr>
+          </a:p>
+        </p:txBody>
+      </p:sp>
+      <p:grpSp>
+        <p:nvGrpSpPr>
+          <p:cNvPr id="21" name="Group 20">
+            <a:extLst>
+              <a:ext uri="{FF2B5EF4-FFF2-40B4-BE49-F238E27FC236}">
+                <a16:creationId xmlns:a16="http://schemas.microsoft.com/office/drawing/2014/main" id="{2AE957D7-471B-E718-EF04-388FCCC3E7FB}"/>
+              </a:ext>
+            </a:extLst>
+          </p:cNvPr>
+          <p:cNvGrpSpPr/>
+          <p:nvPr/>
+        </p:nvGrpSpPr>
+        <p:grpSpPr>
+          <a:xfrm>
+            <a:off x="346787" y="1754155"/>
+            <a:ext cx="11498426" cy="1632858"/>
+            <a:chOff x="457199" y="2258008"/>
+            <a:chExt cx="11498426" cy="1632858"/>
+          </a:xfrm>
+        </p:grpSpPr>
+        <p:grpSp>
+          <p:nvGrpSpPr>
+            <p:cNvPr id="14" name="Group 13">
+              <a:extLst>
+                <a:ext uri="{FF2B5EF4-FFF2-40B4-BE49-F238E27FC236}">
+                  <a16:creationId xmlns:a16="http://schemas.microsoft.com/office/drawing/2014/main" id="{F3FE3E5B-23FD-6E84-D37F-94D2DCD760F8}"/>
+                </a:ext>
+              </a:extLst>
+            </p:cNvPr>
+            <p:cNvGrpSpPr/>
+            <p:nvPr/>
+          </p:nvGrpSpPr>
+          <p:grpSpPr>
+            <a:xfrm>
+              <a:off x="457199" y="2258008"/>
+              <a:ext cx="3554964" cy="1632858"/>
+              <a:chOff x="457199" y="2202024"/>
+              <a:chExt cx="3554964" cy="1632858"/>
+            </a:xfrm>
+          </p:grpSpPr>
+          <p:sp>
+            <p:nvSpPr>
+              <p:cNvPr id="9" name="Rectangle: Rounded Corners 8">
+                <a:extLst>
+                  <a:ext uri="{FF2B5EF4-FFF2-40B4-BE49-F238E27FC236}">
+                    <a16:creationId xmlns:a16="http://schemas.microsoft.com/office/drawing/2014/main" id="{750E653F-6E68-281C-E99D-C4D1D81B0B5F}"/>
+                  </a:ext>
+                </a:extLst>
+              </p:cNvPr>
+              <p:cNvSpPr/>
+              <p:nvPr/>
+            </p:nvSpPr>
+            <p:spPr>
+              <a:xfrm>
+                <a:off x="597159" y="2313992"/>
+                <a:ext cx="3415004" cy="1520890"/>
+              </a:xfrm>
+              <a:prstGeom prst="roundRect">
+                <a:avLst/>
+              </a:prstGeom>
+              <a:solidFill>
+                <a:schemeClr val="accent2">
+                  <a:lumMod val="20000"/>
+                  <a:lumOff val="80000"/>
+                </a:schemeClr>
+              </a:solidFill>
+              <a:ln>
+                <a:solidFill>
+                  <a:schemeClr val="tx1">
+                    <a:lumMod val="10000"/>
+                    <a:lumOff val="90000"/>
+                  </a:schemeClr>
+                </a:solidFill>
+              </a:ln>
+              <a:effectLst>
+                <a:outerShdw blurRad="50800" dist="38100" dir="2700000" algn="tl" rotWithShape="0">
+                  <a:prstClr val="black">
+                    <a:alpha val="40000"/>
+                  </a:prstClr>
+                </a:outerShdw>
+              </a:effectLst>
+            </p:spPr>
+            <p:style>
+              <a:lnRef idx="2">
+                <a:schemeClr val="accent1">
+                  <a:shade val="15000"/>
+                </a:schemeClr>
+              </a:lnRef>
+              <a:fillRef idx="1">
+                <a:schemeClr val="accent1"/>
+              </a:fillRef>
+              <a:effectRef idx="0">
+                <a:schemeClr val="accent1"/>
+              </a:effectRef>
+              <a:fontRef idx="minor">
+                <a:schemeClr val="lt1"/>
+              </a:fontRef>
+            </p:style>
+            <p:txBody>
+              <a:bodyPr rtlCol="0" anchor="ctr"/>
+              <a:lstStyle/>
+              <a:p>
+                <a:pPr>
+                  <a:lnSpc>
+                    <a:spcPct val="150000"/>
+                  </a:lnSpc>
+                </a:pPr>
+                <a:r>
+                  <a:rPr lang="en-ZA" sz="2000" b="1" dirty="0">
+                    <a:solidFill>
+                      <a:schemeClr val="tx2"/>
+                    </a:solidFill>
+                    <a:latin typeface="Times New Roman" panose="02020603050405020304" pitchFamily="18" charset="0"/>
+                    <a:cs typeface="Times New Roman" panose="02020603050405020304" pitchFamily="18" charset="0"/>
+                  </a:rPr>
+                  <a:t>Current situation</a:t>
+                </a:r>
+              </a:p>
+              <a:p>
+                <a:pPr>
+                  <a:lnSpc>
+                    <a:spcPct val="150000"/>
+                  </a:lnSpc>
+                </a:pPr>
+                <a:r>
+                  <a:rPr lang="en-ZA" sz="1200" dirty="0">
+                    <a:solidFill>
+                      <a:schemeClr val="tx2"/>
+                    </a:solidFill>
+                    <a:latin typeface="Times New Roman" panose="02020603050405020304" pitchFamily="18" charset="0"/>
+                    <a:cs typeface="Times New Roman" panose="02020603050405020304" pitchFamily="18" charset="0"/>
+                  </a:rPr>
+                  <a:t>A mid-sized financial services company still relies on a fixed rule-based credit approval process.</a:t>
+                </a:r>
+              </a:p>
+            </p:txBody>
+          </p:sp>
+          <p:sp>
+            <p:nvSpPr>
+              <p:cNvPr id="13" name="Flowchart: Connector 12">
+                <a:extLst>
+                  <a:ext uri="{FF2B5EF4-FFF2-40B4-BE49-F238E27FC236}">
+                    <a16:creationId xmlns:a16="http://schemas.microsoft.com/office/drawing/2014/main" id="{81704100-503A-5AA9-1CB7-EB4AF3302DEC}"/>
+                  </a:ext>
+                </a:extLst>
+              </p:cNvPr>
+              <p:cNvSpPr/>
+              <p:nvPr/>
+            </p:nvSpPr>
+            <p:spPr>
+              <a:xfrm>
+                <a:off x="457199" y="2202024"/>
+                <a:ext cx="447870" cy="457200"/>
+              </a:xfrm>
+              <a:prstGeom prst="flowChartConnector">
+                <a:avLst/>
+              </a:prstGeom>
+              <a:solidFill>
+                <a:schemeClr val="accent4">
+                  <a:lumMod val="40000"/>
+                  <a:lumOff val="60000"/>
+                </a:schemeClr>
+              </a:solidFill>
+              <a:ln>
+                <a:solidFill>
+                  <a:schemeClr val="accent4">
+                    <a:lumMod val="40000"/>
+                    <a:lumOff val="60000"/>
+                  </a:schemeClr>
+                </a:solidFill>
+              </a:ln>
+            </p:spPr>
+            <p:style>
+              <a:lnRef idx="2">
+                <a:schemeClr val="accent1">
+                  <a:shade val="15000"/>
+                </a:schemeClr>
+              </a:lnRef>
+              <a:fillRef idx="1">
+                <a:schemeClr val="accent1"/>
+              </a:fillRef>
+              <a:effectRef idx="0">
+                <a:schemeClr val="accent1"/>
+              </a:effectRef>
+              <a:fontRef idx="minor">
+                <a:schemeClr val="lt1"/>
+              </a:fontRef>
+            </p:style>
+            <p:txBody>
+              <a:bodyPr rtlCol="0" anchor="ctr"/>
+              <a:lstStyle/>
+              <a:p>
+                <a:pPr algn="ctr"/>
+                <a:r>
+                  <a:rPr lang="en-ZA" sz="2000" b="1" dirty="0">
+                    <a:solidFill>
+                      <a:schemeClr val="tx2"/>
+                    </a:solidFill>
+                    <a:latin typeface="Times New Roman" panose="02020603050405020304" pitchFamily="18" charset="0"/>
+                    <a:cs typeface="Times New Roman" panose="02020603050405020304" pitchFamily="18" charset="0"/>
+                  </a:rPr>
+                  <a:t>1</a:t>
+                </a:r>
+              </a:p>
+            </p:txBody>
+          </p:sp>
+        </p:grpSp>
+        <p:grpSp>
+          <p:nvGrpSpPr>
+            <p:cNvPr id="15" name="Group 14">
+              <a:extLst>
+                <a:ext uri="{FF2B5EF4-FFF2-40B4-BE49-F238E27FC236}">
+                  <a16:creationId xmlns:a16="http://schemas.microsoft.com/office/drawing/2014/main" id="{14CFD373-C87B-6550-F58E-12B1192517EB}"/>
+                </a:ext>
+              </a:extLst>
+            </p:cNvPr>
+            <p:cNvGrpSpPr/>
+            <p:nvPr/>
+          </p:nvGrpSpPr>
+          <p:grpSpPr>
+            <a:xfrm>
+              <a:off x="4428930" y="2258008"/>
+              <a:ext cx="3554964" cy="1632858"/>
+              <a:chOff x="457199" y="2202024"/>
+              <a:chExt cx="3554964" cy="1632858"/>
+            </a:xfrm>
+          </p:grpSpPr>
+          <p:sp>
+            <p:nvSpPr>
+              <p:cNvPr id="16" name="Rectangle: Rounded Corners 15">
+                <a:extLst>
+                  <a:ext uri="{FF2B5EF4-FFF2-40B4-BE49-F238E27FC236}">
+                    <a16:creationId xmlns:a16="http://schemas.microsoft.com/office/drawing/2014/main" id="{91E567BE-EA72-C968-298B-C0D12C129F2D}"/>
+                  </a:ext>
+                </a:extLst>
+              </p:cNvPr>
+              <p:cNvSpPr/>
+              <p:nvPr/>
+            </p:nvSpPr>
+            <p:spPr>
+              <a:xfrm>
+                <a:off x="597159" y="2313992"/>
+                <a:ext cx="3415004" cy="1520890"/>
+              </a:xfrm>
+              <a:prstGeom prst="roundRect">
+                <a:avLst/>
+              </a:prstGeom>
+              <a:solidFill>
+                <a:schemeClr val="accent2">
+                  <a:lumMod val="20000"/>
+                  <a:lumOff val="80000"/>
+                </a:schemeClr>
+              </a:solidFill>
+              <a:ln>
+                <a:solidFill>
+                  <a:schemeClr val="tx1">
+                    <a:lumMod val="10000"/>
+                    <a:lumOff val="90000"/>
+                  </a:schemeClr>
+                </a:solidFill>
+              </a:ln>
+              <a:effectLst>
+                <a:outerShdw blurRad="50800" dist="38100" dir="2700000" algn="tl" rotWithShape="0">
+                  <a:prstClr val="black">
+                    <a:alpha val="40000"/>
+                  </a:prstClr>
+                </a:outerShdw>
+              </a:effectLst>
+            </p:spPr>
+            <p:style>
+              <a:lnRef idx="2">
+                <a:schemeClr val="accent1">
+                  <a:shade val="15000"/>
+                </a:schemeClr>
+              </a:lnRef>
+              <a:fillRef idx="1">
+                <a:schemeClr val="accent1"/>
+              </a:fillRef>
+              <a:effectRef idx="0">
+                <a:schemeClr val="accent1"/>
+              </a:effectRef>
+              <a:fontRef idx="minor">
+                <a:schemeClr val="lt1"/>
+              </a:fontRef>
+            </p:style>
+            <p:txBody>
+              <a:bodyPr rtlCol="0" anchor="ctr"/>
+              <a:lstStyle/>
+              <a:p>
+                <a:pPr>
+                  <a:lnSpc>
+                    <a:spcPct val="150000"/>
+                  </a:lnSpc>
+                </a:pPr>
+                <a:r>
+                  <a:rPr lang="en-ZA" sz="2000" b="1" dirty="0">
+                    <a:solidFill>
+                      <a:schemeClr val="tx2"/>
+                    </a:solidFill>
+                    <a:latin typeface="Times New Roman" panose="02020603050405020304" pitchFamily="18" charset="0"/>
+                    <a:cs typeface="Times New Roman" panose="02020603050405020304" pitchFamily="18" charset="0"/>
+                  </a:rPr>
+                  <a:t>The gap</a:t>
+                </a:r>
+              </a:p>
+              <a:p>
+                <a:pPr>
+                  <a:lnSpc>
+                    <a:spcPct val="150000"/>
+                  </a:lnSpc>
+                </a:pPr>
+                <a:r>
+                  <a:rPr lang="en-ZA" sz="1200" dirty="0">
+                    <a:solidFill>
+                      <a:schemeClr val="tx2"/>
+                    </a:solidFill>
+                    <a:latin typeface="Times New Roman" panose="02020603050405020304" pitchFamily="18" charset="0"/>
+                    <a:cs typeface="Times New Roman" panose="02020603050405020304" pitchFamily="18" charset="0"/>
+                  </a:rPr>
+                  <a:t>Rule-based scoring cannot capture nonlinear relationships in applicant data or adapt to new trends.</a:t>
+                </a:r>
+              </a:p>
+            </p:txBody>
+          </p:sp>
+          <p:sp>
+            <p:nvSpPr>
+              <p:cNvPr id="17" name="Flowchart: Connector 16">
+                <a:extLst>
+                  <a:ext uri="{FF2B5EF4-FFF2-40B4-BE49-F238E27FC236}">
+                    <a16:creationId xmlns:a16="http://schemas.microsoft.com/office/drawing/2014/main" id="{F80C31BA-E3EB-C530-2F9C-3316994CC296}"/>
+                  </a:ext>
+                </a:extLst>
+              </p:cNvPr>
+              <p:cNvSpPr/>
+              <p:nvPr/>
+            </p:nvSpPr>
+            <p:spPr>
+              <a:xfrm>
+                <a:off x="457199" y="2202024"/>
+                <a:ext cx="447870" cy="457200"/>
+              </a:xfrm>
+              <a:prstGeom prst="flowChartConnector">
+                <a:avLst/>
+              </a:prstGeom>
+              <a:solidFill>
+                <a:schemeClr val="accent4">
+                  <a:lumMod val="40000"/>
+                  <a:lumOff val="60000"/>
+                </a:schemeClr>
+              </a:solidFill>
+              <a:ln>
+                <a:solidFill>
+                  <a:schemeClr val="accent4">
+                    <a:lumMod val="40000"/>
+                    <a:lumOff val="60000"/>
+                  </a:schemeClr>
+                </a:solidFill>
+              </a:ln>
+            </p:spPr>
+            <p:style>
+              <a:lnRef idx="2">
+                <a:schemeClr val="accent1">
+                  <a:shade val="15000"/>
+                </a:schemeClr>
+              </a:lnRef>
+              <a:fillRef idx="1">
+                <a:schemeClr val="accent1"/>
+              </a:fillRef>
+              <a:effectRef idx="0">
+                <a:schemeClr val="accent1"/>
+              </a:effectRef>
+              <a:fontRef idx="minor">
+                <a:schemeClr val="lt1"/>
+              </a:fontRef>
+            </p:style>
+            <p:txBody>
+              <a:bodyPr rtlCol="0" anchor="ctr"/>
+              <a:lstStyle/>
+              <a:p>
+                <a:pPr algn="ctr"/>
+                <a:r>
+                  <a:rPr lang="en-ZA" sz="2000" b="1" dirty="0">
+                    <a:solidFill>
+                      <a:schemeClr val="tx2"/>
+                    </a:solidFill>
+                    <a:latin typeface="Times New Roman" panose="02020603050405020304" pitchFamily="18" charset="0"/>
+                    <a:cs typeface="Times New Roman" panose="02020603050405020304" pitchFamily="18" charset="0"/>
+                  </a:rPr>
+                  <a:t>2</a:t>
+                </a:r>
+              </a:p>
+            </p:txBody>
+          </p:sp>
+        </p:grpSp>
+        <p:grpSp>
+          <p:nvGrpSpPr>
+            <p:cNvPr id="18" name="Group 17">
+              <a:extLst>
+                <a:ext uri="{FF2B5EF4-FFF2-40B4-BE49-F238E27FC236}">
+                  <a16:creationId xmlns:a16="http://schemas.microsoft.com/office/drawing/2014/main" id="{12FAF7CE-4ABB-2F24-961D-EA15B9EC213B}"/>
+                </a:ext>
+              </a:extLst>
+            </p:cNvPr>
+            <p:cNvGrpSpPr/>
+            <p:nvPr/>
+          </p:nvGrpSpPr>
+          <p:grpSpPr>
+            <a:xfrm>
+              <a:off x="8400661" y="2258008"/>
+              <a:ext cx="3554964" cy="1632858"/>
+              <a:chOff x="457199" y="2202024"/>
+              <a:chExt cx="3554964" cy="1632858"/>
+            </a:xfrm>
+          </p:grpSpPr>
+          <p:sp>
+            <p:nvSpPr>
+              <p:cNvPr id="19" name="Rectangle: Rounded Corners 18">
+                <a:extLst>
+                  <a:ext uri="{FF2B5EF4-FFF2-40B4-BE49-F238E27FC236}">
+                    <a16:creationId xmlns:a16="http://schemas.microsoft.com/office/drawing/2014/main" id="{06ABC3D6-86BF-F2D2-2263-F8A492EC6AA6}"/>
+                  </a:ext>
+                </a:extLst>
+              </p:cNvPr>
+              <p:cNvSpPr/>
+              <p:nvPr/>
+            </p:nvSpPr>
+            <p:spPr>
+              <a:xfrm>
+                <a:off x="597159" y="2313992"/>
+                <a:ext cx="3415004" cy="1520890"/>
+              </a:xfrm>
+              <a:prstGeom prst="roundRect">
+                <a:avLst/>
+              </a:prstGeom>
+              <a:solidFill>
+                <a:schemeClr val="accent2">
+                  <a:lumMod val="20000"/>
+                  <a:lumOff val="80000"/>
+                </a:schemeClr>
+              </a:solidFill>
+              <a:ln>
+                <a:solidFill>
+                  <a:schemeClr val="tx1">
+                    <a:lumMod val="10000"/>
+                    <a:lumOff val="90000"/>
+                  </a:schemeClr>
+                </a:solidFill>
+              </a:ln>
+              <a:effectLst>
+                <a:outerShdw blurRad="50800" dist="38100" dir="2700000" algn="tl" rotWithShape="0">
+                  <a:prstClr val="black">
+                    <a:alpha val="40000"/>
+                  </a:prstClr>
+                </a:outerShdw>
+              </a:effectLst>
+            </p:spPr>
+            <p:style>
+              <a:lnRef idx="2">
+                <a:schemeClr val="accent1">
+                  <a:shade val="15000"/>
+                </a:schemeClr>
+              </a:lnRef>
+              <a:fillRef idx="1">
+                <a:schemeClr val="accent1"/>
+              </a:fillRef>
+              <a:effectRef idx="0">
+                <a:schemeClr val="accent1"/>
+              </a:effectRef>
+              <a:fontRef idx="minor">
+                <a:schemeClr val="lt1"/>
+              </a:fontRef>
+            </p:style>
+            <p:txBody>
+              <a:bodyPr rtlCol="0" anchor="ctr"/>
+              <a:lstStyle/>
+              <a:p>
+                <a:pPr>
+                  <a:lnSpc>
+                    <a:spcPct val="150000"/>
+                  </a:lnSpc>
+                </a:pPr>
+                <a:r>
+                  <a:rPr lang="en-ZA" sz="2000" b="1" dirty="0">
+                    <a:solidFill>
+                      <a:schemeClr val="tx2"/>
+                    </a:solidFill>
+                    <a:latin typeface="Times New Roman" panose="02020603050405020304" pitchFamily="18" charset="0"/>
+                    <a:cs typeface="Times New Roman" panose="02020603050405020304" pitchFamily="18" charset="0"/>
+                  </a:rPr>
+                  <a:t>The cost</a:t>
+                </a:r>
+              </a:p>
+              <a:p>
+                <a:pPr>
+                  <a:lnSpc>
+                    <a:spcPct val="150000"/>
+                  </a:lnSpc>
+                </a:pPr>
+                <a:r>
+                  <a:rPr lang="en-ZA" sz="1200" dirty="0">
+                    <a:solidFill>
+                      <a:schemeClr val="tx2"/>
+                    </a:solidFill>
+                    <a:latin typeface="Times New Roman" panose="02020603050405020304" pitchFamily="18" charset="0"/>
+                    <a:cs typeface="Times New Roman" panose="02020603050405020304" pitchFamily="18" charset="0"/>
+                  </a:rPr>
+                  <a:t>This causes false approvals (financial loss) and false rejections (lost business and poor customer experience).</a:t>
+                </a:r>
+              </a:p>
+            </p:txBody>
+          </p:sp>
+          <p:sp>
+            <p:nvSpPr>
+              <p:cNvPr id="20" name="Flowchart: Connector 19">
+                <a:extLst>
+                  <a:ext uri="{FF2B5EF4-FFF2-40B4-BE49-F238E27FC236}">
+                    <a16:creationId xmlns:a16="http://schemas.microsoft.com/office/drawing/2014/main" id="{2FAAA1C8-AE57-9FE7-2995-748176148515}"/>
+                  </a:ext>
+                </a:extLst>
+              </p:cNvPr>
+              <p:cNvSpPr/>
+              <p:nvPr/>
+            </p:nvSpPr>
+            <p:spPr>
+              <a:xfrm>
+                <a:off x="457199" y="2202024"/>
+                <a:ext cx="447870" cy="457200"/>
+              </a:xfrm>
+              <a:prstGeom prst="flowChartConnector">
+                <a:avLst/>
+              </a:prstGeom>
+              <a:solidFill>
+                <a:schemeClr val="accent4">
+                  <a:lumMod val="40000"/>
+                  <a:lumOff val="60000"/>
+                </a:schemeClr>
+              </a:solidFill>
+              <a:ln>
+                <a:solidFill>
+                  <a:schemeClr val="accent4">
+                    <a:lumMod val="40000"/>
+                    <a:lumOff val="60000"/>
+                  </a:schemeClr>
+                </a:solidFill>
+              </a:ln>
+            </p:spPr>
+            <p:style>
+              <a:lnRef idx="2">
+                <a:schemeClr val="accent1">
+                  <a:shade val="15000"/>
+                </a:schemeClr>
+              </a:lnRef>
+              <a:fillRef idx="1">
+                <a:schemeClr val="accent1"/>
+              </a:fillRef>
+              <a:effectRef idx="0">
+                <a:schemeClr val="accent1"/>
+              </a:effectRef>
+              <a:fontRef idx="minor">
+                <a:schemeClr val="lt1"/>
+              </a:fontRef>
+            </p:style>
+            <p:txBody>
+              <a:bodyPr rtlCol="0" anchor="ctr"/>
+              <a:lstStyle/>
+              <a:p>
+                <a:pPr algn="ctr"/>
+                <a:r>
+                  <a:rPr lang="en-ZA" sz="2000" b="1" dirty="0">
+                    <a:solidFill>
+                      <a:schemeClr val="tx2"/>
+                    </a:solidFill>
+                    <a:latin typeface="Times New Roman" panose="02020603050405020304" pitchFamily="18" charset="0"/>
+                    <a:cs typeface="Times New Roman" panose="02020603050405020304" pitchFamily="18" charset="0"/>
+                  </a:rPr>
+                  <a:t>3</a:t>
+                </a:r>
+              </a:p>
+            </p:txBody>
+          </p:sp>
+        </p:grpSp>
+      </p:grpSp>
+      <p:sp>
+        <p:nvSpPr>
+          <p:cNvPr id="22" name="Rectangle: Rounded Corners 21">
+            <a:extLst>
+              <a:ext uri="{FF2B5EF4-FFF2-40B4-BE49-F238E27FC236}">
+                <a16:creationId xmlns:a16="http://schemas.microsoft.com/office/drawing/2014/main" id="{BEF16CDA-C0B0-113E-B233-58D439B4DF9C}"/>
+              </a:ext>
+            </a:extLst>
+          </p:cNvPr>
+          <p:cNvSpPr/>
+          <p:nvPr/>
+        </p:nvSpPr>
+        <p:spPr>
+          <a:xfrm>
+            <a:off x="570722" y="4180114"/>
+            <a:ext cx="11274491" cy="1231641"/>
+          </a:xfrm>
+          <a:prstGeom prst="roundRect">
+            <a:avLst/>
+          </a:prstGeom>
+          <a:solidFill>
+            <a:schemeClr val="accent2">
+              <a:lumMod val="20000"/>
+              <a:lumOff val="80000"/>
+            </a:schemeClr>
+          </a:solidFill>
+          <a:ln>
+            <a:solidFill>
+              <a:schemeClr val="accent2">
+                <a:lumMod val="20000"/>
+                <a:lumOff val="80000"/>
+              </a:schemeClr>
+            </a:solidFill>
+          </a:ln>
+        </p:spPr>
+        <p:style>
+          <a:lnRef idx="2">
+            <a:schemeClr val="accent1">
+              <a:shade val="15000"/>
+            </a:schemeClr>
+          </a:lnRef>
+          <a:fillRef idx="1">
+            <a:schemeClr val="accent1"/>
+          </a:fillRef>
+          <a:effectRef idx="0">
+            <a:schemeClr val="accent1"/>
+          </a:effectRef>
+          <a:fontRef idx="minor">
+            <a:schemeClr val="lt1"/>
+          </a:fontRef>
+        </p:style>
+        <p:txBody>
+          <a:bodyPr rtlCol="0" anchor="ctr"/>
+          <a:lstStyle/>
+          <a:p>
+            <a:pPr>
+              <a:lnSpc>
+                <a:spcPct val="150000"/>
+              </a:lnSpc>
+            </a:pPr>
+            <a:r>
+              <a:rPr lang="en-ZA" sz="2000" b="1" dirty="0">
+                <a:solidFill>
+                  <a:schemeClr val="tx2"/>
+                </a:solidFill>
+                <a:latin typeface="Times New Roman" panose="02020603050405020304" pitchFamily="18" charset="0"/>
+                <a:cs typeface="Times New Roman" panose="02020603050405020304" pitchFamily="18" charset="0"/>
+              </a:rPr>
+              <a:t>Objective</a:t>
+            </a:r>
+          </a:p>
+          <a:p>
+            <a:pPr>
+              <a:lnSpc>
+                <a:spcPct val="150000"/>
+              </a:lnSpc>
+            </a:pPr>
+            <a:r>
+              <a:rPr lang="en-ZA" sz="1200" dirty="0">
+                <a:solidFill>
+                  <a:schemeClr val="tx2"/>
+                </a:solidFill>
+                <a:latin typeface="Times New Roman" panose="02020603050405020304" pitchFamily="18" charset="0"/>
+                <a:cs typeface="Times New Roman" panose="02020603050405020304" pitchFamily="18" charset="0"/>
+              </a:rPr>
+              <a:t>Is to build a supervised machine learning classification system that follows a full ML Life Cycle (acquisition, preprocessing, PCA, modelling, evaluation and tuning) to predict whether a loan applicant is high-risk or low-risk and translate the results into business recommendations.</a:t>
+            </a:r>
+          </a:p>
+        </p:txBody>
+      </p:sp>
+      <p:sp>
+        <p:nvSpPr>
+          <p:cNvPr id="23" name="Slide Number Placeholder 22">
+            <a:extLst>
+              <a:ext uri="{FF2B5EF4-FFF2-40B4-BE49-F238E27FC236}">
+                <a16:creationId xmlns:a16="http://schemas.microsoft.com/office/drawing/2014/main" id="{626702EE-22D9-6BEA-19F7-48371E6FB94A}"/>
+              </a:ext>
+            </a:extLst>
+          </p:cNvPr>
+          <p:cNvSpPr>
+            <a:spLocks noGrp="1"/>
+          </p:cNvSpPr>
+          <p:nvPr>
+            <p:ph type="sldNum" sz="quarter" idx="12"/>
+          </p:nvPr>
+        </p:nvSpPr>
+        <p:spPr/>
+        <p:txBody>
+          <a:bodyPr/>
+          <a:lstStyle/>
+          <a:p>
+            <a:fld id="{AEAA3239-9EA4-4A65-A281-97F994456D9F}" type="slidenum">
+              <a:rPr lang="en-US" smtClean="0"/>
+              <a:t>2</a:t>
+            </a:fld>
+            <a:endParaRPr lang="en-US"/>
           </a:p>
         </p:txBody>
       </p:sp>
@@ -19370,6 +20574,3117 @@
     <p:extLst>
       <p:ext uri="{BB962C8B-B14F-4D97-AF65-F5344CB8AC3E}">
         <p14:creationId xmlns:p14="http://schemas.microsoft.com/office/powerpoint/2010/main" val="838054146"/>
+      </p:ext>
+    </p:extLst>
+  </p:cSld>
+  <p:clrMapOvr>
+    <a:masterClrMapping/>
+  </p:clrMapOvr>
+</p:sld>
+</file>
+
+<file path=ppt/slides/slide3.xml><?xml version="1.0" encoding="utf-8"?>
+<p:sld xmlns:a="http://schemas.openxmlformats.org/drawingml/2006/main" xmlns:r="http://schemas.openxmlformats.org/officeDocument/2006/relationships" xmlns:p="http://schemas.openxmlformats.org/presentationml/2006/main">
+  <p:cSld>
+    <p:spTree>
+      <p:nvGrpSpPr>
+        <p:cNvPr id="1" name=""/>
+        <p:cNvGrpSpPr/>
+        <p:nvPr/>
+      </p:nvGrpSpPr>
+      <p:grpSpPr>
+        <a:xfrm>
+          <a:off x="0" y="0"/>
+          <a:ext cx="0" cy="0"/>
+          <a:chOff x="0" y="0"/>
+          <a:chExt cx="0" cy="0"/>
+        </a:xfrm>
+      </p:grpSpPr>
+      <p:sp>
+        <p:nvSpPr>
+          <p:cNvPr id="2" name="Title 1">
+            <a:extLst>
+              <a:ext uri="{FF2B5EF4-FFF2-40B4-BE49-F238E27FC236}">
+                <a16:creationId xmlns:a16="http://schemas.microsoft.com/office/drawing/2014/main" id="{30C09699-B87A-D2F8-DF10-D9F76F6021D4}"/>
+              </a:ext>
+            </a:extLst>
+          </p:cNvPr>
+          <p:cNvSpPr>
+            <a:spLocks noGrp="1"/>
+          </p:cNvSpPr>
+          <p:nvPr>
+            <p:ph type="ctrTitle"/>
+          </p:nvPr>
+        </p:nvSpPr>
+        <p:spPr>
+          <a:xfrm>
+            <a:off x="457199" y="457200"/>
+            <a:ext cx="9982201" cy="1343608"/>
+          </a:xfrm>
+        </p:spPr>
+        <p:txBody>
+          <a:bodyPr>
+            <a:noAutofit/>
+          </a:bodyPr>
+          <a:lstStyle/>
+          <a:p>
+            <a:pPr>
+              <a:lnSpc>
+                <a:spcPct val="150000"/>
+              </a:lnSpc>
+            </a:pPr>
+            <a:r>
+              <a:rPr lang="en-ZA" sz="2800" b="1" dirty="0">
+                <a:solidFill>
+                  <a:schemeClr val="tx2"/>
+                </a:solidFill>
+                <a:latin typeface="Times New Roman" panose="02020603050405020304" pitchFamily="18" charset="0"/>
+                <a:cs typeface="Times New Roman" panose="02020603050405020304" pitchFamily="18" charset="0"/>
+              </a:rPr>
+              <a:t>Dataset overview</a:t>
+            </a:r>
+            <a:br>
+              <a:rPr lang="en-ZA" sz="2800" b="1" dirty="0">
+                <a:solidFill>
+                  <a:schemeClr val="tx2"/>
+                </a:solidFill>
+                <a:latin typeface="Times New Roman" panose="02020603050405020304" pitchFamily="18" charset="0"/>
+                <a:cs typeface="Times New Roman" panose="02020603050405020304" pitchFamily="18" charset="0"/>
+              </a:rPr>
+            </a:br>
+            <a:endParaRPr lang="en-ZA" sz="2800" b="1" dirty="0">
+              <a:solidFill>
+                <a:schemeClr val="tx2"/>
+              </a:solidFill>
+              <a:latin typeface="Times New Roman" panose="02020603050405020304" pitchFamily="18" charset="0"/>
+              <a:cs typeface="Times New Roman" panose="02020603050405020304" pitchFamily="18" charset="0"/>
+            </a:endParaRPr>
+          </a:p>
+        </p:txBody>
+      </p:sp>
+      <p:grpSp>
+        <p:nvGrpSpPr>
+          <p:cNvPr id="9" name="Group 8">
+            <a:extLst>
+              <a:ext uri="{FF2B5EF4-FFF2-40B4-BE49-F238E27FC236}">
+                <a16:creationId xmlns:a16="http://schemas.microsoft.com/office/drawing/2014/main" id="{B5268710-362F-5D3A-ADEF-E878E929E19D}"/>
+              </a:ext>
+            </a:extLst>
+          </p:cNvPr>
+          <p:cNvGrpSpPr/>
+          <p:nvPr/>
+        </p:nvGrpSpPr>
+        <p:grpSpPr>
+          <a:xfrm>
+            <a:off x="541176" y="1707502"/>
+            <a:ext cx="2929812" cy="4198776"/>
+            <a:chOff x="541176" y="1707502"/>
+            <a:chExt cx="2929812" cy="4198776"/>
+          </a:xfrm>
+        </p:grpSpPr>
+        <p:sp>
+          <p:nvSpPr>
+            <p:cNvPr id="4" name="Rectangle: Rounded Corners 3">
+              <a:extLst>
+                <a:ext uri="{FF2B5EF4-FFF2-40B4-BE49-F238E27FC236}">
+                  <a16:creationId xmlns:a16="http://schemas.microsoft.com/office/drawing/2014/main" id="{9338586F-97B7-4B4D-B65A-F4F4BE39E158}"/>
+                </a:ext>
+              </a:extLst>
+            </p:cNvPr>
+            <p:cNvSpPr/>
+            <p:nvPr/>
+          </p:nvSpPr>
+          <p:spPr>
+            <a:xfrm>
+              <a:off x="541176" y="1707502"/>
+              <a:ext cx="2929812" cy="1156996"/>
+            </a:xfrm>
+            <a:prstGeom prst="roundRect">
+              <a:avLst/>
+            </a:prstGeom>
+            <a:solidFill>
+              <a:schemeClr val="accent2">
+                <a:lumMod val="20000"/>
+                <a:lumOff val="80000"/>
+              </a:schemeClr>
+            </a:solidFill>
+            <a:ln>
+              <a:solidFill>
+                <a:schemeClr val="accent3">
+                  <a:lumMod val="20000"/>
+                  <a:lumOff val="80000"/>
+                </a:schemeClr>
+              </a:solidFill>
+            </a:ln>
+          </p:spPr>
+          <p:style>
+            <a:lnRef idx="2">
+              <a:schemeClr val="accent1">
+                <a:shade val="15000"/>
+              </a:schemeClr>
+            </a:lnRef>
+            <a:fillRef idx="1">
+              <a:schemeClr val="accent1"/>
+            </a:fillRef>
+            <a:effectRef idx="0">
+              <a:schemeClr val="accent1"/>
+            </a:effectRef>
+            <a:fontRef idx="minor">
+              <a:schemeClr val="lt1"/>
+            </a:fontRef>
+          </p:style>
+          <p:txBody>
+            <a:bodyPr rtlCol="0" anchor="ctr"/>
+            <a:lstStyle/>
+            <a:p>
+              <a:pPr>
+                <a:lnSpc>
+                  <a:spcPct val="150000"/>
+                </a:lnSpc>
+              </a:pPr>
+              <a:r>
+                <a:rPr lang="en-ZA" sz="2000" b="1" dirty="0">
+                  <a:solidFill>
+                    <a:schemeClr val="accent3">
+                      <a:lumMod val="75000"/>
+                    </a:schemeClr>
+                  </a:solidFill>
+                  <a:latin typeface="Times New Roman" panose="02020603050405020304" pitchFamily="18" charset="0"/>
+                  <a:cs typeface="Times New Roman" panose="02020603050405020304" pitchFamily="18" charset="0"/>
+                </a:rPr>
+                <a:t>32 581</a:t>
+              </a:r>
+            </a:p>
+            <a:p>
+              <a:pPr>
+                <a:lnSpc>
+                  <a:spcPct val="150000"/>
+                </a:lnSpc>
+              </a:pPr>
+              <a:r>
+                <a:rPr lang="en-ZA" sz="1200" dirty="0">
+                  <a:solidFill>
+                    <a:schemeClr val="tx2"/>
+                  </a:solidFill>
+                  <a:latin typeface="Times New Roman" panose="02020603050405020304" pitchFamily="18" charset="0"/>
+                  <a:cs typeface="Times New Roman" panose="02020603050405020304" pitchFamily="18" charset="0"/>
+                </a:rPr>
+                <a:t>Rows: Loan Applicants</a:t>
+              </a:r>
+            </a:p>
+          </p:txBody>
+        </p:sp>
+        <p:sp>
+          <p:nvSpPr>
+            <p:cNvPr id="6" name="Rectangle: Rounded Corners 5">
+              <a:extLst>
+                <a:ext uri="{FF2B5EF4-FFF2-40B4-BE49-F238E27FC236}">
+                  <a16:creationId xmlns:a16="http://schemas.microsoft.com/office/drawing/2014/main" id="{6A2BF41D-8296-2AE8-41C7-DBD3D006BBAC}"/>
+                </a:ext>
+              </a:extLst>
+            </p:cNvPr>
+            <p:cNvSpPr/>
+            <p:nvPr/>
+          </p:nvSpPr>
+          <p:spPr>
+            <a:xfrm>
+              <a:off x="541176" y="3228392"/>
+              <a:ext cx="2929812" cy="1156996"/>
+            </a:xfrm>
+            <a:prstGeom prst="roundRect">
+              <a:avLst/>
+            </a:prstGeom>
+            <a:solidFill>
+              <a:schemeClr val="accent2">
+                <a:lumMod val="20000"/>
+                <a:lumOff val="80000"/>
+              </a:schemeClr>
+            </a:solidFill>
+            <a:ln>
+              <a:solidFill>
+                <a:schemeClr val="accent3">
+                  <a:lumMod val="20000"/>
+                  <a:lumOff val="80000"/>
+                </a:schemeClr>
+              </a:solidFill>
+            </a:ln>
+          </p:spPr>
+          <p:style>
+            <a:lnRef idx="2">
+              <a:schemeClr val="accent1">
+                <a:shade val="15000"/>
+              </a:schemeClr>
+            </a:lnRef>
+            <a:fillRef idx="1">
+              <a:schemeClr val="accent1"/>
+            </a:fillRef>
+            <a:effectRef idx="0">
+              <a:schemeClr val="accent1"/>
+            </a:effectRef>
+            <a:fontRef idx="minor">
+              <a:schemeClr val="lt1"/>
+            </a:fontRef>
+          </p:style>
+          <p:txBody>
+            <a:bodyPr rtlCol="0" anchor="ctr"/>
+            <a:lstStyle/>
+            <a:p>
+              <a:pPr>
+                <a:lnSpc>
+                  <a:spcPct val="150000"/>
+                </a:lnSpc>
+              </a:pPr>
+              <a:r>
+                <a:rPr lang="en-ZA" sz="2000" b="1" dirty="0">
+                  <a:solidFill>
+                    <a:schemeClr val="accent3">
+                      <a:lumMod val="75000"/>
+                    </a:schemeClr>
+                  </a:solidFill>
+                  <a:latin typeface="Times New Roman" panose="02020603050405020304" pitchFamily="18" charset="0"/>
+                  <a:cs typeface="Times New Roman" panose="02020603050405020304" pitchFamily="18" charset="0"/>
+                </a:rPr>
+                <a:t>12</a:t>
+              </a:r>
+            </a:p>
+            <a:p>
+              <a:pPr>
+                <a:lnSpc>
+                  <a:spcPct val="150000"/>
+                </a:lnSpc>
+              </a:pPr>
+              <a:r>
+                <a:rPr lang="en-ZA" sz="1200" dirty="0">
+                  <a:solidFill>
+                    <a:schemeClr val="tx2"/>
+                  </a:solidFill>
+                  <a:latin typeface="Times New Roman" panose="02020603050405020304" pitchFamily="18" charset="0"/>
+                  <a:cs typeface="Times New Roman" panose="02020603050405020304" pitchFamily="18" charset="0"/>
+                </a:rPr>
+                <a:t>Original columns</a:t>
+              </a:r>
+            </a:p>
+          </p:txBody>
+        </p:sp>
+        <p:sp>
+          <p:nvSpPr>
+            <p:cNvPr id="8" name="Rectangle: Rounded Corners 7">
+              <a:extLst>
+                <a:ext uri="{FF2B5EF4-FFF2-40B4-BE49-F238E27FC236}">
+                  <a16:creationId xmlns:a16="http://schemas.microsoft.com/office/drawing/2014/main" id="{767C5B18-4A8C-0C61-0149-C57FC6A85F88}"/>
+                </a:ext>
+              </a:extLst>
+            </p:cNvPr>
+            <p:cNvSpPr/>
+            <p:nvPr/>
+          </p:nvSpPr>
+          <p:spPr>
+            <a:xfrm>
+              <a:off x="541176" y="4749282"/>
+              <a:ext cx="2929812" cy="1156996"/>
+            </a:xfrm>
+            <a:prstGeom prst="roundRect">
+              <a:avLst/>
+            </a:prstGeom>
+            <a:solidFill>
+              <a:schemeClr val="accent2">
+                <a:lumMod val="20000"/>
+                <a:lumOff val="80000"/>
+              </a:schemeClr>
+            </a:solidFill>
+            <a:ln>
+              <a:solidFill>
+                <a:schemeClr val="accent3">
+                  <a:lumMod val="20000"/>
+                  <a:lumOff val="80000"/>
+                </a:schemeClr>
+              </a:solidFill>
+            </a:ln>
+          </p:spPr>
+          <p:style>
+            <a:lnRef idx="2">
+              <a:schemeClr val="accent1">
+                <a:shade val="15000"/>
+              </a:schemeClr>
+            </a:lnRef>
+            <a:fillRef idx="1">
+              <a:schemeClr val="accent1"/>
+            </a:fillRef>
+            <a:effectRef idx="0">
+              <a:schemeClr val="accent1"/>
+            </a:effectRef>
+            <a:fontRef idx="minor">
+              <a:schemeClr val="lt1"/>
+            </a:fontRef>
+          </p:style>
+          <p:txBody>
+            <a:bodyPr rtlCol="0" anchor="ctr"/>
+            <a:lstStyle/>
+            <a:p>
+              <a:pPr>
+                <a:lnSpc>
+                  <a:spcPct val="150000"/>
+                </a:lnSpc>
+              </a:pPr>
+              <a:r>
+                <a:rPr lang="en-ZA" sz="2000" b="1" dirty="0">
+                  <a:solidFill>
+                    <a:schemeClr val="accent3">
+                      <a:lumMod val="75000"/>
+                    </a:schemeClr>
+                  </a:solidFill>
+                  <a:latin typeface="Times New Roman" panose="02020603050405020304" pitchFamily="18" charset="0"/>
+                  <a:cs typeface="Times New Roman" panose="02020603050405020304" pitchFamily="18" charset="0"/>
+                </a:rPr>
+                <a:t>78% / 22%</a:t>
+              </a:r>
+            </a:p>
+            <a:p>
+              <a:pPr>
+                <a:lnSpc>
+                  <a:spcPct val="150000"/>
+                </a:lnSpc>
+              </a:pPr>
+              <a:r>
+                <a:rPr lang="en-ZA" sz="1200" dirty="0">
+                  <a:solidFill>
+                    <a:schemeClr val="tx2"/>
+                  </a:solidFill>
+                  <a:latin typeface="Times New Roman" panose="02020603050405020304" pitchFamily="18" charset="0"/>
+                  <a:cs typeface="Times New Roman" panose="02020603050405020304" pitchFamily="18" charset="0"/>
+                </a:rPr>
+                <a:t>Low-risk or High-risk split</a:t>
+              </a:r>
+            </a:p>
+          </p:txBody>
+        </p:sp>
+      </p:grpSp>
+      <p:sp>
+        <p:nvSpPr>
+          <p:cNvPr id="11" name="TextBox 10">
+            <a:extLst>
+              <a:ext uri="{FF2B5EF4-FFF2-40B4-BE49-F238E27FC236}">
+                <a16:creationId xmlns:a16="http://schemas.microsoft.com/office/drawing/2014/main" id="{EB6BF935-14F4-D51F-83E7-4EEBDEF35282}"/>
+              </a:ext>
+            </a:extLst>
+          </p:cNvPr>
+          <p:cNvSpPr txBox="1"/>
+          <p:nvPr/>
+        </p:nvSpPr>
+        <p:spPr>
+          <a:xfrm>
+            <a:off x="4609322" y="1338170"/>
+            <a:ext cx="3956179" cy="369332"/>
+          </a:xfrm>
+          <a:prstGeom prst="rect">
+            <a:avLst/>
+          </a:prstGeom>
+          <a:noFill/>
+        </p:spPr>
+        <p:txBody>
+          <a:bodyPr wrap="square" rtlCol="0">
+            <a:spAutoFit/>
+          </a:bodyPr>
+          <a:lstStyle/>
+          <a:p>
+            <a:r>
+              <a:rPr lang="en-ZA" b="1" dirty="0">
+                <a:solidFill>
+                  <a:schemeClr val="tx2"/>
+                </a:solidFill>
+                <a:latin typeface="Times New Roman" panose="02020603050405020304" pitchFamily="18" charset="0"/>
+                <a:cs typeface="Times New Roman" panose="02020603050405020304" pitchFamily="18" charset="0"/>
+              </a:rPr>
+              <a:t>Key features </a:t>
+            </a:r>
+          </a:p>
+        </p:txBody>
+      </p:sp>
+      <p:graphicFrame>
+        <p:nvGraphicFramePr>
+          <p:cNvPr id="12" name="Table 11">
+            <a:extLst>
+              <a:ext uri="{FF2B5EF4-FFF2-40B4-BE49-F238E27FC236}">
+                <a16:creationId xmlns:a16="http://schemas.microsoft.com/office/drawing/2014/main" id="{F1211279-574A-404D-07AE-BAEDD03880BB}"/>
+              </a:ext>
+            </a:extLst>
+          </p:cNvPr>
+          <p:cNvGraphicFramePr>
+            <a:graphicFrameLocks noGrp="1"/>
+          </p:cNvGraphicFramePr>
+          <p:nvPr>
+            <p:extLst>
+              <p:ext uri="{D42A27DB-BD31-4B8C-83A1-F6EECF244321}">
+                <p14:modId xmlns:p14="http://schemas.microsoft.com/office/powerpoint/2010/main" val="3172214105"/>
+              </p:ext>
+            </p:extLst>
+          </p:nvPr>
+        </p:nvGraphicFramePr>
+        <p:xfrm>
+          <a:off x="4609322" y="1707502"/>
+          <a:ext cx="6214188" cy="4281116"/>
+        </p:xfrm>
+        <a:graphic>
+          <a:graphicData uri="http://schemas.openxmlformats.org/drawingml/2006/table">
+            <a:tbl>
+              <a:tblPr firstRow="1" bandRow="1">
+                <a:tableStyleId>{21E4AEA4-8DFA-4A89-87EB-49C32662AFE0}</a:tableStyleId>
+              </a:tblPr>
+              <a:tblGrid>
+                <a:gridCol w="3107094">
+                  <a:extLst>
+                    <a:ext uri="{9D8B030D-6E8A-4147-A177-3AD203B41FA5}">
+                      <a16:colId xmlns:a16="http://schemas.microsoft.com/office/drawing/2014/main" val="3809859597"/>
+                    </a:ext>
+                  </a:extLst>
+                </a:gridCol>
+                <a:gridCol w="3107094">
+                  <a:extLst>
+                    <a:ext uri="{9D8B030D-6E8A-4147-A177-3AD203B41FA5}">
+                      <a16:colId xmlns:a16="http://schemas.microsoft.com/office/drawing/2014/main" val="2366207377"/>
+                    </a:ext>
+                  </a:extLst>
+                </a:gridCol>
+              </a:tblGrid>
+              <a:tr h="524847">
+                <a:tc>
+                  <a:txBody>
+                    <a:bodyPr/>
+                    <a:lstStyle/>
+                    <a:p>
+                      <a:pPr algn="just">
+                        <a:lnSpc>
+                          <a:spcPct val="150000"/>
+                        </a:lnSpc>
+                      </a:pPr>
+                      <a:r>
+                        <a:rPr lang="en-ZA" sz="1400" dirty="0">
+                          <a:solidFill>
+                            <a:schemeClr val="tx2"/>
+                          </a:solidFill>
+                          <a:latin typeface="Times New Roman" panose="02020603050405020304" pitchFamily="18" charset="0"/>
+                          <a:cs typeface="Times New Roman" panose="02020603050405020304" pitchFamily="18" charset="0"/>
+                        </a:rPr>
+                        <a:t>Feature</a:t>
+                      </a:r>
+                    </a:p>
+                  </a:txBody>
+                  <a:tcPr/>
+                </a:tc>
+                <a:tc>
+                  <a:txBody>
+                    <a:bodyPr/>
+                    <a:lstStyle/>
+                    <a:p>
+                      <a:pPr algn="just">
+                        <a:lnSpc>
+                          <a:spcPct val="150000"/>
+                        </a:lnSpc>
+                      </a:pPr>
+                      <a:r>
+                        <a:rPr lang="en-ZA" sz="1400" dirty="0">
+                          <a:solidFill>
+                            <a:schemeClr val="tx2"/>
+                          </a:solidFill>
+                          <a:latin typeface="Times New Roman" panose="02020603050405020304" pitchFamily="18" charset="0"/>
+                          <a:cs typeface="Times New Roman" panose="02020603050405020304" pitchFamily="18" charset="0"/>
+                        </a:rPr>
+                        <a:t>Description</a:t>
+                      </a:r>
+                    </a:p>
+                  </a:txBody>
+                  <a:tcPr/>
+                </a:tc>
+                <a:extLst>
+                  <a:ext uri="{0D108BD9-81ED-4DB2-BD59-A6C34878D82A}">
+                    <a16:rowId xmlns:a16="http://schemas.microsoft.com/office/drawing/2014/main" val="362794694"/>
+                  </a:ext>
+                </a:extLst>
+              </a:tr>
+              <a:tr h="524847">
+                <a:tc>
+                  <a:txBody>
+                    <a:bodyPr/>
+                    <a:lstStyle/>
+                    <a:p>
+                      <a:pPr algn="just">
+                        <a:lnSpc>
+                          <a:spcPct val="150000"/>
+                        </a:lnSpc>
+                      </a:pPr>
+                      <a:r>
+                        <a:rPr lang="en-ZA" sz="1200" dirty="0" err="1">
+                          <a:solidFill>
+                            <a:schemeClr val="tx2"/>
+                          </a:solidFill>
+                          <a:latin typeface="Times New Roman" panose="02020603050405020304" pitchFamily="18" charset="0"/>
+                          <a:cs typeface="Times New Roman" panose="02020603050405020304" pitchFamily="18" charset="0"/>
+                        </a:rPr>
+                        <a:t>person_age</a:t>
+                      </a:r>
+                      <a:r>
+                        <a:rPr lang="en-ZA" sz="1200" dirty="0">
+                          <a:solidFill>
+                            <a:schemeClr val="tx2"/>
+                          </a:solidFill>
+                          <a:latin typeface="Times New Roman" panose="02020603050405020304" pitchFamily="18" charset="0"/>
+                          <a:cs typeface="Times New Roman" panose="02020603050405020304" pitchFamily="18" charset="0"/>
+                        </a:rPr>
+                        <a:t> / </a:t>
+                      </a:r>
+                      <a:r>
+                        <a:rPr lang="en-ZA" sz="1200" dirty="0" err="1">
+                          <a:solidFill>
+                            <a:schemeClr val="tx2"/>
+                          </a:solidFill>
+                          <a:latin typeface="Times New Roman" panose="02020603050405020304" pitchFamily="18" charset="0"/>
+                          <a:cs typeface="Times New Roman" panose="02020603050405020304" pitchFamily="18" charset="0"/>
+                        </a:rPr>
+                        <a:t>person_income</a:t>
+                      </a:r>
+                      <a:endParaRPr lang="en-ZA" sz="1200" dirty="0">
+                        <a:solidFill>
+                          <a:schemeClr val="tx2"/>
+                        </a:solidFill>
+                        <a:latin typeface="Times New Roman" panose="02020603050405020304" pitchFamily="18" charset="0"/>
+                        <a:cs typeface="Times New Roman" panose="02020603050405020304" pitchFamily="18" charset="0"/>
+                      </a:endParaRPr>
+                    </a:p>
+                  </a:txBody>
+                  <a:tcPr/>
+                </a:tc>
+                <a:tc>
+                  <a:txBody>
+                    <a:bodyPr/>
+                    <a:lstStyle/>
+                    <a:p>
+                      <a:pPr algn="just">
+                        <a:lnSpc>
+                          <a:spcPct val="150000"/>
+                        </a:lnSpc>
+                      </a:pPr>
+                      <a:r>
+                        <a:rPr lang="en-ZA" sz="1200" dirty="0">
+                          <a:solidFill>
+                            <a:schemeClr val="tx2"/>
+                          </a:solidFill>
+                          <a:latin typeface="Times New Roman" panose="02020603050405020304" pitchFamily="18" charset="0"/>
+                          <a:cs typeface="Times New Roman" panose="02020603050405020304" pitchFamily="18" charset="0"/>
+                        </a:rPr>
+                        <a:t>Applicant demographics.</a:t>
+                      </a:r>
+                    </a:p>
+                  </a:txBody>
+                  <a:tcPr/>
+                </a:tc>
+                <a:extLst>
+                  <a:ext uri="{0D108BD9-81ED-4DB2-BD59-A6C34878D82A}">
+                    <a16:rowId xmlns:a16="http://schemas.microsoft.com/office/drawing/2014/main" val="3512058764"/>
+                  </a:ext>
+                </a:extLst>
+              </a:tr>
+              <a:tr h="524847">
+                <a:tc>
+                  <a:txBody>
+                    <a:bodyPr/>
+                    <a:lstStyle/>
+                    <a:p>
+                      <a:pPr algn="just">
+                        <a:lnSpc>
+                          <a:spcPct val="150000"/>
+                        </a:lnSpc>
+                      </a:pPr>
+                      <a:r>
+                        <a:rPr lang="en-ZA" sz="1200" dirty="0" err="1">
+                          <a:solidFill>
+                            <a:schemeClr val="tx2"/>
+                          </a:solidFill>
+                          <a:latin typeface="Times New Roman" panose="02020603050405020304" pitchFamily="18" charset="0"/>
+                          <a:cs typeface="Times New Roman" panose="02020603050405020304" pitchFamily="18" charset="0"/>
+                        </a:rPr>
+                        <a:t>person_home_ownership</a:t>
+                      </a:r>
+                      <a:r>
+                        <a:rPr lang="en-ZA" sz="1200" dirty="0">
+                          <a:solidFill>
+                            <a:schemeClr val="tx2"/>
+                          </a:solidFill>
+                          <a:latin typeface="Times New Roman" panose="02020603050405020304" pitchFamily="18" charset="0"/>
+                          <a:cs typeface="Times New Roman" panose="02020603050405020304" pitchFamily="18" charset="0"/>
+                        </a:rPr>
+                        <a:t> / </a:t>
+                      </a:r>
+                      <a:r>
+                        <a:rPr lang="en-ZA" sz="1200" dirty="0" err="1">
+                          <a:solidFill>
+                            <a:schemeClr val="tx2"/>
+                          </a:solidFill>
+                          <a:latin typeface="Times New Roman" panose="02020603050405020304" pitchFamily="18" charset="0"/>
+                          <a:cs typeface="Times New Roman" panose="02020603050405020304" pitchFamily="18" charset="0"/>
+                        </a:rPr>
+                        <a:t>person_emp_length</a:t>
+                      </a:r>
+                      <a:endParaRPr lang="en-ZA" sz="1200" dirty="0">
+                        <a:solidFill>
+                          <a:schemeClr val="tx2"/>
+                        </a:solidFill>
+                        <a:latin typeface="Times New Roman" panose="02020603050405020304" pitchFamily="18" charset="0"/>
+                        <a:cs typeface="Times New Roman" panose="02020603050405020304" pitchFamily="18" charset="0"/>
+                      </a:endParaRPr>
+                    </a:p>
+                  </a:txBody>
+                  <a:tcPr/>
+                </a:tc>
+                <a:tc>
+                  <a:txBody>
+                    <a:bodyPr/>
+                    <a:lstStyle/>
+                    <a:p>
+                      <a:pPr algn="just">
+                        <a:lnSpc>
+                          <a:spcPct val="150000"/>
+                        </a:lnSpc>
+                      </a:pPr>
+                      <a:r>
+                        <a:rPr lang="en-ZA" sz="1200" dirty="0">
+                          <a:solidFill>
+                            <a:schemeClr val="tx2"/>
+                          </a:solidFill>
+                          <a:latin typeface="Times New Roman" panose="02020603050405020304" pitchFamily="18" charset="0"/>
+                          <a:cs typeface="Times New Roman" panose="02020603050405020304" pitchFamily="18" charset="0"/>
+                        </a:rPr>
+                        <a:t>Housing status and years employed.</a:t>
+                      </a:r>
+                    </a:p>
+                  </a:txBody>
+                  <a:tcPr/>
+                </a:tc>
+                <a:extLst>
+                  <a:ext uri="{0D108BD9-81ED-4DB2-BD59-A6C34878D82A}">
+                    <a16:rowId xmlns:a16="http://schemas.microsoft.com/office/drawing/2014/main" val="2206363679"/>
+                  </a:ext>
+                </a:extLst>
+              </a:tr>
+              <a:tr h="524847">
+                <a:tc>
+                  <a:txBody>
+                    <a:bodyPr/>
+                    <a:lstStyle/>
+                    <a:p>
+                      <a:pPr algn="just">
+                        <a:lnSpc>
+                          <a:spcPct val="150000"/>
+                        </a:lnSpc>
+                      </a:pPr>
+                      <a:r>
+                        <a:rPr lang="en-ZA" sz="1200" dirty="0" err="1">
+                          <a:solidFill>
+                            <a:schemeClr val="tx2"/>
+                          </a:solidFill>
+                          <a:latin typeface="Times New Roman" panose="02020603050405020304" pitchFamily="18" charset="0"/>
+                          <a:cs typeface="Times New Roman" panose="02020603050405020304" pitchFamily="18" charset="0"/>
+                        </a:rPr>
+                        <a:t>loan_intent</a:t>
+                      </a:r>
+                      <a:r>
+                        <a:rPr lang="en-ZA" sz="1200" dirty="0">
+                          <a:solidFill>
+                            <a:schemeClr val="tx2"/>
+                          </a:solidFill>
+                          <a:latin typeface="Times New Roman" panose="02020603050405020304" pitchFamily="18" charset="0"/>
+                          <a:cs typeface="Times New Roman" panose="02020603050405020304" pitchFamily="18" charset="0"/>
+                        </a:rPr>
+                        <a:t> / </a:t>
+                      </a:r>
+                      <a:r>
+                        <a:rPr lang="en-ZA" sz="1200" dirty="0" err="1">
+                          <a:solidFill>
+                            <a:schemeClr val="tx2"/>
+                          </a:solidFill>
+                          <a:latin typeface="Times New Roman" panose="02020603050405020304" pitchFamily="18" charset="0"/>
+                          <a:cs typeface="Times New Roman" panose="02020603050405020304" pitchFamily="18" charset="0"/>
+                        </a:rPr>
+                        <a:t>loan_grade</a:t>
+                      </a:r>
+                      <a:endParaRPr lang="en-ZA" sz="1200" dirty="0">
+                        <a:solidFill>
+                          <a:schemeClr val="tx2"/>
+                        </a:solidFill>
+                        <a:latin typeface="Times New Roman" panose="02020603050405020304" pitchFamily="18" charset="0"/>
+                        <a:cs typeface="Times New Roman" panose="02020603050405020304" pitchFamily="18" charset="0"/>
+                      </a:endParaRPr>
+                    </a:p>
+                  </a:txBody>
+                  <a:tcPr/>
+                </a:tc>
+                <a:tc>
+                  <a:txBody>
+                    <a:bodyPr/>
+                    <a:lstStyle/>
+                    <a:p>
+                      <a:pPr algn="just">
+                        <a:lnSpc>
+                          <a:spcPct val="150000"/>
+                        </a:lnSpc>
+                      </a:pPr>
+                      <a:r>
+                        <a:rPr lang="en-ZA" sz="1200" dirty="0">
+                          <a:solidFill>
+                            <a:schemeClr val="tx2"/>
+                          </a:solidFill>
+                          <a:latin typeface="Times New Roman" panose="02020603050405020304" pitchFamily="18" charset="0"/>
+                          <a:cs typeface="Times New Roman" panose="02020603050405020304" pitchFamily="18" charset="0"/>
+                        </a:rPr>
+                        <a:t>Purpose and internal risk grade (A-G).</a:t>
+                      </a:r>
+                    </a:p>
+                  </a:txBody>
+                  <a:tcPr/>
+                </a:tc>
+                <a:extLst>
+                  <a:ext uri="{0D108BD9-81ED-4DB2-BD59-A6C34878D82A}">
+                    <a16:rowId xmlns:a16="http://schemas.microsoft.com/office/drawing/2014/main" val="488254932"/>
+                  </a:ext>
+                </a:extLst>
+              </a:tr>
+              <a:tr h="524847">
+                <a:tc>
+                  <a:txBody>
+                    <a:bodyPr/>
+                    <a:lstStyle/>
+                    <a:p>
+                      <a:pPr algn="just">
+                        <a:lnSpc>
+                          <a:spcPct val="150000"/>
+                        </a:lnSpc>
+                      </a:pPr>
+                      <a:r>
+                        <a:rPr lang="en-ZA" sz="1200" dirty="0" err="1">
+                          <a:solidFill>
+                            <a:schemeClr val="tx2"/>
+                          </a:solidFill>
+                          <a:latin typeface="Times New Roman" panose="02020603050405020304" pitchFamily="18" charset="0"/>
+                          <a:cs typeface="Times New Roman" panose="02020603050405020304" pitchFamily="18" charset="0"/>
+                        </a:rPr>
+                        <a:t>loan_amnt</a:t>
+                      </a:r>
+                      <a:r>
+                        <a:rPr lang="en-ZA" sz="1200" dirty="0">
+                          <a:solidFill>
+                            <a:schemeClr val="tx2"/>
+                          </a:solidFill>
+                          <a:latin typeface="Times New Roman" panose="02020603050405020304" pitchFamily="18" charset="0"/>
+                          <a:cs typeface="Times New Roman" panose="02020603050405020304" pitchFamily="18" charset="0"/>
+                        </a:rPr>
+                        <a:t> / </a:t>
+                      </a:r>
+                      <a:r>
+                        <a:rPr lang="en-ZA" sz="1200" dirty="0" err="1">
+                          <a:solidFill>
+                            <a:schemeClr val="tx2"/>
+                          </a:solidFill>
+                          <a:latin typeface="Times New Roman" panose="02020603050405020304" pitchFamily="18" charset="0"/>
+                          <a:cs typeface="Times New Roman" panose="02020603050405020304" pitchFamily="18" charset="0"/>
+                        </a:rPr>
+                        <a:t>loan_int_rate</a:t>
+                      </a:r>
+                      <a:endParaRPr lang="en-ZA" sz="1200" dirty="0">
+                        <a:solidFill>
+                          <a:schemeClr val="tx2"/>
+                        </a:solidFill>
+                        <a:latin typeface="Times New Roman" panose="02020603050405020304" pitchFamily="18" charset="0"/>
+                        <a:cs typeface="Times New Roman" panose="02020603050405020304" pitchFamily="18" charset="0"/>
+                      </a:endParaRPr>
+                    </a:p>
+                  </a:txBody>
+                  <a:tcPr/>
+                </a:tc>
+                <a:tc>
+                  <a:txBody>
+                    <a:bodyPr/>
+                    <a:lstStyle/>
+                    <a:p>
+                      <a:pPr algn="just">
+                        <a:lnSpc>
+                          <a:spcPct val="150000"/>
+                        </a:lnSpc>
+                      </a:pPr>
+                      <a:r>
+                        <a:rPr lang="en-ZA" sz="1200" dirty="0">
+                          <a:solidFill>
+                            <a:schemeClr val="tx2"/>
+                          </a:solidFill>
+                          <a:latin typeface="Times New Roman" panose="02020603050405020304" pitchFamily="18" charset="0"/>
+                          <a:cs typeface="Times New Roman" panose="02020603050405020304" pitchFamily="18" charset="0"/>
+                        </a:rPr>
+                        <a:t>Loan size and interest rate.</a:t>
+                      </a:r>
+                    </a:p>
+                  </a:txBody>
+                  <a:tcPr/>
+                </a:tc>
+                <a:extLst>
+                  <a:ext uri="{0D108BD9-81ED-4DB2-BD59-A6C34878D82A}">
+                    <a16:rowId xmlns:a16="http://schemas.microsoft.com/office/drawing/2014/main" val="2212963552"/>
+                  </a:ext>
+                </a:extLst>
+              </a:tr>
+              <a:tr h="524847">
+                <a:tc>
+                  <a:txBody>
+                    <a:bodyPr/>
+                    <a:lstStyle/>
+                    <a:p>
+                      <a:pPr algn="just">
+                        <a:lnSpc>
+                          <a:spcPct val="150000"/>
+                        </a:lnSpc>
+                      </a:pPr>
+                      <a:r>
+                        <a:rPr lang="en-ZA" sz="1200" dirty="0" err="1">
+                          <a:solidFill>
+                            <a:schemeClr val="tx2"/>
+                          </a:solidFill>
+                          <a:latin typeface="Times New Roman" panose="02020603050405020304" pitchFamily="18" charset="0"/>
+                          <a:cs typeface="Times New Roman" panose="02020603050405020304" pitchFamily="18" charset="0"/>
+                        </a:rPr>
+                        <a:t>loan_percent_income</a:t>
+                      </a:r>
+                      <a:endParaRPr lang="en-ZA" sz="1200" dirty="0">
+                        <a:solidFill>
+                          <a:schemeClr val="tx2"/>
+                        </a:solidFill>
+                        <a:latin typeface="Times New Roman" panose="02020603050405020304" pitchFamily="18" charset="0"/>
+                        <a:cs typeface="Times New Roman" panose="02020603050405020304" pitchFamily="18" charset="0"/>
+                      </a:endParaRPr>
+                    </a:p>
+                  </a:txBody>
+                  <a:tcPr/>
+                </a:tc>
+                <a:tc>
+                  <a:txBody>
+                    <a:bodyPr/>
+                    <a:lstStyle/>
+                    <a:p>
+                      <a:pPr algn="just">
+                        <a:lnSpc>
+                          <a:spcPct val="150000"/>
+                        </a:lnSpc>
+                      </a:pPr>
+                      <a:r>
+                        <a:rPr lang="en-ZA" sz="1200" dirty="0">
+                          <a:solidFill>
+                            <a:schemeClr val="tx2"/>
+                          </a:solidFill>
+                          <a:latin typeface="Times New Roman" panose="02020603050405020304" pitchFamily="18" charset="0"/>
+                          <a:cs typeface="Times New Roman" panose="02020603050405020304" pitchFamily="18" charset="0"/>
+                        </a:rPr>
+                        <a:t>Loan amount as % of income.</a:t>
+                      </a:r>
+                    </a:p>
+                  </a:txBody>
+                  <a:tcPr/>
+                </a:tc>
+                <a:extLst>
+                  <a:ext uri="{0D108BD9-81ED-4DB2-BD59-A6C34878D82A}">
+                    <a16:rowId xmlns:a16="http://schemas.microsoft.com/office/drawing/2014/main" val="721878911"/>
+                  </a:ext>
+                </a:extLst>
+              </a:tr>
+              <a:tr h="524847">
+                <a:tc>
+                  <a:txBody>
+                    <a:bodyPr/>
+                    <a:lstStyle/>
+                    <a:p>
+                      <a:pPr algn="just">
+                        <a:lnSpc>
+                          <a:spcPct val="150000"/>
+                        </a:lnSpc>
+                      </a:pPr>
+                      <a:r>
+                        <a:rPr lang="en-ZA" sz="1200" dirty="0" err="1">
+                          <a:solidFill>
+                            <a:schemeClr val="tx2"/>
+                          </a:solidFill>
+                          <a:latin typeface="Times New Roman" panose="02020603050405020304" pitchFamily="18" charset="0"/>
+                          <a:cs typeface="Times New Roman" panose="02020603050405020304" pitchFamily="18" charset="0"/>
+                        </a:rPr>
+                        <a:t>cb_person_default_on_file</a:t>
+                      </a:r>
+                      <a:r>
+                        <a:rPr lang="en-ZA" sz="1200" dirty="0">
+                          <a:solidFill>
+                            <a:schemeClr val="tx2"/>
+                          </a:solidFill>
+                          <a:latin typeface="Times New Roman" panose="02020603050405020304" pitchFamily="18" charset="0"/>
+                          <a:cs typeface="Times New Roman" panose="02020603050405020304" pitchFamily="18" charset="0"/>
+                        </a:rPr>
+                        <a:t> / </a:t>
+                      </a:r>
+                      <a:r>
+                        <a:rPr lang="en-ZA" sz="1200" dirty="0" err="1">
+                          <a:solidFill>
+                            <a:schemeClr val="tx2"/>
+                          </a:solidFill>
+                          <a:latin typeface="Times New Roman" panose="02020603050405020304" pitchFamily="18" charset="0"/>
+                          <a:cs typeface="Times New Roman" panose="02020603050405020304" pitchFamily="18" charset="0"/>
+                        </a:rPr>
+                        <a:t>cred_hist_length</a:t>
+                      </a:r>
+                      <a:endParaRPr lang="en-ZA" sz="1200" dirty="0">
+                        <a:solidFill>
+                          <a:schemeClr val="tx2"/>
+                        </a:solidFill>
+                        <a:latin typeface="Times New Roman" panose="02020603050405020304" pitchFamily="18" charset="0"/>
+                        <a:cs typeface="Times New Roman" panose="02020603050405020304" pitchFamily="18" charset="0"/>
+                      </a:endParaRPr>
+                    </a:p>
+                  </a:txBody>
+                  <a:tcPr/>
+                </a:tc>
+                <a:tc>
+                  <a:txBody>
+                    <a:bodyPr/>
+                    <a:lstStyle/>
+                    <a:p>
+                      <a:pPr algn="just">
+                        <a:lnSpc>
+                          <a:spcPct val="150000"/>
+                        </a:lnSpc>
+                      </a:pPr>
+                      <a:r>
+                        <a:rPr lang="en-ZA" sz="1200" dirty="0">
+                          <a:solidFill>
+                            <a:schemeClr val="tx2"/>
+                          </a:solidFill>
+                          <a:latin typeface="Times New Roman" panose="02020603050405020304" pitchFamily="18" charset="0"/>
+                          <a:cs typeface="Times New Roman" panose="02020603050405020304" pitchFamily="18" charset="0"/>
+                        </a:rPr>
+                        <a:t>Prior default flag and credit history length.</a:t>
+                      </a:r>
+                    </a:p>
+                  </a:txBody>
+                  <a:tcPr/>
+                </a:tc>
+                <a:extLst>
+                  <a:ext uri="{0D108BD9-81ED-4DB2-BD59-A6C34878D82A}">
+                    <a16:rowId xmlns:a16="http://schemas.microsoft.com/office/drawing/2014/main" val="1646669565"/>
+                  </a:ext>
+                </a:extLst>
+              </a:tr>
+              <a:tr h="524847">
+                <a:tc>
+                  <a:txBody>
+                    <a:bodyPr/>
+                    <a:lstStyle/>
+                    <a:p>
+                      <a:pPr algn="just">
+                        <a:lnSpc>
+                          <a:spcPct val="150000"/>
+                        </a:lnSpc>
+                      </a:pPr>
+                      <a:r>
+                        <a:rPr lang="en-ZA" sz="1200" dirty="0" err="1">
+                          <a:solidFill>
+                            <a:schemeClr val="tx2"/>
+                          </a:solidFill>
+                          <a:latin typeface="Times New Roman" panose="02020603050405020304" pitchFamily="18" charset="0"/>
+                          <a:cs typeface="Times New Roman" panose="02020603050405020304" pitchFamily="18" charset="0"/>
+                        </a:rPr>
+                        <a:t>loan_status</a:t>
+                      </a:r>
+                      <a:r>
+                        <a:rPr lang="en-ZA" sz="1200" dirty="0">
+                          <a:solidFill>
+                            <a:schemeClr val="tx2"/>
+                          </a:solidFill>
+                          <a:latin typeface="Times New Roman" panose="02020603050405020304" pitchFamily="18" charset="0"/>
+                          <a:cs typeface="Times New Roman" panose="02020603050405020304" pitchFamily="18" charset="0"/>
+                        </a:rPr>
+                        <a:t> (target)</a:t>
+                      </a:r>
+                    </a:p>
+                  </a:txBody>
+                  <a:tcPr/>
+                </a:tc>
+                <a:tc>
+                  <a:txBody>
+                    <a:bodyPr/>
+                    <a:lstStyle/>
+                    <a:p>
+                      <a:pPr algn="just">
+                        <a:lnSpc>
+                          <a:spcPct val="150000"/>
+                        </a:lnSpc>
+                      </a:pPr>
+                      <a:r>
+                        <a:rPr lang="en-ZA" sz="1200" dirty="0">
+                          <a:solidFill>
+                            <a:schemeClr val="tx2"/>
+                          </a:solidFill>
+                          <a:latin typeface="Times New Roman" panose="02020603050405020304" pitchFamily="18" charset="0"/>
+                          <a:cs typeface="Times New Roman" panose="02020603050405020304" pitchFamily="18" charset="0"/>
+                        </a:rPr>
+                        <a:t>0 = Low risk or repaid</a:t>
+                      </a:r>
+                    </a:p>
+                    <a:p>
+                      <a:pPr algn="just">
+                        <a:lnSpc>
+                          <a:spcPct val="150000"/>
+                        </a:lnSpc>
+                      </a:pPr>
+                      <a:r>
+                        <a:rPr lang="en-ZA" sz="1200" dirty="0">
+                          <a:solidFill>
+                            <a:schemeClr val="tx2"/>
+                          </a:solidFill>
+                          <a:latin typeface="Times New Roman" panose="02020603050405020304" pitchFamily="18" charset="0"/>
+                          <a:cs typeface="Times New Roman" panose="02020603050405020304" pitchFamily="18" charset="0"/>
+                        </a:rPr>
+                        <a:t>1 = High risk or default</a:t>
+                      </a:r>
+                    </a:p>
+                  </a:txBody>
+                  <a:tcPr/>
+                </a:tc>
+                <a:extLst>
+                  <a:ext uri="{0D108BD9-81ED-4DB2-BD59-A6C34878D82A}">
+                    <a16:rowId xmlns:a16="http://schemas.microsoft.com/office/drawing/2014/main" val="674524751"/>
+                  </a:ext>
+                </a:extLst>
+              </a:tr>
+            </a:tbl>
+          </a:graphicData>
+        </a:graphic>
+      </p:graphicFrame>
+      <p:sp>
+        <p:nvSpPr>
+          <p:cNvPr id="14" name="Slide Number Placeholder 13">
+            <a:extLst>
+              <a:ext uri="{FF2B5EF4-FFF2-40B4-BE49-F238E27FC236}">
+                <a16:creationId xmlns:a16="http://schemas.microsoft.com/office/drawing/2014/main" id="{72FED5DD-E26C-FA2C-5DF4-C2729C74B6E3}"/>
+              </a:ext>
+            </a:extLst>
+          </p:cNvPr>
+          <p:cNvSpPr>
+            <a:spLocks noGrp="1"/>
+          </p:cNvSpPr>
+          <p:nvPr>
+            <p:ph type="sldNum" sz="quarter" idx="12"/>
+          </p:nvPr>
+        </p:nvSpPr>
+        <p:spPr/>
+        <p:txBody>
+          <a:bodyPr/>
+          <a:lstStyle/>
+          <a:p>
+            <a:fld id="{AEAA3239-9EA4-4A65-A281-97F994456D9F}" type="slidenum">
+              <a:rPr lang="en-US" smtClean="0"/>
+              <a:t>3</a:t>
+            </a:fld>
+            <a:endParaRPr lang="en-US"/>
+          </a:p>
+        </p:txBody>
+      </p:sp>
+    </p:spTree>
+    <p:extLst>
+      <p:ext uri="{BB962C8B-B14F-4D97-AF65-F5344CB8AC3E}">
+        <p14:creationId xmlns:p14="http://schemas.microsoft.com/office/powerpoint/2010/main" val="1420003605"/>
+      </p:ext>
+    </p:extLst>
+  </p:cSld>
+  <p:clrMapOvr>
+    <a:masterClrMapping/>
+  </p:clrMapOvr>
+</p:sld>
+</file>
+
+<file path=ppt/slides/slide4.xml><?xml version="1.0" encoding="utf-8"?>
+<p:sld xmlns:a="http://schemas.openxmlformats.org/drawingml/2006/main" xmlns:r="http://schemas.openxmlformats.org/officeDocument/2006/relationships" xmlns:p="http://schemas.openxmlformats.org/presentationml/2006/main">
+  <p:cSld>
+    <p:spTree>
+      <p:nvGrpSpPr>
+        <p:cNvPr id="1" name=""/>
+        <p:cNvGrpSpPr/>
+        <p:nvPr/>
+      </p:nvGrpSpPr>
+      <p:grpSpPr>
+        <a:xfrm>
+          <a:off x="0" y="0"/>
+          <a:ext cx="0" cy="0"/>
+          <a:chOff x="0" y="0"/>
+          <a:chExt cx="0" cy="0"/>
+        </a:xfrm>
+      </p:grpSpPr>
+      <p:sp>
+        <p:nvSpPr>
+          <p:cNvPr id="2" name="Slide Number Placeholder 1">
+            <a:extLst>
+              <a:ext uri="{FF2B5EF4-FFF2-40B4-BE49-F238E27FC236}">
+                <a16:creationId xmlns:a16="http://schemas.microsoft.com/office/drawing/2014/main" id="{0FACBEB7-405D-D9E7-6FA3-2C195E2FA638}"/>
+              </a:ext>
+            </a:extLst>
+          </p:cNvPr>
+          <p:cNvSpPr>
+            <a:spLocks noGrp="1"/>
+          </p:cNvSpPr>
+          <p:nvPr>
+            <p:ph type="sldNum" sz="quarter" idx="12"/>
+          </p:nvPr>
+        </p:nvSpPr>
+        <p:spPr/>
+        <p:txBody>
+          <a:bodyPr/>
+          <a:lstStyle/>
+          <a:p>
+            <a:fld id="{AEAA3239-9EA4-4A65-A281-97F994456D9F}" type="slidenum">
+              <a:rPr lang="en-US" smtClean="0"/>
+              <a:t>4</a:t>
+            </a:fld>
+            <a:endParaRPr lang="en-US"/>
+          </a:p>
+        </p:txBody>
+      </p:sp>
+      <p:sp>
+        <p:nvSpPr>
+          <p:cNvPr id="4" name="TextBox 3">
+            <a:extLst>
+              <a:ext uri="{FF2B5EF4-FFF2-40B4-BE49-F238E27FC236}">
+                <a16:creationId xmlns:a16="http://schemas.microsoft.com/office/drawing/2014/main" id="{34C5732B-A0FC-6BE7-66B4-BD16ABA69C2E}"/>
+              </a:ext>
+            </a:extLst>
+          </p:cNvPr>
+          <p:cNvSpPr txBox="1"/>
+          <p:nvPr/>
+        </p:nvSpPr>
+        <p:spPr>
+          <a:xfrm>
+            <a:off x="4377420" y="530001"/>
+            <a:ext cx="3437159" cy="661207"/>
+          </a:xfrm>
+          <a:prstGeom prst="rect">
+            <a:avLst/>
+          </a:prstGeom>
+          <a:noFill/>
+        </p:spPr>
+        <p:txBody>
+          <a:bodyPr wrap="none" rtlCol="0">
+            <a:spAutoFit/>
+          </a:bodyPr>
+          <a:lstStyle/>
+          <a:p>
+            <a:pPr>
+              <a:lnSpc>
+                <a:spcPct val="150000"/>
+              </a:lnSpc>
+            </a:pPr>
+            <a:r>
+              <a:rPr lang="en-ZA" sz="2800" b="1" dirty="0">
+                <a:solidFill>
+                  <a:schemeClr val="tx2"/>
+                </a:solidFill>
+                <a:latin typeface="Times New Roman" panose="02020603050405020304" pitchFamily="18" charset="0"/>
+                <a:cs typeface="Times New Roman" panose="02020603050405020304" pitchFamily="18" charset="0"/>
+              </a:rPr>
+              <a:t>Data issues identified</a:t>
+            </a:r>
+          </a:p>
+        </p:txBody>
+      </p:sp>
+      <p:grpSp>
+        <p:nvGrpSpPr>
+          <p:cNvPr id="20" name="Group 19">
+            <a:extLst>
+              <a:ext uri="{FF2B5EF4-FFF2-40B4-BE49-F238E27FC236}">
+                <a16:creationId xmlns:a16="http://schemas.microsoft.com/office/drawing/2014/main" id="{452FD5C8-F8BA-B7F9-0F73-AB18189159C9}"/>
+              </a:ext>
+            </a:extLst>
+          </p:cNvPr>
+          <p:cNvGrpSpPr/>
+          <p:nvPr/>
+        </p:nvGrpSpPr>
+        <p:grpSpPr>
+          <a:xfrm>
+            <a:off x="447870" y="1903446"/>
+            <a:ext cx="10260562" cy="3763346"/>
+            <a:chOff x="447870" y="1903446"/>
+            <a:chExt cx="10260562" cy="3763346"/>
+          </a:xfrm>
+        </p:grpSpPr>
+        <p:sp>
+          <p:nvSpPr>
+            <p:cNvPr id="5" name="Rectangle: Rounded Corners 4">
+              <a:extLst>
+                <a:ext uri="{FF2B5EF4-FFF2-40B4-BE49-F238E27FC236}">
+                  <a16:creationId xmlns:a16="http://schemas.microsoft.com/office/drawing/2014/main" id="{F16DFC1D-4B85-6FFB-08AF-FF5552E231FF}"/>
+                </a:ext>
+              </a:extLst>
+            </p:cNvPr>
+            <p:cNvSpPr/>
+            <p:nvPr/>
+          </p:nvSpPr>
+          <p:spPr>
+            <a:xfrm>
+              <a:off x="447870" y="1903446"/>
+              <a:ext cx="3013788" cy="1623526"/>
+            </a:xfrm>
+            <a:prstGeom prst="roundRect">
+              <a:avLst/>
+            </a:prstGeom>
+            <a:solidFill>
+              <a:schemeClr val="accent2">
+                <a:lumMod val="20000"/>
+                <a:lumOff val="80000"/>
+              </a:schemeClr>
+            </a:solidFill>
+            <a:ln>
+              <a:solidFill>
+                <a:schemeClr val="accent2">
+                  <a:lumMod val="20000"/>
+                  <a:lumOff val="80000"/>
+                </a:schemeClr>
+              </a:solidFill>
+            </a:ln>
+          </p:spPr>
+          <p:style>
+            <a:lnRef idx="2">
+              <a:schemeClr val="accent1">
+                <a:shade val="15000"/>
+              </a:schemeClr>
+            </a:lnRef>
+            <a:fillRef idx="1">
+              <a:schemeClr val="accent1"/>
+            </a:fillRef>
+            <a:effectRef idx="0">
+              <a:schemeClr val="accent1"/>
+            </a:effectRef>
+            <a:fontRef idx="minor">
+              <a:schemeClr val="lt1"/>
+            </a:fontRef>
+          </p:style>
+          <p:txBody>
+            <a:bodyPr rtlCol="0" anchor="ctr"/>
+            <a:lstStyle/>
+            <a:p>
+              <a:pPr marL="342900" indent="-342900">
+                <a:lnSpc>
+                  <a:spcPct val="150000"/>
+                </a:lnSpc>
+                <a:buFont typeface="Wingdings" panose="05000000000000000000" pitchFamily="2" charset="2"/>
+                <a:buChar char="q"/>
+              </a:pPr>
+              <a:r>
+                <a:rPr lang="en-ZA" sz="1600" b="1" dirty="0">
+                  <a:solidFill>
+                    <a:schemeClr val="accent3">
+                      <a:lumMod val="75000"/>
+                    </a:schemeClr>
+                  </a:solidFill>
+                  <a:latin typeface="Times New Roman" panose="02020603050405020304" pitchFamily="18" charset="0"/>
+                  <a:cs typeface="Times New Roman" panose="02020603050405020304" pitchFamily="18" charset="0"/>
+                </a:rPr>
+                <a:t>Missing values</a:t>
+              </a:r>
+            </a:p>
+            <a:p>
+              <a:pPr>
+                <a:lnSpc>
+                  <a:spcPct val="150000"/>
+                </a:lnSpc>
+              </a:pPr>
+              <a:r>
+                <a:rPr lang="en-ZA" sz="1200" dirty="0" err="1">
+                  <a:solidFill>
+                    <a:schemeClr val="tx2"/>
+                  </a:solidFill>
+                  <a:latin typeface="Times New Roman" panose="02020603050405020304" pitchFamily="18" charset="0"/>
+                  <a:cs typeface="Times New Roman" panose="02020603050405020304" pitchFamily="18" charset="0"/>
+                </a:rPr>
+                <a:t>loan_int_rate</a:t>
+              </a:r>
+              <a:r>
+                <a:rPr lang="en-ZA" sz="1200" dirty="0">
+                  <a:solidFill>
+                    <a:schemeClr val="tx2"/>
+                  </a:solidFill>
+                  <a:latin typeface="Times New Roman" panose="02020603050405020304" pitchFamily="18" charset="0"/>
+                  <a:cs typeface="Times New Roman" panose="02020603050405020304" pitchFamily="18" charset="0"/>
+                </a:rPr>
+                <a:t>: 3 116 missing (9.6%).</a:t>
+              </a:r>
+            </a:p>
+            <a:p>
+              <a:pPr>
+                <a:lnSpc>
+                  <a:spcPct val="150000"/>
+                </a:lnSpc>
+              </a:pPr>
+              <a:r>
+                <a:rPr lang="en-ZA" sz="1200" dirty="0" err="1">
+                  <a:solidFill>
+                    <a:schemeClr val="tx2"/>
+                  </a:solidFill>
+                  <a:latin typeface="Times New Roman" panose="02020603050405020304" pitchFamily="18" charset="0"/>
+                  <a:cs typeface="Times New Roman" panose="02020603050405020304" pitchFamily="18" charset="0"/>
+                </a:rPr>
+                <a:t>Person_emp_length</a:t>
+              </a:r>
+              <a:r>
+                <a:rPr lang="en-ZA" sz="1200" dirty="0">
+                  <a:solidFill>
+                    <a:schemeClr val="tx2"/>
+                  </a:solidFill>
+                  <a:latin typeface="Times New Roman" panose="02020603050405020304" pitchFamily="18" charset="0"/>
+                  <a:cs typeface="Times New Roman" panose="02020603050405020304" pitchFamily="18" charset="0"/>
+                </a:rPr>
+                <a:t>: 895 missing (2.7%).</a:t>
+              </a:r>
+            </a:p>
+          </p:txBody>
+        </p:sp>
+        <p:sp>
+          <p:nvSpPr>
+            <p:cNvPr id="11" name="Rectangle: Rounded Corners 10">
+              <a:extLst>
+                <a:ext uri="{FF2B5EF4-FFF2-40B4-BE49-F238E27FC236}">
+                  <a16:creationId xmlns:a16="http://schemas.microsoft.com/office/drawing/2014/main" id="{AE71BBAF-2E2F-12D9-77D9-E3A23E6F4AB7}"/>
+                </a:ext>
+              </a:extLst>
+            </p:cNvPr>
+            <p:cNvSpPr/>
+            <p:nvPr/>
+          </p:nvSpPr>
+          <p:spPr>
+            <a:xfrm>
+              <a:off x="4071257" y="1903446"/>
+              <a:ext cx="3013788" cy="1623526"/>
+            </a:xfrm>
+            <a:prstGeom prst="roundRect">
+              <a:avLst/>
+            </a:prstGeom>
+            <a:solidFill>
+              <a:schemeClr val="accent2">
+                <a:lumMod val="20000"/>
+                <a:lumOff val="80000"/>
+              </a:schemeClr>
+            </a:solidFill>
+            <a:ln>
+              <a:solidFill>
+                <a:schemeClr val="accent2">
+                  <a:lumMod val="20000"/>
+                  <a:lumOff val="80000"/>
+                </a:schemeClr>
+              </a:solidFill>
+            </a:ln>
+          </p:spPr>
+          <p:style>
+            <a:lnRef idx="2">
+              <a:schemeClr val="accent1">
+                <a:shade val="15000"/>
+              </a:schemeClr>
+            </a:lnRef>
+            <a:fillRef idx="1">
+              <a:schemeClr val="accent1"/>
+            </a:fillRef>
+            <a:effectRef idx="0">
+              <a:schemeClr val="accent1"/>
+            </a:effectRef>
+            <a:fontRef idx="minor">
+              <a:schemeClr val="lt1"/>
+            </a:fontRef>
+          </p:style>
+          <p:txBody>
+            <a:bodyPr rtlCol="0" anchor="ctr"/>
+            <a:lstStyle/>
+            <a:p>
+              <a:pPr marL="342900" indent="-342900">
+                <a:lnSpc>
+                  <a:spcPct val="150000"/>
+                </a:lnSpc>
+                <a:buFont typeface="Wingdings" panose="05000000000000000000" pitchFamily="2" charset="2"/>
+                <a:buChar char="q"/>
+              </a:pPr>
+              <a:r>
+                <a:rPr lang="en-ZA" sz="1600" b="1" dirty="0">
+                  <a:solidFill>
+                    <a:schemeClr val="accent3">
+                      <a:lumMod val="75000"/>
+                    </a:schemeClr>
+                  </a:solidFill>
+                  <a:latin typeface="Times New Roman" panose="02020603050405020304" pitchFamily="18" charset="0"/>
+                  <a:cs typeface="Times New Roman" panose="02020603050405020304" pitchFamily="18" charset="0"/>
+                </a:rPr>
+                <a:t>Duplicate rows</a:t>
+              </a:r>
+            </a:p>
+            <a:p>
+              <a:pPr>
+                <a:lnSpc>
+                  <a:spcPct val="150000"/>
+                </a:lnSpc>
+              </a:pPr>
+              <a:r>
+                <a:rPr lang="en-ZA" sz="1200" dirty="0">
+                  <a:solidFill>
+                    <a:schemeClr val="tx2"/>
+                  </a:solidFill>
+                  <a:latin typeface="Times New Roman" panose="02020603050405020304" pitchFamily="18" charset="0"/>
+                  <a:cs typeface="Times New Roman" panose="02020603050405020304" pitchFamily="18" charset="0"/>
+                </a:rPr>
+                <a:t>165 exact duplicates records found in the row dataset.</a:t>
+              </a:r>
+            </a:p>
+          </p:txBody>
+        </p:sp>
+        <p:sp>
+          <p:nvSpPr>
+            <p:cNvPr id="13" name="Rectangle: Rounded Corners 12">
+              <a:extLst>
+                <a:ext uri="{FF2B5EF4-FFF2-40B4-BE49-F238E27FC236}">
+                  <a16:creationId xmlns:a16="http://schemas.microsoft.com/office/drawing/2014/main" id="{0B8DEA96-23F7-4671-8B04-75C8E827447D}"/>
+                </a:ext>
+              </a:extLst>
+            </p:cNvPr>
+            <p:cNvSpPr/>
+            <p:nvPr/>
+          </p:nvSpPr>
+          <p:spPr>
+            <a:xfrm>
+              <a:off x="7694644" y="1903446"/>
+              <a:ext cx="3013788" cy="1623526"/>
+            </a:xfrm>
+            <a:prstGeom prst="roundRect">
+              <a:avLst/>
+            </a:prstGeom>
+            <a:solidFill>
+              <a:schemeClr val="accent2">
+                <a:lumMod val="20000"/>
+                <a:lumOff val="80000"/>
+              </a:schemeClr>
+            </a:solidFill>
+            <a:ln>
+              <a:solidFill>
+                <a:schemeClr val="accent2">
+                  <a:lumMod val="20000"/>
+                  <a:lumOff val="80000"/>
+                </a:schemeClr>
+              </a:solidFill>
+            </a:ln>
+          </p:spPr>
+          <p:style>
+            <a:lnRef idx="2">
+              <a:schemeClr val="accent1">
+                <a:shade val="15000"/>
+              </a:schemeClr>
+            </a:lnRef>
+            <a:fillRef idx="1">
+              <a:schemeClr val="accent1"/>
+            </a:fillRef>
+            <a:effectRef idx="0">
+              <a:schemeClr val="accent1"/>
+            </a:effectRef>
+            <a:fontRef idx="minor">
+              <a:schemeClr val="lt1"/>
+            </a:fontRef>
+          </p:style>
+          <p:txBody>
+            <a:bodyPr rtlCol="0" anchor="ctr"/>
+            <a:lstStyle/>
+            <a:p>
+              <a:pPr marL="342900" indent="-342900">
+                <a:lnSpc>
+                  <a:spcPct val="150000"/>
+                </a:lnSpc>
+                <a:buFont typeface="Wingdings" panose="05000000000000000000" pitchFamily="2" charset="2"/>
+                <a:buChar char="q"/>
+              </a:pPr>
+              <a:r>
+                <a:rPr lang="en-ZA" sz="1600" b="1" dirty="0">
+                  <a:solidFill>
+                    <a:schemeClr val="accent3">
+                      <a:lumMod val="75000"/>
+                    </a:schemeClr>
+                  </a:solidFill>
+                  <a:latin typeface="Times New Roman" panose="02020603050405020304" pitchFamily="18" charset="0"/>
+                  <a:cs typeface="Times New Roman" panose="02020603050405020304" pitchFamily="18" charset="0"/>
+                </a:rPr>
+                <a:t>Impossible outliers</a:t>
+              </a:r>
+            </a:p>
+            <a:p>
+              <a:pPr>
+                <a:lnSpc>
+                  <a:spcPct val="150000"/>
+                </a:lnSpc>
+              </a:pPr>
+              <a:r>
+                <a:rPr lang="en-ZA" sz="1200" dirty="0" err="1">
+                  <a:solidFill>
+                    <a:schemeClr val="tx2"/>
+                  </a:solidFill>
+                  <a:latin typeface="Times New Roman" panose="02020603050405020304" pitchFamily="18" charset="0"/>
+                  <a:cs typeface="Times New Roman" panose="02020603050405020304" pitchFamily="18" charset="0"/>
+                </a:rPr>
+                <a:t>person_age</a:t>
+              </a:r>
+              <a:r>
+                <a:rPr lang="en-ZA" sz="1200" dirty="0">
+                  <a:solidFill>
+                    <a:schemeClr val="tx2"/>
+                  </a:solidFill>
+                  <a:latin typeface="Times New Roman" panose="02020603050405020304" pitchFamily="18" charset="0"/>
+                  <a:cs typeface="Times New Roman" panose="02020603050405020304" pitchFamily="18" charset="0"/>
+                </a:rPr>
+                <a:t> up to 144 years and </a:t>
+              </a:r>
+              <a:r>
+                <a:rPr lang="en-ZA" sz="1200" dirty="0" err="1">
+                  <a:solidFill>
+                    <a:schemeClr val="tx2"/>
+                  </a:solidFill>
+                  <a:latin typeface="Times New Roman" panose="02020603050405020304" pitchFamily="18" charset="0"/>
+                  <a:cs typeface="Times New Roman" panose="02020603050405020304" pitchFamily="18" charset="0"/>
+                </a:rPr>
+                <a:t>person_emp_length</a:t>
+              </a:r>
+              <a:r>
+                <a:rPr lang="en-ZA" sz="1200" dirty="0">
+                  <a:solidFill>
+                    <a:schemeClr val="tx2"/>
+                  </a:solidFill>
+                  <a:latin typeface="Times New Roman" panose="02020603050405020304" pitchFamily="18" charset="0"/>
+                  <a:cs typeface="Times New Roman" panose="02020603050405020304" pitchFamily="18" charset="0"/>
+                </a:rPr>
+                <a:t> up to 123 years of employment.</a:t>
+              </a:r>
+            </a:p>
+          </p:txBody>
+        </p:sp>
+        <p:sp>
+          <p:nvSpPr>
+            <p:cNvPr id="15" name="Rectangle: Rounded Corners 14">
+              <a:extLst>
+                <a:ext uri="{FF2B5EF4-FFF2-40B4-BE49-F238E27FC236}">
+                  <a16:creationId xmlns:a16="http://schemas.microsoft.com/office/drawing/2014/main" id="{E6101395-99E0-F679-1F64-061F36C0955F}"/>
+                </a:ext>
+              </a:extLst>
+            </p:cNvPr>
+            <p:cNvSpPr/>
+            <p:nvPr/>
+          </p:nvSpPr>
+          <p:spPr>
+            <a:xfrm>
+              <a:off x="447870" y="4043266"/>
+              <a:ext cx="3013788" cy="1623526"/>
+            </a:xfrm>
+            <a:prstGeom prst="roundRect">
+              <a:avLst/>
+            </a:prstGeom>
+            <a:solidFill>
+              <a:schemeClr val="accent2">
+                <a:lumMod val="20000"/>
+                <a:lumOff val="80000"/>
+              </a:schemeClr>
+            </a:solidFill>
+            <a:ln>
+              <a:solidFill>
+                <a:schemeClr val="accent2">
+                  <a:lumMod val="20000"/>
+                  <a:lumOff val="80000"/>
+                </a:schemeClr>
+              </a:solidFill>
+            </a:ln>
+          </p:spPr>
+          <p:style>
+            <a:lnRef idx="2">
+              <a:schemeClr val="accent1">
+                <a:shade val="15000"/>
+              </a:schemeClr>
+            </a:lnRef>
+            <a:fillRef idx="1">
+              <a:schemeClr val="accent1"/>
+            </a:fillRef>
+            <a:effectRef idx="0">
+              <a:schemeClr val="accent1"/>
+            </a:effectRef>
+            <a:fontRef idx="minor">
+              <a:schemeClr val="lt1"/>
+            </a:fontRef>
+          </p:style>
+          <p:txBody>
+            <a:bodyPr rtlCol="0" anchor="ctr"/>
+            <a:lstStyle/>
+            <a:p>
+              <a:pPr marL="342900" indent="-342900">
+                <a:lnSpc>
+                  <a:spcPct val="150000"/>
+                </a:lnSpc>
+                <a:buFont typeface="Wingdings" panose="05000000000000000000" pitchFamily="2" charset="2"/>
+                <a:buChar char="q"/>
+              </a:pPr>
+              <a:r>
+                <a:rPr lang="en-ZA" sz="1600" b="1" dirty="0">
+                  <a:solidFill>
+                    <a:schemeClr val="accent3">
+                      <a:lumMod val="75000"/>
+                    </a:schemeClr>
+                  </a:solidFill>
+                  <a:latin typeface="Times New Roman" panose="02020603050405020304" pitchFamily="18" charset="0"/>
+                  <a:cs typeface="Times New Roman" panose="02020603050405020304" pitchFamily="18" charset="0"/>
+                </a:rPr>
+                <a:t>Extreme but valid outliers</a:t>
+              </a:r>
+            </a:p>
+            <a:p>
+              <a:pPr>
+                <a:lnSpc>
+                  <a:spcPct val="150000"/>
+                </a:lnSpc>
+              </a:pPr>
+              <a:r>
+                <a:rPr lang="en-ZA" sz="1200" dirty="0" err="1">
+                  <a:solidFill>
+                    <a:schemeClr val="tx2"/>
+                  </a:solidFill>
+                  <a:latin typeface="Times New Roman" panose="02020603050405020304" pitchFamily="18" charset="0"/>
+                  <a:cs typeface="Times New Roman" panose="02020603050405020304" pitchFamily="18" charset="0"/>
+                </a:rPr>
+                <a:t>person_income</a:t>
+              </a:r>
+              <a:r>
+                <a:rPr lang="en-ZA" sz="1200" dirty="0">
+                  <a:solidFill>
+                    <a:schemeClr val="tx2"/>
+                  </a:solidFill>
+                  <a:latin typeface="Times New Roman" panose="02020603050405020304" pitchFamily="18" charset="0"/>
+                  <a:cs typeface="Times New Roman" panose="02020603050405020304" pitchFamily="18" charset="0"/>
+                </a:rPr>
+                <a:t> up to 6 000 000 large spreads in </a:t>
+              </a:r>
+              <a:r>
+                <a:rPr lang="en-ZA" sz="1200" dirty="0" err="1">
+                  <a:solidFill>
+                    <a:schemeClr val="tx2"/>
+                  </a:solidFill>
+                  <a:latin typeface="Times New Roman" panose="02020603050405020304" pitchFamily="18" charset="0"/>
+                  <a:cs typeface="Times New Roman" panose="02020603050405020304" pitchFamily="18" charset="0"/>
+                </a:rPr>
+                <a:t>loan_amt</a:t>
+              </a:r>
+              <a:r>
+                <a:rPr lang="en-ZA" sz="1200" dirty="0">
+                  <a:solidFill>
+                    <a:schemeClr val="tx2"/>
+                  </a:solidFill>
+                  <a:latin typeface="Times New Roman" panose="02020603050405020304" pitchFamily="18" charset="0"/>
+                  <a:cs typeface="Times New Roman" panose="02020603050405020304" pitchFamily="18" charset="0"/>
+                </a:rPr>
+                <a:t> and </a:t>
+              </a:r>
+              <a:r>
+                <a:rPr lang="en-ZA" sz="1200" dirty="0" err="1">
+                  <a:solidFill>
+                    <a:schemeClr val="tx2"/>
+                  </a:solidFill>
+                  <a:latin typeface="Times New Roman" panose="02020603050405020304" pitchFamily="18" charset="0"/>
+                  <a:cs typeface="Times New Roman" panose="02020603050405020304" pitchFamily="18" charset="0"/>
+                </a:rPr>
+                <a:t>loan_int_rate</a:t>
+              </a:r>
+              <a:r>
+                <a:rPr lang="en-ZA" sz="1200" dirty="0">
+                  <a:solidFill>
+                    <a:schemeClr val="tx2"/>
+                  </a:solidFill>
+                  <a:latin typeface="Times New Roman" panose="02020603050405020304" pitchFamily="18" charset="0"/>
+                  <a:cs typeface="Times New Roman" panose="02020603050405020304" pitchFamily="18" charset="0"/>
+                </a:rPr>
+                <a:t>.</a:t>
+              </a:r>
+            </a:p>
+          </p:txBody>
+        </p:sp>
+        <p:sp>
+          <p:nvSpPr>
+            <p:cNvPr id="17" name="Rectangle: Rounded Corners 16">
+              <a:extLst>
+                <a:ext uri="{FF2B5EF4-FFF2-40B4-BE49-F238E27FC236}">
+                  <a16:creationId xmlns:a16="http://schemas.microsoft.com/office/drawing/2014/main" id="{969CBD7C-1F4E-DEC1-7570-2CE212A58AC1}"/>
+                </a:ext>
+              </a:extLst>
+            </p:cNvPr>
+            <p:cNvSpPr/>
+            <p:nvPr/>
+          </p:nvSpPr>
+          <p:spPr>
+            <a:xfrm>
+              <a:off x="4071257" y="4043266"/>
+              <a:ext cx="3013788" cy="1623526"/>
+            </a:xfrm>
+            <a:prstGeom prst="roundRect">
+              <a:avLst/>
+            </a:prstGeom>
+            <a:solidFill>
+              <a:schemeClr val="accent2">
+                <a:lumMod val="20000"/>
+                <a:lumOff val="80000"/>
+              </a:schemeClr>
+            </a:solidFill>
+            <a:ln>
+              <a:solidFill>
+                <a:schemeClr val="accent2">
+                  <a:lumMod val="20000"/>
+                  <a:lumOff val="80000"/>
+                </a:schemeClr>
+              </a:solidFill>
+            </a:ln>
+          </p:spPr>
+          <p:style>
+            <a:lnRef idx="2">
+              <a:schemeClr val="accent1">
+                <a:shade val="15000"/>
+              </a:schemeClr>
+            </a:lnRef>
+            <a:fillRef idx="1">
+              <a:schemeClr val="accent1"/>
+            </a:fillRef>
+            <a:effectRef idx="0">
+              <a:schemeClr val="accent1"/>
+            </a:effectRef>
+            <a:fontRef idx="minor">
+              <a:schemeClr val="lt1"/>
+            </a:fontRef>
+          </p:style>
+          <p:txBody>
+            <a:bodyPr rtlCol="0" anchor="ctr"/>
+            <a:lstStyle/>
+            <a:p>
+              <a:pPr marL="342900" indent="-342900">
+                <a:lnSpc>
+                  <a:spcPct val="150000"/>
+                </a:lnSpc>
+                <a:buFont typeface="Wingdings" panose="05000000000000000000" pitchFamily="2" charset="2"/>
+                <a:buChar char="q"/>
+              </a:pPr>
+              <a:r>
+                <a:rPr lang="en-ZA" sz="1600" b="1" dirty="0">
+                  <a:solidFill>
+                    <a:schemeClr val="accent3">
+                      <a:lumMod val="75000"/>
+                    </a:schemeClr>
+                  </a:solidFill>
+                  <a:latin typeface="Times New Roman" panose="02020603050405020304" pitchFamily="18" charset="0"/>
+                  <a:cs typeface="Times New Roman" panose="02020603050405020304" pitchFamily="18" charset="0"/>
+                </a:rPr>
+                <a:t>Class imbalance</a:t>
+              </a:r>
+            </a:p>
+            <a:p>
+              <a:pPr>
+                <a:lnSpc>
+                  <a:spcPct val="150000"/>
+                </a:lnSpc>
+              </a:pPr>
+              <a:r>
+                <a:rPr lang="en-ZA" sz="1200" dirty="0">
+                  <a:solidFill>
+                    <a:schemeClr val="tx2"/>
+                  </a:solidFill>
+                  <a:latin typeface="Times New Roman" panose="02020603050405020304" pitchFamily="18" charset="0"/>
+                  <a:cs typeface="Times New Roman" panose="02020603050405020304" pitchFamily="18" charset="0"/>
+                </a:rPr>
+                <a:t>78% low risk vs 22% high risk applicants {accuracy alone is a misleading metric}.</a:t>
+              </a:r>
+            </a:p>
+          </p:txBody>
+        </p:sp>
+        <p:sp>
+          <p:nvSpPr>
+            <p:cNvPr id="19" name="Rectangle: Rounded Corners 18">
+              <a:extLst>
+                <a:ext uri="{FF2B5EF4-FFF2-40B4-BE49-F238E27FC236}">
+                  <a16:creationId xmlns:a16="http://schemas.microsoft.com/office/drawing/2014/main" id="{E069293D-C6DB-B694-09E4-84AC977ADF74}"/>
+                </a:ext>
+              </a:extLst>
+            </p:cNvPr>
+            <p:cNvSpPr/>
+            <p:nvPr/>
+          </p:nvSpPr>
+          <p:spPr>
+            <a:xfrm>
+              <a:off x="7694644" y="4043266"/>
+              <a:ext cx="3013788" cy="1623526"/>
+            </a:xfrm>
+            <a:prstGeom prst="roundRect">
+              <a:avLst/>
+            </a:prstGeom>
+            <a:solidFill>
+              <a:schemeClr val="accent2">
+                <a:lumMod val="20000"/>
+                <a:lumOff val="80000"/>
+              </a:schemeClr>
+            </a:solidFill>
+            <a:ln>
+              <a:solidFill>
+                <a:schemeClr val="accent2">
+                  <a:lumMod val="20000"/>
+                  <a:lumOff val="80000"/>
+                </a:schemeClr>
+              </a:solidFill>
+            </a:ln>
+          </p:spPr>
+          <p:style>
+            <a:lnRef idx="2">
+              <a:schemeClr val="accent1">
+                <a:shade val="15000"/>
+              </a:schemeClr>
+            </a:lnRef>
+            <a:fillRef idx="1">
+              <a:schemeClr val="accent1"/>
+            </a:fillRef>
+            <a:effectRef idx="0">
+              <a:schemeClr val="accent1"/>
+            </a:effectRef>
+            <a:fontRef idx="minor">
+              <a:schemeClr val="lt1"/>
+            </a:fontRef>
+          </p:style>
+          <p:txBody>
+            <a:bodyPr rtlCol="0" anchor="ctr"/>
+            <a:lstStyle/>
+            <a:p>
+              <a:pPr marL="342900" indent="-342900">
+                <a:lnSpc>
+                  <a:spcPct val="150000"/>
+                </a:lnSpc>
+                <a:buFont typeface="Wingdings" panose="05000000000000000000" pitchFamily="2" charset="2"/>
+                <a:buChar char="q"/>
+              </a:pPr>
+              <a:r>
+                <a:rPr lang="en-ZA" sz="1600" b="1" dirty="0">
+                  <a:solidFill>
+                    <a:schemeClr val="accent3">
+                      <a:lumMod val="75000"/>
+                    </a:schemeClr>
+                  </a:solidFill>
+                  <a:latin typeface="Times New Roman" panose="02020603050405020304" pitchFamily="18" charset="0"/>
+                  <a:cs typeface="Times New Roman" panose="02020603050405020304" pitchFamily="18" charset="0"/>
+                </a:rPr>
+                <a:t>Skewed distributions</a:t>
+              </a:r>
+            </a:p>
+            <a:p>
+              <a:pPr>
+                <a:lnSpc>
+                  <a:spcPct val="150000"/>
+                </a:lnSpc>
+              </a:pPr>
+              <a:r>
+                <a:rPr lang="en-ZA" sz="1200" dirty="0" err="1">
+                  <a:solidFill>
+                    <a:schemeClr val="tx2"/>
+                  </a:solidFill>
+                  <a:latin typeface="Times New Roman" panose="02020603050405020304" pitchFamily="18" charset="0"/>
+                  <a:cs typeface="Times New Roman" panose="02020603050405020304" pitchFamily="18" charset="0"/>
+                </a:rPr>
+                <a:t>person_income</a:t>
+              </a:r>
+              <a:r>
+                <a:rPr lang="en-ZA" sz="1200" dirty="0">
+                  <a:solidFill>
+                    <a:schemeClr val="tx2"/>
+                  </a:solidFill>
+                  <a:latin typeface="Times New Roman" panose="02020603050405020304" pitchFamily="18" charset="0"/>
+                  <a:cs typeface="Times New Roman" panose="02020603050405020304" pitchFamily="18" charset="0"/>
+                </a:rPr>
+                <a:t>, </a:t>
+              </a:r>
+              <a:r>
+                <a:rPr lang="en-ZA" sz="1200" dirty="0" err="1">
+                  <a:solidFill>
+                    <a:schemeClr val="tx2"/>
+                  </a:solidFill>
+                  <a:latin typeface="Times New Roman" panose="02020603050405020304" pitchFamily="18" charset="0"/>
+                  <a:cs typeface="Times New Roman" panose="02020603050405020304" pitchFamily="18" charset="0"/>
+                </a:rPr>
+                <a:t>loan_amt</a:t>
+              </a:r>
+              <a:r>
+                <a:rPr lang="en-ZA" sz="1200" dirty="0">
+                  <a:solidFill>
+                    <a:schemeClr val="tx2"/>
+                  </a:solidFill>
+                  <a:latin typeface="Times New Roman" panose="02020603050405020304" pitchFamily="18" charset="0"/>
+                  <a:cs typeface="Times New Roman" panose="02020603050405020304" pitchFamily="18" charset="0"/>
+                </a:rPr>
+                <a:t> and </a:t>
+              </a:r>
+              <a:r>
+                <a:rPr lang="en-ZA" sz="1200" dirty="0" err="1">
+                  <a:solidFill>
+                    <a:schemeClr val="tx2"/>
+                  </a:solidFill>
+                  <a:latin typeface="Times New Roman" panose="02020603050405020304" pitchFamily="18" charset="0"/>
+                  <a:cs typeface="Times New Roman" panose="02020603050405020304" pitchFamily="18" charset="0"/>
+                </a:rPr>
+                <a:t>loan_percent_income</a:t>
+              </a:r>
+              <a:r>
+                <a:rPr lang="en-ZA" sz="1200" dirty="0">
+                  <a:solidFill>
+                    <a:schemeClr val="tx2"/>
+                  </a:solidFill>
+                  <a:latin typeface="Times New Roman" panose="02020603050405020304" pitchFamily="18" charset="0"/>
+                  <a:cs typeface="Times New Roman" panose="02020603050405020304" pitchFamily="18" charset="0"/>
+                </a:rPr>
+                <a:t> are strongly right skewed.</a:t>
+              </a:r>
+            </a:p>
+          </p:txBody>
+        </p:sp>
+      </p:grpSp>
+    </p:spTree>
+    <p:extLst>
+      <p:ext uri="{BB962C8B-B14F-4D97-AF65-F5344CB8AC3E}">
+        <p14:creationId xmlns:p14="http://schemas.microsoft.com/office/powerpoint/2010/main" val="1320807106"/>
+      </p:ext>
+    </p:extLst>
+  </p:cSld>
+  <p:clrMapOvr>
+    <a:masterClrMapping/>
+  </p:clrMapOvr>
+</p:sld>
+</file>
+
+<file path=ppt/slides/slide5.xml><?xml version="1.0" encoding="utf-8"?>
+<p:sld xmlns:a="http://schemas.openxmlformats.org/drawingml/2006/main" xmlns:r="http://schemas.openxmlformats.org/officeDocument/2006/relationships" xmlns:p="http://schemas.openxmlformats.org/presentationml/2006/main">
+  <p:cSld>
+    <p:spTree>
+      <p:nvGrpSpPr>
+        <p:cNvPr id="1" name=""/>
+        <p:cNvGrpSpPr/>
+        <p:nvPr/>
+      </p:nvGrpSpPr>
+      <p:grpSpPr>
+        <a:xfrm>
+          <a:off x="0" y="0"/>
+          <a:ext cx="0" cy="0"/>
+          <a:chOff x="0" y="0"/>
+          <a:chExt cx="0" cy="0"/>
+        </a:xfrm>
+      </p:grpSpPr>
+      <p:sp>
+        <p:nvSpPr>
+          <p:cNvPr id="2" name="Title 1">
+            <a:extLst>
+              <a:ext uri="{FF2B5EF4-FFF2-40B4-BE49-F238E27FC236}">
+                <a16:creationId xmlns:a16="http://schemas.microsoft.com/office/drawing/2014/main" id="{DEE19E3C-E9B3-43B6-3190-55C9663706B5}"/>
+              </a:ext>
+            </a:extLst>
+          </p:cNvPr>
+          <p:cNvSpPr>
+            <a:spLocks noGrp="1"/>
+          </p:cNvSpPr>
+          <p:nvPr>
+            <p:ph type="title"/>
+          </p:nvPr>
+        </p:nvSpPr>
+        <p:spPr>
+          <a:xfrm>
+            <a:off x="457200" y="457201"/>
+            <a:ext cx="11277600" cy="982183"/>
+          </a:xfrm>
+        </p:spPr>
+        <p:txBody>
+          <a:bodyPr>
+            <a:normAutofit fontScale="90000"/>
+          </a:bodyPr>
+          <a:lstStyle/>
+          <a:p>
+            <a:pPr>
+              <a:lnSpc>
+                <a:spcPct val="150000"/>
+              </a:lnSpc>
+            </a:pPr>
+            <a:r>
+              <a:rPr lang="en-ZA" sz="3100" b="1" dirty="0">
+                <a:latin typeface="Times New Roman" panose="02020603050405020304" pitchFamily="18" charset="0"/>
+                <a:cs typeface="Times New Roman" panose="02020603050405020304" pitchFamily="18" charset="0"/>
+              </a:rPr>
+              <a:t>Preprocessing summary</a:t>
+            </a:r>
+            <a:br>
+              <a:rPr lang="en-ZA" sz="2800" b="1" dirty="0">
+                <a:latin typeface="Times New Roman" panose="02020603050405020304" pitchFamily="18" charset="0"/>
+                <a:cs typeface="Times New Roman" panose="02020603050405020304" pitchFamily="18" charset="0"/>
+              </a:rPr>
+            </a:br>
+            <a:r>
+              <a:rPr lang="en-ZA" sz="1600" dirty="0">
+                <a:latin typeface="Times New Roman" panose="02020603050405020304" pitchFamily="18" charset="0"/>
+                <a:cs typeface="Times New Roman" panose="02020603050405020304" pitchFamily="18" charset="0"/>
+              </a:rPr>
+              <a:t>Cleaning, encoding, scaling and splitting the data</a:t>
+            </a:r>
+            <a:endParaRPr lang="en-ZA" sz="2800" b="1" dirty="0">
+              <a:latin typeface="Times New Roman" panose="02020603050405020304" pitchFamily="18" charset="0"/>
+              <a:cs typeface="Times New Roman" panose="02020603050405020304" pitchFamily="18" charset="0"/>
+            </a:endParaRPr>
+          </a:p>
+        </p:txBody>
+      </p:sp>
+      <p:sp>
+        <p:nvSpPr>
+          <p:cNvPr id="3" name="Slide Number Placeholder 2">
+            <a:extLst>
+              <a:ext uri="{FF2B5EF4-FFF2-40B4-BE49-F238E27FC236}">
+                <a16:creationId xmlns:a16="http://schemas.microsoft.com/office/drawing/2014/main" id="{2A2790C7-FFAF-C8AD-C16B-E9DA3D319E79}"/>
+              </a:ext>
+            </a:extLst>
+          </p:cNvPr>
+          <p:cNvSpPr>
+            <a:spLocks noGrp="1"/>
+          </p:cNvSpPr>
+          <p:nvPr>
+            <p:ph type="sldNum" sz="quarter" idx="12"/>
+          </p:nvPr>
+        </p:nvSpPr>
+        <p:spPr/>
+        <p:txBody>
+          <a:bodyPr/>
+          <a:lstStyle/>
+          <a:p>
+            <a:fld id="{AEAA3239-9EA4-4A65-A281-97F994456D9F}" type="slidenum">
+              <a:rPr lang="en-US" smtClean="0"/>
+              <a:t>5</a:t>
+            </a:fld>
+            <a:endParaRPr lang="en-US"/>
+          </a:p>
+        </p:txBody>
+      </p:sp>
+      <p:graphicFrame>
+        <p:nvGraphicFramePr>
+          <p:cNvPr id="5" name="Table 4">
+            <a:extLst>
+              <a:ext uri="{FF2B5EF4-FFF2-40B4-BE49-F238E27FC236}">
+                <a16:creationId xmlns:a16="http://schemas.microsoft.com/office/drawing/2014/main" id="{58FF69B2-7E30-0308-1586-D628F46E045E}"/>
+              </a:ext>
+            </a:extLst>
+          </p:cNvPr>
+          <p:cNvGraphicFramePr>
+            <a:graphicFrameLocks noGrp="1"/>
+          </p:cNvGraphicFramePr>
+          <p:nvPr>
+            <p:extLst>
+              <p:ext uri="{D42A27DB-BD31-4B8C-83A1-F6EECF244321}">
+                <p14:modId xmlns:p14="http://schemas.microsoft.com/office/powerpoint/2010/main" val="746823749"/>
+              </p:ext>
+            </p:extLst>
+          </p:nvPr>
+        </p:nvGraphicFramePr>
+        <p:xfrm>
+          <a:off x="2032000" y="1763486"/>
+          <a:ext cx="8128000" cy="4758614"/>
+        </p:xfrm>
+        <a:graphic>
+          <a:graphicData uri="http://schemas.openxmlformats.org/drawingml/2006/table">
+            <a:tbl>
+              <a:tblPr firstRow="1" bandRow="1">
+                <a:tableStyleId>{8799B23B-EC83-4686-B30A-512413B5E67A}</a:tableStyleId>
+              </a:tblPr>
+              <a:tblGrid>
+                <a:gridCol w="4064000">
+                  <a:extLst>
+                    <a:ext uri="{9D8B030D-6E8A-4147-A177-3AD203B41FA5}">
+                      <a16:colId xmlns:a16="http://schemas.microsoft.com/office/drawing/2014/main" val="547919749"/>
+                    </a:ext>
+                  </a:extLst>
+                </a:gridCol>
+                <a:gridCol w="4064000">
+                  <a:extLst>
+                    <a:ext uri="{9D8B030D-6E8A-4147-A177-3AD203B41FA5}">
+                      <a16:colId xmlns:a16="http://schemas.microsoft.com/office/drawing/2014/main" val="3875453754"/>
+                    </a:ext>
+                  </a:extLst>
+                </a:gridCol>
+              </a:tblGrid>
+              <a:tr h="883186">
+                <a:tc>
+                  <a:txBody>
+                    <a:bodyPr/>
+                    <a:lstStyle/>
+                    <a:p>
+                      <a:pPr>
+                        <a:lnSpc>
+                          <a:spcPct val="150000"/>
+                        </a:lnSpc>
+                      </a:pPr>
+                      <a:r>
+                        <a:rPr lang="en-ZA" sz="1200" dirty="0">
+                          <a:solidFill>
+                            <a:schemeClr val="tx2"/>
+                          </a:solidFill>
+                          <a:latin typeface="Times New Roman" panose="02020603050405020304" pitchFamily="18" charset="0"/>
+                          <a:cs typeface="Times New Roman" panose="02020603050405020304" pitchFamily="18" charset="0"/>
+                        </a:rPr>
+                        <a:t>1. Missing values</a:t>
+                      </a:r>
+                    </a:p>
+                  </a:txBody>
+                  <a:tcPr>
+                    <a:solidFill>
+                      <a:schemeClr val="accent2">
+                        <a:lumMod val="20000"/>
+                        <a:lumOff val="80000"/>
+                      </a:schemeClr>
+                    </a:solidFill>
+                  </a:tcPr>
+                </a:tc>
+                <a:tc>
+                  <a:txBody>
+                    <a:bodyPr/>
+                    <a:lstStyle/>
+                    <a:p>
+                      <a:pPr>
+                        <a:lnSpc>
+                          <a:spcPct val="150000"/>
+                        </a:lnSpc>
+                      </a:pPr>
+                      <a:r>
+                        <a:rPr lang="en-ZA" sz="1200" b="0" dirty="0" err="1">
+                          <a:latin typeface="Times New Roman" panose="02020603050405020304" pitchFamily="18" charset="0"/>
+                          <a:cs typeface="Times New Roman" panose="02020603050405020304" pitchFamily="18" charset="0"/>
+                        </a:rPr>
+                        <a:t>person_emp_length</a:t>
+                      </a:r>
+                      <a:r>
+                        <a:rPr lang="en-ZA" sz="1200" b="0" dirty="0">
+                          <a:latin typeface="Times New Roman" panose="02020603050405020304" pitchFamily="18" charset="0"/>
+                          <a:cs typeface="Times New Roman" panose="02020603050405020304" pitchFamily="18" charset="0"/>
+                        </a:rPr>
+                        <a:t> imputed with the median (robust to skew). </a:t>
+                      </a:r>
+                      <a:r>
+                        <a:rPr lang="en-ZA" sz="1200" b="0" dirty="0" err="1">
+                          <a:latin typeface="Times New Roman" panose="02020603050405020304" pitchFamily="18" charset="0"/>
+                          <a:cs typeface="Times New Roman" panose="02020603050405020304" pitchFamily="18" charset="0"/>
+                        </a:rPr>
+                        <a:t>loan_int_rate</a:t>
+                      </a:r>
+                      <a:r>
+                        <a:rPr lang="en-ZA" sz="1200" b="0" dirty="0">
+                          <a:latin typeface="Times New Roman" panose="02020603050405020304" pitchFamily="18" charset="0"/>
+                          <a:cs typeface="Times New Roman" panose="02020603050405020304" pitchFamily="18" charset="0"/>
+                        </a:rPr>
+                        <a:t> imputed with the median rate per </a:t>
+                      </a:r>
+                      <a:r>
+                        <a:rPr lang="en-ZA" sz="1200" b="0" dirty="0" err="1">
+                          <a:latin typeface="Times New Roman" panose="02020603050405020304" pitchFamily="18" charset="0"/>
+                          <a:cs typeface="Times New Roman" panose="02020603050405020304" pitchFamily="18" charset="0"/>
+                        </a:rPr>
+                        <a:t>loan_grade</a:t>
+                      </a:r>
+                      <a:r>
+                        <a:rPr lang="en-ZA" sz="1200" b="0" dirty="0">
+                          <a:latin typeface="Times New Roman" panose="02020603050405020304" pitchFamily="18" charset="0"/>
+                          <a:cs typeface="Times New Roman" panose="02020603050405020304" pitchFamily="18" charset="0"/>
+                        </a:rPr>
+                        <a:t> since rate is tied to grade.</a:t>
+                      </a:r>
+                    </a:p>
+                  </a:txBody>
+                  <a:tcPr>
+                    <a:solidFill>
+                      <a:schemeClr val="accent2">
+                        <a:lumMod val="20000"/>
+                        <a:lumOff val="80000"/>
+                      </a:schemeClr>
+                    </a:solidFill>
+                  </a:tcPr>
+                </a:tc>
+                <a:extLst>
+                  <a:ext uri="{0D108BD9-81ED-4DB2-BD59-A6C34878D82A}">
+                    <a16:rowId xmlns:a16="http://schemas.microsoft.com/office/drawing/2014/main" val="4139845649"/>
+                  </a:ext>
+                </a:extLst>
+              </a:tr>
+              <a:tr h="342686">
+                <a:tc>
+                  <a:txBody>
+                    <a:bodyPr/>
+                    <a:lstStyle/>
+                    <a:p>
+                      <a:pPr>
+                        <a:lnSpc>
+                          <a:spcPct val="150000"/>
+                        </a:lnSpc>
+                      </a:pPr>
+                      <a:r>
+                        <a:rPr lang="en-ZA" sz="1200" b="1" dirty="0">
+                          <a:latin typeface="Times New Roman" panose="02020603050405020304" pitchFamily="18" charset="0"/>
+                          <a:cs typeface="Times New Roman" panose="02020603050405020304" pitchFamily="18" charset="0"/>
+                        </a:rPr>
+                        <a:t>2. Duplicates</a:t>
+                      </a:r>
+                    </a:p>
+                  </a:txBody>
+                  <a:tcPr>
+                    <a:solidFill>
+                      <a:schemeClr val="accent2">
+                        <a:lumMod val="20000"/>
+                        <a:lumOff val="80000"/>
+                      </a:schemeClr>
+                    </a:solidFill>
+                  </a:tcPr>
+                </a:tc>
+                <a:tc>
+                  <a:txBody>
+                    <a:bodyPr/>
+                    <a:lstStyle/>
+                    <a:p>
+                      <a:pPr>
+                        <a:lnSpc>
+                          <a:spcPct val="150000"/>
+                        </a:lnSpc>
+                      </a:pPr>
+                      <a:r>
+                        <a:rPr lang="en-ZA" sz="1200" b="0" dirty="0">
+                          <a:latin typeface="Times New Roman" panose="02020603050405020304" pitchFamily="18" charset="0"/>
+                          <a:cs typeface="Times New Roman" panose="02020603050405020304" pitchFamily="18" charset="0"/>
+                        </a:rPr>
+                        <a:t>32 581 – 165 duplicates rows = 32 416 rows remaining</a:t>
+                      </a:r>
+                    </a:p>
+                  </a:txBody>
+                  <a:tcPr>
+                    <a:solidFill>
+                      <a:schemeClr val="accent2">
+                        <a:lumMod val="20000"/>
+                        <a:lumOff val="80000"/>
+                      </a:schemeClr>
+                    </a:solidFill>
+                  </a:tcPr>
+                </a:tc>
+                <a:extLst>
+                  <a:ext uri="{0D108BD9-81ED-4DB2-BD59-A6C34878D82A}">
+                    <a16:rowId xmlns:a16="http://schemas.microsoft.com/office/drawing/2014/main" val="3908104558"/>
+                  </a:ext>
+                </a:extLst>
+              </a:tr>
+              <a:tr h="1158027">
+                <a:tc>
+                  <a:txBody>
+                    <a:bodyPr/>
+                    <a:lstStyle/>
+                    <a:p>
+                      <a:pPr>
+                        <a:lnSpc>
+                          <a:spcPct val="150000"/>
+                        </a:lnSpc>
+                      </a:pPr>
+                      <a:r>
+                        <a:rPr lang="en-ZA" sz="1200" b="1" dirty="0">
+                          <a:latin typeface="Times New Roman" panose="02020603050405020304" pitchFamily="18" charset="0"/>
+                          <a:cs typeface="Times New Roman" panose="02020603050405020304" pitchFamily="18" charset="0"/>
+                        </a:rPr>
+                        <a:t>3. Outliers</a:t>
+                      </a:r>
+                    </a:p>
+                  </a:txBody>
+                  <a:tcPr>
+                    <a:solidFill>
+                      <a:schemeClr val="accent2">
+                        <a:lumMod val="20000"/>
+                        <a:lumOff val="80000"/>
+                      </a:schemeClr>
+                    </a:solidFill>
+                  </a:tcPr>
+                </a:tc>
+                <a:tc>
+                  <a:txBody>
+                    <a:bodyPr/>
+                    <a:lstStyle/>
+                    <a:p>
+                      <a:pPr>
+                        <a:lnSpc>
+                          <a:spcPct val="150000"/>
+                        </a:lnSpc>
+                      </a:pPr>
+                      <a:r>
+                        <a:rPr lang="en-ZA" sz="1200" dirty="0">
+                          <a:latin typeface="Times New Roman" panose="02020603050405020304" pitchFamily="18" charset="0"/>
+                          <a:cs typeface="Times New Roman" panose="02020603050405020304" pitchFamily="18" charset="0"/>
+                        </a:rPr>
+                        <a:t>Impossible values removed (age &gt; 100 years and employment length &gt; 60 years). Remaining outliers capped using the IQR method rather than deleted to keep genuine high earners in the data.</a:t>
+                      </a:r>
+                    </a:p>
+                  </a:txBody>
+                  <a:tcPr>
+                    <a:solidFill>
+                      <a:schemeClr val="accent2">
+                        <a:lumMod val="20000"/>
+                        <a:lumOff val="80000"/>
+                      </a:schemeClr>
+                    </a:solidFill>
+                  </a:tcPr>
+                </a:tc>
+                <a:extLst>
+                  <a:ext uri="{0D108BD9-81ED-4DB2-BD59-A6C34878D82A}">
+                    <a16:rowId xmlns:a16="http://schemas.microsoft.com/office/drawing/2014/main" val="1312809454"/>
+                  </a:ext>
+                </a:extLst>
+              </a:tr>
+              <a:tr h="883186">
+                <a:tc>
+                  <a:txBody>
+                    <a:bodyPr/>
+                    <a:lstStyle/>
+                    <a:p>
+                      <a:pPr>
+                        <a:lnSpc>
+                          <a:spcPct val="150000"/>
+                        </a:lnSpc>
+                      </a:pPr>
+                      <a:r>
+                        <a:rPr lang="en-ZA" sz="1200" b="1" dirty="0">
+                          <a:latin typeface="Times New Roman" panose="02020603050405020304" pitchFamily="18" charset="0"/>
+                          <a:cs typeface="Times New Roman" panose="02020603050405020304" pitchFamily="18" charset="0"/>
+                        </a:rPr>
+                        <a:t>4. Encoding</a:t>
+                      </a:r>
+                    </a:p>
+                  </a:txBody>
+                  <a:tcPr>
+                    <a:solidFill>
+                      <a:schemeClr val="accent2">
+                        <a:lumMod val="20000"/>
+                        <a:lumOff val="80000"/>
+                      </a:schemeClr>
+                    </a:solidFill>
+                  </a:tcPr>
+                </a:tc>
+                <a:tc>
+                  <a:txBody>
+                    <a:bodyPr/>
+                    <a:lstStyle/>
+                    <a:p>
+                      <a:pPr>
+                        <a:lnSpc>
+                          <a:spcPct val="150000"/>
+                        </a:lnSpc>
+                      </a:pPr>
+                      <a:r>
+                        <a:rPr lang="en-ZA" sz="1200" dirty="0" err="1">
+                          <a:latin typeface="Times New Roman" panose="02020603050405020304" pitchFamily="18" charset="0"/>
+                          <a:cs typeface="Times New Roman" panose="02020603050405020304" pitchFamily="18" charset="0"/>
+                        </a:rPr>
+                        <a:t>loan_grade</a:t>
+                      </a:r>
+                      <a:r>
+                        <a:rPr lang="en-ZA" sz="1200" dirty="0">
+                          <a:latin typeface="Times New Roman" panose="02020603050405020304" pitchFamily="18" charset="0"/>
+                          <a:cs typeface="Times New Roman" panose="02020603050405020304" pitchFamily="18" charset="0"/>
+                        </a:rPr>
+                        <a:t> mapped 0 – 6 and </a:t>
+                      </a:r>
+                      <a:r>
+                        <a:rPr lang="en-ZA" sz="1200" dirty="0" err="1">
+                          <a:latin typeface="Times New Roman" panose="02020603050405020304" pitchFamily="18" charset="0"/>
+                          <a:cs typeface="Times New Roman" panose="02020603050405020304" pitchFamily="18" charset="0"/>
+                        </a:rPr>
+                        <a:t>cb_person_default_on_file</a:t>
+                      </a:r>
+                      <a:r>
+                        <a:rPr lang="en-ZA" sz="1200" dirty="0">
+                          <a:latin typeface="Times New Roman" panose="02020603050405020304" pitchFamily="18" charset="0"/>
+                          <a:cs typeface="Times New Roman" panose="02020603050405020304" pitchFamily="18" charset="0"/>
+                        </a:rPr>
+                        <a:t> mapped Y/N to 1/0. </a:t>
+                      </a:r>
+                      <a:r>
+                        <a:rPr lang="en-ZA" sz="1200" dirty="0" err="1">
+                          <a:latin typeface="Times New Roman" panose="02020603050405020304" pitchFamily="18" charset="0"/>
+                          <a:cs typeface="Times New Roman" panose="02020603050405020304" pitchFamily="18" charset="0"/>
+                        </a:rPr>
+                        <a:t>person_home_ownership</a:t>
+                      </a:r>
+                      <a:r>
+                        <a:rPr lang="en-ZA" sz="1200" dirty="0">
+                          <a:latin typeface="Times New Roman" panose="02020603050405020304" pitchFamily="18" charset="0"/>
+                          <a:cs typeface="Times New Roman" panose="02020603050405020304" pitchFamily="18" charset="0"/>
+                        </a:rPr>
+                        <a:t> and </a:t>
+                      </a:r>
+                      <a:r>
+                        <a:rPr lang="en-ZA" sz="1200" dirty="0" err="1">
+                          <a:latin typeface="Times New Roman" panose="02020603050405020304" pitchFamily="18" charset="0"/>
+                          <a:cs typeface="Times New Roman" panose="02020603050405020304" pitchFamily="18" charset="0"/>
+                        </a:rPr>
+                        <a:t>loan_intent</a:t>
+                      </a:r>
+                      <a:r>
+                        <a:rPr lang="en-ZA" sz="1200" dirty="0">
+                          <a:latin typeface="Times New Roman" panose="02020603050405020304" pitchFamily="18" charset="0"/>
+                          <a:cs typeface="Times New Roman" panose="02020603050405020304" pitchFamily="18" charset="0"/>
+                        </a:rPr>
+                        <a:t> one hot encoded.</a:t>
+                      </a:r>
+                    </a:p>
+                  </a:txBody>
+                  <a:tcPr>
+                    <a:solidFill>
+                      <a:schemeClr val="accent2">
+                        <a:lumMod val="20000"/>
+                        <a:lumOff val="80000"/>
+                      </a:schemeClr>
+                    </a:solidFill>
+                  </a:tcPr>
+                </a:tc>
+                <a:extLst>
+                  <a:ext uri="{0D108BD9-81ED-4DB2-BD59-A6C34878D82A}">
+                    <a16:rowId xmlns:a16="http://schemas.microsoft.com/office/drawing/2014/main" val="1880696545"/>
+                  </a:ext>
+                </a:extLst>
+              </a:tr>
+              <a:tr h="883186">
+                <a:tc>
+                  <a:txBody>
+                    <a:bodyPr/>
+                    <a:lstStyle/>
+                    <a:p>
+                      <a:pPr>
+                        <a:lnSpc>
+                          <a:spcPct val="150000"/>
+                        </a:lnSpc>
+                      </a:pPr>
+                      <a:r>
+                        <a:rPr lang="en-ZA" sz="1200" b="1" dirty="0">
+                          <a:latin typeface="Times New Roman" panose="02020603050405020304" pitchFamily="18" charset="0"/>
+                          <a:cs typeface="Times New Roman" panose="02020603050405020304" pitchFamily="18" charset="0"/>
+                        </a:rPr>
+                        <a:t>5. Feature scaling</a:t>
+                      </a:r>
+                    </a:p>
+                  </a:txBody>
+                  <a:tcPr>
+                    <a:solidFill>
+                      <a:schemeClr val="accent2">
+                        <a:lumMod val="20000"/>
+                        <a:lumOff val="80000"/>
+                      </a:schemeClr>
+                    </a:solidFill>
+                  </a:tcPr>
+                </a:tc>
+                <a:tc>
+                  <a:txBody>
+                    <a:bodyPr/>
+                    <a:lstStyle/>
+                    <a:p>
+                      <a:pPr>
+                        <a:lnSpc>
+                          <a:spcPct val="150000"/>
+                        </a:lnSpc>
+                      </a:pPr>
+                      <a:r>
+                        <a:rPr lang="en-ZA" sz="1200" dirty="0" err="1">
+                          <a:latin typeface="Times New Roman" panose="02020603050405020304" pitchFamily="18" charset="0"/>
+                          <a:cs typeface="Times New Roman" panose="02020603050405020304" pitchFamily="18" charset="0"/>
+                        </a:rPr>
+                        <a:t>StandardScaler</a:t>
+                      </a:r>
+                      <a:r>
+                        <a:rPr lang="en-ZA" sz="1200" dirty="0">
+                          <a:latin typeface="Times New Roman" panose="02020603050405020304" pitchFamily="18" charset="0"/>
+                          <a:cs typeface="Times New Roman" panose="02020603050405020304" pitchFamily="18" charset="0"/>
+                        </a:rPr>
+                        <a:t> applied to numeric features because algorithms such as KNN and logistic regression would let large magnitude feature like income dominate.</a:t>
+                      </a:r>
+                    </a:p>
+                  </a:txBody>
+                  <a:tcPr>
+                    <a:solidFill>
+                      <a:schemeClr val="accent2">
+                        <a:lumMod val="20000"/>
+                        <a:lumOff val="80000"/>
+                      </a:schemeClr>
+                    </a:solidFill>
+                  </a:tcPr>
+                </a:tc>
+                <a:extLst>
+                  <a:ext uri="{0D108BD9-81ED-4DB2-BD59-A6C34878D82A}">
+                    <a16:rowId xmlns:a16="http://schemas.microsoft.com/office/drawing/2014/main" val="3873594570"/>
+                  </a:ext>
+                </a:extLst>
+              </a:tr>
+              <a:tr h="608343">
+                <a:tc>
+                  <a:txBody>
+                    <a:bodyPr/>
+                    <a:lstStyle/>
+                    <a:p>
+                      <a:pPr>
+                        <a:lnSpc>
+                          <a:spcPct val="150000"/>
+                        </a:lnSpc>
+                      </a:pPr>
+                      <a:r>
+                        <a:rPr lang="en-ZA" sz="1200" b="1" dirty="0">
+                          <a:latin typeface="Times New Roman" panose="02020603050405020304" pitchFamily="18" charset="0"/>
+                          <a:cs typeface="Times New Roman" panose="02020603050405020304" pitchFamily="18" charset="0"/>
+                        </a:rPr>
+                        <a:t>6. Train / test split</a:t>
+                      </a:r>
+                    </a:p>
+                  </a:txBody>
+                  <a:tcPr>
+                    <a:solidFill>
+                      <a:schemeClr val="accent2">
+                        <a:lumMod val="20000"/>
+                        <a:lumOff val="80000"/>
+                      </a:schemeClr>
+                    </a:solidFill>
+                  </a:tcPr>
+                </a:tc>
+                <a:tc>
+                  <a:txBody>
+                    <a:bodyPr/>
+                    <a:lstStyle/>
+                    <a:p>
+                      <a:pPr>
+                        <a:lnSpc>
+                          <a:spcPct val="150000"/>
+                        </a:lnSpc>
+                      </a:pPr>
+                      <a:r>
+                        <a:rPr lang="en-ZA" sz="1200" dirty="0">
+                          <a:latin typeface="Times New Roman" panose="02020603050405020304" pitchFamily="18" charset="0"/>
+                          <a:cs typeface="Times New Roman" panose="02020603050405020304" pitchFamily="18" charset="0"/>
+                        </a:rPr>
+                        <a:t>80/20 split = 25 927 training rows and 6 482 testing rows preserving the class ratio.</a:t>
+                      </a:r>
+                    </a:p>
+                  </a:txBody>
+                  <a:tcPr>
+                    <a:solidFill>
+                      <a:schemeClr val="accent2">
+                        <a:lumMod val="20000"/>
+                        <a:lumOff val="80000"/>
+                      </a:schemeClr>
+                    </a:solidFill>
+                  </a:tcPr>
+                </a:tc>
+                <a:extLst>
+                  <a:ext uri="{0D108BD9-81ED-4DB2-BD59-A6C34878D82A}">
+                    <a16:rowId xmlns:a16="http://schemas.microsoft.com/office/drawing/2014/main" val="340765286"/>
+                  </a:ext>
+                </a:extLst>
+              </a:tr>
+            </a:tbl>
+          </a:graphicData>
+        </a:graphic>
+      </p:graphicFrame>
+    </p:spTree>
+    <p:extLst>
+      <p:ext uri="{BB962C8B-B14F-4D97-AF65-F5344CB8AC3E}">
+        <p14:creationId xmlns:p14="http://schemas.microsoft.com/office/powerpoint/2010/main" val="855587190"/>
+      </p:ext>
+    </p:extLst>
+  </p:cSld>
+  <p:clrMapOvr>
+    <a:masterClrMapping/>
+  </p:clrMapOvr>
+</p:sld>
+</file>
+
+<file path=ppt/slides/slide6.xml><?xml version="1.0" encoding="utf-8"?>
+<p:sld xmlns:a="http://schemas.openxmlformats.org/drawingml/2006/main" xmlns:r="http://schemas.openxmlformats.org/officeDocument/2006/relationships" xmlns:p="http://schemas.openxmlformats.org/presentationml/2006/main">
+  <p:cSld>
+    <p:spTree>
+      <p:nvGrpSpPr>
+        <p:cNvPr id="1" name=""/>
+        <p:cNvGrpSpPr/>
+        <p:nvPr/>
+      </p:nvGrpSpPr>
+      <p:grpSpPr>
+        <a:xfrm>
+          <a:off x="0" y="0"/>
+          <a:ext cx="0" cy="0"/>
+          <a:chOff x="0" y="0"/>
+          <a:chExt cx="0" cy="0"/>
+        </a:xfrm>
+      </p:grpSpPr>
+      <p:sp>
+        <p:nvSpPr>
+          <p:cNvPr id="2" name="Title 1">
+            <a:extLst>
+              <a:ext uri="{FF2B5EF4-FFF2-40B4-BE49-F238E27FC236}">
+                <a16:creationId xmlns:a16="http://schemas.microsoft.com/office/drawing/2014/main" id="{FD3F206E-8859-03F4-D25B-742E549DD91C}"/>
+              </a:ext>
+            </a:extLst>
+          </p:cNvPr>
+          <p:cNvSpPr>
+            <a:spLocks noGrp="1"/>
+          </p:cNvSpPr>
+          <p:nvPr>
+            <p:ph type="ctrTitle"/>
+          </p:nvPr>
+        </p:nvSpPr>
+        <p:spPr>
+          <a:xfrm>
+            <a:off x="457199" y="457200"/>
+            <a:ext cx="7845553" cy="457200"/>
+          </a:xfrm>
+        </p:spPr>
+        <p:txBody>
+          <a:bodyPr>
+            <a:noAutofit/>
+          </a:bodyPr>
+          <a:lstStyle/>
+          <a:p>
+            <a:pPr>
+              <a:lnSpc>
+                <a:spcPct val="150000"/>
+              </a:lnSpc>
+            </a:pPr>
+            <a:r>
+              <a:rPr lang="en-ZA" sz="2800" b="1" dirty="0">
+                <a:solidFill>
+                  <a:schemeClr val="tx2"/>
+                </a:solidFill>
+                <a:latin typeface="Times New Roman" panose="02020603050405020304" pitchFamily="18" charset="0"/>
+                <a:cs typeface="Times New Roman" panose="02020603050405020304" pitchFamily="18" charset="0"/>
+              </a:rPr>
+              <a:t>PCA explanation and variance plot</a:t>
+            </a:r>
+          </a:p>
+        </p:txBody>
+      </p:sp>
+      <p:sp>
+        <p:nvSpPr>
+          <p:cNvPr id="3" name="Slide Number Placeholder 2">
+            <a:extLst>
+              <a:ext uri="{FF2B5EF4-FFF2-40B4-BE49-F238E27FC236}">
+                <a16:creationId xmlns:a16="http://schemas.microsoft.com/office/drawing/2014/main" id="{AC397655-5486-D6F2-06F1-ABF1420A763F}"/>
+              </a:ext>
+            </a:extLst>
+          </p:cNvPr>
+          <p:cNvSpPr>
+            <a:spLocks noGrp="1"/>
+          </p:cNvSpPr>
+          <p:nvPr>
+            <p:ph type="sldNum" sz="quarter" idx="12"/>
+          </p:nvPr>
+        </p:nvSpPr>
+        <p:spPr/>
+        <p:txBody>
+          <a:bodyPr/>
+          <a:lstStyle/>
+          <a:p>
+            <a:fld id="{AEAA3239-9EA4-4A65-A281-97F994456D9F}" type="slidenum">
+              <a:rPr lang="en-US" smtClean="0"/>
+              <a:t>6</a:t>
+            </a:fld>
+            <a:endParaRPr lang="en-US"/>
+          </a:p>
+        </p:txBody>
+      </p:sp>
+      <p:sp>
+        <p:nvSpPr>
+          <p:cNvPr id="4" name="TextBox 3">
+            <a:extLst>
+              <a:ext uri="{FF2B5EF4-FFF2-40B4-BE49-F238E27FC236}">
+                <a16:creationId xmlns:a16="http://schemas.microsoft.com/office/drawing/2014/main" id="{68678F28-5190-6A5D-62A5-015767B1BC1D}"/>
+              </a:ext>
+            </a:extLst>
+          </p:cNvPr>
+          <p:cNvSpPr txBox="1"/>
+          <p:nvPr/>
+        </p:nvSpPr>
+        <p:spPr>
+          <a:xfrm>
+            <a:off x="457199" y="1212977"/>
+            <a:ext cx="4068147" cy="890115"/>
+          </a:xfrm>
+          <a:prstGeom prst="rect">
+            <a:avLst/>
+          </a:prstGeom>
+          <a:noFill/>
+        </p:spPr>
+        <p:txBody>
+          <a:bodyPr wrap="square" rtlCol="0">
+            <a:spAutoFit/>
+          </a:bodyPr>
+          <a:lstStyle/>
+          <a:p>
+            <a:pPr>
+              <a:lnSpc>
+                <a:spcPct val="150000"/>
+              </a:lnSpc>
+            </a:pPr>
+            <a:r>
+              <a:rPr lang="en-ZA" sz="1200" b="1" dirty="0">
+                <a:solidFill>
+                  <a:schemeClr val="tx2"/>
+                </a:solidFill>
+                <a:latin typeface="Times New Roman" panose="02020603050405020304" pitchFamily="18" charset="0"/>
+                <a:cs typeface="Times New Roman" panose="02020603050405020304" pitchFamily="18" charset="0"/>
+              </a:rPr>
+              <a:t>PCA </a:t>
+            </a:r>
+            <a:r>
+              <a:rPr lang="en-ZA" sz="1200" dirty="0">
+                <a:solidFill>
+                  <a:schemeClr val="tx2"/>
+                </a:solidFill>
+                <a:latin typeface="Times New Roman" panose="02020603050405020304" pitchFamily="18" charset="0"/>
+                <a:cs typeface="Times New Roman" panose="02020603050405020304" pitchFamily="18" charset="0"/>
+              </a:rPr>
+              <a:t>compresses correlated features into fewer uncorrelated components reducing dimensionality while preserving most of the informative variance.</a:t>
+            </a:r>
+            <a:endParaRPr lang="en-ZA" sz="1200" b="1" dirty="0">
+              <a:solidFill>
+                <a:schemeClr val="tx2"/>
+              </a:solidFill>
+              <a:latin typeface="Times New Roman" panose="02020603050405020304" pitchFamily="18" charset="0"/>
+              <a:cs typeface="Times New Roman" panose="02020603050405020304" pitchFamily="18" charset="0"/>
+            </a:endParaRPr>
+          </a:p>
+        </p:txBody>
+      </p:sp>
+      <p:sp>
+        <p:nvSpPr>
+          <p:cNvPr id="5" name="Rectangle: Rounded Corners 4">
+            <a:extLst>
+              <a:ext uri="{FF2B5EF4-FFF2-40B4-BE49-F238E27FC236}">
+                <a16:creationId xmlns:a16="http://schemas.microsoft.com/office/drawing/2014/main" id="{101B37D2-ABBA-15BF-263E-02D2CA6E3131}"/>
+              </a:ext>
+            </a:extLst>
+          </p:cNvPr>
+          <p:cNvSpPr/>
+          <p:nvPr/>
+        </p:nvSpPr>
+        <p:spPr>
+          <a:xfrm>
+            <a:off x="559837" y="2360645"/>
+            <a:ext cx="2481943" cy="1408922"/>
+          </a:xfrm>
+          <a:prstGeom prst="roundRect">
+            <a:avLst/>
+          </a:prstGeom>
+          <a:solidFill>
+            <a:schemeClr val="accent2">
+              <a:lumMod val="20000"/>
+              <a:lumOff val="80000"/>
+            </a:schemeClr>
+          </a:solidFill>
+          <a:ln>
+            <a:solidFill>
+              <a:schemeClr val="accent2">
+                <a:lumMod val="20000"/>
+                <a:lumOff val="80000"/>
+              </a:schemeClr>
+            </a:solidFill>
+          </a:ln>
+        </p:spPr>
+        <p:style>
+          <a:lnRef idx="2">
+            <a:schemeClr val="accent1">
+              <a:shade val="15000"/>
+            </a:schemeClr>
+          </a:lnRef>
+          <a:fillRef idx="1">
+            <a:schemeClr val="accent1"/>
+          </a:fillRef>
+          <a:effectRef idx="0">
+            <a:schemeClr val="accent1"/>
+          </a:effectRef>
+          <a:fontRef idx="minor">
+            <a:schemeClr val="lt1"/>
+          </a:fontRef>
+        </p:style>
+        <p:txBody>
+          <a:bodyPr rtlCol="0" anchor="ctr"/>
+          <a:lstStyle/>
+          <a:p>
+            <a:pPr>
+              <a:lnSpc>
+                <a:spcPct val="150000"/>
+              </a:lnSpc>
+            </a:pPr>
+            <a:r>
+              <a:rPr lang="en-ZA" sz="1200" dirty="0">
+                <a:solidFill>
+                  <a:schemeClr val="tx2"/>
+                </a:solidFill>
+                <a:latin typeface="Times New Roman" panose="02020603050405020304" pitchFamily="18" charset="0"/>
+                <a:cs typeface="Times New Roman" panose="02020603050405020304" pitchFamily="18" charset="0"/>
+              </a:rPr>
+              <a:t>Number of components needed for 90% variance:</a:t>
+            </a:r>
+          </a:p>
+          <a:p>
+            <a:pPr algn="ctr">
+              <a:lnSpc>
+                <a:spcPct val="150000"/>
+              </a:lnSpc>
+            </a:pPr>
+            <a:r>
+              <a:rPr lang="en-ZA" sz="1600" b="1" dirty="0">
+                <a:solidFill>
+                  <a:schemeClr val="tx2"/>
+                </a:solidFill>
+                <a:latin typeface="Times New Roman" panose="02020603050405020304" pitchFamily="18" charset="0"/>
+                <a:cs typeface="Times New Roman" panose="02020603050405020304" pitchFamily="18" charset="0"/>
+              </a:rPr>
+              <a:t>11</a:t>
+            </a:r>
+          </a:p>
+        </p:txBody>
+      </p:sp>
+      <p:sp>
+        <p:nvSpPr>
+          <p:cNvPr id="7" name="Rectangle: Rounded Corners 6">
+            <a:extLst>
+              <a:ext uri="{FF2B5EF4-FFF2-40B4-BE49-F238E27FC236}">
+                <a16:creationId xmlns:a16="http://schemas.microsoft.com/office/drawing/2014/main" id="{DA97D7DB-313D-CFE8-5561-7E90996C9450}"/>
+              </a:ext>
+            </a:extLst>
+          </p:cNvPr>
+          <p:cNvSpPr/>
+          <p:nvPr/>
+        </p:nvSpPr>
+        <p:spPr>
+          <a:xfrm>
+            <a:off x="3502090" y="2401669"/>
+            <a:ext cx="2481943" cy="1408922"/>
+          </a:xfrm>
+          <a:prstGeom prst="roundRect">
+            <a:avLst/>
+          </a:prstGeom>
+          <a:solidFill>
+            <a:schemeClr val="accent2">
+              <a:lumMod val="20000"/>
+              <a:lumOff val="80000"/>
+            </a:schemeClr>
+          </a:solidFill>
+          <a:ln>
+            <a:solidFill>
+              <a:schemeClr val="accent2">
+                <a:lumMod val="20000"/>
+                <a:lumOff val="80000"/>
+              </a:schemeClr>
+            </a:solidFill>
+          </a:ln>
+        </p:spPr>
+        <p:style>
+          <a:lnRef idx="2">
+            <a:schemeClr val="accent1">
+              <a:shade val="15000"/>
+            </a:schemeClr>
+          </a:lnRef>
+          <a:fillRef idx="1">
+            <a:schemeClr val="accent1"/>
+          </a:fillRef>
+          <a:effectRef idx="0">
+            <a:schemeClr val="accent1"/>
+          </a:effectRef>
+          <a:fontRef idx="minor">
+            <a:schemeClr val="lt1"/>
+          </a:fontRef>
+        </p:style>
+        <p:txBody>
+          <a:bodyPr rtlCol="0" anchor="ctr"/>
+          <a:lstStyle/>
+          <a:p>
+            <a:pPr>
+              <a:lnSpc>
+                <a:spcPct val="150000"/>
+              </a:lnSpc>
+            </a:pPr>
+            <a:r>
+              <a:rPr lang="en-ZA" sz="1200" dirty="0">
+                <a:solidFill>
+                  <a:schemeClr val="tx2"/>
+                </a:solidFill>
+                <a:latin typeface="Times New Roman" panose="02020603050405020304" pitchFamily="18" charset="0"/>
+                <a:cs typeface="Times New Roman" panose="02020603050405020304" pitchFamily="18" charset="0"/>
+              </a:rPr>
+              <a:t>Number of components needed for 95% variance:</a:t>
+            </a:r>
+          </a:p>
+          <a:p>
+            <a:pPr algn="ctr">
+              <a:lnSpc>
+                <a:spcPct val="150000"/>
+              </a:lnSpc>
+            </a:pPr>
+            <a:r>
+              <a:rPr lang="en-ZA" sz="1600" b="1" dirty="0">
+                <a:solidFill>
+                  <a:schemeClr val="tx2"/>
+                </a:solidFill>
+                <a:latin typeface="Times New Roman" panose="02020603050405020304" pitchFamily="18" charset="0"/>
+                <a:cs typeface="Times New Roman" panose="02020603050405020304" pitchFamily="18" charset="0"/>
+              </a:rPr>
+              <a:t>13</a:t>
+            </a:r>
+          </a:p>
+        </p:txBody>
+      </p:sp>
+      <p:sp>
+        <p:nvSpPr>
+          <p:cNvPr id="8" name="TextBox 7">
+            <a:extLst>
+              <a:ext uri="{FF2B5EF4-FFF2-40B4-BE49-F238E27FC236}">
+                <a16:creationId xmlns:a16="http://schemas.microsoft.com/office/drawing/2014/main" id="{3202D219-EFBD-0B93-72B9-EB96D28B3591}"/>
+              </a:ext>
+            </a:extLst>
+          </p:cNvPr>
+          <p:cNvSpPr txBox="1"/>
+          <p:nvPr/>
+        </p:nvSpPr>
+        <p:spPr>
+          <a:xfrm>
+            <a:off x="653143" y="4264090"/>
+            <a:ext cx="3648269" cy="890115"/>
+          </a:xfrm>
+          <a:prstGeom prst="rect">
+            <a:avLst/>
+          </a:prstGeom>
+          <a:noFill/>
+        </p:spPr>
+        <p:txBody>
+          <a:bodyPr wrap="square" rtlCol="0">
+            <a:spAutoFit/>
+          </a:bodyPr>
+          <a:lstStyle/>
+          <a:p>
+            <a:pPr>
+              <a:lnSpc>
+                <a:spcPct val="150000"/>
+              </a:lnSpc>
+            </a:pPr>
+            <a:r>
+              <a:rPr lang="en-ZA" sz="1200" b="1" dirty="0">
+                <a:solidFill>
+                  <a:schemeClr val="tx2"/>
+                </a:solidFill>
+                <a:latin typeface="Times New Roman" panose="02020603050405020304" pitchFamily="18" charset="0"/>
+                <a:cs typeface="Times New Roman" panose="02020603050405020304" pitchFamily="18" charset="0"/>
+              </a:rPr>
+              <a:t>13 components </a:t>
+            </a:r>
+            <a:r>
+              <a:rPr lang="en-ZA" sz="1200" dirty="0">
+                <a:solidFill>
+                  <a:schemeClr val="tx2"/>
+                </a:solidFill>
+                <a:latin typeface="Times New Roman" panose="02020603050405020304" pitchFamily="18" charset="0"/>
+                <a:cs typeface="Times New Roman" panose="02020603050405020304" pitchFamily="18" charset="0"/>
+              </a:rPr>
+              <a:t>(95% threshold) were selected keeping most information while cutting model input size and reducing overfitting risk from redundant features.</a:t>
+            </a:r>
+            <a:endParaRPr lang="en-ZA" sz="1200" b="1" dirty="0">
+              <a:solidFill>
+                <a:schemeClr val="tx2"/>
+              </a:solidFill>
+              <a:latin typeface="Times New Roman" panose="02020603050405020304" pitchFamily="18" charset="0"/>
+              <a:cs typeface="Times New Roman" panose="02020603050405020304" pitchFamily="18" charset="0"/>
+            </a:endParaRPr>
+          </a:p>
+        </p:txBody>
+      </p:sp>
+    </p:spTree>
+    <p:extLst>
+      <p:ext uri="{BB962C8B-B14F-4D97-AF65-F5344CB8AC3E}">
+        <p14:creationId xmlns:p14="http://schemas.microsoft.com/office/powerpoint/2010/main" val="4224083050"/>
+      </p:ext>
+    </p:extLst>
+  </p:cSld>
+  <p:clrMapOvr>
+    <a:masterClrMapping/>
+  </p:clrMapOvr>
+</p:sld>
+</file>
+
+<file path=ppt/slides/slide7.xml><?xml version="1.0" encoding="utf-8"?>
+<p:sld xmlns:a="http://schemas.openxmlformats.org/drawingml/2006/main" xmlns:r="http://schemas.openxmlformats.org/officeDocument/2006/relationships" xmlns:p="http://schemas.openxmlformats.org/presentationml/2006/main">
+  <p:cSld>
+    <p:spTree>
+      <p:nvGrpSpPr>
+        <p:cNvPr id="1" name=""/>
+        <p:cNvGrpSpPr/>
+        <p:nvPr/>
+      </p:nvGrpSpPr>
+      <p:grpSpPr>
+        <a:xfrm>
+          <a:off x="0" y="0"/>
+          <a:ext cx="0" cy="0"/>
+          <a:chOff x="0" y="0"/>
+          <a:chExt cx="0" cy="0"/>
+        </a:xfrm>
+      </p:grpSpPr>
+      <p:sp>
+        <p:nvSpPr>
+          <p:cNvPr id="2" name="Title 1">
+            <a:extLst>
+              <a:ext uri="{FF2B5EF4-FFF2-40B4-BE49-F238E27FC236}">
+                <a16:creationId xmlns:a16="http://schemas.microsoft.com/office/drawing/2014/main" id="{D9CBD972-E19E-F98B-7232-3066ADCC0805}"/>
+              </a:ext>
+            </a:extLst>
+          </p:cNvPr>
+          <p:cNvSpPr>
+            <a:spLocks noGrp="1"/>
+          </p:cNvSpPr>
+          <p:nvPr>
+            <p:ph type="ctrTitle"/>
+          </p:nvPr>
+        </p:nvSpPr>
+        <p:spPr/>
+        <p:txBody>
+          <a:bodyPr/>
+          <a:lstStyle/>
+          <a:p>
+            <a:endParaRPr lang="en-ZA"/>
+          </a:p>
+        </p:txBody>
+      </p:sp>
+      <p:sp>
+        <p:nvSpPr>
+          <p:cNvPr id="3" name="Slide Number Placeholder 2">
+            <a:extLst>
+              <a:ext uri="{FF2B5EF4-FFF2-40B4-BE49-F238E27FC236}">
+                <a16:creationId xmlns:a16="http://schemas.microsoft.com/office/drawing/2014/main" id="{A064F995-DAC0-F2BA-F4B7-4AA15848CD5D}"/>
+              </a:ext>
+            </a:extLst>
+          </p:cNvPr>
+          <p:cNvSpPr>
+            <a:spLocks noGrp="1"/>
+          </p:cNvSpPr>
+          <p:nvPr>
+            <p:ph type="sldNum" sz="quarter" idx="12"/>
+          </p:nvPr>
+        </p:nvSpPr>
+        <p:spPr/>
+        <p:txBody>
+          <a:bodyPr/>
+          <a:lstStyle/>
+          <a:p>
+            <a:fld id="{AEAA3239-9EA4-4A65-A281-97F994456D9F}" type="slidenum">
+              <a:rPr lang="en-US" smtClean="0"/>
+              <a:t>7</a:t>
+            </a:fld>
+            <a:endParaRPr lang="en-US"/>
+          </a:p>
+        </p:txBody>
+      </p:sp>
+    </p:spTree>
+    <p:extLst>
+      <p:ext uri="{BB962C8B-B14F-4D97-AF65-F5344CB8AC3E}">
+        <p14:creationId xmlns:p14="http://schemas.microsoft.com/office/powerpoint/2010/main" val="4169104927"/>
       </p:ext>
     </p:extLst>
   </p:cSld>

--- a/Credit Risk Prediction System.pptx
+++ b/Credit Risk Prediction System.pptx
@@ -141,7 +141,7 @@
 <file path=ppt/revisionInfo.xml><?xml version="1.0" encoding="utf-8"?>
 <p1510:revInfo xmlns:a="http://schemas.openxmlformats.org/drawingml/2006/main" xmlns:r="http://schemas.openxmlformats.org/officeDocument/2006/relationships" xmlns:p1510="http://schemas.microsoft.com/office/powerpoint/2015/10/main">
   <p1510:revLst>
-    <p1510:client id="{5F03DC37-C6E7-4D03-9B6A-5B1F4D882761}" v="46" dt="2026-09-02T07:57:28.032"/>
+    <p1510:client id="{5F03DC37-C6E7-4D03-9B6A-5B1F4D882761}" v="50" dt="2026-09-02T08:36:14.898"/>
   </p1510:revLst>
 </p1510:revInfo>
 </file>
@@ -151,7 +151,7 @@
   <pc:docChgLst>
     <pc:chgData name="Thembelihle Nkosi" userId="34acb82be647289d" providerId="LiveId" clId="{A75475CB-E90B-49A7-8916-1196816BF4F1}"/>
     <pc:docChg chg="undo custSel addSld delSld modSld">
-      <pc:chgData name="Thembelihle Nkosi" userId="34acb82be647289d" providerId="LiveId" clId="{A75475CB-E90B-49A7-8916-1196816BF4F1}" dt="2026-09-02T07:58:45.096" v="4282" actId="20577"/>
+      <pc:chgData name="Thembelihle Nkosi" userId="34acb82be647289d" providerId="LiveId" clId="{A75475CB-E90B-49A7-8916-1196816BF4F1}" dt="2026-09-02T08:46:53.098" v="4655" actId="20577"/>
       <pc:docMkLst>
         <pc:docMk/>
       </pc:docMkLst>
@@ -361,14 +361,14 @@
           </ac:grpSpMkLst>
         </pc:grpChg>
       </pc:sldChg>
-      <pc:sldChg chg="addSp modSp new mod">
-        <pc:chgData name="Thembelihle Nkosi" userId="34acb82be647289d" providerId="LiveId" clId="{A75475CB-E90B-49A7-8916-1196816BF4F1}" dt="2026-09-01T19:41:01.335" v="2810" actId="14100"/>
+      <pc:sldChg chg="addSp delSp modSp new mod">
+        <pc:chgData name="Thembelihle Nkosi" userId="34acb82be647289d" providerId="LiveId" clId="{A75475CB-E90B-49A7-8916-1196816BF4F1}" dt="2026-09-02T08:35:57.616" v="4427" actId="164"/>
         <pc:sldMkLst>
           <pc:docMk/>
           <pc:sldMk cId="1420003605" sldId="262"/>
         </pc:sldMkLst>
         <pc:spChg chg="mod">
-          <ac:chgData name="Thembelihle Nkosi" userId="34acb82be647289d" providerId="LiveId" clId="{A75475CB-E90B-49A7-8916-1196816BF4F1}" dt="2026-09-01T19:41:01.335" v="2810" actId="14100"/>
+          <ac:chgData name="Thembelihle Nkosi" userId="34acb82be647289d" providerId="LiveId" clId="{A75475CB-E90B-49A7-8916-1196816BF4F1}" dt="2026-09-02T08:33:35.084" v="4409" actId="1076"/>
           <ac:spMkLst>
             <pc:docMk/>
             <pc:sldMk cId="1420003605" sldId="262"/>
@@ -383,24 +383,24 @@
             <ac:spMk id="3" creationId="{717D40CD-0B84-4C31-ECF8-D1C62B229695}"/>
           </ac:spMkLst>
         </pc:spChg>
-        <pc:spChg chg="add mod">
-          <ac:chgData name="Thembelihle Nkosi" userId="34acb82be647289d" providerId="LiveId" clId="{A75475CB-E90B-49A7-8916-1196816BF4F1}" dt="2026-09-01T13:01:46.071" v="1501" actId="207"/>
+        <pc:spChg chg="add mod topLvl">
+          <ac:chgData name="Thembelihle Nkosi" userId="34acb82be647289d" providerId="LiveId" clId="{A75475CB-E90B-49A7-8916-1196816BF4F1}" dt="2026-09-02T08:35:57.616" v="4427" actId="164"/>
           <ac:spMkLst>
             <pc:docMk/>
             <pc:sldMk cId="1420003605" sldId="262"/>
             <ac:spMk id="4" creationId="{9338586F-97B7-4B4D-B65A-F4F4BE39E158}"/>
           </ac:spMkLst>
         </pc:spChg>
-        <pc:spChg chg="add mod">
-          <ac:chgData name="Thembelihle Nkosi" userId="34acb82be647289d" providerId="LiveId" clId="{A75475CB-E90B-49A7-8916-1196816BF4F1}" dt="2026-09-01T13:01:58.200" v="1502" actId="207"/>
+        <pc:spChg chg="add mod topLvl">
+          <ac:chgData name="Thembelihle Nkosi" userId="34acb82be647289d" providerId="LiveId" clId="{A75475CB-E90B-49A7-8916-1196816BF4F1}" dt="2026-09-02T08:35:57.616" v="4427" actId="164"/>
           <ac:spMkLst>
             <pc:docMk/>
             <pc:sldMk cId="1420003605" sldId="262"/>
             <ac:spMk id="6" creationId="{6A2BF41D-8296-2AE8-41C7-DBD3D006BBAC}"/>
           </ac:spMkLst>
         </pc:spChg>
-        <pc:spChg chg="add mod">
-          <ac:chgData name="Thembelihle Nkosi" userId="34acb82be647289d" providerId="LiveId" clId="{A75475CB-E90B-49A7-8916-1196816BF4F1}" dt="2026-09-01T13:02:02.588" v="1503" actId="207"/>
+        <pc:spChg chg="add mod topLvl">
+          <ac:chgData name="Thembelihle Nkosi" userId="34acb82be647289d" providerId="LiveId" clId="{A75475CB-E90B-49A7-8916-1196816BF4F1}" dt="2026-09-02T08:35:57.616" v="4427" actId="164"/>
           <ac:spMkLst>
             <pc:docMk/>
             <pc:sldMk cId="1420003605" sldId="262"/>
@@ -416,7 +416,7 @@
           </ac:spMkLst>
         </pc:spChg>
         <pc:spChg chg="add mod">
-          <ac:chgData name="Thembelihle Nkosi" userId="34acb82be647289d" providerId="LiveId" clId="{A75475CB-E90B-49A7-8916-1196816BF4F1}" dt="2026-09-01T13:04:14.667" v="1531" actId="1076"/>
+          <ac:chgData name="Thembelihle Nkosi" userId="34acb82be647289d" providerId="LiveId" clId="{A75475CB-E90B-49A7-8916-1196816BF4F1}" dt="2026-09-02T08:34:27.321" v="4421" actId="1076"/>
           <ac:spMkLst>
             <pc:docMk/>
             <pc:sldMk cId="1420003605" sldId="262"/>
@@ -432,7 +432,15 @@
           </ac:spMkLst>
         </pc:spChg>
         <pc:grpChg chg="add mod">
-          <ac:chgData name="Thembelihle Nkosi" userId="34acb82be647289d" providerId="LiveId" clId="{A75475CB-E90B-49A7-8916-1196816BF4F1}" dt="2026-09-01T13:00:28.304" v="1392" actId="164"/>
+          <ac:chgData name="Thembelihle Nkosi" userId="34acb82be647289d" providerId="LiveId" clId="{A75475CB-E90B-49A7-8916-1196816BF4F1}" dt="2026-09-02T08:35:57.616" v="4427" actId="164"/>
+          <ac:grpSpMkLst>
+            <pc:docMk/>
+            <pc:sldMk cId="1420003605" sldId="262"/>
+            <ac:grpSpMk id="7" creationId="{D831B685-E072-5AF0-6D34-0532AB2C0109}"/>
+          </ac:grpSpMkLst>
+        </pc:grpChg>
+        <pc:grpChg chg="add del mod">
+          <ac:chgData name="Thembelihle Nkosi" userId="34acb82be647289d" providerId="LiveId" clId="{A75475CB-E90B-49A7-8916-1196816BF4F1}" dt="2026-09-02T08:33:12.596" v="4405" actId="165"/>
           <ac:grpSpMkLst>
             <pc:docMk/>
             <pc:sldMk cId="1420003605" sldId="262"/>
@@ -440,16 +448,24 @@
           </ac:grpSpMkLst>
         </pc:grpChg>
         <pc:graphicFrameChg chg="add mod modGraphic">
-          <ac:chgData name="Thembelihle Nkosi" userId="34acb82be647289d" providerId="LiveId" clId="{A75475CB-E90B-49A7-8916-1196816BF4F1}" dt="2026-09-01T13:20:01.500" v="2065" actId="20577"/>
+          <ac:chgData name="Thembelihle Nkosi" userId="34acb82be647289d" providerId="LiveId" clId="{A75475CB-E90B-49A7-8916-1196816BF4F1}" dt="2026-09-02T08:34:23.727" v="4420" actId="1076"/>
           <ac:graphicFrameMkLst>
             <pc:docMk/>
             <pc:sldMk cId="1420003605" sldId="262"/>
             <ac:graphicFrameMk id="12" creationId="{F1211279-574A-404D-07AE-BAEDD03880BB}"/>
           </ac:graphicFrameMkLst>
         </pc:graphicFrameChg>
+        <pc:picChg chg="add mod">
+          <ac:chgData name="Thembelihle Nkosi" userId="34acb82be647289d" providerId="LiveId" clId="{A75475CB-E90B-49A7-8916-1196816BF4F1}" dt="2026-09-02T08:35:07.299" v="4426" actId="1076"/>
+          <ac:picMkLst>
+            <pc:docMk/>
+            <pc:sldMk cId="1420003605" sldId="262"/>
+            <ac:picMk id="5" creationId="{6CC99FC1-5497-0D82-F843-27530B5CCB86}"/>
+          </ac:picMkLst>
+        </pc:picChg>
       </pc:sldChg>
       <pc:sldChg chg="addSp delSp modSp new mod">
-        <pc:chgData name="Thembelihle Nkosi" userId="34acb82be647289d" providerId="LiveId" clId="{A75475CB-E90B-49A7-8916-1196816BF4F1}" dt="2026-09-01T13:37:08.337" v="2778" actId="1076"/>
+        <pc:chgData name="Thembelihle Nkosi" userId="34acb82be647289d" providerId="LiveId" clId="{A75475CB-E90B-49A7-8916-1196816BF4F1}" dt="2026-09-02T08:40:08.754" v="4449" actId="1035"/>
         <pc:sldMkLst>
           <pc:docMk/>
           <pc:sldMk cId="1320807106" sldId="263"/>
@@ -463,15 +479,15 @@
           </ac:spMkLst>
         </pc:spChg>
         <pc:spChg chg="add mod">
-          <ac:chgData name="Thembelihle Nkosi" userId="34acb82be647289d" providerId="LiveId" clId="{A75475CB-E90B-49A7-8916-1196816BF4F1}" dt="2026-09-01T13:37:08.337" v="2778" actId="1076"/>
+          <ac:chgData name="Thembelihle Nkosi" userId="34acb82be647289d" providerId="LiveId" clId="{A75475CB-E90B-49A7-8916-1196816BF4F1}" dt="2026-09-02T08:38:57.927" v="4439" actId="14100"/>
           <ac:spMkLst>
             <pc:docMk/>
             <pc:sldMk cId="1320807106" sldId="263"/>
             <ac:spMk id="4" creationId="{34C5732B-A0FC-6BE7-66B4-BD16ABA69C2E}"/>
           </ac:spMkLst>
         </pc:spChg>
-        <pc:spChg chg="add mod">
-          <ac:chgData name="Thembelihle Nkosi" userId="34acb82be647289d" providerId="LiveId" clId="{A75475CB-E90B-49A7-8916-1196816BF4F1}" dt="2026-09-01T13:36:58.238" v="2777" actId="164"/>
+        <pc:spChg chg="add mod topLvl">
+          <ac:chgData name="Thembelihle Nkosi" userId="34acb82be647289d" providerId="LiveId" clId="{A75475CB-E90B-49A7-8916-1196816BF4F1}" dt="2026-09-02T08:36:20.131" v="4430" actId="1076"/>
           <ac:spMkLst>
             <pc:docMk/>
             <pc:sldMk cId="1320807106" sldId="263"/>
@@ -494,54 +510,62 @@
             <ac:spMk id="9" creationId="{D2323175-B4C2-4BD7-6D9C-5F0D7B5D92E9}"/>
           </ac:spMkLst>
         </pc:spChg>
-        <pc:spChg chg="add mod">
-          <ac:chgData name="Thembelihle Nkosi" userId="34acb82be647289d" providerId="LiveId" clId="{A75475CB-E90B-49A7-8916-1196816BF4F1}" dt="2026-09-01T13:36:58.238" v="2777" actId="164"/>
+        <pc:spChg chg="add mod topLvl">
+          <ac:chgData name="Thembelihle Nkosi" userId="34acb82be647289d" providerId="LiveId" clId="{A75475CB-E90B-49A7-8916-1196816BF4F1}" dt="2026-09-02T08:36:24.843" v="4431" actId="1076"/>
           <ac:spMkLst>
             <pc:docMk/>
             <pc:sldMk cId="1320807106" sldId="263"/>
             <ac:spMk id="11" creationId="{AE71BBAF-2E2F-12D9-77D9-E3A23E6F4AB7}"/>
           </ac:spMkLst>
         </pc:spChg>
-        <pc:spChg chg="add mod">
-          <ac:chgData name="Thembelihle Nkosi" userId="34acb82be647289d" providerId="LiveId" clId="{A75475CB-E90B-49A7-8916-1196816BF4F1}" dt="2026-09-01T13:36:58.238" v="2777" actId="164"/>
+        <pc:spChg chg="add mod topLvl">
+          <ac:chgData name="Thembelihle Nkosi" userId="34acb82be647289d" providerId="LiveId" clId="{A75475CB-E90B-49A7-8916-1196816BF4F1}" dt="2026-09-02T08:38:26.561" v="4433" actId="1076"/>
           <ac:spMkLst>
             <pc:docMk/>
             <pc:sldMk cId="1320807106" sldId="263"/>
             <ac:spMk id="13" creationId="{0B8DEA96-23F7-4671-8B04-75C8E827447D}"/>
           </ac:spMkLst>
         </pc:spChg>
-        <pc:spChg chg="add mod">
-          <ac:chgData name="Thembelihle Nkosi" userId="34acb82be647289d" providerId="LiveId" clId="{A75475CB-E90B-49A7-8916-1196816BF4F1}" dt="2026-09-01T13:36:58.238" v="2777" actId="164"/>
+        <pc:spChg chg="add mod topLvl">
+          <ac:chgData name="Thembelihle Nkosi" userId="34acb82be647289d" providerId="LiveId" clId="{A75475CB-E90B-49A7-8916-1196816BF4F1}" dt="2026-09-02T08:38:30.239" v="4434" actId="1076"/>
           <ac:spMkLst>
             <pc:docMk/>
             <pc:sldMk cId="1320807106" sldId="263"/>
             <ac:spMk id="15" creationId="{E6101395-99E0-F679-1F64-061F36C0955F}"/>
           </ac:spMkLst>
         </pc:spChg>
-        <pc:spChg chg="add mod">
-          <ac:chgData name="Thembelihle Nkosi" userId="34acb82be647289d" providerId="LiveId" clId="{A75475CB-E90B-49A7-8916-1196816BF4F1}" dt="2026-09-01T13:36:58.238" v="2777" actId="164"/>
+        <pc:spChg chg="add mod topLvl">
+          <ac:chgData name="Thembelihle Nkosi" userId="34acb82be647289d" providerId="LiveId" clId="{A75475CB-E90B-49A7-8916-1196816BF4F1}" dt="2026-09-02T08:38:44.567" v="4437" actId="1076"/>
           <ac:spMkLst>
             <pc:docMk/>
             <pc:sldMk cId="1320807106" sldId="263"/>
             <ac:spMk id="17" creationId="{969CBD7C-1F4E-DEC1-7570-2CE212A58AC1}"/>
           </ac:spMkLst>
         </pc:spChg>
-        <pc:spChg chg="add mod">
-          <ac:chgData name="Thembelihle Nkosi" userId="34acb82be647289d" providerId="LiveId" clId="{A75475CB-E90B-49A7-8916-1196816BF4F1}" dt="2026-09-01T13:36:58.238" v="2777" actId="164"/>
+        <pc:spChg chg="add mod topLvl">
+          <ac:chgData name="Thembelihle Nkosi" userId="34acb82be647289d" providerId="LiveId" clId="{A75475CB-E90B-49A7-8916-1196816BF4F1}" dt="2026-09-02T08:38:39.019" v="4436" actId="1076"/>
           <ac:spMkLst>
             <pc:docMk/>
             <pc:sldMk cId="1320807106" sldId="263"/>
             <ac:spMk id="19" creationId="{E069293D-C6DB-B694-09E4-84AC977ADF74}"/>
           </ac:spMkLst>
         </pc:spChg>
-        <pc:grpChg chg="add mod">
-          <ac:chgData name="Thembelihle Nkosi" userId="34acb82be647289d" providerId="LiveId" clId="{A75475CB-E90B-49A7-8916-1196816BF4F1}" dt="2026-09-01T13:36:58.238" v="2777" actId="164"/>
+        <pc:grpChg chg="add del mod">
+          <ac:chgData name="Thembelihle Nkosi" userId="34acb82be647289d" providerId="LiveId" clId="{A75475CB-E90B-49A7-8916-1196816BF4F1}" dt="2026-09-02T08:36:14.893" v="4429" actId="165"/>
           <ac:grpSpMkLst>
             <pc:docMk/>
             <pc:sldMk cId="1320807106" sldId="263"/>
             <ac:grpSpMk id="20" creationId="{452FD5C8-F8BA-B7F9-0F73-AB18189159C9}"/>
           </ac:grpSpMkLst>
         </pc:grpChg>
+        <pc:picChg chg="add mod">
+          <ac:chgData name="Thembelihle Nkosi" userId="34acb82be647289d" providerId="LiveId" clId="{A75475CB-E90B-49A7-8916-1196816BF4F1}" dt="2026-09-02T08:40:08.754" v="4449" actId="1035"/>
+          <ac:picMkLst>
+            <pc:docMk/>
+            <pc:sldMk cId="1320807106" sldId="263"/>
+            <ac:picMk id="6" creationId="{AFEBA0FF-BBCD-5D95-F59E-BDA53C650EEB}"/>
+          </ac:picMkLst>
+        </pc:picChg>
       </pc:sldChg>
       <pc:sldChg chg="addSp delSp modSp new mod">
         <pc:chgData name="Thembelihle Nkosi" userId="34acb82be647289d" providerId="LiveId" clId="{A75475CB-E90B-49A7-8916-1196816BF4F1}" dt="2026-09-02T07:49:55.799" v="3807" actId="14100"/>
@@ -590,7 +614,7 @@
         </pc:sldMkLst>
       </pc:sldChg>
       <pc:sldChg chg="addSp modSp new mod modClrScheme chgLayout">
-        <pc:chgData name="Thembelihle Nkosi" userId="34acb82be647289d" providerId="LiveId" clId="{A75475CB-E90B-49A7-8916-1196816BF4F1}" dt="2026-09-02T07:58:45.096" v="4282" actId="20577"/>
+        <pc:chgData name="Thembelihle Nkosi" userId="34acb82be647289d" providerId="LiveId" clId="{A75475CB-E90B-49A7-8916-1196816BF4F1}" dt="2026-09-02T08:26:57.205" v="4291" actId="14100"/>
         <pc:sldMkLst>
           <pc:docMk/>
           <pc:sldMk cId="4224083050" sldId="265"/>
@@ -628,7 +652,7 @@
           </ac:spMkLst>
         </pc:spChg>
         <pc:spChg chg="add mod">
-          <ac:chgData name="Thembelihle Nkosi" userId="34acb82be647289d" providerId="LiveId" clId="{A75475CB-E90B-49A7-8916-1196816BF4F1}" dt="2026-09-02T07:57:23.799" v="4103" actId="20577"/>
+          <ac:chgData name="Thembelihle Nkosi" userId="34acb82be647289d" providerId="LiveId" clId="{A75475CB-E90B-49A7-8916-1196816BF4F1}" dt="2026-09-02T08:26:43.411" v="4288" actId="1076"/>
           <ac:spMkLst>
             <pc:docMk/>
             <pc:sldMk cId="4224083050" sldId="265"/>
@@ -636,19 +660,66 @@
           </ac:spMkLst>
         </pc:spChg>
         <pc:spChg chg="add mod">
-          <ac:chgData name="Thembelihle Nkosi" userId="34acb82be647289d" providerId="LiveId" clId="{A75475CB-E90B-49A7-8916-1196816BF4F1}" dt="2026-09-02T07:58:45.096" v="4282" actId="20577"/>
+          <ac:chgData name="Thembelihle Nkosi" userId="34acb82be647289d" providerId="LiveId" clId="{A75475CB-E90B-49A7-8916-1196816BF4F1}" dt="2026-09-02T08:26:48.263" v="4289" actId="1076"/>
           <ac:spMkLst>
             <pc:docMk/>
             <pc:sldMk cId="4224083050" sldId="265"/>
             <ac:spMk id="8" creationId="{3202D219-EFBD-0B93-72B9-EB96D28B3591}"/>
           </ac:spMkLst>
         </pc:spChg>
+        <pc:picChg chg="add mod">
+          <ac:chgData name="Thembelihle Nkosi" userId="34acb82be647289d" providerId="LiveId" clId="{A75475CB-E90B-49A7-8916-1196816BF4F1}" dt="2026-09-02T08:26:57.205" v="4291" actId="14100"/>
+          <ac:picMkLst>
+            <pc:docMk/>
+            <pc:sldMk cId="4224083050" sldId="265"/>
+            <ac:picMk id="10" creationId="{6C017206-1816-2CDA-9AE8-0959A0BF2D66}"/>
+          </ac:picMkLst>
+        </pc:picChg>
       </pc:sldChg>
-      <pc:sldChg chg="new">
-        <pc:chgData name="Thembelihle Nkosi" userId="34acb82be647289d" providerId="LiveId" clId="{A75475CB-E90B-49A7-8916-1196816BF4F1}" dt="2026-09-02T07:52:51.138" v="3916" actId="680"/>
+      <pc:sldChg chg="addSp modSp new mod chgLayout">
+        <pc:chgData name="Thembelihle Nkosi" userId="34acb82be647289d" providerId="LiveId" clId="{A75475CB-E90B-49A7-8916-1196816BF4F1}" dt="2026-09-02T08:46:53.098" v="4655" actId="20577"/>
         <pc:sldMkLst>
           <pc:docMk/>
           <pc:sldMk cId="4169104927" sldId="266"/>
+        </pc:sldMkLst>
+        <pc:spChg chg="mod ord">
+          <ac:chgData name="Thembelihle Nkosi" userId="34acb82be647289d" providerId="LiveId" clId="{A75475CB-E90B-49A7-8916-1196816BF4F1}" dt="2026-09-02T08:29:46.231" v="4351" actId="700"/>
+          <ac:spMkLst>
+            <pc:docMk/>
+            <pc:sldMk cId="4169104927" sldId="266"/>
+            <ac:spMk id="2" creationId="{D9CBD972-E19E-F98B-7232-3066ADCC0805}"/>
+          </ac:spMkLst>
+        </pc:spChg>
+        <pc:spChg chg="mod ord">
+          <ac:chgData name="Thembelihle Nkosi" userId="34acb82be647289d" providerId="LiveId" clId="{A75475CB-E90B-49A7-8916-1196816BF4F1}" dt="2026-09-02T08:29:46.231" v="4351" actId="700"/>
+          <ac:spMkLst>
+            <pc:docMk/>
+            <pc:sldMk cId="4169104927" sldId="266"/>
+            <ac:spMk id="3" creationId="{A064F995-DAC0-F2BA-F4B7-4AA15848CD5D}"/>
+          </ac:spMkLst>
+        </pc:spChg>
+        <pc:spChg chg="add mod">
+          <ac:chgData name="Thembelihle Nkosi" userId="34acb82be647289d" providerId="LiveId" clId="{A75475CB-E90B-49A7-8916-1196816BF4F1}" dt="2026-09-02T08:40:49.579" v="4451" actId="207"/>
+          <ac:spMkLst>
+            <pc:docMk/>
+            <pc:sldMk cId="4169104927" sldId="266"/>
+            <ac:spMk id="4" creationId="{7C1039FA-C227-0728-B80A-A04A4B6CE04E}"/>
+          </ac:spMkLst>
+        </pc:spChg>
+        <pc:graphicFrameChg chg="add mod modGraphic">
+          <ac:chgData name="Thembelihle Nkosi" userId="34acb82be647289d" providerId="LiveId" clId="{A75475CB-E90B-49A7-8916-1196816BF4F1}" dt="2026-09-02T08:46:53.098" v="4655" actId="20577"/>
+          <ac:graphicFrameMkLst>
+            <pc:docMk/>
+            <pc:sldMk cId="4169104927" sldId="266"/>
+            <ac:graphicFrameMk id="5" creationId="{CCFB4286-0FB1-4E05-CAE8-526E19E62BD2}"/>
+          </ac:graphicFrameMkLst>
+        </pc:graphicFrameChg>
+      </pc:sldChg>
+      <pc:sldChg chg="new del">
+        <pc:chgData name="Thembelihle Nkosi" userId="34acb82be647289d" providerId="LiveId" clId="{A75475CB-E90B-49A7-8916-1196816BF4F1}" dt="2026-09-02T08:29:25.749" v="4350" actId="2696"/>
+        <pc:sldMkLst>
+          <pc:docMk/>
+          <pc:sldMk cId="925457027" sldId="267"/>
         </pc:sldMkLst>
       </pc:sldChg>
     </pc:docChg>
@@ -20618,7 +20689,7 @@
         </p:nvSpPr>
         <p:spPr>
           <a:xfrm>
-            <a:off x="457199" y="457200"/>
+            <a:off x="0" y="21922"/>
             <a:ext cx="9982201" cy="1343608"/>
           </a:xfrm>
         </p:spPr>
@@ -20664,10 +20735,10 @@
       </p:sp>
       <p:grpSp>
         <p:nvGrpSpPr>
-          <p:cNvPr id="9" name="Group 8">
-            <a:extLst>
-              <a:ext uri="{FF2B5EF4-FFF2-40B4-BE49-F238E27FC236}">
-                <a16:creationId xmlns:a16="http://schemas.microsoft.com/office/drawing/2014/main" id="{B5268710-362F-5D3A-ADEF-E878E929E19D}"/>
+          <p:cNvPr id="7" name="Group 6">
+            <a:extLst>
+              <a:ext uri="{FF2B5EF4-FFF2-40B4-BE49-F238E27FC236}">
+                <a16:creationId xmlns:a16="http://schemas.microsoft.com/office/drawing/2014/main" id="{D831B685-E072-5AF0-6D34-0532AB2C0109}"/>
               </a:ext>
             </a:extLst>
           </p:cNvPr>
@@ -20676,10 +20747,10 @@
         </p:nvGrpSpPr>
         <p:grpSpPr>
           <a:xfrm>
-            <a:off x="541176" y="1707502"/>
-            <a:ext cx="2929812" cy="4198776"/>
-            <a:chOff x="541176" y="1707502"/>
-            <a:chExt cx="2929812" cy="4198776"/>
+            <a:off x="3609391" y="562598"/>
+            <a:ext cx="7176799" cy="1156996"/>
+            <a:chOff x="3609391" y="562598"/>
+            <a:chExt cx="7176799" cy="1156996"/>
           </a:xfrm>
         </p:grpSpPr>
         <p:sp>
@@ -20696,8 +20767,8 @@
           </p:nvSpPr>
           <p:spPr>
             <a:xfrm>
-              <a:off x="541176" y="1707502"/>
-              <a:ext cx="2929812" cy="1156996"/>
+              <a:off x="3609391" y="562598"/>
+              <a:ext cx="2203580" cy="1156996"/>
             </a:xfrm>
             <a:prstGeom prst="roundRect">
               <a:avLst/>
@@ -20788,8 +20859,8 @@
           </p:nvSpPr>
           <p:spPr>
             <a:xfrm>
-              <a:off x="541176" y="3228392"/>
-              <a:ext cx="2929812" cy="1156996"/>
+              <a:off x="6096000" y="562598"/>
+              <a:ext cx="2203580" cy="1156996"/>
             </a:xfrm>
             <a:prstGeom prst="roundRect">
               <a:avLst/>
@@ -20880,8 +20951,8 @@
           </p:nvSpPr>
           <p:spPr>
             <a:xfrm>
-              <a:off x="541176" y="4749282"/>
-              <a:ext cx="2929812" cy="1156996"/>
+              <a:off x="8582610" y="562598"/>
+              <a:ext cx="2203580" cy="1156996"/>
             </a:xfrm>
             <a:prstGeom prst="roundRect">
               <a:avLst/>
@@ -20973,7 +21044,7 @@
         </p:nvSpPr>
         <p:spPr>
           <a:xfrm>
-            <a:off x="4609322" y="1338170"/>
+            <a:off x="242595" y="1538820"/>
             <a:ext cx="3956179" cy="369332"/>
           </a:xfrm>
           <a:prstGeom prst="rect">
@@ -21015,13 +21086,13 @@
           <p:nvPr>
             <p:extLst>
               <p:ext uri="{D42A27DB-BD31-4B8C-83A1-F6EECF244321}">
-                <p14:modId xmlns:p14="http://schemas.microsoft.com/office/powerpoint/2010/main" val="3172214105"/>
+                <p14:modId xmlns:p14="http://schemas.microsoft.com/office/powerpoint/2010/main" val="1038633274"/>
               </p:ext>
             </p:extLst>
           </p:nvPr>
         </p:nvGraphicFramePr>
         <p:xfrm>
-          <a:off x="4609322" y="1707502"/>
+          <a:off x="242595" y="2077550"/>
           <a:ext cx="6214188" cy="4281116"/>
         </p:xfrm>
         <a:graphic>
@@ -21688,6 +21759,42 @@
           </a:p>
         </p:txBody>
       </p:sp>
+      <p:pic>
+        <p:nvPicPr>
+          <p:cNvPr id="5" name="Picture 4">
+            <a:extLst>
+              <a:ext uri="{FF2B5EF4-FFF2-40B4-BE49-F238E27FC236}">
+                <a16:creationId xmlns:a16="http://schemas.microsoft.com/office/drawing/2014/main" id="{6CC99FC1-5497-0D82-F843-27530B5CCB86}"/>
+              </a:ext>
+            </a:extLst>
+          </p:cNvPr>
+          <p:cNvPicPr>
+            <a:picLocks noChangeAspect="1"/>
+          </p:cNvPicPr>
+          <p:nvPr/>
+        </p:nvPicPr>
+        <p:blipFill>
+          <a:blip r:embed="rId2">
+            <a:extLst>
+              <a:ext uri="{28A0092B-C50C-407E-A947-70E740481C1C}">
+                <a14:useLocalDpi xmlns:a14="http://schemas.microsoft.com/office/drawing/2010/main" val="0"/>
+              </a:ext>
+            </a:extLst>
+          </a:blip>
+          <a:stretch>
+            <a:fillRect/>
+          </a:stretch>
+        </p:blipFill>
+        <p:spPr>
+          <a:xfrm>
+            <a:off x="7471674" y="2077550"/>
+            <a:ext cx="4425451" cy="3657354"/>
+          </a:xfrm>
+          <a:prstGeom prst="rect">
+            <a:avLst/>
+          </a:prstGeom>
+        </p:spPr>
+      </p:pic>
     </p:spTree>
     <p:extLst>
       <p:ext uri="{BB962C8B-B14F-4D97-AF65-F5344CB8AC3E}">
@@ -21761,8 +21868,8 @@
         </p:nvSpPr>
         <p:spPr>
           <a:xfrm>
-            <a:off x="4377420" y="530001"/>
-            <a:ext cx="3437159" cy="661207"/>
+            <a:off x="236184" y="100793"/>
+            <a:ext cx="9971506" cy="661207"/>
           </a:xfrm>
           <a:prstGeom prst="rect">
             <a:avLst/>
@@ -21770,12 +21877,12 @@
           <a:noFill/>
         </p:spPr>
         <p:txBody>
-          <a:bodyPr wrap="none" rtlCol="0">
+          <a:bodyPr wrap="square" rtlCol="0">
             <a:spAutoFit/>
           </a:bodyPr>
           <a:lstStyle/>
           <a:p>
-            <a:pPr>
+            <a:pPr algn="ctr">
               <a:lnSpc>
                 <a:spcPct val="150000"/>
               </a:lnSpc>
@@ -21793,758 +21900,773 @@
           </a:p>
         </p:txBody>
       </p:sp>
-      <p:grpSp>
-        <p:nvGrpSpPr>
-          <p:cNvPr id="20" name="Group 19">
-            <a:extLst>
-              <a:ext uri="{FF2B5EF4-FFF2-40B4-BE49-F238E27FC236}">
-                <a16:creationId xmlns:a16="http://schemas.microsoft.com/office/drawing/2014/main" id="{452FD5C8-F8BA-B7F9-0F73-AB18189159C9}"/>
-              </a:ext>
-            </a:extLst>
-          </p:cNvPr>
-          <p:cNvGrpSpPr/>
+      <p:sp>
+        <p:nvSpPr>
+          <p:cNvPr id="5" name="Rectangle: Rounded Corners 4">
+            <a:extLst>
+              <a:ext uri="{FF2B5EF4-FFF2-40B4-BE49-F238E27FC236}">
+                <a16:creationId xmlns:a16="http://schemas.microsoft.com/office/drawing/2014/main" id="{F16DFC1D-4B85-6FFB-08AF-FF5552E231FF}"/>
+              </a:ext>
+            </a:extLst>
+          </p:cNvPr>
+          <p:cNvSpPr/>
           <p:nvPr/>
-        </p:nvGrpSpPr>
-        <p:grpSpPr>
-          <a:xfrm>
-            <a:off x="447870" y="1903446"/>
-            <a:ext cx="10260562" cy="3763346"/>
-            <a:chOff x="447870" y="1903446"/>
-            <a:chExt cx="10260562" cy="3763346"/>
-          </a:xfrm>
-        </p:grpSpPr>
-        <p:sp>
-          <p:nvSpPr>
-            <p:cNvPr id="5" name="Rectangle: Rounded Corners 4">
-              <a:extLst>
-                <a:ext uri="{FF2B5EF4-FFF2-40B4-BE49-F238E27FC236}">
-                  <a16:creationId xmlns:a16="http://schemas.microsoft.com/office/drawing/2014/main" id="{F16DFC1D-4B85-6FFB-08AF-FF5552E231FF}"/>
-                </a:ext>
-              </a:extLst>
-            </p:cNvPr>
-            <p:cNvSpPr/>
-            <p:nvPr/>
-          </p:nvSpPr>
-          <p:spPr>
-            <a:xfrm>
-              <a:off x="447870" y="1903446"/>
-              <a:ext cx="3013788" cy="1623526"/>
-            </a:xfrm>
-            <a:prstGeom prst="roundRect">
-              <a:avLst/>
-            </a:prstGeom>
+        </p:nvSpPr>
+        <p:spPr>
+          <a:xfrm>
+            <a:off x="236184" y="1017038"/>
+            <a:ext cx="3013788" cy="1623526"/>
+          </a:xfrm>
+          <a:prstGeom prst="roundRect">
+            <a:avLst/>
+          </a:prstGeom>
+          <a:solidFill>
+            <a:schemeClr val="accent2">
+              <a:lumMod val="20000"/>
+              <a:lumOff val="80000"/>
+            </a:schemeClr>
+          </a:solidFill>
+          <a:ln>
             <a:solidFill>
               <a:schemeClr val="accent2">
                 <a:lumMod val="20000"/>
                 <a:lumOff val="80000"/>
               </a:schemeClr>
             </a:solidFill>
-            <a:ln>
-              <a:solidFill>
-                <a:schemeClr val="accent2">
-                  <a:lumMod val="20000"/>
-                  <a:lumOff val="80000"/>
-                </a:schemeClr>
-              </a:solidFill>
-            </a:ln>
-          </p:spPr>
-          <p:style>
-            <a:lnRef idx="2">
-              <a:schemeClr val="accent1">
-                <a:shade val="15000"/>
-              </a:schemeClr>
-            </a:lnRef>
-            <a:fillRef idx="1">
-              <a:schemeClr val="accent1"/>
-            </a:fillRef>
-            <a:effectRef idx="0">
-              <a:schemeClr val="accent1"/>
-            </a:effectRef>
-            <a:fontRef idx="minor">
-              <a:schemeClr val="lt1"/>
-            </a:fontRef>
-          </p:style>
-          <p:txBody>
-            <a:bodyPr rtlCol="0" anchor="ctr"/>
-            <a:lstStyle/>
-            <a:p>
-              <a:pPr marL="342900" indent="-342900">
-                <a:lnSpc>
-                  <a:spcPct val="150000"/>
-                </a:lnSpc>
-                <a:buFont typeface="Wingdings" panose="05000000000000000000" pitchFamily="2" charset="2"/>
-                <a:buChar char="q"/>
-              </a:pPr>
-              <a:r>
-                <a:rPr lang="en-ZA" sz="1600" b="1" dirty="0">
-                  <a:solidFill>
-                    <a:schemeClr val="accent3">
-                      <a:lumMod val="75000"/>
-                    </a:schemeClr>
-                  </a:solidFill>
-                  <a:latin typeface="Times New Roman" panose="02020603050405020304" pitchFamily="18" charset="0"/>
-                  <a:cs typeface="Times New Roman" panose="02020603050405020304" pitchFamily="18" charset="0"/>
-                </a:rPr>
-                <a:t>Missing values</a:t>
-              </a:r>
-            </a:p>
-            <a:p>
-              <a:pPr>
-                <a:lnSpc>
-                  <a:spcPct val="150000"/>
-                </a:lnSpc>
-              </a:pPr>
-              <a:r>
-                <a:rPr lang="en-ZA" sz="1200" dirty="0" err="1">
-                  <a:solidFill>
-                    <a:schemeClr val="tx2"/>
-                  </a:solidFill>
-                  <a:latin typeface="Times New Roman" panose="02020603050405020304" pitchFamily="18" charset="0"/>
-                  <a:cs typeface="Times New Roman" panose="02020603050405020304" pitchFamily="18" charset="0"/>
-                </a:rPr>
-                <a:t>loan_int_rate</a:t>
-              </a:r>
-              <a:r>
-                <a:rPr lang="en-ZA" sz="1200" dirty="0">
-                  <a:solidFill>
-                    <a:schemeClr val="tx2"/>
-                  </a:solidFill>
-                  <a:latin typeface="Times New Roman" panose="02020603050405020304" pitchFamily="18" charset="0"/>
-                  <a:cs typeface="Times New Roman" panose="02020603050405020304" pitchFamily="18" charset="0"/>
-                </a:rPr>
-                <a:t>: 3 116 missing (9.6%).</a:t>
-              </a:r>
-            </a:p>
-            <a:p>
-              <a:pPr>
-                <a:lnSpc>
-                  <a:spcPct val="150000"/>
-                </a:lnSpc>
-              </a:pPr>
-              <a:r>
-                <a:rPr lang="en-ZA" sz="1200" dirty="0" err="1">
-                  <a:solidFill>
-                    <a:schemeClr val="tx2"/>
-                  </a:solidFill>
-                  <a:latin typeface="Times New Roman" panose="02020603050405020304" pitchFamily="18" charset="0"/>
-                  <a:cs typeface="Times New Roman" panose="02020603050405020304" pitchFamily="18" charset="0"/>
-                </a:rPr>
-                <a:t>Person_emp_length</a:t>
-              </a:r>
-              <a:r>
-                <a:rPr lang="en-ZA" sz="1200" dirty="0">
-                  <a:solidFill>
-                    <a:schemeClr val="tx2"/>
-                  </a:solidFill>
-                  <a:latin typeface="Times New Roman" panose="02020603050405020304" pitchFamily="18" charset="0"/>
-                  <a:cs typeface="Times New Roman" panose="02020603050405020304" pitchFamily="18" charset="0"/>
-                </a:rPr>
-                <a:t>: 895 missing (2.7%).</a:t>
-              </a:r>
-            </a:p>
-          </p:txBody>
-        </p:sp>
-        <p:sp>
-          <p:nvSpPr>
-            <p:cNvPr id="11" name="Rectangle: Rounded Corners 10">
-              <a:extLst>
-                <a:ext uri="{FF2B5EF4-FFF2-40B4-BE49-F238E27FC236}">
-                  <a16:creationId xmlns:a16="http://schemas.microsoft.com/office/drawing/2014/main" id="{AE71BBAF-2E2F-12D9-77D9-E3A23E6F4AB7}"/>
-                </a:ext>
-              </a:extLst>
-            </p:cNvPr>
-            <p:cNvSpPr/>
-            <p:nvPr/>
-          </p:nvSpPr>
-          <p:spPr>
-            <a:xfrm>
-              <a:off x="4071257" y="1903446"/>
-              <a:ext cx="3013788" cy="1623526"/>
-            </a:xfrm>
-            <a:prstGeom prst="roundRect">
-              <a:avLst/>
-            </a:prstGeom>
+          </a:ln>
+        </p:spPr>
+        <p:style>
+          <a:lnRef idx="2">
+            <a:schemeClr val="accent1">
+              <a:shade val="15000"/>
+            </a:schemeClr>
+          </a:lnRef>
+          <a:fillRef idx="1">
+            <a:schemeClr val="accent1"/>
+          </a:fillRef>
+          <a:effectRef idx="0">
+            <a:schemeClr val="accent1"/>
+          </a:effectRef>
+          <a:fontRef idx="minor">
+            <a:schemeClr val="lt1"/>
+          </a:fontRef>
+        </p:style>
+        <p:txBody>
+          <a:bodyPr rtlCol="0" anchor="ctr"/>
+          <a:lstStyle/>
+          <a:p>
+            <a:pPr marL="342900" indent="-342900">
+              <a:lnSpc>
+                <a:spcPct val="150000"/>
+              </a:lnSpc>
+              <a:buFont typeface="Wingdings" panose="05000000000000000000" pitchFamily="2" charset="2"/>
+              <a:buChar char="q"/>
+            </a:pPr>
+            <a:r>
+              <a:rPr lang="en-ZA" sz="1600" b="1" dirty="0">
+                <a:solidFill>
+                  <a:schemeClr val="accent3">
+                    <a:lumMod val="75000"/>
+                  </a:schemeClr>
+                </a:solidFill>
+                <a:latin typeface="Times New Roman" panose="02020603050405020304" pitchFamily="18" charset="0"/>
+                <a:cs typeface="Times New Roman" panose="02020603050405020304" pitchFamily="18" charset="0"/>
+              </a:rPr>
+              <a:t>Missing values</a:t>
+            </a:r>
+          </a:p>
+          <a:p>
+            <a:pPr>
+              <a:lnSpc>
+                <a:spcPct val="150000"/>
+              </a:lnSpc>
+            </a:pPr>
+            <a:r>
+              <a:rPr lang="en-ZA" sz="1200" dirty="0" err="1">
+                <a:solidFill>
+                  <a:schemeClr val="tx2"/>
+                </a:solidFill>
+                <a:latin typeface="Times New Roman" panose="02020603050405020304" pitchFamily="18" charset="0"/>
+                <a:cs typeface="Times New Roman" panose="02020603050405020304" pitchFamily="18" charset="0"/>
+              </a:rPr>
+              <a:t>loan_int_rate</a:t>
+            </a:r>
+            <a:r>
+              <a:rPr lang="en-ZA" sz="1200" dirty="0">
+                <a:solidFill>
+                  <a:schemeClr val="tx2"/>
+                </a:solidFill>
+                <a:latin typeface="Times New Roman" panose="02020603050405020304" pitchFamily="18" charset="0"/>
+                <a:cs typeface="Times New Roman" panose="02020603050405020304" pitchFamily="18" charset="0"/>
+              </a:rPr>
+              <a:t>: 3 116 missing (9.6%).</a:t>
+            </a:r>
+          </a:p>
+          <a:p>
+            <a:pPr>
+              <a:lnSpc>
+                <a:spcPct val="150000"/>
+              </a:lnSpc>
+            </a:pPr>
+            <a:r>
+              <a:rPr lang="en-ZA" sz="1200" dirty="0" err="1">
+                <a:solidFill>
+                  <a:schemeClr val="tx2"/>
+                </a:solidFill>
+                <a:latin typeface="Times New Roman" panose="02020603050405020304" pitchFamily="18" charset="0"/>
+                <a:cs typeface="Times New Roman" panose="02020603050405020304" pitchFamily="18" charset="0"/>
+              </a:rPr>
+              <a:t>Person_emp_length</a:t>
+            </a:r>
+            <a:r>
+              <a:rPr lang="en-ZA" sz="1200" dirty="0">
+                <a:solidFill>
+                  <a:schemeClr val="tx2"/>
+                </a:solidFill>
+                <a:latin typeface="Times New Roman" panose="02020603050405020304" pitchFamily="18" charset="0"/>
+                <a:cs typeface="Times New Roman" panose="02020603050405020304" pitchFamily="18" charset="0"/>
+              </a:rPr>
+              <a:t>: 895 missing (2.7%).</a:t>
+            </a:r>
+          </a:p>
+        </p:txBody>
+      </p:sp>
+      <p:sp>
+        <p:nvSpPr>
+          <p:cNvPr id="11" name="Rectangle: Rounded Corners 10">
+            <a:extLst>
+              <a:ext uri="{FF2B5EF4-FFF2-40B4-BE49-F238E27FC236}">
+                <a16:creationId xmlns:a16="http://schemas.microsoft.com/office/drawing/2014/main" id="{AE71BBAF-2E2F-12D9-77D9-E3A23E6F4AB7}"/>
+              </a:ext>
+            </a:extLst>
+          </p:cNvPr>
+          <p:cNvSpPr/>
+          <p:nvPr/>
+        </p:nvSpPr>
+        <p:spPr>
+          <a:xfrm>
+            <a:off x="3595395" y="1017038"/>
+            <a:ext cx="3013788" cy="1623526"/>
+          </a:xfrm>
+          <a:prstGeom prst="roundRect">
+            <a:avLst/>
+          </a:prstGeom>
+          <a:solidFill>
+            <a:schemeClr val="accent2">
+              <a:lumMod val="20000"/>
+              <a:lumOff val="80000"/>
+            </a:schemeClr>
+          </a:solidFill>
+          <a:ln>
             <a:solidFill>
               <a:schemeClr val="accent2">
                 <a:lumMod val="20000"/>
                 <a:lumOff val="80000"/>
               </a:schemeClr>
             </a:solidFill>
-            <a:ln>
-              <a:solidFill>
-                <a:schemeClr val="accent2">
-                  <a:lumMod val="20000"/>
-                  <a:lumOff val="80000"/>
-                </a:schemeClr>
-              </a:solidFill>
-            </a:ln>
-          </p:spPr>
-          <p:style>
-            <a:lnRef idx="2">
-              <a:schemeClr val="accent1">
-                <a:shade val="15000"/>
-              </a:schemeClr>
-            </a:lnRef>
-            <a:fillRef idx="1">
-              <a:schemeClr val="accent1"/>
-            </a:fillRef>
-            <a:effectRef idx="0">
-              <a:schemeClr val="accent1"/>
-            </a:effectRef>
-            <a:fontRef idx="minor">
-              <a:schemeClr val="lt1"/>
-            </a:fontRef>
-          </p:style>
-          <p:txBody>
-            <a:bodyPr rtlCol="0" anchor="ctr"/>
-            <a:lstStyle/>
-            <a:p>
-              <a:pPr marL="342900" indent="-342900">
-                <a:lnSpc>
-                  <a:spcPct val="150000"/>
-                </a:lnSpc>
-                <a:buFont typeface="Wingdings" panose="05000000000000000000" pitchFamily="2" charset="2"/>
-                <a:buChar char="q"/>
-              </a:pPr>
-              <a:r>
-                <a:rPr lang="en-ZA" sz="1600" b="1" dirty="0">
-                  <a:solidFill>
-                    <a:schemeClr val="accent3">
-                      <a:lumMod val="75000"/>
-                    </a:schemeClr>
-                  </a:solidFill>
-                  <a:latin typeface="Times New Roman" panose="02020603050405020304" pitchFamily="18" charset="0"/>
-                  <a:cs typeface="Times New Roman" panose="02020603050405020304" pitchFamily="18" charset="0"/>
-                </a:rPr>
-                <a:t>Duplicate rows</a:t>
-              </a:r>
-            </a:p>
-            <a:p>
-              <a:pPr>
-                <a:lnSpc>
-                  <a:spcPct val="150000"/>
-                </a:lnSpc>
-              </a:pPr>
-              <a:r>
-                <a:rPr lang="en-ZA" sz="1200" dirty="0">
-                  <a:solidFill>
-                    <a:schemeClr val="tx2"/>
-                  </a:solidFill>
-                  <a:latin typeface="Times New Roman" panose="02020603050405020304" pitchFamily="18" charset="0"/>
-                  <a:cs typeface="Times New Roman" panose="02020603050405020304" pitchFamily="18" charset="0"/>
-                </a:rPr>
-                <a:t>165 exact duplicates records found in the row dataset.</a:t>
-              </a:r>
-            </a:p>
-          </p:txBody>
-        </p:sp>
-        <p:sp>
-          <p:nvSpPr>
-            <p:cNvPr id="13" name="Rectangle: Rounded Corners 12">
-              <a:extLst>
-                <a:ext uri="{FF2B5EF4-FFF2-40B4-BE49-F238E27FC236}">
-                  <a16:creationId xmlns:a16="http://schemas.microsoft.com/office/drawing/2014/main" id="{0B8DEA96-23F7-4671-8B04-75C8E827447D}"/>
-                </a:ext>
-              </a:extLst>
-            </p:cNvPr>
-            <p:cNvSpPr/>
-            <p:nvPr/>
-          </p:nvSpPr>
-          <p:spPr>
-            <a:xfrm>
-              <a:off x="7694644" y="1903446"/>
-              <a:ext cx="3013788" cy="1623526"/>
-            </a:xfrm>
-            <a:prstGeom prst="roundRect">
-              <a:avLst/>
-            </a:prstGeom>
+          </a:ln>
+        </p:spPr>
+        <p:style>
+          <a:lnRef idx="2">
+            <a:schemeClr val="accent1">
+              <a:shade val="15000"/>
+            </a:schemeClr>
+          </a:lnRef>
+          <a:fillRef idx="1">
+            <a:schemeClr val="accent1"/>
+          </a:fillRef>
+          <a:effectRef idx="0">
+            <a:schemeClr val="accent1"/>
+          </a:effectRef>
+          <a:fontRef idx="minor">
+            <a:schemeClr val="lt1"/>
+          </a:fontRef>
+        </p:style>
+        <p:txBody>
+          <a:bodyPr rtlCol="0" anchor="ctr"/>
+          <a:lstStyle/>
+          <a:p>
+            <a:pPr marL="342900" indent="-342900">
+              <a:lnSpc>
+                <a:spcPct val="150000"/>
+              </a:lnSpc>
+              <a:buFont typeface="Wingdings" panose="05000000000000000000" pitchFamily="2" charset="2"/>
+              <a:buChar char="q"/>
+            </a:pPr>
+            <a:r>
+              <a:rPr lang="en-ZA" sz="1600" b="1" dirty="0">
+                <a:solidFill>
+                  <a:schemeClr val="accent3">
+                    <a:lumMod val="75000"/>
+                  </a:schemeClr>
+                </a:solidFill>
+                <a:latin typeface="Times New Roman" panose="02020603050405020304" pitchFamily="18" charset="0"/>
+                <a:cs typeface="Times New Roman" panose="02020603050405020304" pitchFamily="18" charset="0"/>
+              </a:rPr>
+              <a:t>Duplicate rows</a:t>
+            </a:r>
+          </a:p>
+          <a:p>
+            <a:pPr>
+              <a:lnSpc>
+                <a:spcPct val="150000"/>
+              </a:lnSpc>
+            </a:pPr>
+            <a:r>
+              <a:rPr lang="en-ZA" sz="1200" dirty="0">
+                <a:solidFill>
+                  <a:schemeClr val="tx2"/>
+                </a:solidFill>
+                <a:latin typeface="Times New Roman" panose="02020603050405020304" pitchFamily="18" charset="0"/>
+                <a:cs typeface="Times New Roman" panose="02020603050405020304" pitchFamily="18" charset="0"/>
+              </a:rPr>
+              <a:t>165 exact duplicates records found in the row dataset.</a:t>
+            </a:r>
+          </a:p>
+        </p:txBody>
+      </p:sp>
+      <p:sp>
+        <p:nvSpPr>
+          <p:cNvPr id="13" name="Rectangle: Rounded Corners 12">
+            <a:extLst>
+              <a:ext uri="{FF2B5EF4-FFF2-40B4-BE49-F238E27FC236}">
+                <a16:creationId xmlns:a16="http://schemas.microsoft.com/office/drawing/2014/main" id="{0B8DEA96-23F7-4671-8B04-75C8E827447D}"/>
+              </a:ext>
+            </a:extLst>
+          </p:cNvPr>
+          <p:cNvSpPr/>
+          <p:nvPr/>
+        </p:nvSpPr>
+        <p:spPr>
+          <a:xfrm>
+            <a:off x="236184" y="2895602"/>
+            <a:ext cx="3013788" cy="1623526"/>
+          </a:xfrm>
+          <a:prstGeom prst="roundRect">
+            <a:avLst/>
+          </a:prstGeom>
+          <a:solidFill>
+            <a:schemeClr val="accent2">
+              <a:lumMod val="20000"/>
+              <a:lumOff val="80000"/>
+            </a:schemeClr>
+          </a:solidFill>
+          <a:ln>
             <a:solidFill>
               <a:schemeClr val="accent2">
                 <a:lumMod val="20000"/>
                 <a:lumOff val="80000"/>
               </a:schemeClr>
             </a:solidFill>
-            <a:ln>
-              <a:solidFill>
-                <a:schemeClr val="accent2">
-                  <a:lumMod val="20000"/>
-                  <a:lumOff val="80000"/>
-                </a:schemeClr>
-              </a:solidFill>
-            </a:ln>
-          </p:spPr>
-          <p:style>
-            <a:lnRef idx="2">
-              <a:schemeClr val="accent1">
-                <a:shade val="15000"/>
-              </a:schemeClr>
-            </a:lnRef>
-            <a:fillRef idx="1">
-              <a:schemeClr val="accent1"/>
-            </a:fillRef>
-            <a:effectRef idx="0">
-              <a:schemeClr val="accent1"/>
-            </a:effectRef>
-            <a:fontRef idx="minor">
-              <a:schemeClr val="lt1"/>
-            </a:fontRef>
-          </p:style>
-          <p:txBody>
-            <a:bodyPr rtlCol="0" anchor="ctr"/>
-            <a:lstStyle/>
-            <a:p>
-              <a:pPr marL="342900" indent="-342900">
-                <a:lnSpc>
-                  <a:spcPct val="150000"/>
-                </a:lnSpc>
-                <a:buFont typeface="Wingdings" panose="05000000000000000000" pitchFamily="2" charset="2"/>
-                <a:buChar char="q"/>
-              </a:pPr>
-              <a:r>
-                <a:rPr lang="en-ZA" sz="1600" b="1" dirty="0">
-                  <a:solidFill>
-                    <a:schemeClr val="accent3">
-                      <a:lumMod val="75000"/>
-                    </a:schemeClr>
-                  </a:solidFill>
-                  <a:latin typeface="Times New Roman" panose="02020603050405020304" pitchFamily="18" charset="0"/>
-                  <a:cs typeface="Times New Roman" panose="02020603050405020304" pitchFamily="18" charset="0"/>
-                </a:rPr>
-                <a:t>Impossible outliers</a:t>
-              </a:r>
-            </a:p>
-            <a:p>
-              <a:pPr>
-                <a:lnSpc>
-                  <a:spcPct val="150000"/>
-                </a:lnSpc>
-              </a:pPr>
-              <a:r>
-                <a:rPr lang="en-ZA" sz="1200" dirty="0" err="1">
-                  <a:solidFill>
-                    <a:schemeClr val="tx2"/>
-                  </a:solidFill>
-                  <a:latin typeface="Times New Roman" panose="02020603050405020304" pitchFamily="18" charset="0"/>
-                  <a:cs typeface="Times New Roman" panose="02020603050405020304" pitchFamily="18" charset="0"/>
-                </a:rPr>
-                <a:t>person_age</a:t>
-              </a:r>
-              <a:r>
-                <a:rPr lang="en-ZA" sz="1200" dirty="0">
-                  <a:solidFill>
-                    <a:schemeClr val="tx2"/>
-                  </a:solidFill>
-                  <a:latin typeface="Times New Roman" panose="02020603050405020304" pitchFamily="18" charset="0"/>
-                  <a:cs typeface="Times New Roman" panose="02020603050405020304" pitchFamily="18" charset="0"/>
-                </a:rPr>
-                <a:t> up to 144 years and </a:t>
-              </a:r>
-              <a:r>
-                <a:rPr lang="en-ZA" sz="1200" dirty="0" err="1">
-                  <a:solidFill>
-                    <a:schemeClr val="tx2"/>
-                  </a:solidFill>
-                  <a:latin typeface="Times New Roman" panose="02020603050405020304" pitchFamily="18" charset="0"/>
-                  <a:cs typeface="Times New Roman" panose="02020603050405020304" pitchFamily="18" charset="0"/>
-                </a:rPr>
-                <a:t>person_emp_length</a:t>
-              </a:r>
-              <a:r>
-                <a:rPr lang="en-ZA" sz="1200" dirty="0">
-                  <a:solidFill>
-                    <a:schemeClr val="tx2"/>
-                  </a:solidFill>
-                  <a:latin typeface="Times New Roman" panose="02020603050405020304" pitchFamily="18" charset="0"/>
-                  <a:cs typeface="Times New Roman" panose="02020603050405020304" pitchFamily="18" charset="0"/>
-                </a:rPr>
-                <a:t> up to 123 years of employment.</a:t>
-              </a:r>
-            </a:p>
-          </p:txBody>
-        </p:sp>
-        <p:sp>
-          <p:nvSpPr>
-            <p:cNvPr id="15" name="Rectangle: Rounded Corners 14">
-              <a:extLst>
-                <a:ext uri="{FF2B5EF4-FFF2-40B4-BE49-F238E27FC236}">
-                  <a16:creationId xmlns:a16="http://schemas.microsoft.com/office/drawing/2014/main" id="{E6101395-99E0-F679-1F64-061F36C0955F}"/>
-                </a:ext>
-              </a:extLst>
-            </p:cNvPr>
-            <p:cNvSpPr/>
-            <p:nvPr/>
-          </p:nvSpPr>
-          <p:spPr>
-            <a:xfrm>
-              <a:off x="447870" y="4043266"/>
-              <a:ext cx="3013788" cy="1623526"/>
-            </a:xfrm>
-            <a:prstGeom prst="roundRect">
-              <a:avLst/>
-            </a:prstGeom>
+          </a:ln>
+        </p:spPr>
+        <p:style>
+          <a:lnRef idx="2">
+            <a:schemeClr val="accent1">
+              <a:shade val="15000"/>
+            </a:schemeClr>
+          </a:lnRef>
+          <a:fillRef idx="1">
+            <a:schemeClr val="accent1"/>
+          </a:fillRef>
+          <a:effectRef idx="0">
+            <a:schemeClr val="accent1"/>
+          </a:effectRef>
+          <a:fontRef idx="minor">
+            <a:schemeClr val="lt1"/>
+          </a:fontRef>
+        </p:style>
+        <p:txBody>
+          <a:bodyPr rtlCol="0" anchor="ctr"/>
+          <a:lstStyle/>
+          <a:p>
+            <a:pPr marL="342900" indent="-342900">
+              <a:lnSpc>
+                <a:spcPct val="150000"/>
+              </a:lnSpc>
+              <a:buFont typeface="Wingdings" panose="05000000000000000000" pitchFamily="2" charset="2"/>
+              <a:buChar char="q"/>
+            </a:pPr>
+            <a:r>
+              <a:rPr lang="en-ZA" sz="1600" b="1" dirty="0">
+                <a:solidFill>
+                  <a:schemeClr val="accent3">
+                    <a:lumMod val="75000"/>
+                  </a:schemeClr>
+                </a:solidFill>
+                <a:latin typeface="Times New Roman" panose="02020603050405020304" pitchFamily="18" charset="0"/>
+                <a:cs typeface="Times New Roman" panose="02020603050405020304" pitchFamily="18" charset="0"/>
+              </a:rPr>
+              <a:t>Impossible outliers</a:t>
+            </a:r>
+          </a:p>
+          <a:p>
+            <a:pPr>
+              <a:lnSpc>
+                <a:spcPct val="150000"/>
+              </a:lnSpc>
+            </a:pPr>
+            <a:r>
+              <a:rPr lang="en-ZA" sz="1200" dirty="0" err="1">
+                <a:solidFill>
+                  <a:schemeClr val="tx2"/>
+                </a:solidFill>
+                <a:latin typeface="Times New Roman" panose="02020603050405020304" pitchFamily="18" charset="0"/>
+                <a:cs typeface="Times New Roman" panose="02020603050405020304" pitchFamily="18" charset="0"/>
+              </a:rPr>
+              <a:t>person_age</a:t>
+            </a:r>
+            <a:r>
+              <a:rPr lang="en-ZA" sz="1200" dirty="0">
+                <a:solidFill>
+                  <a:schemeClr val="tx2"/>
+                </a:solidFill>
+                <a:latin typeface="Times New Roman" panose="02020603050405020304" pitchFamily="18" charset="0"/>
+                <a:cs typeface="Times New Roman" panose="02020603050405020304" pitchFamily="18" charset="0"/>
+              </a:rPr>
+              <a:t> up to 144 years and </a:t>
+            </a:r>
+            <a:r>
+              <a:rPr lang="en-ZA" sz="1200" dirty="0" err="1">
+                <a:solidFill>
+                  <a:schemeClr val="tx2"/>
+                </a:solidFill>
+                <a:latin typeface="Times New Roman" panose="02020603050405020304" pitchFamily="18" charset="0"/>
+                <a:cs typeface="Times New Roman" panose="02020603050405020304" pitchFamily="18" charset="0"/>
+              </a:rPr>
+              <a:t>person_emp_length</a:t>
+            </a:r>
+            <a:r>
+              <a:rPr lang="en-ZA" sz="1200" dirty="0">
+                <a:solidFill>
+                  <a:schemeClr val="tx2"/>
+                </a:solidFill>
+                <a:latin typeface="Times New Roman" panose="02020603050405020304" pitchFamily="18" charset="0"/>
+                <a:cs typeface="Times New Roman" panose="02020603050405020304" pitchFamily="18" charset="0"/>
+              </a:rPr>
+              <a:t> up to 123 years of employment.</a:t>
+            </a:r>
+          </a:p>
+        </p:txBody>
+      </p:sp>
+      <p:sp>
+        <p:nvSpPr>
+          <p:cNvPr id="15" name="Rectangle: Rounded Corners 14">
+            <a:extLst>
+              <a:ext uri="{FF2B5EF4-FFF2-40B4-BE49-F238E27FC236}">
+                <a16:creationId xmlns:a16="http://schemas.microsoft.com/office/drawing/2014/main" id="{E6101395-99E0-F679-1F64-061F36C0955F}"/>
+              </a:ext>
+            </a:extLst>
+          </p:cNvPr>
+          <p:cNvSpPr/>
+          <p:nvPr/>
+        </p:nvSpPr>
+        <p:spPr>
+          <a:xfrm>
+            <a:off x="3595395" y="2895602"/>
+            <a:ext cx="3013788" cy="1623526"/>
+          </a:xfrm>
+          <a:prstGeom prst="roundRect">
+            <a:avLst/>
+          </a:prstGeom>
+          <a:solidFill>
+            <a:schemeClr val="accent2">
+              <a:lumMod val="20000"/>
+              <a:lumOff val="80000"/>
+            </a:schemeClr>
+          </a:solidFill>
+          <a:ln>
             <a:solidFill>
               <a:schemeClr val="accent2">
                 <a:lumMod val="20000"/>
                 <a:lumOff val="80000"/>
               </a:schemeClr>
             </a:solidFill>
-            <a:ln>
-              <a:solidFill>
-                <a:schemeClr val="accent2">
-                  <a:lumMod val="20000"/>
-                  <a:lumOff val="80000"/>
-                </a:schemeClr>
-              </a:solidFill>
-            </a:ln>
-          </p:spPr>
-          <p:style>
-            <a:lnRef idx="2">
-              <a:schemeClr val="accent1">
-                <a:shade val="15000"/>
-              </a:schemeClr>
-            </a:lnRef>
-            <a:fillRef idx="1">
-              <a:schemeClr val="accent1"/>
-            </a:fillRef>
-            <a:effectRef idx="0">
-              <a:schemeClr val="accent1"/>
-            </a:effectRef>
-            <a:fontRef idx="minor">
-              <a:schemeClr val="lt1"/>
-            </a:fontRef>
-          </p:style>
-          <p:txBody>
-            <a:bodyPr rtlCol="0" anchor="ctr"/>
-            <a:lstStyle/>
-            <a:p>
-              <a:pPr marL="342900" indent="-342900">
-                <a:lnSpc>
-                  <a:spcPct val="150000"/>
-                </a:lnSpc>
-                <a:buFont typeface="Wingdings" panose="05000000000000000000" pitchFamily="2" charset="2"/>
-                <a:buChar char="q"/>
-              </a:pPr>
-              <a:r>
-                <a:rPr lang="en-ZA" sz="1600" b="1" dirty="0">
-                  <a:solidFill>
-                    <a:schemeClr val="accent3">
-                      <a:lumMod val="75000"/>
-                    </a:schemeClr>
-                  </a:solidFill>
-                  <a:latin typeface="Times New Roman" panose="02020603050405020304" pitchFamily="18" charset="0"/>
-                  <a:cs typeface="Times New Roman" panose="02020603050405020304" pitchFamily="18" charset="0"/>
-                </a:rPr>
-                <a:t>Extreme but valid outliers</a:t>
-              </a:r>
-            </a:p>
-            <a:p>
-              <a:pPr>
-                <a:lnSpc>
-                  <a:spcPct val="150000"/>
-                </a:lnSpc>
-              </a:pPr>
-              <a:r>
-                <a:rPr lang="en-ZA" sz="1200" dirty="0" err="1">
-                  <a:solidFill>
-                    <a:schemeClr val="tx2"/>
-                  </a:solidFill>
-                  <a:latin typeface="Times New Roman" panose="02020603050405020304" pitchFamily="18" charset="0"/>
-                  <a:cs typeface="Times New Roman" panose="02020603050405020304" pitchFamily="18" charset="0"/>
-                </a:rPr>
-                <a:t>person_income</a:t>
-              </a:r>
-              <a:r>
-                <a:rPr lang="en-ZA" sz="1200" dirty="0">
-                  <a:solidFill>
-                    <a:schemeClr val="tx2"/>
-                  </a:solidFill>
-                  <a:latin typeface="Times New Roman" panose="02020603050405020304" pitchFamily="18" charset="0"/>
-                  <a:cs typeface="Times New Roman" panose="02020603050405020304" pitchFamily="18" charset="0"/>
-                </a:rPr>
-                <a:t> up to 6 000 000 large spreads in </a:t>
-              </a:r>
-              <a:r>
-                <a:rPr lang="en-ZA" sz="1200" dirty="0" err="1">
-                  <a:solidFill>
-                    <a:schemeClr val="tx2"/>
-                  </a:solidFill>
-                  <a:latin typeface="Times New Roman" panose="02020603050405020304" pitchFamily="18" charset="0"/>
-                  <a:cs typeface="Times New Roman" panose="02020603050405020304" pitchFamily="18" charset="0"/>
-                </a:rPr>
-                <a:t>loan_amt</a:t>
-              </a:r>
-              <a:r>
-                <a:rPr lang="en-ZA" sz="1200" dirty="0">
-                  <a:solidFill>
-                    <a:schemeClr val="tx2"/>
-                  </a:solidFill>
-                  <a:latin typeface="Times New Roman" panose="02020603050405020304" pitchFamily="18" charset="0"/>
-                  <a:cs typeface="Times New Roman" panose="02020603050405020304" pitchFamily="18" charset="0"/>
-                </a:rPr>
-                <a:t> and </a:t>
-              </a:r>
-              <a:r>
-                <a:rPr lang="en-ZA" sz="1200" dirty="0" err="1">
-                  <a:solidFill>
-                    <a:schemeClr val="tx2"/>
-                  </a:solidFill>
-                  <a:latin typeface="Times New Roman" panose="02020603050405020304" pitchFamily="18" charset="0"/>
-                  <a:cs typeface="Times New Roman" panose="02020603050405020304" pitchFamily="18" charset="0"/>
-                </a:rPr>
-                <a:t>loan_int_rate</a:t>
-              </a:r>
-              <a:r>
-                <a:rPr lang="en-ZA" sz="1200" dirty="0">
-                  <a:solidFill>
-                    <a:schemeClr val="tx2"/>
-                  </a:solidFill>
-                  <a:latin typeface="Times New Roman" panose="02020603050405020304" pitchFamily="18" charset="0"/>
-                  <a:cs typeface="Times New Roman" panose="02020603050405020304" pitchFamily="18" charset="0"/>
-                </a:rPr>
-                <a:t>.</a:t>
-              </a:r>
-            </a:p>
-          </p:txBody>
-        </p:sp>
-        <p:sp>
-          <p:nvSpPr>
-            <p:cNvPr id="17" name="Rectangle: Rounded Corners 16">
-              <a:extLst>
-                <a:ext uri="{FF2B5EF4-FFF2-40B4-BE49-F238E27FC236}">
-                  <a16:creationId xmlns:a16="http://schemas.microsoft.com/office/drawing/2014/main" id="{969CBD7C-1F4E-DEC1-7570-2CE212A58AC1}"/>
-                </a:ext>
-              </a:extLst>
-            </p:cNvPr>
-            <p:cNvSpPr/>
-            <p:nvPr/>
-          </p:nvSpPr>
-          <p:spPr>
-            <a:xfrm>
-              <a:off x="4071257" y="4043266"/>
-              <a:ext cx="3013788" cy="1623526"/>
-            </a:xfrm>
-            <a:prstGeom prst="roundRect">
-              <a:avLst/>
-            </a:prstGeom>
+          </a:ln>
+        </p:spPr>
+        <p:style>
+          <a:lnRef idx="2">
+            <a:schemeClr val="accent1">
+              <a:shade val="15000"/>
+            </a:schemeClr>
+          </a:lnRef>
+          <a:fillRef idx="1">
+            <a:schemeClr val="accent1"/>
+          </a:fillRef>
+          <a:effectRef idx="0">
+            <a:schemeClr val="accent1"/>
+          </a:effectRef>
+          <a:fontRef idx="minor">
+            <a:schemeClr val="lt1"/>
+          </a:fontRef>
+        </p:style>
+        <p:txBody>
+          <a:bodyPr rtlCol="0" anchor="ctr"/>
+          <a:lstStyle/>
+          <a:p>
+            <a:pPr marL="342900" indent="-342900">
+              <a:lnSpc>
+                <a:spcPct val="150000"/>
+              </a:lnSpc>
+              <a:buFont typeface="Wingdings" panose="05000000000000000000" pitchFamily="2" charset="2"/>
+              <a:buChar char="q"/>
+            </a:pPr>
+            <a:r>
+              <a:rPr lang="en-ZA" sz="1600" b="1" dirty="0">
+                <a:solidFill>
+                  <a:schemeClr val="accent3">
+                    <a:lumMod val="75000"/>
+                  </a:schemeClr>
+                </a:solidFill>
+                <a:latin typeface="Times New Roman" panose="02020603050405020304" pitchFamily="18" charset="0"/>
+                <a:cs typeface="Times New Roman" panose="02020603050405020304" pitchFamily="18" charset="0"/>
+              </a:rPr>
+              <a:t>Extreme but valid outliers</a:t>
+            </a:r>
+          </a:p>
+          <a:p>
+            <a:pPr>
+              <a:lnSpc>
+                <a:spcPct val="150000"/>
+              </a:lnSpc>
+            </a:pPr>
+            <a:r>
+              <a:rPr lang="en-ZA" sz="1200" dirty="0" err="1">
+                <a:solidFill>
+                  <a:schemeClr val="tx2"/>
+                </a:solidFill>
+                <a:latin typeface="Times New Roman" panose="02020603050405020304" pitchFamily="18" charset="0"/>
+                <a:cs typeface="Times New Roman" panose="02020603050405020304" pitchFamily="18" charset="0"/>
+              </a:rPr>
+              <a:t>person_income</a:t>
+            </a:r>
+            <a:r>
+              <a:rPr lang="en-ZA" sz="1200" dirty="0">
+                <a:solidFill>
+                  <a:schemeClr val="tx2"/>
+                </a:solidFill>
+                <a:latin typeface="Times New Roman" panose="02020603050405020304" pitchFamily="18" charset="0"/>
+                <a:cs typeface="Times New Roman" panose="02020603050405020304" pitchFamily="18" charset="0"/>
+              </a:rPr>
+              <a:t> up to 6 000 000 large spreads in </a:t>
+            </a:r>
+            <a:r>
+              <a:rPr lang="en-ZA" sz="1200" dirty="0" err="1">
+                <a:solidFill>
+                  <a:schemeClr val="tx2"/>
+                </a:solidFill>
+                <a:latin typeface="Times New Roman" panose="02020603050405020304" pitchFamily="18" charset="0"/>
+                <a:cs typeface="Times New Roman" panose="02020603050405020304" pitchFamily="18" charset="0"/>
+              </a:rPr>
+              <a:t>loan_amt</a:t>
+            </a:r>
+            <a:r>
+              <a:rPr lang="en-ZA" sz="1200" dirty="0">
+                <a:solidFill>
+                  <a:schemeClr val="tx2"/>
+                </a:solidFill>
+                <a:latin typeface="Times New Roman" panose="02020603050405020304" pitchFamily="18" charset="0"/>
+                <a:cs typeface="Times New Roman" panose="02020603050405020304" pitchFamily="18" charset="0"/>
+              </a:rPr>
+              <a:t> and </a:t>
+            </a:r>
+            <a:r>
+              <a:rPr lang="en-ZA" sz="1200" dirty="0" err="1">
+                <a:solidFill>
+                  <a:schemeClr val="tx2"/>
+                </a:solidFill>
+                <a:latin typeface="Times New Roman" panose="02020603050405020304" pitchFamily="18" charset="0"/>
+                <a:cs typeface="Times New Roman" panose="02020603050405020304" pitchFamily="18" charset="0"/>
+              </a:rPr>
+              <a:t>loan_int_rate</a:t>
+            </a:r>
+            <a:r>
+              <a:rPr lang="en-ZA" sz="1200" dirty="0">
+                <a:solidFill>
+                  <a:schemeClr val="tx2"/>
+                </a:solidFill>
+                <a:latin typeface="Times New Roman" panose="02020603050405020304" pitchFamily="18" charset="0"/>
+                <a:cs typeface="Times New Roman" panose="02020603050405020304" pitchFamily="18" charset="0"/>
+              </a:rPr>
+              <a:t>.</a:t>
+            </a:r>
+          </a:p>
+        </p:txBody>
+      </p:sp>
+      <p:sp>
+        <p:nvSpPr>
+          <p:cNvPr id="17" name="Rectangle: Rounded Corners 16">
+            <a:extLst>
+              <a:ext uri="{FF2B5EF4-FFF2-40B4-BE49-F238E27FC236}">
+                <a16:creationId xmlns:a16="http://schemas.microsoft.com/office/drawing/2014/main" id="{969CBD7C-1F4E-DEC1-7570-2CE212A58AC1}"/>
+              </a:ext>
+            </a:extLst>
+          </p:cNvPr>
+          <p:cNvSpPr/>
+          <p:nvPr/>
+        </p:nvSpPr>
+        <p:spPr>
+          <a:xfrm>
+            <a:off x="236184" y="4774166"/>
+            <a:ext cx="3013788" cy="1623526"/>
+          </a:xfrm>
+          <a:prstGeom prst="roundRect">
+            <a:avLst/>
+          </a:prstGeom>
+          <a:solidFill>
+            <a:schemeClr val="accent2">
+              <a:lumMod val="20000"/>
+              <a:lumOff val="80000"/>
+            </a:schemeClr>
+          </a:solidFill>
+          <a:ln>
             <a:solidFill>
               <a:schemeClr val="accent2">
                 <a:lumMod val="20000"/>
                 <a:lumOff val="80000"/>
               </a:schemeClr>
             </a:solidFill>
-            <a:ln>
-              <a:solidFill>
-                <a:schemeClr val="accent2">
-                  <a:lumMod val="20000"/>
-                  <a:lumOff val="80000"/>
-                </a:schemeClr>
-              </a:solidFill>
-            </a:ln>
-          </p:spPr>
-          <p:style>
-            <a:lnRef idx="2">
-              <a:schemeClr val="accent1">
-                <a:shade val="15000"/>
-              </a:schemeClr>
-            </a:lnRef>
-            <a:fillRef idx="1">
-              <a:schemeClr val="accent1"/>
-            </a:fillRef>
-            <a:effectRef idx="0">
-              <a:schemeClr val="accent1"/>
-            </a:effectRef>
-            <a:fontRef idx="minor">
-              <a:schemeClr val="lt1"/>
-            </a:fontRef>
-          </p:style>
-          <p:txBody>
-            <a:bodyPr rtlCol="0" anchor="ctr"/>
-            <a:lstStyle/>
-            <a:p>
-              <a:pPr marL="342900" indent="-342900">
-                <a:lnSpc>
-                  <a:spcPct val="150000"/>
-                </a:lnSpc>
-                <a:buFont typeface="Wingdings" panose="05000000000000000000" pitchFamily="2" charset="2"/>
-                <a:buChar char="q"/>
-              </a:pPr>
-              <a:r>
-                <a:rPr lang="en-ZA" sz="1600" b="1" dirty="0">
-                  <a:solidFill>
-                    <a:schemeClr val="accent3">
-                      <a:lumMod val="75000"/>
-                    </a:schemeClr>
-                  </a:solidFill>
-                  <a:latin typeface="Times New Roman" panose="02020603050405020304" pitchFamily="18" charset="0"/>
-                  <a:cs typeface="Times New Roman" panose="02020603050405020304" pitchFamily="18" charset="0"/>
-                </a:rPr>
-                <a:t>Class imbalance</a:t>
-              </a:r>
-            </a:p>
-            <a:p>
-              <a:pPr>
-                <a:lnSpc>
-                  <a:spcPct val="150000"/>
-                </a:lnSpc>
-              </a:pPr>
-              <a:r>
-                <a:rPr lang="en-ZA" sz="1200" dirty="0">
-                  <a:solidFill>
-                    <a:schemeClr val="tx2"/>
-                  </a:solidFill>
-                  <a:latin typeface="Times New Roman" panose="02020603050405020304" pitchFamily="18" charset="0"/>
-                  <a:cs typeface="Times New Roman" panose="02020603050405020304" pitchFamily="18" charset="0"/>
-                </a:rPr>
-                <a:t>78% low risk vs 22% high risk applicants {accuracy alone is a misleading metric}.</a:t>
-              </a:r>
-            </a:p>
-          </p:txBody>
-        </p:sp>
-        <p:sp>
-          <p:nvSpPr>
-            <p:cNvPr id="19" name="Rectangle: Rounded Corners 18">
-              <a:extLst>
-                <a:ext uri="{FF2B5EF4-FFF2-40B4-BE49-F238E27FC236}">
-                  <a16:creationId xmlns:a16="http://schemas.microsoft.com/office/drawing/2014/main" id="{E069293D-C6DB-B694-09E4-84AC977ADF74}"/>
-                </a:ext>
-              </a:extLst>
-            </p:cNvPr>
-            <p:cNvSpPr/>
-            <p:nvPr/>
-          </p:nvSpPr>
-          <p:spPr>
-            <a:xfrm>
-              <a:off x="7694644" y="4043266"/>
-              <a:ext cx="3013788" cy="1623526"/>
-            </a:xfrm>
-            <a:prstGeom prst="roundRect">
-              <a:avLst/>
-            </a:prstGeom>
+          </a:ln>
+        </p:spPr>
+        <p:style>
+          <a:lnRef idx="2">
+            <a:schemeClr val="accent1">
+              <a:shade val="15000"/>
+            </a:schemeClr>
+          </a:lnRef>
+          <a:fillRef idx="1">
+            <a:schemeClr val="accent1"/>
+          </a:fillRef>
+          <a:effectRef idx="0">
+            <a:schemeClr val="accent1"/>
+          </a:effectRef>
+          <a:fontRef idx="minor">
+            <a:schemeClr val="lt1"/>
+          </a:fontRef>
+        </p:style>
+        <p:txBody>
+          <a:bodyPr rtlCol="0" anchor="ctr"/>
+          <a:lstStyle/>
+          <a:p>
+            <a:pPr marL="342900" indent="-342900">
+              <a:lnSpc>
+                <a:spcPct val="150000"/>
+              </a:lnSpc>
+              <a:buFont typeface="Wingdings" panose="05000000000000000000" pitchFamily="2" charset="2"/>
+              <a:buChar char="q"/>
+            </a:pPr>
+            <a:r>
+              <a:rPr lang="en-ZA" sz="1600" b="1" dirty="0">
+                <a:solidFill>
+                  <a:schemeClr val="accent3">
+                    <a:lumMod val="75000"/>
+                  </a:schemeClr>
+                </a:solidFill>
+                <a:latin typeface="Times New Roman" panose="02020603050405020304" pitchFamily="18" charset="0"/>
+                <a:cs typeface="Times New Roman" panose="02020603050405020304" pitchFamily="18" charset="0"/>
+              </a:rPr>
+              <a:t>Class imbalance</a:t>
+            </a:r>
+          </a:p>
+          <a:p>
+            <a:pPr>
+              <a:lnSpc>
+                <a:spcPct val="150000"/>
+              </a:lnSpc>
+            </a:pPr>
+            <a:r>
+              <a:rPr lang="en-ZA" sz="1200" dirty="0">
+                <a:solidFill>
+                  <a:schemeClr val="tx2"/>
+                </a:solidFill>
+                <a:latin typeface="Times New Roman" panose="02020603050405020304" pitchFamily="18" charset="0"/>
+                <a:cs typeface="Times New Roman" panose="02020603050405020304" pitchFamily="18" charset="0"/>
+              </a:rPr>
+              <a:t>78% low risk vs 22% high risk applicants {accuracy alone is a misleading metric}.</a:t>
+            </a:r>
+          </a:p>
+        </p:txBody>
+      </p:sp>
+      <p:sp>
+        <p:nvSpPr>
+          <p:cNvPr id="19" name="Rectangle: Rounded Corners 18">
+            <a:extLst>
+              <a:ext uri="{FF2B5EF4-FFF2-40B4-BE49-F238E27FC236}">
+                <a16:creationId xmlns:a16="http://schemas.microsoft.com/office/drawing/2014/main" id="{E069293D-C6DB-B694-09E4-84AC977ADF74}"/>
+              </a:ext>
+            </a:extLst>
+          </p:cNvPr>
+          <p:cNvSpPr/>
+          <p:nvPr/>
+        </p:nvSpPr>
+        <p:spPr>
+          <a:xfrm>
+            <a:off x="3595395" y="4777274"/>
+            <a:ext cx="3013788" cy="1623526"/>
+          </a:xfrm>
+          <a:prstGeom prst="roundRect">
+            <a:avLst/>
+          </a:prstGeom>
+          <a:solidFill>
+            <a:schemeClr val="accent2">
+              <a:lumMod val="20000"/>
+              <a:lumOff val="80000"/>
+            </a:schemeClr>
+          </a:solidFill>
+          <a:ln>
             <a:solidFill>
               <a:schemeClr val="accent2">
                 <a:lumMod val="20000"/>
                 <a:lumOff val="80000"/>
               </a:schemeClr>
             </a:solidFill>
-            <a:ln>
-              <a:solidFill>
-                <a:schemeClr val="accent2">
-                  <a:lumMod val="20000"/>
-                  <a:lumOff val="80000"/>
-                </a:schemeClr>
-              </a:solidFill>
-            </a:ln>
-          </p:spPr>
-          <p:style>
-            <a:lnRef idx="2">
-              <a:schemeClr val="accent1">
-                <a:shade val="15000"/>
-              </a:schemeClr>
-            </a:lnRef>
-            <a:fillRef idx="1">
-              <a:schemeClr val="accent1"/>
-            </a:fillRef>
-            <a:effectRef idx="0">
-              <a:schemeClr val="accent1"/>
-            </a:effectRef>
-            <a:fontRef idx="minor">
-              <a:schemeClr val="lt1"/>
-            </a:fontRef>
-          </p:style>
-          <p:txBody>
-            <a:bodyPr rtlCol="0" anchor="ctr"/>
-            <a:lstStyle/>
-            <a:p>
-              <a:pPr marL="342900" indent="-342900">
-                <a:lnSpc>
-                  <a:spcPct val="150000"/>
-                </a:lnSpc>
-                <a:buFont typeface="Wingdings" panose="05000000000000000000" pitchFamily="2" charset="2"/>
-                <a:buChar char="q"/>
-              </a:pPr>
-              <a:r>
-                <a:rPr lang="en-ZA" sz="1600" b="1" dirty="0">
-                  <a:solidFill>
-                    <a:schemeClr val="accent3">
-                      <a:lumMod val="75000"/>
-                    </a:schemeClr>
-                  </a:solidFill>
-                  <a:latin typeface="Times New Roman" panose="02020603050405020304" pitchFamily="18" charset="0"/>
-                  <a:cs typeface="Times New Roman" panose="02020603050405020304" pitchFamily="18" charset="0"/>
-                </a:rPr>
-                <a:t>Skewed distributions</a:t>
-              </a:r>
-            </a:p>
-            <a:p>
-              <a:pPr>
-                <a:lnSpc>
-                  <a:spcPct val="150000"/>
-                </a:lnSpc>
-              </a:pPr>
-              <a:r>
-                <a:rPr lang="en-ZA" sz="1200" dirty="0" err="1">
-                  <a:solidFill>
-                    <a:schemeClr val="tx2"/>
-                  </a:solidFill>
-                  <a:latin typeface="Times New Roman" panose="02020603050405020304" pitchFamily="18" charset="0"/>
-                  <a:cs typeface="Times New Roman" panose="02020603050405020304" pitchFamily="18" charset="0"/>
-                </a:rPr>
-                <a:t>person_income</a:t>
-              </a:r>
-              <a:r>
-                <a:rPr lang="en-ZA" sz="1200" dirty="0">
-                  <a:solidFill>
-                    <a:schemeClr val="tx2"/>
-                  </a:solidFill>
-                  <a:latin typeface="Times New Roman" panose="02020603050405020304" pitchFamily="18" charset="0"/>
-                  <a:cs typeface="Times New Roman" panose="02020603050405020304" pitchFamily="18" charset="0"/>
-                </a:rPr>
-                <a:t>, </a:t>
-              </a:r>
-              <a:r>
-                <a:rPr lang="en-ZA" sz="1200" dirty="0" err="1">
-                  <a:solidFill>
-                    <a:schemeClr val="tx2"/>
-                  </a:solidFill>
-                  <a:latin typeface="Times New Roman" panose="02020603050405020304" pitchFamily="18" charset="0"/>
-                  <a:cs typeface="Times New Roman" panose="02020603050405020304" pitchFamily="18" charset="0"/>
-                </a:rPr>
-                <a:t>loan_amt</a:t>
-              </a:r>
-              <a:r>
-                <a:rPr lang="en-ZA" sz="1200" dirty="0">
-                  <a:solidFill>
-                    <a:schemeClr val="tx2"/>
-                  </a:solidFill>
-                  <a:latin typeface="Times New Roman" panose="02020603050405020304" pitchFamily="18" charset="0"/>
-                  <a:cs typeface="Times New Roman" panose="02020603050405020304" pitchFamily="18" charset="0"/>
-                </a:rPr>
-                <a:t> and </a:t>
-              </a:r>
-              <a:r>
-                <a:rPr lang="en-ZA" sz="1200" dirty="0" err="1">
-                  <a:solidFill>
-                    <a:schemeClr val="tx2"/>
-                  </a:solidFill>
-                  <a:latin typeface="Times New Roman" panose="02020603050405020304" pitchFamily="18" charset="0"/>
-                  <a:cs typeface="Times New Roman" panose="02020603050405020304" pitchFamily="18" charset="0"/>
-                </a:rPr>
-                <a:t>loan_percent_income</a:t>
-              </a:r>
-              <a:r>
-                <a:rPr lang="en-ZA" sz="1200" dirty="0">
-                  <a:solidFill>
-                    <a:schemeClr val="tx2"/>
-                  </a:solidFill>
-                  <a:latin typeface="Times New Roman" panose="02020603050405020304" pitchFamily="18" charset="0"/>
-                  <a:cs typeface="Times New Roman" panose="02020603050405020304" pitchFamily="18" charset="0"/>
-                </a:rPr>
-                <a:t> are strongly right skewed.</a:t>
-              </a:r>
-            </a:p>
-          </p:txBody>
-        </p:sp>
-      </p:grpSp>
+          </a:ln>
+        </p:spPr>
+        <p:style>
+          <a:lnRef idx="2">
+            <a:schemeClr val="accent1">
+              <a:shade val="15000"/>
+            </a:schemeClr>
+          </a:lnRef>
+          <a:fillRef idx="1">
+            <a:schemeClr val="accent1"/>
+          </a:fillRef>
+          <a:effectRef idx="0">
+            <a:schemeClr val="accent1"/>
+          </a:effectRef>
+          <a:fontRef idx="minor">
+            <a:schemeClr val="lt1"/>
+          </a:fontRef>
+        </p:style>
+        <p:txBody>
+          <a:bodyPr rtlCol="0" anchor="ctr"/>
+          <a:lstStyle/>
+          <a:p>
+            <a:pPr marL="342900" indent="-342900">
+              <a:lnSpc>
+                <a:spcPct val="150000"/>
+              </a:lnSpc>
+              <a:buFont typeface="Wingdings" panose="05000000000000000000" pitchFamily="2" charset="2"/>
+              <a:buChar char="q"/>
+            </a:pPr>
+            <a:r>
+              <a:rPr lang="en-ZA" sz="1600" b="1" dirty="0">
+                <a:solidFill>
+                  <a:schemeClr val="accent3">
+                    <a:lumMod val="75000"/>
+                  </a:schemeClr>
+                </a:solidFill>
+                <a:latin typeface="Times New Roman" panose="02020603050405020304" pitchFamily="18" charset="0"/>
+                <a:cs typeface="Times New Roman" panose="02020603050405020304" pitchFamily="18" charset="0"/>
+              </a:rPr>
+              <a:t>Skewed distributions</a:t>
+            </a:r>
+          </a:p>
+          <a:p>
+            <a:pPr>
+              <a:lnSpc>
+                <a:spcPct val="150000"/>
+              </a:lnSpc>
+            </a:pPr>
+            <a:r>
+              <a:rPr lang="en-ZA" sz="1200" dirty="0" err="1">
+                <a:solidFill>
+                  <a:schemeClr val="tx2"/>
+                </a:solidFill>
+                <a:latin typeface="Times New Roman" panose="02020603050405020304" pitchFamily="18" charset="0"/>
+                <a:cs typeface="Times New Roman" panose="02020603050405020304" pitchFamily="18" charset="0"/>
+              </a:rPr>
+              <a:t>person_income</a:t>
+            </a:r>
+            <a:r>
+              <a:rPr lang="en-ZA" sz="1200" dirty="0">
+                <a:solidFill>
+                  <a:schemeClr val="tx2"/>
+                </a:solidFill>
+                <a:latin typeface="Times New Roman" panose="02020603050405020304" pitchFamily="18" charset="0"/>
+                <a:cs typeface="Times New Roman" panose="02020603050405020304" pitchFamily="18" charset="0"/>
+              </a:rPr>
+              <a:t>, </a:t>
+            </a:r>
+            <a:r>
+              <a:rPr lang="en-ZA" sz="1200" dirty="0" err="1">
+                <a:solidFill>
+                  <a:schemeClr val="tx2"/>
+                </a:solidFill>
+                <a:latin typeface="Times New Roman" panose="02020603050405020304" pitchFamily="18" charset="0"/>
+                <a:cs typeface="Times New Roman" panose="02020603050405020304" pitchFamily="18" charset="0"/>
+              </a:rPr>
+              <a:t>loan_amt</a:t>
+            </a:r>
+            <a:r>
+              <a:rPr lang="en-ZA" sz="1200" dirty="0">
+                <a:solidFill>
+                  <a:schemeClr val="tx2"/>
+                </a:solidFill>
+                <a:latin typeface="Times New Roman" panose="02020603050405020304" pitchFamily="18" charset="0"/>
+                <a:cs typeface="Times New Roman" panose="02020603050405020304" pitchFamily="18" charset="0"/>
+              </a:rPr>
+              <a:t> and </a:t>
+            </a:r>
+            <a:r>
+              <a:rPr lang="en-ZA" sz="1200" dirty="0" err="1">
+                <a:solidFill>
+                  <a:schemeClr val="tx2"/>
+                </a:solidFill>
+                <a:latin typeface="Times New Roman" panose="02020603050405020304" pitchFamily="18" charset="0"/>
+                <a:cs typeface="Times New Roman" panose="02020603050405020304" pitchFamily="18" charset="0"/>
+              </a:rPr>
+              <a:t>loan_percent_income</a:t>
+            </a:r>
+            <a:r>
+              <a:rPr lang="en-ZA" sz="1200" dirty="0">
+                <a:solidFill>
+                  <a:schemeClr val="tx2"/>
+                </a:solidFill>
+                <a:latin typeface="Times New Roman" panose="02020603050405020304" pitchFamily="18" charset="0"/>
+                <a:cs typeface="Times New Roman" panose="02020603050405020304" pitchFamily="18" charset="0"/>
+              </a:rPr>
+              <a:t> are strongly right skewed.</a:t>
+            </a:r>
+          </a:p>
+        </p:txBody>
+      </p:sp>
+      <p:pic>
+        <p:nvPicPr>
+          <p:cNvPr id="6" name="Picture 5">
+            <a:extLst>
+              <a:ext uri="{FF2B5EF4-FFF2-40B4-BE49-F238E27FC236}">
+                <a16:creationId xmlns:a16="http://schemas.microsoft.com/office/drawing/2014/main" id="{AFEBA0FF-BBCD-5D95-F59E-BDA53C650EEB}"/>
+              </a:ext>
+            </a:extLst>
+          </p:cNvPr>
+          <p:cNvPicPr>
+            <a:picLocks noChangeAspect="1"/>
+          </p:cNvPicPr>
+          <p:nvPr/>
+        </p:nvPicPr>
+        <p:blipFill>
+          <a:blip r:embed="rId2">
+            <a:extLst>
+              <a:ext uri="{28A0092B-C50C-407E-A947-70E740481C1C}">
+                <a14:useLocalDpi xmlns:a14="http://schemas.microsoft.com/office/drawing/2010/main" val="0"/>
+              </a:ext>
+            </a:extLst>
+          </a:blip>
+          <a:stretch>
+            <a:fillRect/>
+          </a:stretch>
+        </p:blipFill>
+        <p:spPr>
+          <a:xfrm>
+            <a:off x="6954606" y="1870789"/>
+            <a:ext cx="5001210" cy="3928187"/>
+          </a:xfrm>
+          <a:prstGeom prst="rect">
+            <a:avLst/>
+          </a:prstGeom>
+        </p:spPr>
+      </p:pic>
     </p:spTree>
     <p:extLst>
       <p:ext uri="{BB962C8B-B14F-4D97-AF65-F5344CB8AC3E}">
@@ -23458,7 +23580,7 @@
         </p:nvSpPr>
         <p:spPr>
           <a:xfrm>
-            <a:off x="3502090" y="2401669"/>
+            <a:off x="559837" y="4027120"/>
             <a:ext cx="2481943" cy="1408922"/>
           </a:xfrm>
           <a:prstGeom prst="roundRect">
@@ -23548,7 +23670,7 @@
         </p:nvSpPr>
         <p:spPr>
           <a:xfrm>
-            <a:off x="653143" y="4264090"/>
+            <a:off x="457199" y="5510685"/>
             <a:ext cx="3648269" cy="890115"/>
           </a:xfrm>
           <a:prstGeom prst="rect">
@@ -23597,6 +23719,42 @@
           </a:p>
         </p:txBody>
       </p:sp>
+      <p:pic>
+        <p:nvPicPr>
+          <p:cNvPr id="10" name="Picture 9">
+            <a:extLst>
+              <a:ext uri="{FF2B5EF4-FFF2-40B4-BE49-F238E27FC236}">
+                <a16:creationId xmlns:a16="http://schemas.microsoft.com/office/drawing/2014/main" id="{6C017206-1816-2CDA-9AE8-0959A0BF2D66}"/>
+              </a:ext>
+            </a:extLst>
+          </p:cNvPr>
+          <p:cNvPicPr>
+            <a:picLocks noChangeAspect="1"/>
+          </p:cNvPicPr>
+          <p:nvPr/>
+        </p:nvPicPr>
+        <p:blipFill>
+          <a:blip r:embed="rId2">
+            <a:extLst>
+              <a:ext uri="{28A0092B-C50C-407E-A947-70E740481C1C}">
+                <a14:useLocalDpi xmlns:a14="http://schemas.microsoft.com/office/drawing/2010/main" val="0"/>
+              </a:ext>
+            </a:extLst>
+          </a:blip>
+          <a:stretch>
+            <a:fillRect/>
+          </a:stretch>
+        </p:blipFill>
+        <p:spPr>
+          <a:xfrm>
+            <a:off x="4668416" y="1658034"/>
+            <a:ext cx="6826898" cy="4571692"/>
+          </a:xfrm>
+          <a:prstGeom prst="rect">
+            <a:avLst/>
+          </a:prstGeom>
+        </p:spPr>
+      </p:pic>
     </p:spTree>
     <p:extLst>
       <p:ext uri="{BB962C8B-B14F-4D97-AF65-F5344CB8AC3E}">
@@ -23640,15 +23798,31 @@
             <a:spLocks noGrp="1"/>
           </p:cNvSpPr>
           <p:nvPr>
-            <p:ph type="ctrTitle"/>
+            <p:ph type="title"/>
           </p:nvPr>
         </p:nvSpPr>
         <p:spPr/>
         <p:txBody>
-          <a:bodyPr/>
+          <a:bodyPr>
+            <a:noAutofit/>
+          </a:bodyPr>
           <a:lstStyle/>
           <a:p>
-            <a:endParaRPr lang="en-ZA"/>
+            <a:pPr>
+              <a:lnSpc>
+                <a:spcPct val="150000"/>
+              </a:lnSpc>
+            </a:pPr>
+            <a:r>
+              <a:rPr lang="en-ZA" sz="2800" b="1" dirty="0">
+                <a:solidFill>
+                  <a:schemeClr val="tx2"/>
+                </a:solidFill>
+                <a:latin typeface="Times New Roman" panose="02020603050405020304" pitchFamily="18" charset="0"/>
+                <a:cs typeface="Times New Roman" panose="02020603050405020304" pitchFamily="18" charset="0"/>
+              </a:rPr>
+              <a:t>Model comparison – Before PCA</a:t>
+            </a:r>
           </a:p>
         </p:txBody>
       </p:sp>
@@ -23681,6 +23855,771 @@
           </a:p>
         </p:txBody>
       </p:sp>
+      <p:sp>
+        <p:nvSpPr>
+          <p:cNvPr id="4" name="TextBox 3">
+            <a:extLst>
+              <a:ext uri="{FF2B5EF4-FFF2-40B4-BE49-F238E27FC236}">
+                <a16:creationId xmlns:a16="http://schemas.microsoft.com/office/drawing/2014/main" id="{7C1039FA-C227-0728-B80A-A04A4B6CE04E}"/>
+              </a:ext>
+            </a:extLst>
+          </p:cNvPr>
+          <p:cNvSpPr txBox="1"/>
+          <p:nvPr/>
+        </p:nvSpPr>
+        <p:spPr>
+          <a:xfrm>
+            <a:off x="457199" y="1129004"/>
+            <a:ext cx="9330612" cy="336118"/>
+          </a:xfrm>
+          <a:prstGeom prst="rect">
+            <a:avLst/>
+          </a:prstGeom>
+          <a:noFill/>
+        </p:spPr>
+        <p:txBody>
+          <a:bodyPr wrap="square" rtlCol="0">
+            <a:spAutoFit/>
+          </a:bodyPr>
+          <a:lstStyle/>
+          <a:p>
+            <a:pPr>
+              <a:lnSpc>
+                <a:spcPct val="150000"/>
+              </a:lnSpc>
+            </a:pPr>
+            <a:r>
+              <a:rPr lang="en-ZA" sz="1200" dirty="0">
+                <a:solidFill>
+                  <a:schemeClr val="tx2"/>
+                </a:solidFill>
+                <a:latin typeface="Times New Roman" panose="02020603050405020304" pitchFamily="18" charset="0"/>
+                <a:cs typeface="Times New Roman" panose="02020603050405020304" pitchFamily="18" charset="0"/>
+              </a:rPr>
+              <a:t>Three classifiers trained on the 17 scaled encoded features</a:t>
+            </a:r>
+          </a:p>
+        </p:txBody>
+      </p:sp>
+      <p:graphicFrame>
+        <p:nvGraphicFramePr>
+          <p:cNvPr id="5" name="Table 4">
+            <a:extLst>
+              <a:ext uri="{FF2B5EF4-FFF2-40B4-BE49-F238E27FC236}">
+                <a16:creationId xmlns:a16="http://schemas.microsoft.com/office/drawing/2014/main" id="{CCFB4286-0FB1-4E05-CAE8-526E19E62BD2}"/>
+              </a:ext>
+            </a:extLst>
+          </p:cNvPr>
+          <p:cNvGraphicFramePr>
+            <a:graphicFrameLocks noGrp="1"/>
+          </p:cNvGraphicFramePr>
+          <p:nvPr>
+            <p:extLst>
+              <p:ext uri="{D42A27DB-BD31-4B8C-83A1-F6EECF244321}">
+                <p14:modId xmlns:p14="http://schemas.microsoft.com/office/powerpoint/2010/main" val="2819410755"/>
+              </p:ext>
+            </p:extLst>
+          </p:nvPr>
+        </p:nvGraphicFramePr>
+        <p:xfrm>
+          <a:off x="457200" y="1661160"/>
+          <a:ext cx="6969965" cy="1483360"/>
+        </p:xfrm>
+        <a:graphic>
+          <a:graphicData uri="http://schemas.openxmlformats.org/drawingml/2006/table">
+            <a:tbl>
+              <a:tblPr firstRow="1" bandRow="1">
+                <a:tableStyleId>{8799B23B-EC83-4686-B30A-512413B5E67A}</a:tableStyleId>
+              </a:tblPr>
+              <a:tblGrid>
+                <a:gridCol w="1393993">
+                  <a:extLst>
+                    <a:ext uri="{9D8B030D-6E8A-4147-A177-3AD203B41FA5}">
+                      <a16:colId xmlns:a16="http://schemas.microsoft.com/office/drawing/2014/main" val="1116900852"/>
+                    </a:ext>
+                  </a:extLst>
+                </a:gridCol>
+                <a:gridCol w="1393993">
+                  <a:extLst>
+                    <a:ext uri="{9D8B030D-6E8A-4147-A177-3AD203B41FA5}">
+                      <a16:colId xmlns:a16="http://schemas.microsoft.com/office/drawing/2014/main" val="839705105"/>
+                    </a:ext>
+                  </a:extLst>
+                </a:gridCol>
+                <a:gridCol w="1393993">
+                  <a:extLst>
+                    <a:ext uri="{9D8B030D-6E8A-4147-A177-3AD203B41FA5}">
+                      <a16:colId xmlns:a16="http://schemas.microsoft.com/office/drawing/2014/main" val="2972379473"/>
+                    </a:ext>
+                  </a:extLst>
+                </a:gridCol>
+                <a:gridCol w="1393993">
+                  <a:extLst>
+                    <a:ext uri="{9D8B030D-6E8A-4147-A177-3AD203B41FA5}">
+                      <a16:colId xmlns:a16="http://schemas.microsoft.com/office/drawing/2014/main" val="3919136990"/>
+                    </a:ext>
+                  </a:extLst>
+                </a:gridCol>
+                <a:gridCol w="1393993">
+                  <a:extLst>
+                    <a:ext uri="{9D8B030D-6E8A-4147-A177-3AD203B41FA5}">
+                      <a16:colId xmlns:a16="http://schemas.microsoft.com/office/drawing/2014/main" val="2536520263"/>
+                    </a:ext>
+                  </a:extLst>
+                </a:gridCol>
+              </a:tblGrid>
+              <a:tr h="370840">
+                <a:tc>
+                  <a:txBody>
+                    <a:bodyPr/>
+                    <a:lstStyle/>
+                    <a:p>
+                      <a:pPr>
+                        <a:lnSpc>
+                          <a:spcPct val="150000"/>
+                        </a:lnSpc>
+                      </a:pPr>
+                      <a:r>
+                        <a:rPr lang="en-ZA" sz="1200" b="1" dirty="0">
+                          <a:solidFill>
+                            <a:schemeClr val="tx2"/>
+                          </a:solidFill>
+                          <a:latin typeface="Times New Roman" panose="02020603050405020304" pitchFamily="18" charset="0"/>
+                          <a:cs typeface="Times New Roman" panose="02020603050405020304" pitchFamily="18" charset="0"/>
+                        </a:rPr>
+                        <a:t>Model</a:t>
+                      </a:r>
+                    </a:p>
+                  </a:txBody>
+                  <a:tcPr>
+                    <a:solidFill>
+                      <a:schemeClr val="accent3">
+                        <a:lumMod val="40000"/>
+                        <a:lumOff val="60000"/>
+                      </a:schemeClr>
+                    </a:solidFill>
+                  </a:tcPr>
+                </a:tc>
+                <a:tc>
+                  <a:txBody>
+                    <a:bodyPr/>
+                    <a:lstStyle/>
+                    <a:p>
+                      <a:pPr>
+                        <a:lnSpc>
+                          <a:spcPct val="150000"/>
+                        </a:lnSpc>
+                      </a:pPr>
+                      <a:r>
+                        <a:rPr lang="en-ZA" sz="1200" dirty="0">
+                          <a:solidFill>
+                            <a:schemeClr val="tx2"/>
+                          </a:solidFill>
+                          <a:latin typeface="Times New Roman" panose="02020603050405020304" pitchFamily="18" charset="0"/>
+                          <a:cs typeface="Times New Roman" panose="02020603050405020304" pitchFamily="18" charset="0"/>
+                        </a:rPr>
+                        <a:t>Accuracy</a:t>
+                      </a:r>
+                    </a:p>
+                  </a:txBody>
+                  <a:tcPr>
+                    <a:solidFill>
+                      <a:schemeClr val="accent3">
+                        <a:lumMod val="40000"/>
+                        <a:lumOff val="60000"/>
+                      </a:schemeClr>
+                    </a:solidFill>
+                  </a:tcPr>
+                </a:tc>
+                <a:tc>
+                  <a:txBody>
+                    <a:bodyPr/>
+                    <a:lstStyle/>
+                    <a:p>
+                      <a:pPr>
+                        <a:lnSpc>
+                          <a:spcPct val="150000"/>
+                        </a:lnSpc>
+                      </a:pPr>
+                      <a:r>
+                        <a:rPr lang="en-ZA" sz="1200" dirty="0">
+                          <a:solidFill>
+                            <a:schemeClr val="tx2"/>
+                          </a:solidFill>
+                          <a:latin typeface="Times New Roman" panose="02020603050405020304" pitchFamily="18" charset="0"/>
+                          <a:cs typeface="Times New Roman" panose="02020603050405020304" pitchFamily="18" charset="0"/>
+                        </a:rPr>
+                        <a:t>Precision</a:t>
+                      </a:r>
+                    </a:p>
+                  </a:txBody>
+                  <a:tcPr>
+                    <a:solidFill>
+                      <a:schemeClr val="accent3">
+                        <a:lumMod val="40000"/>
+                        <a:lumOff val="60000"/>
+                      </a:schemeClr>
+                    </a:solidFill>
+                  </a:tcPr>
+                </a:tc>
+                <a:tc>
+                  <a:txBody>
+                    <a:bodyPr/>
+                    <a:lstStyle/>
+                    <a:p>
+                      <a:pPr>
+                        <a:lnSpc>
+                          <a:spcPct val="150000"/>
+                        </a:lnSpc>
+                      </a:pPr>
+                      <a:r>
+                        <a:rPr lang="en-ZA" sz="1200" dirty="0">
+                          <a:solidFill>
+                            <a:schemeClr val="tx2"/>
+                          </a:solidFill>
+                          <a:latin typeface="Times New Roman" panose="02020603050405020304" pitchFamily="18" charset="0"/>
+                          <a:cs typeface="Times New Roman" panose="02020603050405020304" pitchFamily="18" charset="0"/>
+                        </a:rPr>
+                        <a:t>Recall</a:t>
+                      </a:r>
+                    </a:p>
+                  </a:txBody>
+                  <a:tcPr>
+                    <a:solidFill>
+                      <a:schemeClr val="accent3">
+                        <a:lumMod val="40000"/>
+                        <a:lumOff val="60000"/>
+                      </a:schemeClr>
+                    </a:solidFill>
+                  </a:tcPr>
+                </a:tc>
+                <a:tc>
+                  <a:txBody>
+                    <a:bodyPr/>
+                    <a:lstStyle/>
+                    <a:p>
+                      <a:pPr>
+                        <a:lnSpc>
+                          <a:spcPct val="150000"/>
+                        </a:lnSpc>
+                      </a:pPr>
+                      <a:r>
+                        <a:rPr lang="en-ZA" sz="1200" dirty="0">
+                          <a:solidFill>
+                            <a:schemeClr val="tx2"/>
+                          </a:solidFill>
+                          <a:latin typeface="Times New Roman" panose="02020603050405020304" pitchFamily="18" charset="0"/>
+                          <a:cs typeface="Times New Roman" panose="02020603050405020304" pitchFamily="18" charset="0"/>
+                        </a:rPr>
+                        <a:t>F1-score</a:t>
+                      </a:r>
+                    </a:p>
+                  </a:txBody>
+                  <a:tcPr>
+                    <a:solidFill>
+                      <a:schemeClr val="accent3">
+                        <a:lumMod val="40000"/>
+                        <a:lumOff val="60000"/>
+                      </a:schemeClr>
+                    </a:solidFill>
+                  </a:tcPr>
+                </a:tc>
+                <a:extLst>
+                  <a:ext uri="{0D108BD9-81ED-4DB2-BD59-A6C34878D82A}">
+                    <a16:rowId xmlns:a16="http://schemas.microsoft.com/office/drawing/2014/main" val="3694833940"/>
+                  </a:ext>
+                </a:extLst>
+              </a:tr>
+              <a:tr h="370840">
+                <a:tc>
+                  <a:txBody>
+                    <a:bodyPr/>
+                    <a:lstStyle/>
+                    <a:p>
+                      <a:pPr>
+                        <a:lnSpc>
+                          <a:spcPct val="150000"/>
+                        </a:lnSpc>
+                      </a:pPr>
+                      <a:r>
+                        <a:rPr lang="en-ZA" sz="1200" dirty="0">
+                          <a:solidFill>
+                            <a:schemeClr val="tx2"/>
+                          </a:solidFill>
+                          <a:latin typeface="Times New Roman" panose="02020603050405020304" pitchFamily="18" charset="0"/>
+                          <a:cs typeface="Times New Roman" panose="02020603050405020304" pitchFamily="18" charset="0"/>
+                        </a:rPr>
+                        <a:t>Logistic regression</a:t>
+                      </a:r>
+                    </a:p>
+                  </a:txBody>
+                  <a:tcPr>
+                    <a:solidFill>
+                      <a:schemeClr val="accent2">
+                        <a:lumMod val="20000"/>
+                        <a:lumOff val="80000"/>
+                      </a:schemeClr>
+                    </a:solidFill>
+                  </a:tcPr>
+                </a:tc>
+                <a:tc>
+                  <a:txBody>
+                    <a:bodyPr/>
+                    <a:lstStyle/>
+                    <a:p>
+                      <a:pPr>
+                        <a:lnSpc>
+                          <a:spcPct val="150000"/>
+                        </a:lnSpc>
+                      </a:pPr>
+                      <a:r>
+                        <a:rPr lang="en-ZA" sz="1200" dirty="0">
+                          <a:solidFill>
+                            <a:schemeClr val="tx2"/>
+                          </a:solidFill>
+                          <a:latin typeface="Times New Roman" panose="02020603050405020304" pitchFamily="18" charset="0"/>
+                          <a:cs typeface="Times New Roman" panose="02020603050405020304" pitchFamily="18" charset="0"/>
+                        </a:rPr>
+                        <a:t>0.851</a:t>
+                      </a:r>
+                    </a:p>
+                  </a:txBody>
+                  <a:tcPr>
+                    <a:solidFill>
+                      <a:schemeClr val="accent2">
+                        <a:lumMod val="20000"/>
+                        <a:lumOff val="80000"/>
+                      </a:schemeClr>
+                    </a:solidFill>
+                  </a:tcPr>
+                </a:tc>
+                <a:tc>
+                  <a:txBody>
+                    <a:bodyPr/>
+                    <a:lstStyle/>
+                    <a:p>
+                      <a:pPr>
+                        <a:lnSpc>
+                          <a:spcPct val="150000"/>
+                        </a:lnSpc>
+                      </a:pPr>
+                      <a:r>
+                        <a:rPr lang="en-ZA" sz="1200" dirty="0">
+                          <a:solidFill>
+                            <a:schemeClr val="tx2"/>
+                          </a:solidFill>
+                          <a:latin typeface="Times New Roman" panose="02020603050405020304" pitchFamily="18" charset="0"/>
+                          <a:cs typeface="Times New Roman" panose="02020603050405020304" pitchFamily="18" charset="0"/>
+                        </a:rPr>
+                        <a:t>0.728</a:t>
+                      </a:r>
+                    </a:p>
+                  </a:txBody>
+                  <a:tcPr>
+                    <a:solidFill>
+                      <a:schemeClr val="accent2">
+                        <a:lumMod val="20000"/>
+                        <a:lumOff val="80000"/>
+                      </a:schemeClr>
+                    </a:solidFill>
+                  </a:tcPr>
+                </a:tc>
+                <a:tc>
+                  <a:txBody>
+                    <a:bodyPr/>
+                    <a:lstStyle/>
+                    <a:p>
+                      <a:pPr>
+                        <a:lnSpc>
+                          <a:spcPct val="150000"/>
+                        </a:lnSpc>
+                      </a:pPr>
+                      <a:r>
+                        <a:rPr lang="en-ZA" sz="1200" dirty="0">
+                          <a:solidFill>
+                            <a:schemeClr val="tx2"/>
+                          </a:solidFill>
+                          <a:latin typeface="Times New Roman" panose="02020603050405020304" pitchFamily="18" charset="0"/>
+                          <a:cs typeface="Times New Roman" panose="02020603050405020304" pitchFamily="18" charset="0"/>
+                        </a:rPr>
+                        <a:t>0.511</a:t>
+                      </a:r>
+                    </a:p>
+                  </a:txBody>
+                  <a:tcPr>
+                    <a:solidFill>
+                      <a:schemeClr val="accent2">
+                        <a:lumMod val="20000"/>
+                        <a:lumOff val="80000"/>
+                      </a:schemeClr>
+                    </a:solidFill>
+                  </a:tcPr>
+                </a:tc>
+                <a:tc>
+                  <a:txBody>
+                    <a:bodyPr/>
+                    <a:lstStyle/>
+                    <a:p>
+                      <a:pPr>
+                        <a:lnSpc>
+                          <a:spcPct val="150000"/>
+                        </a:lnSpc>
+                      </a:pPr>
+                      <a:r>
+                        <a:rPr lang="en-ZA" sz="1200" dirty="0">
+                          <a:solidFill>
+                            <a:schemeClr val="tx2"/>
+                          </a:solidFill>
+                          <a:latin typeface="Times New Roman" panose="02020603050405020304" pitchFamily="18" charset="0"/>
+                          <a:cs typeface="Times New Roman" panose="02020603050405020304" pitchFamily="18" charset="0"/>
+                        </a:rPr>
+                        <a:t>0.600</a:t>
+                      </a:r>
+                    </a:p>
+                  </a:txBody>
+                  <a:tcPr>
+                    <a:solidFill>
+                      <a:schemeClr val="accent2">
+                        <a:lumMod val="20000"/>
+                        <a:lumOff val="80000"/>
+                      </a:schemeClr>
+                    </a:solidFill>
+                  </a:tcPr>
+                </a:tc>
+                <a:extLst>
+                  <a:ext uri="{0D108BD9-81ED-4DB2-BD59-A6C34878D82A}">
+                    <a16:rowId xmlns:a16="http://schemas.microsoft.com/office/drawing/2014/main" val="2486599026"/>
+                  </a:ext>
+                </a:extLst>
+              </a:tr>
+              <a:tr h="370840">
+                <a:tc>
+                  <a:txBody>
+                    <a:bodyPr/>
+                    <a:lstStyle/>
+                    <a:p>
+                      <a:pPr>
+                        <a:lnSpc>
+                          <a:spcPct val="150000"/>
+                        </a:lnSpc>
+                      </a:pPr>
+                      <a:r>
+                        <a:rPr lang="en-ZA" sz="1200" dirty="0">
+                          <a:solidFill>
+                            <a:schemeClr val="tx2"/>
+                          </a:solidFill>
+                          <a:latin typeface="Times New Roman" panose="02020603050405020304" pitchFamily="18" charset="0"/>
+                          <a:cs typeface="Times New Roman" panose="02020603050405020304" pitchFamily="18" charset="0"/>
+                        </a:rPr>
+                        <a:t>K-NN</a:t>
+                      </a:r>
+                    </a:p>
+                  </a:txBody>
+                  <a:tcPr>
+                    <a:solidFill>
+                      <a:schemeClr val="accent2">
+                        <a:lumMod val="20000"/>
+                        <a:lumOff val="80000"/>
+                      </a:schemeClr>
+                    </a:solidFill>
+                  </a:tcPr>
+                </a:tc>
+                <a:tc>
+                  <a:txBody>
+                    <a:bodyPr/>
+                    <a:lstStyle/>
+                    <a:p>
+                      <a:pPr>
+                        <a:lnSpc>
+                          <a:spcPct val="150000"/>
+                        </a:lnSpc>
+                      </a:pPr>
+                      <a:r>
+                        <a:rPr lang="en-ZA" sz="1200" dirty="0">
+                          <a:solidFill>
+                            <a:schemeClr val="tx2"/>
+                          </a:solidFill>
+                          <a:latin typeface="Times New Roman" panose="02020603050405020304" pitchFamily="18" charset="0"/>
+                          <a:cs typeface="Times New Roman" panose="02020603050405020304" pitchFamily="18" charset="0"/>
+                        </a:rPr>
+                        <a:t>0.890</a:t>
+                      </a:r>
+                    </a:p>
+                  </a:txBody>
+                  <a:tcPr>
+                    <a:solidFill>
+                      <a:schemeClr val="accent2">
+                        <a:lumMod val="20000"/>
+                        <a:lumOff val="80000"/>
+                      </a:schemeClr>
+                    </a:solidFill>
+                  </a:tcPr>
+                </a:tc>
+                <a:tc>
+                  <a:txBody>
+                    <a:bodyPr/>
+                    <a:lstStyle/>
+                    <a:p>
+                      <a:pPr>
+                        <a:lnSpc>
+                          <a:spcPct val="150000"/>
+                        </a:lnSpc>
+                      </a:pPr>
+                      <a:r>
+                        <a:rPr lang="en-ZA" sz="1200" dirty="0">
+                          <a:solidFill>
+                            <a:schemeClr val="tx2"/>
+                          </a:solidFill>
+                          <a:latin typeface="Times New Roman" panose="02020603050405020304" pitchFamily="18" charset="0"/>
+                          <a:cs typeface="Times New Roman" panose="02020603050405020304" pitchFamily="18" charset="0"/>
+                        </a:rPr>
+                        <a:t>0.859</a:t>
+                      </a:r>
+                    </a:p>
+                  </a:txBody>
+                  <a:tcPr>
+                    <a:solidFill>
+                      <a:schemeClr val="accent2">
+                        <a:lumMod val="20000"/>
+                        <a:lumOff val="80000"/>
+                      </a:schemeClr>
+                    </a:solidFill>
+                  </a:tcPr>
+                </a:tc>
+                <a:tc>
+                  <a:txBody>
+                    <a:bodyPr/>
+                    <a:lstStyle/>
+                    <a:p>
+                      <a:pPr>
+                        <a:lnSpc>
+                          <a:spcPct val="150000"/>
+                        </a:lnSpc>
+                      </a:pPr>
+                      <a:r>
+                        <a:rPr lang="en-ZA" sz="1200" dirty="0">
+                          <a:solidFill>
+                            <a:schemeClr val="tx2"/>
+                          </a:solidFill>
+                          <a:latin typeface="Times New Roman" panose="02020603050405020304" pitchFamily="18" charset="0"/>
+                          <a:cs typeface="Times New Roman" panose="02020603050405020304" pitchFamily="18" charset="0"/>
+                        </a:rPr>
+                        <a:t>0.597</a:t>
+                      </a:r>
+                    </a:p>
+                  </a:txBody>
+                  <a:tcPr>
+                    <a:solidFill>
+                      <a:schemeClr val="accent2">
+                        <a:lumMod val="20000"/>
+                        <a:lumOff val="80000"/>
+                      </a:schemeClr>
+                    </a:solidFill>
+                  </a:tcPr>
+                </a:tc>
+                <a:tc>
+                  <a:txBody>
+                    <a:bodyPr/>
+                    <a:lstStyle/>
+                    <a:p>
+                      <a:pPr>
+                        <a:lnSpc>
+                          <a:spcPct val="150000"/>
+                        </a:lnSpc>
+                      </a:pPr>
+                      <a:r>
+                        <a:rPr lang="en-ZA" sz="1200" dirty="0">
+                          <a:solidFill>
+                            <a:schemeClr val="tx2"/>
+                          </a:solidFill>
+                          <a:latin typeface="Times New Roman" panose="02020603050405020304" pitchFamily="18" charset="0"/>
+                          <a:cs typeface="Times New Roman" panose="02020603050405020304" pitchFamily="18" charset="0"/>
+                        </a:rPr>
+                        <a:t>0.704</a:t>
+                      </a:r>
+                    </a:p>
+                  </a:txBody>
+                  <a:tcPr>
+                    <a:solidFill>
+                      <a:schemeClr val="accent2">
+                        <a:lumMod val="20000"/>
+                        <a:lumOff val="80000"/>
+                      </a:schemeClr>
+                    </a:solidFill>
+                  </a:tcPr>
+                </a:tc>
+                <a:extLst>
+                  <a:ext uri="{0D108BD9-81ED-4DB2-BD59-A6C34878D82A}">
+                    <a16:rowId xmlns:a16="http://schemas.microsoft.com/office/drawing/2014/main" val="160858611"/>
+                  </a:ext>
+                </a:extLst>
+              </a:tr>
+              <a:tr h="370840">
+                <a:tc>
+                  <a:txBody>
+                    <a:bodyPr/>
+                    <a:lstStyle/>
+                    <a:p>
+                      <a:pPr>
+                        <a:lnSpc>
+                          <a:spcPct val="150000"/>
+                        </a:lnSpc>
+                      </a:pPr>
+                      <a:r>
+                        <a:rPr lang="en-ZA" sz="1200" dirty="0">
+                          <a:solidFill>
+                            <a:schemeClr val="tx2"/>
+                          </a:solidFill>
+                          <a:latin typeface="Times New Roman" panose="02020603050405020304" pitchFamily="18" charset="0"/>
+                          <a:cs typeface="Times New Roman" panose="02020603050405020304" pitchFamily="18" charset="0"/>
+                        </a:rPr>
+                        <a:t>Decision Tree</a:t>
+                      </a:r>
+                    </a:p>
+                  </a:txBody>
+                  <a:tcPr>
+                    <a:solidFill>
+                      <a:schemeClr val="accent2">
+                        <a:lumMod val="20000"/>
+                        <a:lumOff val="80000"/>
+                      </a:schemeClr>
+                    </a:solidFill>
+                  </a:tcPr>
+                </a:tc>
+                <a:tc>
+                  <a:txBody>
+                    <a:bodyPr/>
+                    <a:lstStyle/>
+                    <a:p>
+                      <a:pPr>
+                        <a:lnSpc>
+                          <a:spcPct val="150000"/>
+                        </a:lnSpc>
+                      </a:pPr>
+                      <a:r>
+                        <a:rPr lang="en-ZA" sz="1200" dirty="0">
+                          <a:solidFill>
+                            <a:schemeClr val="tx2"/>
+                          </a:solidFill>
+                          <a:latin typeface="Times New Roman" panose="02020603050405020304" pitchFamily="18" charset="0"/>
+                          <a:cs typeface="Times New Roman" panose="02020603050405020304" pitchFamily="18" charset="0"/>
+                        </a:rPr>
+                        <a:t>0.894</a:t>
+                      </a:r>
+                    </a:p>
+                  </a:txBody>
+                  <a:tcPr>
+                    <a:solidFill>
+                      <a:schemeClr val="accent2">
+                        <a:lumMod val="20000"/>
+                        <a:lumOff val="80000"/>
+                      </a:schemeClr>
+                    </a:solidFill>
+                  </a:tcPr>
+                </a:tc>
+                <a:tc>
+                  <a:txBody>
+                    <a:bodyPr/>
+                    <a:lstStyle/>
+                    <a:p>
+                      <a:pPr>
+                        <a:lnSpc>
+                          <a:spcPct val="150000"/>
+                        </a:lnSpc>
+                      </a:pPr>
+                      <a:r>
+                        <a:rPr lang="en-ZA" sz="1200" dirty="0">
+                          <a:solidFill>
+                            <a:schemeClr val="tx2"/>
+                          </a:solidFill>
+                          <a:latin typeface="Times New Roman" panose="02020603050405020304" pitchFamily="18" charset="0"/>
+                          <a:cs typeface="Times New Roman" panose="02020603050405020304" pitchFamily="18" charset="0"/>
+                        </a:rPr>
+                        <a:t>0.852</a:t>
+                      </a:r>
+                    </a:p>
+                  </a:txBody>
+                  <a:tcPr>
+                    <a:solidFill>
+                      <a:schemeClr val="accent2">
+                        <a:lumMod val="20000"/>
+                        <a:lumOff val="80000"/>
+                      </a:schemeClr>
+                    </a:solidFill>
+                  </a:tcPr>
+                </a:tc>
+                <a:tc>
+                  <a:txBody>
+                    <a:bodyPr/>
+                    <a:lstStyle/>
+                    <a:p>
+                      <a:pPr>
+                        <a:lnSpc>
+                          <a:spcPct val="150000"/>
+                        </a:lnSpc>
+                      </a:pPr>
+                      <a:r>
+                        <a:rPr lang="en-ZA" sz="1200" dirty="0">
+                          <a:solidFill>
+                            <a:schemeClr val="tx2"/>
+                          </a:solidFill>
+                          <a:latin typeface="Times New Roman" panose="02020603050405020304" pitchFamily="18" charset="0"/>
+                          <a:cs typeface="Times New Roman" panose="02020603050405020304" pitchFamily="18" charset="0"/>
+                        </a:rPr>
+                        <a:t>0.785</a:t>
+                      </a:r>
+                    </a:p>
+                  </a:txBody>
+                  <a:tcPr>
+                    <a:solidFill>
+                      <a:schemeClr val="accent2">
+                        <a:lumMod val="20000"/>
+                        <a:lumOff val="80000"/>
+                      </a:schemeClr>
+                    </a:solidFill>
+                  </a:tcPr>
+                </a:tc>
+                <a:tc>
+                  <a:txBody>
+                    <a:bodyPr/>
+                    <a:lstStyle/>
+                    <a:p>
+                      <a:pPr>
+                        <a:lnSpc>
+                          <a:spcPct val="150000"/>
+                        </a:lnSpc>
+                      </a:pPr>
+                      <a:r>
+                        <a:rPr lang="en-ZA" sz="1200" dirty="0">
+                          <a:solidFill>
+                            <a:schemeClr val="tx2"/>
+                          </a:solidFill>
+                          <a:latin typeface="Times New Roman" panose="02020603050405020304" pitchFamily="18" charset="0"/>
+                          <a:cs typeface="Times New Roman" panose="02020603050405020304" pitchFamily="18" charset="0"/>
+                        </a:rPr>
+                        <a:t>0.764</a:t>
+                      </a:r>
+                    </a:p>
+                  </a:txBody>
+                  <a:tcPr>
+                    <a:solidFill>
+                      <a:schemeClr val="accent2">
+                        <a:lumMod val="20000"/>
+                        <a:lumOff val="80000"/>
+                      </a:schemeClr>
+                    </a:solidFill>
+                  </a:tcPr>
+                </a:tc>
+                <a:extLst>
+                  <a:ext uri="{0D108BD9-81ED-4DB2-BD59-A6C34878D82A}">
+                    <a16:rowId xmlns:a16="http://schemas.microsoft.com/office/drawing/2014/main" val="1992246048"/>
+                  </a:ext>
+                </a:extLst>
+              </a:tr>
+            </a:tbl>
+          </a:graphicData>
+        </a:graphic>
+      </p:graphicFrame>
     </p:spTree>
     <p:extLst>
       <p:ext uri="{BB962C8B-B14F-4D97-AF65-F5344CB8AC3E}">

--- a/Credit Risk Prediction System.pptx
+++ b/Credit Risk Prediction System.pptx
@@ -151,7 +151,7 @@
   <pc:docChgLst>
     <pc:chgData name="Thembelihle Nkosi" userId="34acb82be647289d" providerId="LiveId" clId="{A75475CB-E90B-49A7-8916-1196816BF4F1}"/>
     <pc:docChg chg="undo custSel addSld delSld modSld">
-      <pc:chgData name="Thembelihle Nkosi" userId="34acb82be647289d" providerId="LiveId" clId="{A75475CB-E90B-49A7-8916-1196816BF4F1}" dt="2026-09-02T08:46:53.098" v="4655" actId="20577"/>
+      <pc:chgData name="Thembelihle Nkosi" userId="34acb82be647289d" providerId="LiveId" clId="{A75475CB-E90B-49A7-8916-1196816BF4F1}" dt="2026-09-02T08:54:58.314" v="4662" actId="14100"/>
       <pc:docMkLst>
         <pc:docMk/>
       </pc:docMkLst>
@@ -613,8 +613,8 @@
           <pc:sldMk cId="2169082369" sldId="265"/>
         </pc:sldMkLst>
       </pc:sldChg>
-      <pc:sldChg chg="addSp modSp new mod modClrScheme chgLayout">
-        <pc:chgData name="Thembelihle Nkosi" userId="34acb82be647289d" providerId="LiveId" clId="{A75475CB-E90B-49A7-8916-1196816BF4F1}" dt="2026-09-02T08:26:57.205" v="4291" actId="14100"/>
+      <pc:sldChg chg="addSp delSp modSp new mod modClrScheme chgLayout">
+        <pc:chgData name="Thembelihle Nkosi" userId="34acb82be647289d" providerId="LiveId" clId="{A75475CB-E90B-49A7-8916-1196816BF4F1}" dt="2026-09-02T08:54:58.314" v="4662" actId="14100"/>
         <pc:sldMkLst>
           <pc:docMk/>
           <pc:sldMk cId="4224083050" sldId="265"/>
@@ -667,12 +667,28 @@
             <ac:spMk id="8" creationId="{3202D219-EFBD-0B93-72B9-EB96D28B3591}"/>
           </ac:spMkLst>
         </pc:spChg>
-        <pc:picChg chg="add mod">
-          <ac:chgData name="Thembelihle Nkosi" userId="34acb82be647289d" providerId="LiveId" clId="{A75475CB-E90B-49A7-8916-1196816BF4F1}" dt="2026-09-02T08:26:57.205" v="4291" actId="14100"/>
+        <pc:picChg chg="add del mod">
+          <ac:chgData name="Thembelihle Nkosi" userId="34acb82be647289d" providerId="LiveId" clId="{A75475CB-E90B-49A7-8916-1196816BF4F1}" dt="2026-09-02T08:54:29.433" v="4656" actId="21"/>
           <ac:picMkLst>
             <pc:docMk/>
             <pc:sldMk cId="4224083050" sldId="265"/>
             <ac:picMk id="10" creationId="{6C017206-1816-2CDA-9AE8-0959A0BF2D66}"/>
+          </ac:picMkLst>
+        </pc:picChg>
+        <pc:picChg chg="add del">
+          <ac:chgData name="Thembelihle Nkosi" userId="34acb82be647289d" providerId="LiveId" clId="{A75475CB-E90B-49A7-8916-1196816BF4F1}" dt="2026-09-02T08:54:35.976" v="4658" actId="21"/>
+          <ac:picMkLst>
+            <pc:docMk/>
+            <pc:sldMk cId="4224083050" sldId="265"/>
+            <ac:picMk id="12" creationId="{36AC9BE9-4539-6549-8BC2-B6731EB2566C}"/>
+          </ac:picMkLst>
+        </pc:picChg>
+        <pc:picChg chg="add mod">
+          <ac:chgData name="Thembelihle Nkosi" userId="34acb82be647289d" providerId="LiveId" clId="{A75475CB-E90B-49A7-8916-1196816BF4F1}" dt="2026-09-02T08:54:58.314" v="4662" actId="14100"/>
+          <ac:picMkLst>
+            <pc:docMk/>
+            <pc:sldMk cId="4224083050" sldId="265"/>
+            <ac:picMk id="14" creationId="{7ACB0A52-45EA-4374-3541-223AAE63F5F4}"/>
           </ac:picMkLst>
         </pc:picChg>
       </pc:sldChg>
@@ -23721,10 +23737,10 @@
       </p:sp>
       <p:pic>
         <p:nvPicPr>
-          <p:cNvPr id="10" name="Picture 9">
-            <a:extLst>
-              <a:ext uri="{FF2B5EF4-FFF2-40B4-BE49-F238E27FC236}">
-                <a16:creationId xmlns:a16="http://schemas.microsoft.com/office/drawing/2014/main" id="{6C017206-1816-2CDA-9AE8-0959A0BF2D66}"/>
+          <p:cNvPr id="14" name="Picture 13">
+            <a:extLst>
+              <a:ext uri="{FF2B5EF4-FFF2-40B4-BE49-F238E27FC236}">
+                <a16:creationId xmlns:a16="http://schemas.microsoft.com/office/drawing/2014/main" id="{7ACB0A52-45EA-4374-3541-223AAE63F5F4}"/>
               </a:ext>
             </a:extLst>
           </p:cNvPr>
@@ -23747,8 +23763,8 @@
         </p:blipFill>
         <p:spPr>
           <a:xfrm>
-            <a:off x="4668416" y="1658034"/>
-            <a:ext cx="6826898" cy="4571692"/>
+            <a:off x="4525346" y="1483721"/>
+            <a:ext cx="7333862" cy="4571692"/>
           </a:xfrm>
           <a:prstGeom prst="rect">
             <a:avLst/>

--- a/Credit Risk Prediction System.pptx
+++ b/Credit Risk Prediction System.pptx
@@ -5,10 +5,10 @@
     <p:sldMasterId id="2147483979" r:id="rId1"/>
   </p:sldMasterIdLst>
   <p:notesMasterIdLst>
-    <p:notesMasterId r:id="rId9"/>
+    <p:notesMasterId r:id="rId11"/>
   </p:notesMasterIdLst>
   <p:handoutMasterIdLst>
-    <p:handoutMasterId r:id="rId10"/>
+    <p:handoutMasterId r:id="rId12"/>
   </p:handoutMasterIdLst>
   <p:sldIdLst>
     <p:sldId id="260" r:id="rId2"/>
@@ -18,6 +18,8 @@
     <p:sldId id="264" r:id="rId6"/>
     <p:sldId id="265" r:id="rId7"/>
     <p:sldId id="266" r:id="rId8"/>
+    <p:sldId id="267" r:id="rId9"/>
+    <p:sldId id="268" r:id="rId10"/>
   </p:sldIdLst>
   <p:sldSz cx="12192000" cy="6858000"/>
   <p:notesSz cx="6858000" cy="9144000"/>
@@ -141,7 +143,7 @@
 <file path=ppt/revisionInfo.xml><?xml version="1.0" encoding="utf-8"?>
 <p1510:revInfo xmlns:a="http://schemas.openxmlformats.org/drawingml/2006/main" xmlns:r="http://schemas.openxmlformats.org/officeDocument/2006/relationships" xmlns:p1510="http://schemas.microsoft.com/office/powerpoint/2015/10/main">
   <p1510:revLst>
-    <p1510:client id="{5F03DC37-C6E7-4D03-9B6A-5B1F4D882761}" v="50" dt="2026-09-02T08:36:14.898"/>
+    <p1510:client id="{5F03DC37-C6E7-4D03-9B6A-5B1F4D882761}" v="55" dt="2026-09-02T12:50:12.272"/>
   </p1510:revLst>
 </p1510:revInfo>
 </file>
@@ -151,7 +153,7 @@
   <pc:docChgLst>
     <pc:chgData name="Thembelihle Nkosi" userId="34acb82be647289d" providerId="LiveId" clId="{A75475CB-E90B-49A7-8916-1196816BF4F1}"/>
     <pc:docChg chg="undo custSel addSld delSld modSld">
-      <pc:chgData name="Thembelihle Nkosi" userId="34acb82be647289d" providerId="LiveId" clId="{A75475CB-E90B-49A7-8916-1196816BF4F1}" dt="2026-09-02T08:54:58.314" v="4662" actId="14100"/>
+      <pc:chgData name="Thembelihle Nkosi" userId="34acb82be647289d" providerId="LiveId" clId="{A75475CB-E90B-49A7-8916-1196816BF4F1}" dt="2026-09-02T12:50:16.342" v="5261"/>
       <pc:docMkLst>
         <pc:docMk/>
       </pc:docMkLst>
@@ -614,7 +616,7 @@
         </pc:sldMkLst>
       </pc:sldChg>
       <pc:sldChg chg="addSp delSp modSp new mod modClrScheme chgLayout">
-        <pc:chgData name="Thembelihle Nkosi" userId="34acb82be647289d" providerId="LiveId" clId="{A75475CB-E90B-49A7-8916-1196816BF4F1}" dt="2026-09-02T08:54:58.314" v="4662" actId="14100"/>
+        <pc:chgData name="Thembelihle Nkosi" userId="34acb82be647289d" providerId="LiveId" clId="{A75475CB-E90B-49A7-8916-1196816BF4F1}" dt="2026-09-02T12:50:16.342" v="5261"/>
         <pc:sldMkLst>
           <pc:docMk/>
           <pc:sldMk cId="4224083050" sldId="265"/>
@@ -649,6 +651,14 @@
             <pc:docMk/>
             <pc:sldMk cId="4224083050" sldId="265"/>
             <ac:spMk id="5" creationId="{101B37D2-ABBA-15BF-263E-02D2CA6E3131}"/>
+          </ac:spMkLst>
+        </pc:spChg>
+        <pc:spChg chg="add del mod">
+          <ac:chgData name="Thembelihle Nkosi" userId="34acb82be647289d" providerId="LiveId" clId="{A75475CB-E90B-49A7-8916-1196816BF4F1}" dt="2026-09-02T12:50:16.342" v="5261"/>
+          <ac:spMkLst>
+            <pc:docMk/>
+            <pc:sldMk cId="4224083050" sldId="265"/>
+            <ac:spMk id="6" creationId="{11132FD8-86E5-183A-E5A5-09C8A2BE04C7}"/>
           </ac:spMkLst>
         </pc:spChg>
         <pc:spChg chg="add mod">
@@ -693,7 +703,7 @@
         </pc:picChg>
       </pc:sldChg>
       <pc:sldChg chg="addSp modSp new mod chgLayout">
-        <pc:chgData name="Thembelihle Nkosi" userId="34acb82be647289d" providerId="LiveId" clId="{A75475CB-E90B-49A7-8916-1196816BF4F1}" dt="2026-09-02T08:46:53.098" v="4655" actId="20577"/>
+        <pc:chgData name="Thembelihle Nkosi" userId="34acb82be647289d" providerId="LiveId" clId="{A75475CB-E90B-49A7-8916-1196816BF4F1}" dt="2026-09-02T09:15:00.665" v="4863" actId="1076"/>
         <pc:sldMkLst>
           <pc:docMk/>
           <pc:sldMk cId="4169104927" sldId="266"/>
@@ -722,6 +732,14 @@
             <ac:spMk id="4" creationId="{7C1039FA-C227-0728-B80A-A04A4B6CE04E}"/>
           </ac:spMkLst>
         </pc:spChg>
+        <pc:spChg chg="add mod">
+          <ac:chgData name="Thembelihle Nkosi" userId="34acb82be647289d" providerId="LiveId" clId="{A75475CB-E90B-49A7-8916-1196816BF4F1}" dt="2026-09-02T09:15:00.665" v="4863" actId="1076"/>
+          <ac:spMkLst>
+            <pc:docMk/>
+            <pc:sldMk cId="4169104927" sldId="266"/>
+            <ac:spMk id="8" creationId="{1CC28A71-0F06-8525-75AF-BF1E0CCC5550}"/>
+          </ac:spMkLst>
+        </pc:spChg>
         <pc:graphicFrameChg chg="add mod modGraphic">
           <ac:chgData name="Thembelihle Nkosi" userId="34acb82be647289d" providerId="LiveId" clId="{A75475CB-E90B-49A7-8916-1196816BF4F1}" dt="2026-09-02T08:46:53.098" v="4655" actId="20577"/>
           <ac:graphicFrameMkLst>
@@ -730,6 +748,14 @@
             <ac:graphicFrameMk id="5" creationId="{CCFB4286-0FB1-4E05-CAE8-526E19E62BD2}"/>
           </ac:graphicFrameMkLst>
         </pc:graphicFrameChg>
+        <pc:picChg chg="add mod">
+          <ac:chgData name="Thembelihle Nkosi" userId="34acb82be647289d" providerId="LiveId" clId="{A75475CB-E90B-49A7-8916-1196816BF4F1}" dt="2026-09-02T09:11:39.242" v="4668" actId="14100"/>
+          <ac:picMkLst>
+            <pc:docMk/>
+            <pc:sldMk cId="4169104927" sldId="266"/>
+            <ac:picMk id="7" creationId="{0A471F18-B616-4DFE-F6D2-6D7BFFD583DA}"/>
+          </ac:picMkLst>
+        </pc:picChg>
       </pc:sldChg>
       <pc:sldChg chg="new del">
         <pc:chgData name="Thembelihle Nkosi" userId="34acb82be647289d" providerId="LiveId" clId="{A75475CB-E90B-49A7-8916-1196816BF4F1}" dt="2026-09-02T08:29:25.749" v="4350" actId="2696"/>
@@ -737,6 +763,76 @@
           <pc:docMk/>
           <pc:sldMk cId="925457027" sldId="267"/>
         </pc:sldMkLst>
+      </pc:sldChg>
+      <pc:sldChg chg="addSp delSp modSp new mod">
+        <pc:chgData name="Thembelihle Nkosi" userId="34acb82be647289d" providerId="LiveId" clId="{A75475CB-E90B-49A7-8916-1196816BF4F1}" dt="2026-09-02T09:24:17.107" v="5228" actId="20577"/>
+        <pc:sldMkLst>
+          <pc:docMk/>
+          <pc:sldMk cId="2713236424" sldId="267"/>
+        </pc:sldMkLst>
+        <pc:spChg chg="add mod">
+          <ac:chgData name="Thembelihle Nkosi" userId="34acb82be647289d" providerId="LiveId" clId="{A75475CB-E90B-49A7-8916-1196816BF4F1}" dt="2026-09-02T09:17:10.509" v="4900" actId="1076"/>
+          <ac:spMkLst>
+            <pc:docMk/>
+            <pc:sldMk cId="2713236424" sldId="267"/>
+            <ac:spMk id="3" creationId="{3F0264F1-B19A-80A7-AAA9-D33FCAFE4996}"/>
+          </ac:spMkLst>
+        </pc:spChg>
+        <pc:spChg chg="add mod">
+          <ac:chgData name="Thembelihle Nkosi" userId="34acb82be647289d" providerId="LiveId" clId="{A75475CB-E90B-49A7-8916-1196816BF4F1}" dt="2026-09-02T09:18:17.008" v="4971" actId="1076"/>
+          <ac:spMkLst>
+            <pc:docMk/>
+            <pc:sldMk cId="2713236424" sldId="267"/>
+            <ac:spMk id="4" creationId="{C5C0F7E0-A1A8-3041-FEDB-470662BEF789}"/>
+          </ac:spMkLst>
+        </pc:spChg>
+        <pc:spChg chg="add mod">
+          <ac:chgData name="Thembelihle Nkosi" userId="34acb82be647289d" providerId="LiveId" clId="{A75475CB-E90B-49A7-8916-1196816BF4F1}" dt="2026-09-02T09:24:17.107" v="5228" actId="20577"/>
+          <ac:spMkLst>
+            <pc:docMk/>
+            <pc:sldMk cId="2713236424" sldId="267"/>
+            <ac:spMk id="12" creationId="{C4CDB01D-D9F1-2BB5-1F85-04A8D58029B2}"/>
+          </ac:spMkLst>
+        </pc:spChg>
+        <pc:graphicFrameChg chg="add mod modGraphic">
+          <ac:chgData name="Thembelihle Nkosi" userId="34acb82be647289d" providerId="LiveId" clId="{A75475CB-E90B-49A7-8916-1196816BF4F1}" dt="2026-09-02T09:19:33.559" v="5027" actId="20577"/>
+          <ac:graphicFrameMkLst>
+            <pc:docMk/>
+            <pc:sldMk cId="2713236424" sldId="267"/>
+            <ac:graphicFrameMk id="6" creationId="{D69D521A-2BF0-B65F-6A49-CE5AFAA45695}"/>
+          </ac:graphicFrameMkLst>
+        </pc:graphicFrameChg>
+        <pc:picChg chg="add del mod">
+          <ac:chgData name="Thembelihle Nkosi" userId="34acb82be647289d" providerId="LiveId" clId="{A75475CB-E90B-49A7-8916-1196816BF4F1}" dt="2026-09-02T09:21:08.953" v="5035" actId="22"/>
+          <ac:picMkLst>
+            <pc:docMk/>
+            <pc:sldMk cId="2713236424" sldId="267"/>
+            <ac:picMk id="8" creationId="{26969078-9E08-2F4D-EDDA-14A2E192FB1C}"/>
+          </ac:picMkLst>
+        </pc:picChg>
+        <pc:picChg chg="add mod">
+          <ac:chgData name="Thembelihle Nkosi" userId="34acb82be647289d" providerId="LiveId" clId="{A75475CB-E90B-49A7-8916-1196816BF4F1}" dt="2026-09-02T09:21:46.975" v="5040" actId="14100"/>
+          <ac:picMkLst>
+            <pc:docMk/>
+            <pc:sldMk cId="2713236424" sldId="267"/>
+            <ac:picMk id="10" creationId="{DDB6FD70-7166-B5A2-F84E-BE650511D505}"/>
+          </ac:picMkLst>
+        </pc:picChg>
+      </pc:sldChg>
+      <pc:sldChg chg="addSp modSp new mod">
+        <pc:chgData name="Thembelihle Nkosi" userId="34acb82be647289d" providerId="LiveId" clId="{A75475CB-E90B-49A7-8916-1196816BF4F1}" dt="2026-09-02T09:25:18.018" v="5258" actId="20577"/>
+        <pc:sldMkLst>
+          <pc:docMk/>
+          <pc:sldMk cId="4292511079" sldId="268"/>
+        </pc:sldMkLst>
+        <pc:spChg chg="add mod">
+          <ac:chgData name="Thembelihle Nkosi" userId="34acb82be647289d" providerId="LiveId" clId="{A75475CB-E90B-49A7-8916-1196816BF4F1}" dt="2026-09-02T09:25:18.018" v="5258" actId="20577"/>
+          <ac:spMkLst>
+            <pc:docMk/>
+            <pc:sldMk cId="4292511079" sldId="268"/>
+            <ac:spMk id="3" creationId="{C22A7DEA-FEE9-B9CB-5AF6-E2858E6D632E}"/>
+          </ac:spMkLst>
+        </pc:spChg>
       </pc:sldChg>
     </pc:docChg>
   </pc:docChgLst>
@@ -24636,10 +24732,1214 @@
           </a:graphicData>
         </a:graphic>
       </p:graphicFrame>
+      <p:pic>
+        <p:nvPicPr>
+          <p:cNvPr id="7" name="Picture 6">
+            <a:extLst>
+              <a:ext uri="{FF2B5EF4-FFF2-40B4-BE49-F238E27FC236}">
+                <a16:creationId xmlns:a16="http://schemas.microsoft.com/office/drawing/2014/main" id="{0A471F18-B616-4DFE-F6D2-6D7BFFD583DA}"/>
+              </a:ext>
+            </a:extLst>
+          </p:cNvPr>
+          <p:cNvPicPr>
+            <a:picLocks noChangeAspect="1"/>
+          </p:cNvPicPr>
+          <p:nvPr/>
+        </p:nvPicPr>
+        <p:blipFill>
+          <a:blip r:embed="rId2"/>
+          <a:stretch>
+            <a:fillRect/>
+          </a:stretch>
+        </p:blipFill>
+        <p:spPr>
+          <a:xfrm>
+            <a:off x="457199" y="3429000"/>
+            <a:ext cx="6232850" cy="3223727"/>
+          </a:xfrm>
+          <a:prstGeom prst="rect">
+            <a:avLst/>
+          </a:prstGeom>
+        </p:spPr>
+      </p:pic>
+      <p:sp>
+        <p:nvSpPr>
+          <p:cNvPr id="8" name="TextBox 7">
+            <a:extLst>
+              <a:ext uri="{FF2B5EF4-FFF2-40B4-BE49-F238E27FC236}">
+                <a16:creationId xmlns:a16="http://schemas.microsoft.com/office/drawing/2014/main" id="{1CC28A71-0F06-8525-75AF-BF1E0CCC5550}"/>
+              </a:ext>
+            </a:extLst>
+          </p:cNvPr>
+          <p:cNvSpPr txBox="1"/>
+          <p:nvPr/>
+        </p:nvSpPr>
+        <p:spPr>
+          <a:xfrm>
+            <a:off x="6921759" y="4376056"/>
+            <a:ext cx="3666931" cy="890115"/>
+          </a:xfrm>
+          <a:prstGeom prst="rect">
+            <a:avLst/>
+          </a:prstGeom>
+          <a:noFill/>
+        </p:spPr>
+        <p:txBody>
+          <a:bodyPr wrap="square" rtlCol="0">
+            <a:spAutoFit/>
+          </a:bodyPr>
+          <a:lstStyle/>
+          <a:p>
+            <a:pPr>
+              <a:lnSpc>
+                <a:spcPct val="150000"/>
+              </a:lnSpc>
+            </a:pPr>
+            <a:r>
+              <a:rPr lang="en-ZA" sz="1200" dirty="0">
+                <a:solidFill>
+                  <a:schemeClr val="tx2"/>
+                </a:solidFill>
+                <a:latin typeface="Times New Roman" panose="02020603050405020304" pitchFamily="18" charset="0"/>
+                <a:cs typeface="Times New Roman" panose="02020603050405020304" pitchFamily="18" charset="0"/>
+              </a:rPr>
+              <a:t>Decision tree leads on </a:t>
+            </a:r>
+            <a:r>
+              <a:rPr lang="en-ZA" sz="1200" b="1" dirty="0">
+                <a:solidFill>
+                  <a:schemeClr val="tx2"/>
+                </a:solidFill>
+                <a:latin typeface="Times New Roman" panose="02020603050405020304" pitchFamily="18" charset="0"/>
+                <a:cs typeface="Times New Roman" panose="02020603050405020304" pitchFamily="18" charset="0"/>
+              </a:rPr>
+              <a:t>Recall </a:t>
+            </a:r>
+            <a:r>
+              <a:rPr lang="en-ZA" sz="1200" dirty="0">
+                <a:solidFill>
+                  <a:schemeClr val="tx2"/>
+                </a:solidFill>
+                <a:latin typeface="Times New Roman" panose="02020603050405020304" pitchFamily="18" charset="0"/>
+                <a:cs typeface="Times New Roman" panose="02020603050405020304" pitchFamily="18" charset="0"/>
+              </a:rPr>
+              <a:t>and </a:t>
+            </a:r>
+            <a:r>
+              <a:rPr lang="en-ZA" sz="1200" b="1" dirty="0">
+                <a:solidFill>
+                  <a:schemeClr val="tx2"/>
+                </a:solidFill>
+                <a:latin typeface="Times New Roman" panose="02020603050405020304" pitchFamily="18" charset="0"/>
+                <a:cs typeface="Times New Roman" panose="02020603050405020304" pitchFamily="18" charset="0"/>
+              </a:rPr>
+              <a:t>F1-score </a:t>
+            </a:r>
+            <a:r>
+              <a:rPr lang="en-ZA" sz="1200" dirty="0">
+                <a:solidFill>
+                  <a:schemeClr val="tx2"/>
+                </a:solidFill>
+                <a:latin typeface="Times New Roman" panose="02020603050405020304" pitchFamily="18" charset="0"/>
+                <a:cs typeface="Times New Roman" panose="02020603050405020304" pitchFamily="18" charset="0"/>
+              </a:rPr>
+              <a:t>and this is important since missing a actual high-risk applicant (false negative) is costlier error for a lender.</a:t>
+            </a:r>
+          </a:p>
+        </p:txBody>
+      </p:sp>
     </p:spTree>
     <p:extLst>
       <p:ext uri="{BB962C8B-B14F-4D97-AF65-F5344CB8AC3E}">
         <p14:creationId xmlns:p14="http://schemas.microsoft.com/office/powerpoint/2010/main" val="4169104927"/>
+      </p:ext>
+    </p:extLst>
+  </p:cSld>
+  <p:clrMapOvr>
+    <a:masterClrMapping/>
+  </p:clrMapOvr>
+</p:sld>
+</file>
+
+<file path=ppt/slides/slide8.xml><?xml version="1.0" encoding="utf-8"?>
+<p:sld xmlns:a="http://schemas.openxmlformats.org/drawingml/2006/main" xmlns:r="http://schemas.openxmlformats.org/officeDocument/2006/relationships" xmlns:p="http://schemas.openxmlformats.org/presentationml/2006/main">
+  <p:cSld>
+    <p:spTree>
+      <p:nvGrpSpPr>
+        <p:cNvPr id="1" name=""/>
+        <p:cNvGrpSpPr/>
+        <p:nvPr/>
+      </p:nvGrpSpPr>
+      <p:grpSpPr>
+        <a:xfrm>
+          <a:off x="0" y="0"/>
+          <a:ext cx="0" cy="0"/>
+          <a:chOff x="0" y="0"/>
+          <a:chExt cx="0" cy="0"/>
+        </a:xfrm>
+      </p:grpSpPr>
+      <p:sp>
+        <p:nvSpPr>
+          <p:cNvPr id="2" name="Slide Number Placeholder 1">
+            <a:extLst>
+              <a:ext uri="{FF2B5EF4-FFF2-40B4-BE49-F238E27FC236}">
+                <a16:creationId xmlns:a16="http://schemas.microsoft.com/office/drawing/2014/main" id="{BE0B1EA4-825A-69C9-C93D-8B44711E18F3}"/>
+              </a:ext>
+            </a:extLst>
+          </p:cNvPr>
+          <p:cNvSpPr>
+            <a:spLocks noGrp="1"/>
+          </p:cNvSpPr>
+          <p:nvPr>
+            <p:ph type="sldNum" sz="quarter" idx="12"/>
+          </p:nvPr>
+        </p:nvSpPr>
+        <p:spPr/>
+        <p:txBody>
+          <a:bodyPr/>
+          <a:lstStyle/>
+          <a:p>
+            <a:fld id="{AEAA3239-9EA4-4A65-A281-97F994456D9F}" type="slidenum">
+              <a:rPr lang="en-US" smtClean="0"/>
+              <a:t>8</a:t>
+            </a:fld>
+            <a:endParaRPr lang="en-US"/>
+          </a:p>
+        </p:txBody>
+      </p:sp>
+      <p:sp>
+        <p:nvSpPr>
+          <p:cNvPr id="3" name="TextBox 2">
+            <a:extLst>
+              <a:ext uri="{FF2B5EF4-FFF2-40B4-BE49-F238E27FC236}">
+                <a16:creationId xmlns:a16="http://schemas.microsoft.com/office/drawing/2014/main" id="{3F0264F1-B19A-80A7-AAA9-D33FCAFE4996}"/>
+              </a:ext>
+            </a:extLst>
+          </p:cNvPr>
+          <p:cNvSpPr txBox="1"/>
+          <p:nvPr/>
+        </p:nvSpPr>
+        <p:spPr>
+          <a:xfrm>
+            <a:off x="681135" y="317241"/>
+            <a:ext cx="5025094" cy="661207"/>
+          </a:xfrm>
+          <a:prstGeom prst="rect">
+            <a:avLst/>
+          </a:prstGeom>
+          <a:noFill/>
+        </p:spPr>
+        <p:txBody>
+          <a:bodyPr wrap="none" rtlCol="0">
+            <a:spAutoFit/>
+          </a:bodyPr>
+          <a:lstStyle/>
+          <a:p>
+            <a:pPr>
+              <a:lnSpc>
+                <a:spcPct val="150000"/>
+              </a:lnSpc>
+            </a:pPr>
+            <a:r>
+              <a:rPr lang="en-ZA" sz="2800" b="1" dirty="0">
+                <a:solidFill>
+                  <a:schemeClr val="tx2"/>
+                </a:solidFill>
+                <a:latin typeface="Times New Roman" panose="02020603050405020304" pitchFamily="18" charset="0"/>
+                <a:cs typeface="Times New Roman" panose="02020603050405020304" pitchFamily="18" charset="0"/>
+              </a:rPr>
+              <a:t>Model comparison – After PCA</a:t>
+            </a:r>
+          </a:p>
+        </p:txBody>
+      </p:sp>
+      <p:sp>
+        <p:nvSpPr>
+          <p:cNvPr id="4" name="TextBox 3">
+            <a:extLst>
+              <a:ext uri="{FF2B5EF4-FFF2-40B4-BE49-F238E27FC236}">
+                <a16:creationId xmlns:a16="http://schemas.microsoft.com/office/drawing/2014/main" id="{C5C0F7E0-A1A8-3041-FEDB-470662BEF789}"/>
+              </a:ext>
+            </a:extLst>
+          </p:cNvPr>
+          <p:cNvSpPr txBox="1"/>
+          <p:nvPr/>
+        </p:nvSpPr>
+        <p:spPr>
+          <a:xfrm>
+            <a:off x="681135" y="1073021"/>
+            <a:ext cx="3948068" cy="336118"/>
+          </a:xfrm>
+          <a:prstGeom prst="rect">
+            <a:avLst/>
+          </a:prstGeom>
+          <a:noFill/>
+        </p:spPr>
+        <p:txBody>
+          <a:bodyPr wrap="none" rtlCol="0">
+            <a:spAutoFit/>
+          </a:bodyPr>
+          <a:lstStyle/>
+          <a:p>
+            <a:pPr>
+              <a:lnSpc>
+                <a:spcPct val="150000"/>
+              </a:lnSpc>
+            </a:pPr>
+            <a:r>
+              <a:rPr lang="en-ZA" sz="1200" dirty="0">
+                <a:latin typeface="Times New Roman" panose="02020603050405020304" pitchFamily="18" charset="0"/>
+                <a:cs typeface="Times New Roman" panose="02020603050405020304" pitchFamily="18" charset="0"/>
+              </a:rPr>
+              <a:t>Same three classifiers retrained on the PCA transformed data.</a:t>
+            </a:r>
+          </a:p>
+        </p:txBody>
+      </p:sp>
+      <p:graphicFrame>
+        <p:nvGraphicFramePr>
+          <p:cNvPr id="6" name="Table 5">
+            <a:extLst>
+              <a:ext uri="{FF2B5EF4-FFF2-40B4-BE49-F238E27FC236}">
+                <a16:creationId xmlns:a16="http://schemas.microsoft.com/office/drawing/2014/main" id="{D69D521A-2BF0-B65F-6A49-CE5AFAA45695}"/>
+              </a:ext>
+            </a:extLst>
+          </p:cNvPr>
+          <p:cNvGraphicFramePr>
+            <a:graphicFrameLocks noGrp="1"/>
+          </p:cNvGraphicFramePr>
+          <p:nvPr>
+            <p:extLst>
+              <p:ext uri="{D42A27DB-BD31-4B8C-83A1-F6EECF244321}">
+                <p14:modId xmlns:p14="http://schemas.microsoft.com/office/powerpoint/2010/main" val="2239864099"/>
+              </p:ext>
+            </p:extLst>
+          </p:nvPr>
+        </p:nvGraphicFramePr>
+        <p:xfrm>
+          <a:off x="681135" y="1689152"/>
+          <a:ext cx="6969965" cy="1483360"/>
+        </p:xfrm>
+        <a:graphic>
+          <a:graphicData uri="http://schemas.openxmlformats.org/drawingml/2006/table">
+            <a:tbl>
+              <a:tblPr firstRow="1" bandRow="1">
+                <a:tableStyleId>{8799B23B-EC83-4686-B30A-512413B5E67A}</a:tableStyleId>
+              </a:tblPr>
+              <a:tblGrid>
+                <a:gridCol w="1393993">
+                  <a:extLst>
+                    <a:ext uri="{9D8B030D-6E8A-4147-A177-3AD203B41FA5}">
+                      <a16:colId xmlns:a16="http://schemas.microsoft.com/office/drawing/2014/main" val="1116900852"/>
+                    </a:ext>
+                  </a:extLst>
+                </a:gridCol>
+                <a:gridCol w="1393993">
+                  <a:extLst>
+                    <a:ext uri="{9D8B030D-6E8A-4147-A177-3AD203B41FA5}">
+                      <a16:colId xmlns:a16="http://schemas.microsoft.com/office/drawing/2014/main" val="839705105"/>
+                    </a:ext>
+                  </a:extLst>
+                </a:gridCol>
+                <a:gridCol w="1393993">
+                  <a:extLst>
+                    <a:ext uri="{9D8B030D-6E8A-4147-A177-3AD203B41FA5}">
+                      <a16:colId xmlns:a16="http://schemas.microsoft.com/office/drawing/2014/main" val="2972379473"/>
+                    </a:ext>
+                  </a:extLst>
+                </a:gridCol>
+                <a:gridCol w="1393993">
+                  <a:extLst>
+                    <a:ext uri="{9D8B030D-6E8A-4147-A177-3AD203B41FA5}">
+                      <a16:colId xmlns:a16="http://schemas.microsoft.com/office/drawing/2014/main" val="3919136990"/>
+                    </a:ext>
+                  </a:extLst>
+                </a:gridCol>
+                <a:gridCol w="1393993">
+                  <a:extLst>
+                    <a:ext uri="{9D8B030D-6E8A-4147-A177-3AD203B41FA5}">
+                      <a16:colId xmlns:a16="http://schemas.microsoft.com/office/drawing/2014/main" val="2536520263"/>
+                    </a:ext>
+                  </a:extLst>
+                </a:gridCol>
+              </a:tblGrid>
+              <a:tr h="370840">
+                <a:tc>
+                  <a:txBody>
+                    <a:bodyPr/>
+                    <a:lstStyle/>
+                    <a:p>
+                      <a:pPr>
+                        <a:lnSpc>
+                          <a:spcPct val="150000"/>
+                        </a:lnSpc>
+                      </a:pPr>
+                      <a:r>
+                        <a:rPr lang="en-ZA" sz="1200" b="1" dirty="0">
+                          <a:solidFill>
+                            <a:schemeClr val="tx2"/>
+                          </a:solidFill>
+                          <a:latin typeface="Times New Roman" panose="02020603050405020304" pitchFamily="18" charset="0"/>
+                          <a:cs typeface="Times New Roman" panose="02020603050405020304" pitchFamily="18" charset="0"/>
+                        </a:rPr>
+                        <a:t>Model</a:t>
+                      </a:r>
+                    </a:p>
+                  </a:txBody>
+                  <a:tcPr>
+                    <a:solidFill>
+                      <a:schemeClr val="accent3">
+                        <a:lumMod val="40000"/>
+                        <a:lumOff val="60000"/>
+                      </a:schemeClr>
+                    </a:solidFill>
+                  </a:tcPr>
+                </a:tc>
+                <a:tc>
+                  <a:txBody>
+                    <a:bodyPr/>
+                    <a:lstStyle/>
+                    <a:p>
+                      <a:pPr>
+                        <a:lnSpc>
+                          <a:spcPct val="150000"/>
+                        </a:lnSpc>
+                      </a:pPr>
+                      <a:r>
+                        <a:rPr lang="en-ZA" sz="1200" dirty="0">
+                          <a:solidFill>
+                            <a:schemeClr val="tx2"/>
+                          </a:solidFill>
+                          <a:latin typeface="Times New Roman" panose="02020603050405020304" pitchFamily="18" charset="0"/>
+                          <a:cs typeface="Times New Roman" panose="02020603050405020304" pitchFamily="18" charset="0"/>
+                        </a:rPr>
+                        <a:t>Accuracy</a:t>
+                      </a:r>
+                    </a:p>
+                  </a:txBody>
+                  <a:tcPr>
+                    <a:solidFill>
+                      <a:schemeClr val="accent3">
+                        <a:lumMod val="40000"/>
+                        <a:lumOff val="60000"/>
+                      </a:schemeClr>
+                    </a:solidFill>
+                  </a:tcPr>
+                </a:tc>
+                <a:tc>
+                  <a:txBody>
+                    <a:bodyPr/>
+                    <a:lstStyle/>
+                    <a:p>
+                      <a:pPr>
+                        <a:lnSpc>
+                          <a:spcPct val="150000"/>
+                        </a:lnSpc>
+                      </a:pPr>
+                      <a:r>
+                        <a:rPr lang="en-ZA" sz="1200" dirty="0">
+                          <a:solidFill>
+                            <a:schemeClr val="tx2"/>
+                          </a:solidFill>
+                          <a:latin typeface="Times New Roman" panose="02020603050405020304" pitchFamily="18" charset="0"/>
+                          <a:cs typeface="Times New Roman" panose="02020603050405020304" pitchFamily="18" charset="0"/>
+                        </a:rPr>
+                        <a:t>Precision</a:t>
+                      </a:r>
+                    </a:p>
+                  </a:txBody>
+                  <a:tcPr>
+                    <a:solidFill>
+                      <a:schemeClr val="accent3">
+                        <a:lumMod val="40000"/>
+                        <a:lumOff val="60000"/>
+                      </a:schemeClr>
+                    </a:solidFill>
+                  </a:tcPr>
+                </a:tc>
+                <a:tc>
+                  <a:txBody>
+                    <a:bodyPr/>
+                    <a:lstStyle/>
+                    <a:p>
+                      <a:pPr>
+                        <a:lnSpc>
+                          <a:spcPct val="150000"/>
+                        </a:lnSpc>
+                      </a:pPr>
+                      <a:r>
+                        <a:rPr lang="en-ZA" sz="1200" dirty="0">
+                          <a:solidFill>
+                            <a:schemeClr val="tx2"/>
+                          </a:solidFill>
+                          <a:latin typeface="Times New Roman" panose="02020603050405020304" pitchFamily="18" charset="0"/>
+                          <a:cs typeface="Times New Roman" panose="02020603050405020304" pitchFamily="18" charset="0"/>
+                        </a:rPr>
+                        <a:t>Recall</a:t>
+                      </a:r>
+                    </a:p>
+                  </a:txBody>
+                  <a:tcPr>
+                    <a:solidFill>
+                      <a:schemeClr val="accent3">
+                        <a:lumMod val="40000"/>
+                        <a:lumOff val="60000"/>
+                      </a:schemeClr>
+                    </a:solidFill>
+                  </a:tcPr>
+                </a:tc>
+                <a:tc>
+                  <a:txBody>
+                    <a:bodyPr/>
+                    <a:lstStyle/>
+                    <a:p>
+                      <a:pPr>
+                        <a:lnSpc>
+                          <a:spcPct val="150000"/>
+                        </a:lnSpc>
+                      </a:pPr>
+                      <a:r>
+                        <a:rPr lang="en-ZA" sz="1200" dirty="0">
+                          <a:solidFill>
+                            <a:schemeClr val="tx2"/>
+                          </a:solidFill>
+                          <a:latin typeface="Times New Roman" panose="02020603050405020304" pitchFamily="18" charset="0"/>
+                          <a:cs typeface="Times New Roman" panose="02020603050405020304" pitchFamily="18" charset="0"/>
+                        </a:rPr>
+                        <a:t>F1-score</a:t>
+                      </a:r>
+                    </a:p>
+                  </a:txBody>
+                  <a:tcPr>
+                    <a:solidFill>
+                      <a:schemeClr val="accent3">
+                        <a:lumMod val="40000"/>
+                        <a:lumOff val="60000"/>
+                      </a:schemeClr>
+                    </a:solidFill>
+                  </a:tcPr>
+                </a:tc>
+                <a:extLst>
+                  <a:ext uri="{0D108BD9-81ED-4DB2-BD59-A6C34878D82A}">
+                    <a16:rowId xmlns:a16="http://schemas.microsoft.com/office/drawing/2014/main" val="3694833940"/>
+                  </a:ext>
+                </a:extLst>
+              </a:tr>
+              <a:tr h="370840">
+                <a:tc>
+                  <a:txBody>
+                    <a:bodyPr/>
+                    <a:lstStyle/>
+                    <a:p>
+                      <a:pPr>
+                        <a:lnSpc>
+                          <a:spcPct val="150000"/>
+                        </a:lnSpc>
+                      </a:pPr>
+                      <a:r>
+                        <a:rPr lang="en-ZA" sz="1200" dirty="0">
+                          <a:solidFill>
+                            <a:schemeClr val="tx2"/>
+                          </a:solidFill>
+                          <a:latin typeface="Times New Roman" panose="02020603050405020304" pitchFamily="18" charset="0"/>
+                          <a:cs typeface="Times New Roman" panose="02020603050405020304" pitchFamily="18" charset="0"/>
+                        </a:rPr>
+                        <a:t>Logistic regression</a:t>
+                      </a:r>
+                    </a:p>
+                  </a:txBody>
+                  <a:tcPr>
+                    <a:solidFill>
+                      <a:schemeClr val="accent2">
+                        <a:lumMod val="20000"/>
+                        <a:lumOff val="80000"/>
+                      </a:schemeClr>
+                    </a:solidFill>
+                  </a:tcPr>
+                </a:tc>
+                <a:tc>
+                  <a:txBody>
+                    <a:bodyPr/>
+                    <a:lstStyle/>
+                    <a:p>
+                      <a:pPr>
+                        <a:lnSpc>
+                          <a:spcPct val="150000"/>
+                        </a:lnSpc>
+                      </a:pPr>
+                      <a:r>
+                        <a:rPr lang="en-ZA" sz="1200" dirty="0">
+                          <a:solidFill>
+                            <a:schemeClr val="tx2"/>
+                          </a:solidFill>
+                          <a:latin typeface="Times New Roman" panose="02020603050405020304" pitchFamily="18" charset="0"/>
+                          <a:cs typeface="Times New Roman" panose="02020603050405020304" pitchFamily="18" charset="0"/>
+                        </a:rPr>
+                        <a:t>0.848</a:t>
+                      </a:r>
+                    </a:p>
+                  </a:txBody>
+                  <a:tcPr>
+                    <a:solidFill>
+                      <a:schemeClr val="accent2">
+                        <a:lumMod val="20000"/>
+                        <a:lumOff val="80000"/>
+                      </a:schemeClr>
+                    </a:solidFill>
+                  </a:tcPr>
+                </a:tc>
+                <a:tc>
+                  <a:txBody>
+                    <a:bodyPr/>
+                    <a:lstStyle/>
+                    <a:p>
+                      <a:pPr>
+                        <a:lnSpc>
+                          <a:spcPct val="150000"/>
+                        </a:lnSpc>
+                      </a:pPr>
+                      <a:r>
+                        <a:rPr lang="en-ZA" sz="1200" dirty="0">
+                          <a:solidFill>
+                            <a:schemeClr val="tx2"/>
+                          </a:solidFill>
+                          <a:latin typeface="Times New Roman" panose="02020603050405020304" pitchFamily="18" charset="0"/>
+                          <a:cs typeface="Times New Roman" panose="02020603050405020304" pitchFamily="18" charset="0"/>
+                        </a:rPr>
+                        <a:t>0.723</a:t>
+                      </a:r>
+                    </a:p>
+                  </a:txBody>
+                  <a:tcPr>
+                    <a:solidFill>
+                      <a:schemeClr val="accent2">
+                        <a:lumMod val="20000"/>
+                        <a:lumOff val="80000"/>
+                      </a:schemeClr>
+                    </a:solidFill>
+                  </a:tcPr>
+                </a:tc>
+                <a:tc>
+                  <a:txBody>
+                    <a:bodyPr/>
+                    <a:lstStyle/>
+                    <a:p>
+                      <a:pPr>
+                        <a:lnSpc>
+                          <a:spcPct val="150000"/>
+                        </a:lnSpc>
+                      </a:pPr>
+                      <a:r>
+                        <a:rPr lang="en-ZA" sz="1200" dirty="0">
+                          <a:solidFill>
+                            <a:schemeClr val="tx2"/>
+                          </a:solidFill>
+                          <a:latin typeface="Times New Roman" panose="02020603050405020304" pitchFamily="18" charset="0"/>
+                          <a:cs typeface="Times New Roman" panose="02020603050405020304" pitchFamily="18" charset="0"/>
+                        </a:rPr>
+                        <a:t>0.495</a:t>
+                      </a:r>
+                    </a:p>
+                  </a:txBody>
+                  <a:tcPr>
+                    <a:solidFill>
+                      <a:schemeClr val="accent2">
+                        <a:lumMod val="20000"/>
+                        <a:lumOff val="80000"/>
+                      </a:schemeClr>
+                    </a:solidFill>
+                  </a:tcPr>
+                </a:tc>
+                <a:tc>
+                  <a:txBody>
+                    <a:bodyPr/>
+                    <a:lstStyle/>
+                    <a:p>
+                      <a:pPr>
+                        <a:lnSpc>
+                          <a:spcPct val="150000"/>
+                        </a:lnSpc>
+                      </a:pPr>
+                      <a:r>
+                        <a:rPr lang="en-ZA" sz="1200" dirty="0">
+                          <a:solidFill>
+                            <a:schemeClr val="tx2"/>
+                          </a:solidFill>
+                          <a:latin typeface="Times New Roman" panose="02020603050405020304" pitchFamily="18" charset="0"/>
+                          <a:cs typeface="Times New Roman" panose="02020603050405020304" pitchFamily="18" charset="0"/>
+                        </a:rPr>
+                        <a:t>0.588</a:t>
+                      </a:r>
+                    </a:p>
+                  </a:txBody>
+                  <a:tcPr>
+                    <a:solidFill>
+                      <a:schemeClr val="accent2">
+                        <a:lumMod val="20000"/>
+                        <a:lumOff val="80000"/>
+                      </a:schemeClr>
+                    </a:solidFill>
+                  </a:tcPr>
+                </a:tc>
+                <a:extLst>
+                  <a:ext uri="{0D108BD9-81ED-4DB2-BD59-A6C34878D82A}">
+                    <a16:rowId xmlns:a16="http://schemas.microsoft.com/office/drawing/2014/main" val="2486599026"/>
+                  </a:ext>
+                </a:extLst>
+              </a:tr>
+              <a:tr h="370840">
+                <a:tc>
+                  <a:txBody>
+                    <a:bodyPr/>
+                    <a:lstStyle/>
+                    <a:p>
+                      <a:pPr>
+                        <a:lnSpc>
+                          <a:spcPct val="150000"/>
+                        </a:lnSpc>
+                      </a:pPr>
+                      <a:r>
+                        <a:rPr lang="en-ZA" sz="1200" dirty="0">
+                          <a:solidFill>
+                            <a:schemeClr val="tx2"/>
+                          </a:solidFill>
+                          <a:latin typeface="Times New Roman" panose="02020603050405020304" pitchFamily="18" charset="0"/>
+                          <a:cs typeface="Times New Roman" panose="02020603050405020304" pitchFamily="18" charset="0"/>
+                        </a:rPr>
+                        <a:t>K-NN</a:t>
+                      </a:r>
+                    </a:p>
+                  </a:txBody>
+                  <a:tcPr>
+                    <a:solidFill>
+                      <a:schemeClr val="accent2">
+                        <a:lumMod val="20000"/>
+                        <a:lumOff val="80000"/>
+                      </a:schemeClr>
+                    </a:solidFill>
+                  </a:tcPr>
+                </a:tc>
+                <a:tc>
+                  <a:txBody>
+                    <a:bodyPr/>
+                    <a:lstStyle/>
+                    <a:p>
+                      <a:pPr>
+                        <a:lnSpc>
+                          <a:spcPct val="150000"/>
+                        </a:lnSpc>
+                      </a:pPr>
+                      <a:r>
+                        <a:rPr lang="en-ZA" sz="1200" dirty="0">
+                          <a:solidFill>
+                            <a:schemeClr val="tx2"/>
+                          </a:solidFill>
+                          <a:latin typeface="Times New Roman" panose="02020603050405020304" pitchFamily="18" charset="0"/>
+                          <a:cs typeface="Times New Roman" panose="02020603050405020304" pitchFamily="18" charset="0"/>
+                        </a:rPr>
+                        <a:t>0.890</a:t>
+                      </a:r>
+                    </a:p>
+                  </a:txBody>
+                  <a:tcPr>
+                    <a:solidFill>
+                      <a:schemeClr val="accent2">
+                        <a:lumMod val="20000"/>
+                        <a:lumOff val="80000"/>
+                      </a:schemeClr>
+                    </a:solidFill>
+                  </a:tcPr>
+                </a:tc>
+                <a:tc>
+                  <a:txBody>
+                    <a:bodyPr/>
+                    <a:lstStyle/>
+                    <a:p>
+                      <a:pPr>
+                        <a:lnSpc>
+                          <a:spcPct val="150000"/>
+                        </a:lnSpc>
+                      </a:pPr>
+                      <a:r>
+                        <a:rPr lang="en-ZA" sz="1200" dirty="0">
+                          <a:solidFill>
+                            <a:schemeClr val="tx2"/>
+                          </a:solidFill>
+                          <a:latin typeface="Times New Roman" panose="02020603050405020304" pitchFamily="18" charset="0"/>
+                          <a:cs typeface="Times New Roman" panose="02020603050405020304" pitchFamily="18" charset="0"/>
+                        </a:rPr>
+                        <a:t>0.852</a:t>
+                      </a:r>
+                    </a:p>
+                  </a:txBody>
+                  <a:tcPr>
+                    <a:solidFill>
+                      <a:schemeClr val="accent2">
+                        <a:lumMod val="20000"/>
+                        <a:lumOff val="80000"/>
+                      </a:schemeClr>
+                    </a:solidFill>
+                  </a:tcPr>
+                </a:tc>
+                <a:tc>
+                  <a:txBody>
+                    <a:bodyPr/>
+                    <a:lstStyle/>
+                    <a:p>
+                      <a:pPr>
+                        <a:lnSpc>
+                          <a:spcPct val="150000"/>
+                        </a:lnSpc>
+                      </a:pPr>
+                      <a:r>
+                        <a:rPr lang="en-ZA" sz="1200" dirty="0">
+                          <a:solidFill>
+                            <a:schemeClr val="tx2"/>
+                          </a:solidFill>
+                          <a:latin typeface="Times New Roman" panose="02020603050405020304" pitchFamily="18" charset="0"/>
+                          <a:cs typeface="Times New Roman" panose="02020603050405020304" pitchFamily="18" charset="0"/>
+                        </a:rPr>
+                        <a:t>0.599</a:t>
+                      </a:r>
+                    </a:p>
+                  </a:txBody>
+                  <a:tcPr>
+                    <a:solidFill>
+                      <a:schemeClr val="accent2">
+                        <a:lumMod val="20000"/>
+                        <a:lumOff val="80000"/>
+                      </a:schemeClr>
+                    </a:solidFill>
+                  </a:tcPr>
+                </a:tc>
+                <a:tc>
+                  <a:txBody>
+                    <a:bodyPr/>
+                    <a:lstStyle/>
+                    <a:p>
+                      <a:pPr>
+                        <a:lnSpc>
+                          <a:spcPct val="150000"/>
+                        </a:lnSpc>
+                      </a:pPr>
+                      <a:r>
+                        <a:rPr lang="en-ZA" sz="1200" dirty="0">
+                          <a:solidFill>
+                            <a:schemeClr val="tx2"/>
+                          </a:solidFill>
+                          <a:latin typeface="Times New Roman" panose="02020603050405020304" pitchFamily="18" charset="0"/>
+                          <a:cs typeface="Times New Roman" panose="02020603050405020304" pitchFamily="18" charset="0"/>
+                        </a:rPr>
+                        <a:t>0.703</a:t>
+                      </a:r>
+                    </a:p>
+                  </a:txBody>
+                  <a:tcPr>
+                    <a:solidFill>
+                      <a:schemeClr val="accent2">
+                        <a:lumMod val="20000"/>
+                        <a:lumOff val="80000"/>
+                      </a:schemeClr>
+                    </a:solidFill>
+                  </a:tcPr>
+                </a:tc>
+                <a:extLst>
+                  <a:ext uri="{0D108BD9-81ED-4DB2-BD59-A6C34878D82A}">
+                    <a16:rowId xmlns:a16="http://schemas.microsoft.com/office/drawing/2014/main" val="160858611"/>
+                  </a:ext>
+                </a:extLst>
+              </a:tr>
+              <a:tr h="370840">
+                <a:tc>
+                  <a:txBody>
+                    <a:bodyPr/>
+                    <a:lstStyle/>
+                    <a:p>
+                      <a:pPr>
+                        <a:lnSpc>
+                          <a:spcPct val="150000"/>
+                        </a:lnSpc>
+                      </a:pPr>
+                      <a:r>
+                        <a:rPr lang="en-ZA" sz="1200" dirty="0">
+                          <a:solidFill>
+                            <a:schemeClr val="tx2"/>
+                          </a:solidFill>
+                          <a:latin typeface="Times New Roman" panose="02020603050405020304" pitchFamily="18" charset="0"/>
+                          <a:cs typeface="Times New Roman" panose="02020603050405020304" pitchFamily="18" charset="0"/>
+                        </a:rPr>
+                        <a:t>Decision Tree</a:t>
+                      </a:r>
+                    </a:p>
+                  </a:txBody>
+                  <a:tcPr>
+                    <a:solidFill>
+                      <a:schemeClr val="accent2">
+                        <a:lumMod val="20000"/>
+                        <a:lumOff val="80000"/>
+                      </a:schemeClr>
+                    </a:solidFill>
+                  </a:tcPr>
+                </a:tc>
+                <a:tc>
+                  <a:txBody>
+                    <a:bodyPr/>
+                    <a:lstStyle/>
+                    <a:p>
+                      <a:pPr>
+                        <a:lnSpc>
+                          <a:spcPct val="150000"/>
+                        </a:lnSpc>
+                      </a:pPr>
+                      <a:r>
+                        <a:rPr lang="en-ZA" sz="1200" dirty="0">
+                          <a:solidFill>
+                            <a:schemeClr val="tx2"/>
+                          </a:solidFill>
+                          <a:latin typeface="Times New Roman" panose="02020603050405020304" pitchFamily="18" charset="0"/>
+                          <a:cs typeface="Times New Roman" panose="02020603050405020304" pitchFamily="18" charset="0"/>
+                        </a:rPr>
+                        <a:t>0.841</a:t>
+                      </a:r>
+                    </a:p>
+                  </a:txBody>
+                  <a:tcPr>
+                    <a:solidFill>
+                      <a:schemeClr val="accent2">
+                        <a:lumMod val="20000"/>
+                        <a:lumOff val="80000"/>
+                      </a:schemeClr>
+                    </a:solidFill>
+                  </a:tcPr>
+                </a:tc>
+                <a:tc>
+                  <a:txBody>
+                    <a:bodyPr/>
+                    <a:lstStyle/>
+                    <a:p>
+                      <a:pPr>
+                        <a:lnSpc>
+                          <a:spcPct val="150000"/>
+                        </a:lnSpc>
+                      </a:pPr>
+                      <a:r>
+                        <a:rPr lang="en-ZA" sz="1200" dirty="0">
+                          <a:solidFill>
+                            <a:schemeClr val="tx2"/>
+                          </a:solidFill>
+                          <a:latin typeface="Times New Roman" panose="02020603050405020304" pitchFamily="18" charset="0"/>
+                          <a:cs typeface="Times New Roman" panose="02020603050405020304" pitchFamily="18" charset="0"/>
+                        </a:rPr>
+                        <a:t>0.631</a:t>
+                      </a:r>
+                    </a:p>
+                  </a:txBody>
+                  <a:tcPr>
+                    <a:solidFill>
+                      <a:schemeClr val="accent2">
+                        <a:lumMod val="20000"/>
+                        <a:lumOff val="80000"/>
+                      </a:schemeClr>
+                    </a:solidFill>
+                  </a:tcPr>
+                </a:tc>
+                <a:tc>
+                  <a:txBody>
+                    <a:bodyPr/>
+                    <a:lstStyle/>
+                    <a:p>
+                      <a:pPr>
+                        <a:lnSpc>
+                          <a:spcPct val="150000"/>
+                        </a:lnSpc>
+                      </a:pPr>
+                      <a:r>
+                        <a:rPr lang="en-ZA" sz="1200" dirty="0">
+                          <a:solidFill>
+                            <a:schemeClr val="tx2"/>
+                          </a:solidFill>
+                          <a:latin typeface="Times New Roman" panose="02020603050405020304" pitchFamily="18" charset="0"/>
+                          <a:cs typeface="Times New Roman" panose="02020603050405020304" pitchFamily="18" charset="0"/>
+                        </a:rPr>
+                        <a:t>0.661</a:t>
+                      </a:r>
+                    </a:p>
+                  </a:txBody>
+                  <a:tcPr>
+                    <a:solidFill>
+                      <a:schemeClr val="accent2">
+                        <a:lumMod val="20000"/>
+                        <a:lumOff val="80000"/>
+                      </a:schemeClr>
+                    </a:solidFill>
+                  </a:tcPr>
+                </a:tc>
+                <a:tc>
+                  <a:txBody>
+                    <a:bodyPr/>
+                    <a:lstStyle/>
+                    <a:p>
+                      <a:pPr>
+                        <a:lnSpc>
+                          <a:spcPct val="150000"/>
+                        </a:lnSpc>
+                      </a:pPr>
+                      <a:r>
+                        <a:rPr lang="en-ZA" sz="1200" dirty="0">
+                          <a:solidFill>
+                            <a:schemeClr val="tx2"/>
+                          </a:solidFill>
+                          <a:latin typeface="Times New Roman" panose="02020603050405020304" pitchFamily="18" charset="0"/>
+                          <a:cs typeface="Times New Roman" panose="02020603050405020304" pitchFamily="18" charset="0"/>
+                        </a:rPr>
+                        <a:t>0.646</a:t>
+                      </a:r>
+                    </a:p>
+                  </a:txBody>
+                  <a:tcPr>
+                    <a:solidFill>
+                      <a:schemeClr val="accent2">
+                        <a:lumMod val="20000"/>
+                        <a:lumOff val="80000"/>
+                      </a:schemeClr>
+                    </a:solidFill>
+                  </a:tcPr>
+                </a:tc>
+                <a:extLst>
+                  <a:ext uri="{0D108BD9-81ED-4DB2-BD59-A6C34878D82A}">
+                    <a16:rowId xmlns:a16="http://schemas.microsoft.com/office/drawing/2014/main" val="1992246048"/>
+                  </a:ext>
+                </a:extLst>
+              </a:tr>
+            </a:tbl>
+          </a:graphicData>
+        </a:graphic>
+      </p:graphicFrame>
+      <p:pic>
+        <p:nvPicPr>
+          <p:cNvPr id="10" name="Picture 9">
+            <a:extLst>
+              <a:ext uri="{FF2B5EF4-FFF2-40B4-BE49-F238E27FC236}">
+                <a16:creationId xmlns:a16="http://schemas.microsoft.com/office/drawing/2014/main" id="{DDB6FD70-7166-B5A2-F84E-BE650511D505}"/>
+              </a:ext>
+            </a:extLst>
+          </p:cNvPr>
+          <p:cNvPicPr>
+            <a:picLocks noChangeAspect="1"/>
+          </p:cNvPicPr>
+          <p:nvPr/>
+        </p:nvPicPr>
+        <p:blipFill>
+          <a:blip r:embed="rId2"/>
+          <a:stretch>
+            <a:fillRect/>
+          </a:stretch>
+        </p:blipFill>
+        <p:spPr>
+          <a:xfrm>
+            <a:off x="681135" y="3452525"/>
+            <a:ext cx="6214187" cy="3197143"/>
+          </a:xfrm>
+          <a:prstGeom prst="rect">
+            <a:avLst/>
+          </a:prstGeom>
+        </p:spPr>
+      </p:pic>
+      <p:sp>
+        <p:nvSpPr>
+          <p:cNvPr id="12" name="TextBox 11">
+            <a:extLst>
+              <a:ext uri="{FF2B5EF4-FFF2-40B4-BE49-F238E27FC236}">
+                <a16:creationId xmlns:a16="http://schemas.microsoft.com/office/drawing/2014/main" id="{C4CDB01D-D9F1-2BB5-1F85-04A8D58029B2}"/>
+              </a:ext>
+            </a:extLst>
+          </p:cNvPr>
+          <p:cNvSpPr txBox="1"/>
+          <p:nvPr/>
+        </p:nvSpPr>
+        <p:spPr>
+          <a:xfrm>
+            <a:off x="7651100" y="3750905"/>
+            <a:ext cx="3666931" cy="1167114"/>
+          </a:xfrm>
+          <a:prstGeom prst="rect">
+            <a:avLst/>
+          </a:prstGeom>
+          <a:noFill/>
+        </p:spPr>
+        <p:txBody>
+          <a:bodyPr wrap="square" rtlCol="0">
+            <a:spAutoFit/>
+          </a:bodyPr>
+          <a:lstStyle/>
+          <a:p>
+            <a:pPr>
+              <a:lnSpc>
+                <a:spcPct val="150000"/>
+              </a:lnSpc>
+            </a:pPr>
+            <a:r>
+              <a:rPr lang="en-ZA" sz="1200" dirty="0">
+                <a:solidFill>
+                  <a:schemeClr val="tx2"/>
+                </a:solidFill>
+                <a:latin typeface="Times New Roman" panose="02020603050405020304" pitchFamily="18" charset="0"/>
+                <a:cs typeface="Times New Roman" panose="02020603050405020304" pitchFamily="18" charset="0"/>
+              </a:rPr>
+              <a:t>PCA gave almost the same results for </a:t>
+            </a:r>
+            <a:r>
+              <a:rPr lang="en-ZA" sz="1200" b="1" dirty="0">
+                <a:solidFill>
+                  <a:schemeClr val="tx2"/>
+                </a:solidFill>
+                <a:latin typeface="Times New Roman" panose="02020603050405020304" pitchFamily="18" charset="0"/>
+                <a:cs typeface="Times New Roman" panose="02020603050405020304" pitchFamily="18" charset="0"/>
+              </a:rPr>
+              <a:t>Logistic Regression </a:t>
+            </a:r>
+            <a:r>
+              <a:rPr lang="en-ZA" sz="1200" dirty="0">
+                <a:solidFill>
+                  <a:schemeClr val="tx2"/>
+                </a:solidFill>
+                <a:latin typeface="Times New Roman" panose="02020603050405020304" pitchFamily="18" charset="0"/>
+                <a:cs typeface="Times New Roman" panose="02020603050405020304" pitchFamily="18" charset="0"/>
+              </a:rPr>
+              <a:t>and </a:t>
+            </a:r>
+            <a:r>
+              <a:rPr lang="en-ZA" sz="1200" b="1" dirty="0">
+                <a:solidFill>
+                  <a:schemeClr val="tx2"/>
+                </a:solidFill>
+                <a:latin typeface="Times New Roman" panose="02020603050405020304" pitchFamily="18" charset="0"/>
+                <a:cs typeface="Times New Roman" panose="02020603050405020304" pitchFamily="18" charset="0"/>
+              </a:rPr>
+              <a:t>KNN </a:t>
+            </a:r>
+            <a:r>
+              <a:rPr lang="en-ZA" sz="1200" dirty="0">
+                <a:solidFill>
+                  <a:schemeClr val="tx2"/>
+                </a:solidFill>
+                <a:latin typeface="Times New Roman" panose="02020603050405020304" pitchFamily="18" charset="0"/>
+                <a:cs typeface="Times New Roman" panose="02020603050405020304" pitchFamily="18" charset="0"/>
+              </a:rPr>
+              <a:t>but hurt the Decision tree which loses meaning once features are rotated into components.</a:t>
+            </a:r>
+          </a:p>
+        </p:txBody>
+      </p:sp>
+    </p:spTree>
+    <p:extLst>
+      <p:ext uri="{BB962C8B-B14F-4D97-AF65-F5344CB8AC3E}">
+        <p14:creationId xmlns:p14="http://schemas.microsoft.com/office/powerpoint/2010/main" val="2713236424"/>
+      </p:ext>
+    </p:extLst>
+  </p:cSld>
+  <p:clrMapOvr>
+    <a:masterClrMapping/>
+  </p:clrMapOvr>
+</p:sld>
+</file>
+
+<file path=ppt/slides/slide9.xml><?xml version="1.0" encoding="utf-8"?>
+<p:sld xmlns:a="http://schemas.openxmlformats.org/drawingml/2006/main" xmlns:r="http://schemas.openxmlformats.org/officeDocument/2006/relationships" xmlns:p="http://schemas.openxmlformats.org/presentationml/2006/main">
+  <p:cSld>
+    <p:spTree>
+      <p:nvGrpSpPr>
+        <p:cNvPr id="1" name=""/>
+        <p:cNvGrpSpPr/>
+        <p:nvPr/>
+      </p:nvGrpSpPr>
+      <p:grpSpPr>
+        <a:xfrm>
+          <a:off x="0" y="0"/>
+          <a:ext cx="0" cy="0"/>
+          <a:chOff x="0" y="0"/>
+          <a:chExt cx="0" cy="0"/>
+        </a:xfrm>
+      </p:grpSpPr>
+      <p:sp>
+        <p:nvSpPr>
+          <p:cNvPr id="2" name="Slide Number Placeholder 1">
+            <a:extLst>
+              <a:ext uri="{FF2B5EF4-FFF2-40B4-BE49-F238E27FC236}">
+                <a16:creationId xmlns:a16="http://schemas.microsoft.com/office/drawing/2014/main" id="{7A9FAB60-913D-6D7F-D5A1-DB15232395A1}"/>
+              </a:ext>
+            </a:extLst>
+          </p:cNvPr>
+          <p:cNvSpPr>
+            <a:spLocks noGrp="1"/>
+          </p:cNvSpPr>
+          <p:nvPr>
+            <p:ph type="sldNum" sz="quarter" idx="12"/>
+          </p:nvPr>
+        </p:nvSpPr>
+        <p:spPr/>
+        <p:txBody>
+          <a:bodyPr/>
+          <a:lstStyle/>
+          <a:p>
+            <a:fld id="{AEAA3239-9EA4-4A65-A281-97F994456D9F}" type="slidenum">
+              <a:rPr lang="en-US" smtClean="0"/>
+              <a:t>9</a:t>
+            </a:fld>
+            <a:endParaRPr lang="en-US"/>
+          </a:p>
+        </p:txBody>
+      </p:sp>
+      <p:sp>
+        <p:nvSpPr>
+          <p:cNvPr id="3" name="TextBox 2">
+            <a:extLst>
+              <a:ext uri="{FF2B5EF4-FFF2-40B4-BE49-F238E27FC236}">
+                <a16:creationId xmlns:a16="http://schemas.microsoft.com/office/drawing/2014/main" id="{C22A7DEA-FEE9-B9CB-5AF6-E2858E6D632E}"/>
+              </a:ext>
+            </a:extLst>
+          </p:cNvPr>
+          <p:cNvSpPr txBox="1"/>
+          <p:nvPr/>
+        </p:nvSpPr>
+        <p:spPr>
+          <a:xfrm>
+            <a:off x="606490" y="382555"/>
+            <a:ext cx="3858685" cy="661207"/>
+          </a:xfrm>
+          <a:prstGeom prst="rect">
+            <a:avLst/>
+          </a:prstGeom>
+          <a:noFill/>
+        </p:spPr>
+        <p:txBody>
+          <a:bodyPr wrap="none" rtlCol="0">
+            <a:spAutoFit/>
+          </a:bodyPr>
+          <a:lstStyle/>
+          <a:p>
+            <a:pPr>
+              <a:lnSpc>
+                <a:spcPct val="150000"/>
+              </a:lnSpc>
+            </a:pPr>
+            <a:r>
+              <a:rPr lang="en-ZA" sz="2800" b="1" dirty="0">
+                <a:solidFill>
+                  <a:schemeClr val="tx2"/>
+                </a:solidFill>
+                <a:latin typeface="Times New Roman" panose="02020603050405020304" pitchFamily="18" charset="0"/>
+                <a:cs typeface="Times New Roman" panose="02020603050405020304" pitchFamily="18" charset="0"/>
+              </a:rPr>
+              <a:t>Hyperparameter tuning</a:t>
+            </a:r>
+          </a:p>
+        </p:txBody>
+      </p:sp>
+    </p:spTree>
+    <p:extLst>
+      <p:ext uri="{BB962C8B-B14F-4D97-AF65-F5344CB8AC3E}">
+        <p14:creationId xmlns:p14="http://schemas.microsoft.com/office/powerpoint/2010/main" val="4292511079"/>
       </p:ext>
     </p:extLst>
   </p:cSld>
